--- a/downloads/presentations/modules/lesson-42-ai-documentation-model-cards-and-system-cards.pptx
+++ b/downloads/presentations/modules/lesson-42-ai-documentation-model-cards-and-system-cards.pptx
@@ -24,9 +24,11 @@
     <p:sldId id="272" r:id="rId18"/>
     <p:sldId id="273" r:id="rId19"/>
     <p:sldId id="274" r:id="rId20"/>
+    <p:sldId id="275" r:id="rId21"/>
+    <p:sldId id="276" r:id="rId22"/>
   </p:sldIdLst>
   <p:notesMasterIdLst>
-    <p:notesMasterId r:id="rId21"/>
+    <p:notesMasterId r:id="rId23"/>
   </p:notesMasterIdLst>
   <p:sldSz cx="12192000" cy="6858000"/>
   <p:notesSz cx="6858000" cy="12192000"/>
@@ -609,10 +611,10 @@
           <a:p>
             <a:r>
               <a:rPr lang="en-US" dirty="0"/>
-              <a:t>Technical Deep Dive
-AI documentation should be created before deployment and maintained after launch. The documentation should identify the system owner, intended users, data inputs, outputs, human review requirements, validation approach, known limitations, and change management process. A document that is created once and never updated will not support responsible operations.
-Model cards are especially useful for predictive or classification models because they can document training data, evaluation metrics, subgroup performance, limitations, and intended use. System cards are especially useful for generative, RAG, and agentic systems because these tools depend on prompts, retrieval content, integrations, permissions, and human workflows.
-Documentation should also cover changes. Model updates, prompt changes, data source changes, terminology updates, and workflow changes can all affect system behavior. Change logs and version histories help agencies reconstruct what happened if outputs change or incidents occur.</a:t>
+              <a:t>Core Concepts
+AI documentation records what the system is intended to do, how it was developed or configured, what data it uses, how it was evaluated, what limitations are known, and how it is monitored. Documentation supports accountability across the AI lifecycle.
+A model card is a structured summary of a model, including intended use, data, evaluation, limitations, risks, and appropriate use. A system card extends documentation to the broader system, including workflow integration, interfaces, user roles, retrieval sources, human oversight, and operational controls.
+Documentation is not a paperwork exercise. It is how agencies preserve institutional memory, support governance review, answer vendor questions, investigate incidents, train staff, and explain decisions to leaders or the public when appropriate.</a:t>
             </a:r>
             <a:endParaRPr lang="en-US" dirty="0"/>
           </a:p>
@@ -700,10 +702,8 @@
           <a:p>
             <a:r>
               <a:rPr lang="en-US" dirty="0"/>
-              <a:t>Risks, Failure Modes, and Guardrails
-A common failure mode is treating the topic as a technical detail rather than a public health control. When staff do not connect technical decisions to authority, workflow, equity, privacy, security, and accountability, the agency may adopt a tool that appears useful but cannot be sustained or defended.
-Another risk is relying on vendor claims without agency-defined evidence. Vendors may provide demonstrations, dashboards, or summary metrics that do not match the agency workflow or data environment. A guardrail is to require documentation, test results, acceptance criteria, and agency-controlled review.
-A third risk is failing to plan for change. Public health data, policies, systems, and emergencies change. Any technical approach must include monitoring, review, versioning, escalation, and retirement pathways so the agency can respond when assumptions no longer hold.</a:t>
+              <a:t>Public Health Example
+An agency using a generative AI assistant to draft public health messages should document the approved use, source materials, prohibited content, review process, accessibility expectations, language review, hallucination controls, user training, monitoring process, and incident response pathway. A system card would help reviewers understand the whole workflow rather than only the model.</a:t>
             </a:r>
             <a:endParaRPr lang="en-US" dirty="0"/>
           </a:p>
@@ -791,9 +791,10 @@
           <a:p>
             <a:r>
               <a:rPr lang="en-US" dirty="0"/>
-              <a:t>Application to AI-Supported Workflows
-Generative AI, predictive analytics, RAG, automation, and agentic workflows all depend on the controls described in this module. The controls should be scaled to the risk of the use case. A tool that drafts internal training text may require lighter review than a tool that updates case records, prioritizes outreach, or supports public communication during an emergency.
-The module should be applied during readiness assessment, procurement, implementation planning, pilot testing, and post-deployment monitoring. Learners should document how the topic affects data, systems, users, safeguards, and decision-making for the selected workflow.</a:t>
+              <a:t>Technical Deep Dive
+AI documentation should be created before deployment and maintained after launch. The documentation should identify the system owner, intended users, data inputs, outputs, human review requirements, validation approach, known limitations, and change management process. A document that is created once and never updated will not support responsible operations.
+Model cards are especially useful for predictive or classification models because they can document training data, evaluation metrics, subgroup performance, limitations, and intended use. System cards are especially useful for generative, RAG, and agentic systems because these tools depend on prompts, retrieval content, integrations, permissions, and human workflows.
+Documentation should also cover changes. Model updates, prompt changes, data source changes, terminology updates, and workflow changes can all affect system behavior. Change logs and version histories help agencies reconstruct what happened if outputs change or incidents occur.</a:t>
             </a:r>
             <a:endParaRPr lang="en-US" dirty="0"/>
           </a:p>
@@ -881,10 +882,10 @@
           <a:p>
             <a:r>
               <a:rPr lang="en-US" dirty="0"/>
-              <a:t>Reflection Questions
-Where does this topic appear in one current or proposed AI workflow in your agency?
-What decisions, data sources, users, or partners would be affected if this area is poorly designed?
-What evidence would governance reviewers need before approving the workflow?</a:t>
+              <a:t>Risks, Failure Modes, and Guardrails
+A common failure mode is treating the topic as a technical detail rather than a public health control. When staff do not connect technical decisions to authority, workflow, equity, privacy, security, and accountability, the agency may adopt a tool that appears useful but cannot be sustained or defended.
+Another risk is relying on vendor claims without agency-defined evidence. Vendors may provide demonstrations, dashboards, or summary metrics that do not match the agency workflow or data environment. A guardrail is to require documentation, test results, acceptance criteria, and agency-controlled review.
+A third risk is failing to plan for change. Public health data, policies, systems, and emergencies change. Any technical approach must include monitoring, review, versioning, escalation, and retirement pathways so the agency can respond when assumptions no longer hold.</a:t>
             </a:r>
             <a:endParaRPr lang="en-US" dirty="0"/>
           </a:p>
@@ -972,9 +973,9 @@
           <a:p>
             <a:r>
               <a:rPr lang="en-US" dirty="0"/>
-              <a:t>Reflection Questions
-Which safeguards should be required before pilot testing?
-Who owns ongoing monitoring and review?</a:t>
+              <a:t>Application to AI-Supported Workflows
+Generative AI, predictive analytics, RAG, automation, and agentic workflows all depend on the controls described in this module. The controls should be scaled to the risk of the use case. A tool that drafts internal training text may require lighter review than a tool that updates case records, prioritizes outreach, or supports public communication during an emergency.
+The module should be applied during readiness assessment, procurement, implementation planning, pilot testing, and post-deployment monitoring. Learners should document how the topic affects data, systems, users, safeguards, and decision-making for the selected workflow.</a:t>
             </a:r>
             <a:endParaRPr lang="en-US" dirty="0"/>
           </a:p>
@@ -1062,9 +1063,10 @@
           <a:p>
             <a:r>
               <a:rPr lang="en-US" dirty="0"/>
-              <a:t>Practical Exercise
-Create a AI documentation packet for one real or realistic public health AI workflow. The artifact should describe the use case, affected users, data sources, system dependencies, risks, guardrails, review points, and unresolved questions.
-The exercise should produce a work product that could be used in a governance meeting, procurement review, implementation planning session, pilot evaluation, or monitoring review. Learners should document assumptions and identify which staff or partners need to be consulted.</a:t>
+              <a:t>Reflection Questions
+Where does this topic appear in one current or proposed AI workflow in your agency?
+What decisions, data sources, users, or partners would be affected if this area is poorly designed?
+What evidence would governance reviewers need before approving the workflow?</a:t>
             </a:r>
             <a:endParaRPr lang="en-US" dirty="0"/>
           </a:p>
@@ -1152,8 +1154,9 @@
           <a:p>
             <a:r>
               <a:rPr lang="en-US" dirty="0"/>
-              <a:t>Expected Artifact or Evidence
-The expected artifact is a completed AI documentation packet. It should be specific to a public health workflow and should include technical dependencies, governance questions, human review expectations, monitoring indicators, and unresolved risks.</a:t>
+              <a:t>Reflection Questions
+Which safeguards should be required before pilot testing?
+Who owns ongoing monitoring and review?</a:t>
             </a:r>
             <a:endParaRPr lang="en-US" dirty="0"/>
           </a:p>
@@ -1241,8 +1244,9 @@
           <a:p>
             <a:r>
               <a:rPr lang="en-US" dirty="0"/>
-              <a:t>Expected Assignment
-The expected artifact is a completed AI documentation packet. It should be specific to a public health workflow and should include technical dependencies, governance questions, human review expectations, monitoring indicators, and unresolved risks.</a:t>
+              <a:t>Practical Exercise
+Create a AI documentation packet for one real or realistic public health AI workflow. The artifact should describe the use case, affected users, data sources, system dependencies, risks, guardrails, review points, and unresolved questions.
+The exercise should produce a work product that could be used in a governance meeting, procurement review, implementation planning session, pilot evaluation, or monitoring review. Learners should document assumptions and identify which staff or partners need to be consulted.</a:t>
             </a:r>
             <a:endParaRPr lang="en-US" dirty="0"/>
           </a:p>
@@ -1330,12 +1334,8 @@
           <a:p>
             <a:r>
               <a:rPr lang="en-US" dirty="0"/>
-              <a:t>Knowledge Check
-1. What is the best reason to address ai documentation, model cards, and system cards before deployment?
-2. Which practice best supports responsible implementation?
-3. Which statement best describes a common failure mode?
-4. What should be included in the practical artifact for this module?
-5. When should the issue be escalated for governance or leadership review?</a:t>
+              <a:t>Expected Artifact or Evidence
+The expected artifact is a completed AI documentation packet. It should be specific to a public health workflow and should include technical dependencies, governance questions, human review expectations, monitoring indicators, and unresolved risks.</a:t>
             </a:r>
             <a:endParaRPr lang="en-US" dirty="0"/>
           </a:p>
@@ -1423,12 +1423,8 @@
           <a:p>
             <a:r>
               <a:rPr lang="en-US" dirty="0"/>
-              <a:t>References and Resources
-NIST AI Risk Management Framework: https://www.nist.gov/itl/ai-risk-management-framework
-NIST Generative AI Profile: https://www.nist.gov/publications/artificial-intelligence-risk-management-framework-generative-artificial-intelligence
-CDC Public Health Data Strategy and Data Modernization resources: https://www.cdc.gov/public-health-data-strategy/php/about/index.html
-OWASP Top 10 for LLM Applications, when security or AI integrations are relevant
-Agency privacy, cybersecurity, data governance, procurement, and records management policies</a:t>
+              <a:t>Expected Assignment
+The expected artifact is a completed AI documentation packet. It should be specific to a public health workflow and should include technical dependencies, governance questions, human review expectations, monitoring indicators, and unresolved risks.</a:t>
             </a:r>
             <a:endParaRPr lang="en-US" dirty="0"/>
           </a:p>
@@ -1562,6 +1558,192 @@
 </p:notes>
 </file>
 
+<file path=ppt/notesSlides/notesSlide20.xml><?xml version="1.0" encoding="utf-8"?>
+<p:notes xmlns:a="http://schemas.openxmlformats.org/drawingml/2006/main" xmlns:r="http://schemas.openxmlformats.org/officeDocument/2006/relationships" xmlns:p="http://schemas.openxmlformats.org/presentationml/2006/main">
+  <p:cSld>
+    <p:spTree>
+      <p:nvGrpSpPr>
+        <p:cNvPr id="1" name=""/>
+        <p:cNvGrpSpPr/>
+        <p:nvPr/>
+      </p:nvGrpSpPr>
+      <p:grpSpPr>
+        <a:xfrm>
+          <a:off x="0" y="0"/>
+          <a:ext cx="0" cy="0"/>
+          <a:chOff x="0" y="0"/>
+          <a:chExt cx="0" cy="0"/>
+        </a:xfrm>
+      </p:grpSpPr>
+      <p:sp>
+        <p:nvSpPr>
+          <p:cNvPr id="2" name="Slide Image Placeholder 1"/>
+          <p:cNvSpPr>
+            <a:spLocks noGrp="1" noRot="1" noChangeAspect="1"/>
+          </p:cNvSpPr>
+          <p:nvPr>
+            <p:ph type="sldImg"/>
+          </p:nvPr>
+        </p:nvSpPr>
+        <p:spPr/>
+      </p:sp>
+      <p:sp>
+        <p:nvSpPr>
+          <p:cNvPr id="3" name="Notes Placeholder 2"/>
+          <p:cNvSpPr>
+            <a:spLocks noGrp="1"/>
+          </p:cNvSpPr>
+          <p:nvPr>
+            <p:ph type="body" idx="1"/>
+          </p:nvPr>
+        </p:nvSpPr>
+        <p:spPr/>
+        <p:txBody>
+          <a:bodyPr/>
+          <a:lstStyle/>
+          <a:p>
+            <a:r>
+              <a:rPr lang="en-US" dirty="0"/>
+              <a:t>Knowledge Check
+1. What is the best reason to address ai documentation, model cards, and system cards before deployment?
+2. Which practice best supports responsible implementation?
+3. Which statement best describes a common failure mode?
+4. What should be included in the practical artifact for this module?
+5. When should the issue be escalated for governance or leadership review?</a:t>
+            </a:r>
+            <a:endParaRPr lang="en-US" dirty="0"/>
+          </a:p>
+        </p:txBody>
+      </p:sp>
+      <p:sp>
+        <p:nvSpPr>
+          <p:cNvPr id="4" name="Slide Number Placeholder 3"/>
+          <p:cNvSpPr>
+            <a:spLocks noGrp="1"/>
+          </p:cNvSpPr>
+          <p:nvPr>
+            <p:ph type="sldNum" sz="quarter" idx="10"/>
+          </p:nvPr>
+        </p:nvSpPr>
+        <p:spPr/>
+        <p:txBody>
+          <a:bodyPr/>
+          <a:lstStyle/>
+          <a:p>
+            <a:fld id="{F7021451-1387-4CA6-816F-3879F97B5CBC}" type="slidenum">
+              <a:rPr lang="en-US"/>
+              <a:t>20</a:t>
+            </a:fld>
+            <a:endParaRPr lang="en-US"/>
+          </a:p>
+        </p:txBody>
+      </p:sp>
+    </p:spTree>
+    <p:extLst>
+      <p:ext uri="{BB962C8B-B14F-4D97-AF65-F5344CB8AC3E}">
+        <p14:creationId xmlns:p14="http://schemas.microsoft.com/office/powerpoint/2010/main" val="1024086991"/>
+      </p:ext>
+    </p:extLst>
+  </p:cSld>
+  <p:clrMapOvr>
+    <a:masterClrMapping/>
+  </p:clrMapOvr>
+</p:notes>
+</file>
+
+<file path=ppt/notesSlides/notesSlide21.xml><?xml version="1.0" encoding="utf-8"?>
+<p:notes xmlns:a="http://schemas.openxmlformats.org/drawingml/2006/main" xmlns:r="http://schemas.openxmlformats.org/officeDocument/2006/relationships" xmlns:p="http://schemas.openxmlformats.org/presentationml/2006/main">
+  <p:cSld>
+    <p:spTree>
+      <p:nvGrpSpPr>
+        <p:cNvPr id="1" name=""/>
+        <p:cNvGrpSpPr/>
+        <p:nvPr/>
+      </p:nvGrpSpPr>
+      <p:grpSpPr>
+        <a:xfrm>
+          <a:off x="0" y="0"/>
+          <a:ext cx="0" cy="0"/>
+          <a:chOff x="0" y="0"/>
+          <a:chExt cx="0" cy="0"/>
+        </a:xfrm>
+      </p:grpSpPr>
+      <p:sp>
+        <p:nvSpPr>
+          <p:cNvPr id="2" name="Slide Image Placeholder 1"/>
+          <p:cNvSpPr>
+            <a:spLocks noGrp="1" noRot="1" noChangeAspect="1"/>
+          </p:cNvSpPr>
+          <p:nvPr>
+            <p:ph type="sldImg"/>
+          </p:nvPr>
+        </p:nvSpPr>
+        <p:spPr/>
+      </p:sp>
+      <p:sp>
+        <p:nvSpPr>
+          <p:cNvPr id="3" name="Notes Placeholder 2"/>
+          <p:cNvSpPr>
+            <a:spLocks noGrp="1"/>
+          </p:cNvSpPr>
+          <p:nvPr>
+            <p:ph type="body" idx="1"/>
+          </p:nvPr>
+        </p:nvSpPr>
+        <p:spPr/>
+        <p:txBody>
+          <a:bodyPr/>
+          <a:lstStyle/>
+          <a:p>
+            <a:r>
+              <a:rPr lang="en-US" dirty="0"/>
+              <a:t>References and Resources
+NIST AI Risk Management Framework: https://www.nist.gov/itl/ai-risk-management-framework
+NIST Generative AI Profile: https://www.nist.gov/publications/artificial-intelligence-risk-management-framework-generative-artificial-intelligence
+CDC Public Health Data Strategy and Data Modernization resources: https://www.cdc.gov/public-health-data-strategy/php/about/index.html
+OWASP Top 10 for LLM Applications, when security or AI integrations are relevant
+Agency privacy, cybersecurity, data governance, procurement, and records management policies</a:t>
+            </a:r>
+            <a:endParaRPr lang="en-US" dirty="0"/>
+          </a:p>
+        </p:txBody>
+      </p:sp>
+      <p:sp>
+        <p:nvSpPr>
+          <p:cNvPr id="4" name="Slide Number Placeholder 3"/>
+          <p:cNvSpPr>
+            <a:spLocks noGrp="1"/>
+          </p:cNvSpPr>
+          <p:nvPr>
+            <p:ph type="sldNum" sz="quarter" idx="10"/>
+          </p:nvPr>
+        </p:nvSpPr>
+        <p:spPr/>
+        <p:txBody>
+          <a:bodyPr/>
+          <a:lstStyle/>
+          <a:p>
+            <a:fld id="{F7021451-1387-4CA6-816F-3879F97B5CBC}" type="slidenum">
+              <a:rPr lang="en-US"/>
+              <a:t>21</a:t>
+            </a:fld>
+            <a:endParaRPr lang="en-US"/>
+          </a:p>
+        </p:txBody>
+      </p:sp>
+    </p:spTree>
+    <p:extLst>
+      <p:ext uri="{BB962C8B-B14F-4D97-AF65-F5344CB8AC3E}">
+        <p14:creationId xmlns:p14="http://schemas.microsoft.com/office/powerpoint/2010/main" val="1024086991"/>
+      </p:ext>
+    </p:extLst>
+  </p:cSld>
+  <p:clrMapOvr>
+    <a:masterClrMapping/>
+  </p:clrMapOvr>
+</p:notes>
+</file>
+
 <file path=ppt/notesSlides/notesSlide3.xml><?xml version="1.0" encoding="utf-8"?>
 <p:notes xmlns:a="http://schemas.openxmlformats.org/drawingml/2006/main" xmlns:r="http://schemas.openxmlformats.org/officeDocument/2006/relationships" xmlns:p="http://schemas.openxmlformats.org/presentationml/2006/main">
   <p:cSld>
@@ -1608,12 +1790,11 @@
           <a:p>
             <a:r>
               <a:rPr lang="en-US" dirty="0"/>
-              <a:t>Learning Objectives
-Explain the purpose of ai documentation, model cards, and system cards in public health AI work.
-Identify the technical, operational, privacy, security, equity, and governance issues associated with the topic.
-Apply the topic to a real or realistic public health workflow, system, or implementation scenario.
-Recognize common failure modes that can affect safety, accuracy, trust, workflow fit, or sustainability.
-Identify practical guardrails that should be documented before implementation.</a:t>
+              <a:t>Related Playbook Plays
+Play 11: Build and Deploy AI Solutions - This lesson informs Play 11 by helping learners connect the lesson topic to build and deploy ai solutions work in the AI Playbook.
+Play 2: Readiness Assessment - This lesson informs Play 2 by helping learners connect the lesson topic to readiness assessment work in the AI Playbook sequence.
+Play 3: Establish AI Governance - This lesson informs Play 3 by helping learners connect the lesson topic to establish ai governance work in the AI Playbook sequence.
+Play 1: Vision &amp; Guardrails - This lesson informs Play 1 by helping learners connect the lesson topic to vision &amp; guardrails work in the AI Playbook sequence.</a:t>
             </a:r>
             <a:endParaRPr lang="en-US" dirty="0"/>
           </a:p>
@@ -1701,8 +1882,13 @@
           <a:p>
             <a:r>
               <a:rPr lang="en-US" dirty="0"/>
-              <a:t>Learning Objectives
-Produce a AI documentation packet that can support readiness assessment, governance review, procurement, implementation, or monitoring.</a:t>
+              <a:t>Related Toolkit Resources
+Tool 4: AI Policy Landscape Scan (Worksheet) - Use AI Policy Landscape Scan to translate this lesson into a documented public health AI planning, governance, implementation,.
+Tool 5: AI Environmental and Resource Impact Review (Checklist) - Use this tool to complete or strengthen the practical exercise for the module using fictional, de-identified, or generalized.
+Tool 6: Human-Centered AI Decision Rule Checklist (Checklist) - Use this tool to complete or strengthen the practical exercise for the module using fictional, de-identified, or generalized.
+Tool 8: AI Project Charter (Planning) - Use AI Project Charter to translate this lesson into a documented public health AI planning, governance, implementation, or.
+Tool 9: Data Quality Assessment Checklist (Checklist) - Use this tool to complete or strengthen the practical exercise for the module using fictional, de-identified, or generalized.
+Tool 10: Tiered Data Classification for AI Use (Worksheet) - Use this tool to complete or strengthen the practical exercise for the module using fictional, de-identified, or generalized.</a:t>
             </a:r>
             <a:endParaRPr lang="en-US" dirty="0"/>
           </a:p>
@@ -1790,8 +1976,12 @@
           <a:p>
             <a:r>
               <a:rPr lang="en-US" dirty="0"/>
-              <a:t>Module Overview
-AI documentation makes systems understandable, reviewable, and accountable. Model cards and system cards are structured documentation tools that describe intended use, data, evaluation, limitations, risks, human oversight, and monitoring. This module helps public health staff create documentation that supports governance review, vendor oversight, public accountability, and incident response.</a:t>
+              <a:t>Learning Objectives
+Explain the purpose of ai documentation, model cards, and system cards in public health AI work.
+Identify the technical, operational, privacy, security, equity, and governance issues associated with the topic.
+Apply the topic to a real or realistic public health workflow, system, or implementation scenario.
+Recognize common failure modes that can affect safety, accuracy, trust, workflow fit, or sustainability.
+Identify practical guardrails that should be documented before implementation.</a:t>
             </a:r>
             <a:endParaRPr lang="en-US" dirty="0"/>
           </a:p>
@@ -1879,8 +2069,8 @@
           <a:p>
             <a:r>
               <a:rPr lang="en-US" dirty="0"/>
-              <a:t>Jurisdiction and Agency Policy Note
-This national-level module is intended for training and planning purposes. It does not replace legal, privacy, procurement, civil rights, records, or agency policy review. Learners should confirm applicable requirements in their own jurisdiction and organization before implementing AI-supported workflows.</a:t>
+              <a:t>Learning Objectives
+Produce a AI documentation packet that can support readiness assessment, governance review, procurement, implementation, or monitoring.</a:t>
             </a:r>
             <a:endParaRPr lang="en-US" dirty="0"/>
           </a:p>
@@ -1968,9 +2158,8 @@
           <a:p>
             <a:r>
               <a:rPr lang="en-US" dirty="0"/>
-              <a:t>Why This Topic Matters for Public Health AI
-AI Documentation, Model Cards, and System Cards matters because AI systems are embedded in public health programs, data systems, and decision processes rather than operating in isolation. The topic affects whether AI outputs are accurate, explainable, safe, equitable, secure, and sustainable. Agencies that ignore this area may create tools that work in a demonstration but fail in actual practice.
-The topic also affects accountability. Public health agencies must be able to explain how data are used, why a tool was approved, what evidence supports the workflow, who reviews outputs, and what happens when the system fails. These responsibilities become more important as AI tools move from experimentation into operational use.</a:t>
+              <a:t>Module Overview
+AI documentation makes systems understandable, reviewable, and accountable. Model cards and system cards are structured documentation tools that describe intended use, data, evaluation, limitations, risks, human oversight, and monitoring. This module helps public health staff create documentation that supports governance review, vendor oversight, public accountability, and incident response.</a:t>
             </a:r>
             <a:endParaRPr lang="en-US" dirty="0"/>
           </a:p>
@@ -2058,10 +2247,8 @@
           <a:p>
             <a:r>
               <a:rPr lang="en-US" dirty="0"/>
-              <a:t>Core Concepts
-AI documentation records what the system is intended to do, how it was developed or configured, what data it uses, how it was evaluated, what limitations are known, and how it is monitored. Documentation supports accountability across the AI lifecycle.
-A model card is a structured summary of a model, including intended use, data, evaluation, limitations, risks, and appropriate use. A system card extends documentation to the broader system, including workflow integration, interfaces, user roles, retrieval sources, human oversight, and operational controls.
-Documentation is not a paperwork exercise. It is how agencies preserve institutional memory, support governance review, answer vendor questions, investigate incidents, train staff, and explain decisions to leaders or the public when appropriate.</a:t>
+              <a:t>Jurisdiction and Agency Policy Note
+This national-level module is intended for training and planning purposes. It does not replace legal, privacy, procurement, civil rights, records, or agency policy review. Learners should confirm applicable requirements in their own jurisdiction and organization before implementing AI-supported workflows.</a:t>
             </a:r>
             <a:endParaRPr lang="en-US" dirty="0"/>
           </a:p>
@@ -2149,8 +2336,9 @@
           <a:p>
             <a:r>
               <a:rPr lang="en-US" dirty="0"/>
-              <a:t>Public Health Example
-An agency using a generative AI assistant to draft public health messages should document the approved use, source materials, prohibited content, review process, accessibility expectations, language review, hallucination controls, user training, monitoring process, and incident response pathway. A system card would help reviewers understand the whole workflow rather than only the model.</a:t>
+              <a:t>Why This Topic Matters for Public Health AI
+AI Documentation, Model Cards, and System Cards matters because AI systems are embedded in public health programs, data systems, and decision processes rather than operating in isolation. The topic affects whether AI outputs are accurate, explainable, safe, equitable, secure, and sustainable. Agencies that ignore this area may create tools that work in a demonstration but fail in actual practice.
+The topic also affects accountability. Public health agencies must be able to explain how data are used, why a tool was approved, what evidence supports the workflow, who reviews outputs, and what happens when the system fails. These responsibilities become more important as AI tools move from experimentation into operational use.</a:t>
             </a:r>
             <a:endParaRPr lang="en-US" dirty="0"/>
           </a:p>
@@ -2773,7 +2961,32 @@
       </p:sp>
       <p:sp>
         <p:nvSpPr>
-          <p:cNvPr id="3" name="Text 1"/>
+          <p:cNvPr id="3" name="Shape 1"/>
+          <p:cNvSpPr/>
+          <p:nvPr/>
+        </p:nvSpPr>
+        <p:spPr>
+          <a:xfrm>
+            <a:off x="0" y="164592"/>
+            <a:ext cx="146304" cy="6693408"/>
+          </a:xfrm>
+          <a:prstGeom prst="rect">
+            <a:avLst/>
+          </a:prstGeom>
+          <a:solidFill>
+            <a:srgbClr val="2F8A28"/>
+          </a:solidFill>
+          <a:ln w="12700">
+            <a:solidFill>
+              <a:srgbClr val="2F8A28"/>
+            </a:solidFill>
+            <a:prstDash val="solid"/>
+          </a:ln>
+        </p:spPr>
+      </p:sp>
+      <p:sp>
+        <p:nvSpPr>
+          <p:cNvPr id="4" name="Text 2"/>
           <p:cNvSpPr/>
           <p:nvPr/>
         </p:nvSpPr>
@@ -2812,7 +3025,7 @@
       </p:sp>
       <p:sp>
         <p:nvSpPr>
-          <p:cNvPr id="4" name="Text 2"/>
+          <p:cNvPr id="5" name="Text 3"/>
           <p:cNvSpPr/>
           <p:nvPr/>
         </p:nvSpPr>
@@ -2851,7 +3064,7 @@
       </p:sp>
       <p:sp>
         <p:nvSpPr>
-          <p:cNvPr id="5" name="Text 3"/>
+          <p:cNvPr id="6" name="Text 4"/>
           <p:cNvSpPr/>
           <p:nvPr/>
         </p:nvSpPr>
@@ -2890,13 +3103,77 @@
       </p:sp>
       <p:sp>
         <p:nvSpPr>
-          <p:cNvPr id="6" name="Text 4"/>
+          <p:cNvPr id="7" name="Shape 5"/>
           <p:cNvSpPr/>
           <p:nvPr/>
         </p:nvSpPr>
         <p:spPr>
           <a:xfrm>
             <a:off x="640080" y="658368"/>
+            <a:ext cx="420624" cy="420624"/>
+          </a:xfrm>
+          <a:prstGeom prst="ellipse">
+            <a:avLst/>
+          </a:prstGeom>
+          <a:solidFill>
+            <a:srgbClr val="0068B7"/>
+          </a:solidFill>
+          <a:ln w="12700">
+            <a:solidFill>
+              <a:srgbClr val="0068B7"/>
+            </a:solidFill>
+            <a:prstDash val="solid"/>
+          </a:ln>
+        </p:spPr>
+      </p:sp>
+      <p:sp>
+        <p:nvSpPr>
+          <p:cNvPr id="8" name="Text 6"/>
+          <p:cNvSpPr/>
+          <p:nvPr/>
+        </p:nvSpPr>
+        <p:spPr>
+          <a:xfrm>
+            <a:off x="640080" y="731520"/>
+            <a:ext cx="420624" cy="164592"/>
+          </a:xfrm>
+          <a:prstGeom prst="rect">
+            <a:avLst/>
+          </a:prstGeom>
+          <a:noFill/>
+          <a:ln/>
+        </p:spPr>
+        <p:txBody>
+          <a:bodyPr wrap="square" lIns="0" tIns="0" rIns="0" bIns="0" rtlCol="0" anchor="ctr"/>
+          <a:lstStyle/>
+          <a:p>
+            <a:pPr algn="ctr" indent="0" marL="0">
+              <a:buNone/>
+            </a:pPr>
+            <a:r>
+              <a:rPr lang="en-US" sz="1100" b="1" dirty="0">
+                <a:solidFill>
+                  <a:srgbClr val="FFFFFF"/>
+                </a:solidFill>
+                <a:latin typeface="Aptos" pitchFamily="34" charset="0"/>
+                <a:ea typeface="Aptos" pitchFamily="34" charset="-122"/>
+                <a:cs typeface="Aptos" pitchFamily="34" charset="-120"/>
+              </a:rPr>
+              <a:t>5</a:t>
+            </a:r>
+            <a:endParaRPr lang="en-US" sz="1100" dirty="0"/>
+          </a:p>
+        </p:txBody>
+      </p:sp>
+      <p:sp>
+        <p:nvSpPr>
+          <p:cNvPr id="9" name="Text 7"/>
+          <p:cNvSpPr/>
+          <p:nvPr/>
+        </p:nvSpPr>
+        <p:spPr>
+          <a:xfrm>
+            <a:off x="640080" y="621792"/>
             <a:ext cx="10881360" cy="566928"/>
           </a:xfrm>
           <a:prstGeom prst="rect">
@@ -2923,7 +3200,7 @@
                 <a:ea typeface="Aptos Display" pitchFamily="34" charset="-122"/>
                 <a:cs typeface="Aptos Display" pitchFamily="34" charset="-120"/>
               </a:rPr>
-              <a:t>Technical Deep Dive</a:t>
+              <a:t>Core Concepts</a:t>
             </a:r>
             <a:endParaRPr lang="en-US" sz="2700" dirty="0"/>
           </a:p>
@@ -2931,32 +3208,178 @@
       </p:sp>
       <p:sp>
         <p:nvSpPr>
-          <p:cNvPr id="7" name="Text 5"/>
-          <p:cNvSpPr/>
-          <p:nvPr/>
-        </p:nvSpPr>
-        <p:spPr>
-          <a:xfrm>
-            <a:off x="822960" y="1325880"/>
-            <a:ext cx="10378440" cy="4800600"/>
-          </a:xfrm>
-          <a:prstGeom prst="rect">
-            <a:avLst/>
-          </a:prstGeom>
-          <a:noFill/>
-          <a:ln/>
-        </p:spPr>
-        <p:txBody>
-          <a:bodyPr wrap="square" lIns="1016" tIns="1016" rIns="1016" bIns="1016" rtlCol="0" anchor="t">
+          <p:cNvPr id="10" name="Text 8"/>
+          <p:cNvSpPr/>
+          <p:nvPr/>
+        </p:nvSpPr>
+        <p:spPr>
+          <a:xfrm>
+            <a:off x="868680" y="1417320"/>
+            <a:ext cx="6675120" cy="4434840"/>
+          </a:xfrm>
+          <a:prstGeom prst="rect">
+            <a:avLst/>
+          </a:prstGeom>
+          <a:noFill/>
+          <a:ln/>
+        </p:spPr>
+        <p:txBody>
+          <a:bodyPr wrap="square" lIns="635" tIns="635" rIns="635" bIns="635" rtlCol="0" anchor="t">
             <a:normAutofit/>
           </a:bodyPr>
           <a:lstStyle/>
           <a:p>
+            <a:r>
+              <a:rPr lang="en-US" sz="1700" dirty="0">
+                <a:solidFill>
+                  <a:srgbClr val="17364A"/>
+                </a:solidFill>
+                <a:latin typeface="Aptos" pitchFamily="34" charset="0"/>
+                <a:ea typeface="Aptos" pitchFamily="34" charset="-122"/>
+                <a:cs typeface="Aptos" pitchFamily="34" charset="-120"/>
+              </a:rPr>
+              <a:t>AI documentation records what the system is intended to do, how it was developed or configured, what data it uses, how it.</a:t>
+            </a:r>
+            <a:endParaRPr lang="en-US" sz="1700" dirty="0"/>
+          </a:p>
+          <a:p>
+            <a:r>
+              <a:rPr lang="en-US" sz="1700" dirty="0">
+                <a:solidFill>
+                  <a:srgbClr val="17364A"/>
+                </a:solidFill>
+                <a:latin typeface="Aptos" pitchFamily="34" charset="0"/>
+                <a:ea typeface="Aptos" pitchFamily="34" charset="-122"/>
+                <a:cs typeface="Aptos" pitchFamily="34" charset="-120"/>
+              </a:rPr>
+              <a:t>Documentation supports accountability across the AI lifecycle.</a:t>
+            </a:r>
+            <a:endParaRPr lang="en-US" sz="1700" dirty="0"/>
+          </a:p>
+          <a:p>
+            <a:r>
+              <a:rPr lang="en-US" sz="1700" dirty="0">
+                <a:solidFill>
+                  <a:srgbClr val="17364A"/>
+                </a:solidFill>
+                <a:latin typeface="Aptos" pitchFamily="34" charset="0"/>
+                <a:ea typeface="Aptos" pitchFamily="34" charset="-122"/>
+                <a:cs typeface="Aptos" pitchFamily="34" charset="-120"/>
+              </a:rPr>
+              <a:t>A model card is a structured summary of a model, including intended use, data, evaluation, limitations, risks, and.</a:t>
+            </a:r>
+            <a:endParaRPr lang="en-US" sz="1700" dirty="0"/>
+          </a:p>
+          <a:p>
+            <a:r>
+              <a:rPr lang="en-US" sz="1700" dirty="0">
+                <a:solidFill>
+                  <a:srgbClr val="17364A"/>
+                </a:solidFill>
+                <a:latin typeface="Aptos" pitchFamily="34" charset="0"/>
+                <a:ea typeface="Aptos" pitchFamily="34" charset="-122"/>
+                <a:cs typeface="Aptos" pitchFamily="34" charset="-120"/>
+              </a:rPr>
+              <a:t>A system card extends documentation to the broader system, including workflow integration, interfaces, user roles,.</a:t>
+            </a:r>
+            <a:endParaRPr lang="en-US" sz="1700" dirty="0"/>
+          </a:p>
+        </p:txBody>
+      </p:sp>
+      <p:sp>
+        <p:nvSpPr>
+          <p:cNvPr id="11" name="Shape 9"/>
+          <p:cNvSpPr/>
+          <p:nvPr/>
+        </p:nvSpPr>
+        <p:spPr>
+          <a:xfrm>
+            <a:off x="7909560" y="1417320"/>
+            <a:ext cx="3154680" cy="1828800"/>
+          </a:xfrm>
+          <a:prstGeom prst="roundRect">
+            <a:avLst>
+              <a:gd name="adj" fmla="val 6000"/>
+            </a:avLst>
+          </a:prstGeom>
+          <a:solidFill>
+            <a:srgbClr val="EEF8ED"/>
+          </a:solidFill>
+          <a:ln w="12700">
+            <a:solidFill>
+              <a:srgbClr val="B9D7E6"/>
+            </a:solidFill>
+            <a:prstDash val="solid"/>
+          </a:ln>
+        </p:spPr>
+      </p:sp>
+      <p:sp>
+        <p:nvSpPr>
+          <p:cNvPr id="12" name="Text 10"/>
+          <p:cNvSpPr/>
+          <p:nvPr/>
+        </p:nvSpPr>
+        <p:spPr>
+          <a:xfrm>
+            <a:off x="8074152" y="1563624"/>
+            <a:ext cx="2825496" cy="201168"/>
+          </a:xfrm>
+          <a:prstGeom prst="rect">
+            <a:avLst/>
+          </a:prstGeom>
+          <a:noFill/>
+          <a:ln/>
+        </p:spPr>
+        <p:txBody>
+          <a:bodyPr wrap="square" lIns="0" tIns="0" rIns="0" bIns="0" rtlCol="0" anchor="ctr"/>
+          <a:lstStyle/>
+          <a:p>
             <a:pPr indent="0" marL="0">
               <a:buNone/>
             </a:pPr>
             <a:r>
-              <a:rPr lang="en-US" sz="1420" dirty="0">
+              <a:rPr lang="en-US" sz="950" b="1" dirty="0">
+                <a:solidFill>
+                  <a:srgbClr val="0068B7"/>
+                </a:solidFill>
+                <a:latin typeface="Aptos" pitchFamily="34" charset="0"/>
+                <a:ea typeface="Aptos" pitchFamily="34" charset="-122"/>
+                <a:cs typeface="Aptos" pitchFamily="34" charset="-120"/>
+              </a:rPr>
+              <a:t>Key idea</a:t>
+            </a:r>
+            <a:endParaRPr lang="en-US" sz="950" dirty="0"/>
+          </a:p>
+        </p:txBody>
+      </p:sp>
+      <p:sp>
+        <p:nvSpPr>
+          <p:cNvPr id="13" name="Text 11"/>
+          <p:cNvSpPr/>
+          <p:nvPr/>
+        </p:nvSpPr>
+        <p:spPr>
+          <a:xfrm>
+            <a:off x="8074152" y="1856232"/>
+            <a:ext cx="2825496" cy="1261872"/>
+          </a:xfrm>
+          <a:prstGeom prst="rect">
+            <a:avLst/>
+          </a:prstGeom>
+          <a:noFill/>
+          <a:ln/>
+        </p:spPr>
+        <p:txBody>
+          <a:bodyPr wrap="square" lIns="0" tIns="0" rIns="0" bIns="0" rtlCol="0" anchor="t">
+            <a:normAutofit/>
+          </a:bodyPr>
+          <a:lstStyle/>
+          <a:p>
+            <a:pPr indent="0" marL="0">
+              <a:buNone/>
+            </a:pPr>
+            <a:r>
+              <a:rPr lang="en-US" sz="1250" dirty="0">
                 <a:solidFill>
                   <a:srgbClr val="17364A"/>
                 </a:solidFill>
@@ -2964,9 +3387,116 @@
                 <a:ea typeface="Aptos" pitchFamily="34" charset="-122"/>
                 <a:cs typeface="Aptos" pitchFamily="34" charset="-120"/>
               </a:rPr>
-              <a:t>AI documentation should be created before deployment and maintained after launch. The documentation should identify the system owner, intended users, data inputs, outputs, human review requirements, validation approach, known limitations, and change management process. A document that is created once and never updated will not support responsible operations. Model cards are especially useful for predictive or classification models because they can document training data, evaluation metrics, subgroup performance, limitations, and intended use. System cards are especially useful for generative, RAG, and agentic systems because these tools depend on prompts, retrieval content, integrations, permissions, and human workflows. Documentation should also cover changes. Model updates, prompt changes, data source changes, terminology updates, and workflow changes can all affect system behavior. Change logs and version histories help agencies reconstruct what happened if outputs change or incidents occur.</a:t>
-            </a:r>
-            <a:endParaRPr lang="en-US" sz="1420" dirty="0"/>
+              <a:t>AI documentation records what the system is intended to do, how it was developed or configured, what data it uses, how it.</a:t>
+            </a:r>
+            <a:endParaRPr lang="en-US" sz="1250" dirty="0"/>
+          </a:p>
+        </p:txBody>
+      </p:sp>
+      <p:sp>
+        <p:nvSpPr>
+          <p:cNvPr id="14" name="Shape 12"/>
+          <p:cNvSpPr/>
+          <p:nvPr/>
+        </p:nvSpPr>
+        <p:spPr>
+          <a:xfrm>
+            <a:off x="7909560" y="3520440"/>
+            <a:ext cx="3154680" cy="1737360"/>
+          </a:xfrm>
+          <a:prstGeom prst="roundRect">
+            <a:avLst>
+              <a:gd name="adj" fmla="val 6316"/>
+            </a:avLst>
+          </a:prstGeom>
+          <a:solidFill>
+            <a:srgbClr val="EAF6F8"/>
+          </a:solidFill>
+          <a:ln w="12700">
+            <a:solidFill>
+              <a:srgbClr val="B9D7E6"/>
+            </a:solidFill>
+            <a:prstDash val="solid"/>
+          </a:ln>
+        </p:spPr>
+      </p:sp>
+      <p:sp>
+        <p:nvSpPr>
+          <p:cNvPr id="15" name="Text 13"/>
+          <p:cNvSpPr/>
+          <p:nvPr/>
+        </p:nvSpPr>
+        <p:spPr>
+          <a:xfrm>
+            <a:off x="8074152" y="3666744"/>
+            <a:ext cx="2825496" cy="201168"/>
+          </a:xfrm>
+          <a:prstGeom prst="rect">
+            <a:avLst/>
+          </a:prstGeom>
+          <a:noFill/>
+          <a:ln/>
+        </p:spPr>
+        <p:txBody>
+          <a:bodyPr wrap="square" lIns="0" tIns="0" rIns="0" bIns="0" rtlCol="0" anchor="ctr"/>
+          <a:lstStyle/>
+          <a:p>
+            <a:pPr indent="0" marL="0">
+              <a:buNone/>
+            </a:pPr>
+            <a:r>
+              <a:rPr lang="en-US" sz="950" b="1" dirty="0">
+                <a:solidFill>
+                  <a:srgbClr val="0068B7"/>
+                </a:solidFill>
+                <a:latin typeface="Aptos" pitchFamily="34" charset="0"/>
+                <a:ea typeface="Aptos" pitchFamily="34" charset="-122"/>
+                <a:cs typeface="Aptos" pitchFamily="34" charset="-120"/>
+              </a:rPr>
+              <a:t>Use this for</a:t>
+            </a:r>
+            <a:endParaRPr lang="en-US" sz="950" dirty="0"/>
+          </a:p>
+        </p:txBody>
+      </p:sp>
+      <p:sp>
+        <p:nvSpPr>
+          <p:cNvPr id="16" name="Text 14"/>
+          <p:cNvSpPr/>
+          <p:nvPr/>
+        </p:nvSpPr>
+        <p:spPr>
+          <a:xfrm>
+            <a:off x="8074152" y="3959352"/>
+            <a:ext cx="2825496" cy="1170432"/>
+          </a:xfrm>
+          <a:prstGeom prst="rect">
+            <a:avLst/>
+          </a:prstGeom>
+          <a:noFill/>
+          <a:ln/>
+        </p:spPr>
+        <p:txBody>
+          <a:bodyPr wrap="square" lIns="0" tIns="0" rIns="0" bIns="0" rtlCol="0" anchor="t">
+            <a:normAutofit/>
+          </a:bodyPr>
+          <a:lstStyle/>
+          <a:p>
+            <a:pPr indent="0" marL="0">
+              <a:buNone/>
+            </a:pPr>
+            <a:r>
+              <a:rPr lang="en-US" sz="1250" dirty="0">
+                <a:solidFill>
+                  <a:srgbClr val="17364A"/>
+                </a:solidFill>
+                <a:latin typeface="Aptos" pitchFamily="34" charset="0"/>
+                <a:ea typeface="Aptos" pitchFamily="34" charset="-122"/>
+                <a:cs typeface="Aptos" pitchFamily="34" charset="-120"/>
+              </a:rPr>
+              <a:t>Connect the concept to public health decisions, safeguards, documentation, or implementation work.</a:t>
+            </a:r>
+            <a:endParaRPr lang="en-US" sz="1250" dirty="0"/>
           </a:p>
         </p:txBody>
       </p:sp>
@@ -3029,7 +3559,32 @@
       </p:sp>
       <p:sp>
         <p:nvSpPr>
-          <p:cNvPr id="3" name="Text 1"/>
+          <p:cNvPr id="3" name="Shape 1"/>
+          <p:cNvSpPr/>
+          <p:nvPr/>
+        </p:nvSpPr>
+        <p:spPr>
+          <a:xfrm>
+            <a:off x="0" y="164592"/>
+            <a:ext cx="146304" cy="6693408"/>
+          </a:xfrm>
+          <a:prstGeom prst="rect">
+            <a:avLst/>
+          </a:prstGeom>
+          <a:solidFill>
+            <a:srgbClr val="2F8A28"/>
+          </a:solidFill>
+          <a:ln w="12700">
+            <a:solidFill>
+              <a:srgbClr val="2F8A28"/>
+            </a:solidFill>
+            <a:prstDash val="solid"/>
+          </a:ln>
+        </p:spPr>
+      </p:sp>
+      <p:sp>
+        <p:nvSpPr>
+          <p:cNvPr id="4" name="Text 2"/>
           <p:cNvSpPr/>
           <p:nvPr/>
         </p:nvSpPr>
@@ -3068,7 +3623,7 @@
       </p:sp>
       <p:sp>
         <p:nvSpPr>
-          <p:cNvPr id="4" name="Text 2"/>
+          <p:cNvPr id="5" name="Text 3"/>
           <p:cNvSpPr/>
           <p:nvPr/>
         </p:nvSpPr>
@@ -3107,7 +3662,7 @@
       </p:sp>
       <p:sp>
         <p:nvSpPr>
-          <p:cNvPr id="5" name="Text 3"/>
+          <p:cNvPr id="6" name="Text 4"/>
           <p:cNvSpPr/>
           <p:nvPr/>
         </p:nvSpPr>
@@ -3146,13 +3701,77 @@
       </p:sp>
       <p:sp>
         <p:nvSpPr>
-          <p:cNvPr id="6" name="Text 4"/>
+          <p:cNvPr id="7" name="Shape 5"/>
           <p:cNvSpPr/>
           <p:nvPr/>
         </p:nvSpPr>
         <p:spPr>
           <a:xfrm>
             <a:off x="640080" y="658368"/>
+            <a:ext cx="420624" cy="420624"/>
+          </a:xfrm>
+          <a:prstGeom prst="ellipse">
+            <a:avLst/>
+          </a:prstGeom>
+          <a:solidFill>
+            <a:srgbClr val="0068B7"/>
+          </a:solidFill>
+          <a:ln w="12700">
+            <a:solidFill>
+              <a:srgbClr val="0068B7"/>
+            </a:solidFill>
+            <a:prstDash val="solid"/>
+          </a:ln>
+        </p:spPr>
+      </p:sp>
+      <p:sp>
+        <p:nvSpPr>
+          <p:cNvPr id="8" name="Text 6"/>
+          <p:cNvSpPr/>
+          <p:nvPr/>
+        </p:nvSpPr>
+        <p:spPr>
+          <a:xfrm>
+            <a:off x="640080" y="731520"/>
+            <a:ext cx="420624" cy="164592"/>
+          </a:xfrm>
+          <a:prstGeom prst="rect">
+            <a:avLst/>
+          </a:prstGeom>
+          <a:noFill/>
+          <a:ln/>
+        </p:spPr>
+        <p:txBody>
+          <a:bodyPr wrap="square" lIns="0" tIns="0" rIns="0" bIns="0" rtlCol="0" anchor="ctr"/>
+          <a:lstStyle/>
+          <a:p>
+            <a:pPr algn="ctr" indent="0" marL="0">
+              <a:buNone/>
+            </a:pPr>
+            <a:r>
+              <a:rPr lang="en-US" sz="1100" b="1" dirty="0">
+                <a:solidFill>
+                  <a:srgbClr val="FFFFFF"/>
+                </a:solidFill>
+                <a:latin typeface="Aptos" pitchFamily="34" charset="0"/>
+                <a:ea typeface="Aptos" pitchFamily="34" charset="-122"/>
+                <a:cs typeface="Aptos" pitchFamily="34" charset="-120"/>
+              </a:rPr>
+              <a:t>6</a:t>
+            </a:r>
+            <a:endParaRPr lang="en-US" sz="1100" dirty="0"/>
+          </a:p>
+        </p:txBody>
+      </p:sp>
+      <p:sp>
+        <p:nvSpPr>
+          <p:cNvPr id="9" name="Text 7"/>
+          <p:cNvSpPr/>
+          <p:nvPr/>
+        </p:nvSpPr>
+        <p:spPr>
+          <a:xfrm>
+            <a:off x="640080" y="621792"/>
             <a:ext cx="10881360" cy="566928"/>
           </a:xfrm>
           <a:prstGeom prst="rect">
@@ -3179,7 +3798,7 @@
                 <a:ea typeface="Aptos Display" pitchFamily="34" charset="-122"/>
                 <a:cs typeface="Aptos Display" pitchFamily="34" charset="-120"/>
               </a:rPr>
-              <a:t>Risks, Failure Modes, and Guardrails</a:t>
+              <a:t>Public Health Example</a:t>
             </a:r>
             <a:endParaRPr lang="en-US" sz="2700" dirty="0"/>
           </a:p>
@@ -3187,32 +3806,150 @@
       </p:sp>
       <p:sp>
         <p:nvSpPr>
-          <p:cNvPr id="7" name="Text 5"/>
-          <p:cNvSpPr/>
-          <p:nvPr/>
-        </p:nvSpPr>
-        <p:spPr>
-          <a:xfrm>
-            <a:off x="822960" y="1325880"/>
-            <a:ext cx="10378440" cy="4800600"/>
-          </a:xfrm>
-          <a:prstGeom prst="rect">
-            <a:avLst/>
-          </a:prstGeom>
-          <a:noFill/>
-          <a:ln/>
-        </p:spPr>
-        <p:txBody>
-          <a:bodyPr wrap="square" lIns="1016" tIns="1016" rIns="1016" bIns="1016" rtlCol="0" anchor="t">
+          <p:cNvPr id="10" name="Text 8"/>
+          <p:cNvSpPr/>
+          <p:nvPr/>
+        </p:nvSpPr>
+        <p:spPr>
+          <a:xfrm>
+            <a:off x="868680" y="1417320"/>
+            <a:ext cx="6675120" cy="4434840"/>
+          </a:xfrm>
+          <a:prstGeom prst="rect">
+            <a:avLst/>
+          </a:prstGeom>
+          <a:noFill/>
+          <a:ln/>
+        </p:spPr>
+        <p:txBody>
+          <a:bodyPr wrap="square" lIns="635" tIns="635" rIns="635" bIns="635" rtlCol="0" anchor="t">
             <a:normAutofit/>
           </a:bodyPr>
           <a:lstStyle/>
           <a:p>
+            <a:r>
+              <a:rPr lang="en-US" sz="1700" dirty="0">
+                <a:solidFill>
+                  <a:srgbClr val="17364A"/>
+                </a:solidFill>
+                <a:latin typeface="Aptos" pitchFamily="34" charset="0"/>
+                <a:ea typeface="Aptos" pitchFamily="34" charset="-122"/>
+                <a:cs typeface="Aptos" pitchFamily="34" charset="-120"/>
+              </a:rPr>
+              <a:t>An agency using a generative AI assistant to draft public health messages should document the approved use, source.</a:t>
+            </a:r>
+            <a:endParaRPr lang="en-US" sz="1700" dirty="0"/>
+          </a:p>
+          <a:p>
+            <a:r>
+              <a:rPr lang="en-US" sz="1700" dirty="0">
+                <a:solidFill>
+                  <a:srgbClr val="17364A"/>
+                </a:solidFill>
+                <a:latin typeface="Aptos" pitchFamily="34" charset="0"/>
+                <a:ea typeface="Aptos" pitchFamily="34" charset="-122"/>
+                <a:cs typeface="Aptos" pitchFamily="34" charset="-120"/>
+              </a:rPr>
+              <a:t>A system card would help reviewers understand the whole workflow rather than only the model.</a:t>
+            </a:r>
+            <a:endParaRPr lang="en-US" sz="1700" dirty="0"/>
+          </a:p>
+        </p:txBody>
+      </p:sp>
+      <p:sp>
+        <p:nvSpPr>
+          <p:cNvPr id="11" name="Shape 9"/>
+          <p:cNvSpPr/>
+          <p:nvPr/>
+        </p:nvSpPr>
+        <p:spPr>
+          <a:xfrm>
+            <a:off x="7909560" y="1417320"/>
+            <a:ext cx="3154680" cy="1828800"/>
+          </a:xfrm>
+          <a:prstGeom prst="roundRect">
+            <a:avLst>
+              <a:gd name="adj" fmla="val 6000"/>
+            </a:avLst>
+          </a:prstGeom>
+          <a:solidFill>
+            <a:srgbClr val="EEF8ED"/>
+          </a:solidFill>
+          <a:ln w="12700">
+            <a:solidFill>
+              <a:srgbClr val="B9D7E6"/>
+            </a:solidFill>
+            <a:prstDash val="solid"/>
+          </a:ln>
+        </p:spPr>
+      </p:sp>
+      <p:sp>
+        <p:nvSpPr>
+          <p:cNvPr id="12" name="Text 10"/>
+          <p:cNvSpPr/>
+          <p:nvPr/>
+        </p:nvSpPr>
+        <p:spPr>
+          <a:xfrm>
+            <a:off x="8074152" y="1563624"/>
+            <a:ext cx="2825496" cy="201168"/>
+          </a:xfrm>
+          <a:prstGeom prst="rect">
+            <a:avLst/>
+          </a:prstGeom>
+          <a:noFill/>
+          <a:ln/>
+        </p:spPr>
+        <p:txBody>
+          <a:bodyPr wrap="square" lIns="0" tIns="0" rIns="0" bIns="0" rtlCol="0" anchor="ctr"/>
+          <a:lstStyle/>
+          <a:p>
             <a:pPr indent="0" marL="0">
               <a:buNone/>
             </a:pPr>
             <a:r>
-              <a:rPr lang="en-US" sz="1420" dirty="0">
+              <a:rPr lang="en-US" sz="950" b="1" dirty="0">
+                <a:solidFill>
+                  <a:srgbClr val="0068B7"/>
+                </a:solidFill>
+                <a:latin typeface="Aptos" pitchFamily="34" charset="0"/>
+                <a:ea typeface="Aptos" pitchFamily="34" charset="-122"/>
+                <a:cs typeface="Aptos" pitchFamily="34" charset="-120"/>
+              </a:rPr>
+              <a:t>Key idea</a:t>
+            </a:r>
+            <a:endParaRPr lang="en-US" sz="950" dirty="0"/>
+          </a:p>
+        </p:txBody>
+      </p:sp>
+      <p:sp>
+        <p:nvSpPr>
+          <p:cNvPr id="13" name="Text 11"/>
+          <p:cNvSpPr/>
+          <p:nvPr/>
+        </p:nvSpPr>
+        <p:spPr>
+          <a:xfrm>
+            <a:off x="8074152" y="1856232"/>
+            <a:ext cx="2825496" cy="1261872"/>
+          </a:xfrm>
+          <a:prstGeom prst="rect">
+            <a:avLst/>
+          </a:prstGeom>
+          <a:noFill/>
+          <a:ln/>
+        </p:spPr>
+        <p:txBody>
+          <a:bodyPr wrap="square" lIns="0" tIns="0" rIns="0" bIns="0" rtlCol="0" anchor="t">
+            <a:normAutofit/>
+          </a:bodyPr>
+          <a:lstStyle/>
+          <a:p>
+            <a:pPr indent="0" marL="0">
+              <a:buNone/>
+            </a:pPr>
+            <a:r>
+              <a:rPr lang="en-US" sz="1250" dirty="0">
                 <a:solidFill>
                   <a:srgbClr val="17364A"/>
                 </a:solidFill>
@@ -3220,9 +3957,116 @@
                 <a:ea typeface="Aptos" pitchFamily="34" charset="-122"/>
                 <a:cs typeface="Aptos" pitchFamily="34" charset="-120"/>
               </a:rPr>
-              <a:t>A common failure mode is treating the topic as a technical detail rather than a public health control. When staff do not connect technical decisions to authority, workflow, equity, privacy, security, and accountability, the agency may adopt a tool that appears useful but cannot be sustained or defended. Another risk is relying on vendor claims without agency-defined evidence. Vendors may provide demonstrations, dashboards, or summary metrics that do not match the agency workflow or data environment. A guardrail is to require documentation, test results, acceptance criteria, and agency-controlled review. A third risk is failing to plan for change. Public health data, policies, systems, and emergencies change. Any technical approach must include monitoring, review, versioning, escalation, and retirement pathways so the agency can respond when assumptions no longer hold.</a:t>
-            </a:r>
-            <a:endParaRPr lang="en-US" sz="1420" dirty="0"/>
+              <a:t>An agency using a generative AI assistant to draft public health messages should document the approved use, source.</a:t>
+            </a:r>
+            <a:endParaRPr lang="en-US" sz="1250" dirty="0"/>
+          </a:p>
+        </p:txBody>
+      </p:sp>
+      <p:sp>
+        <p:nvSpPr>
+          <p:cNvPr id="14" name="Shape 12"/>
+          <p:cNvSpPr/>
+          <p:nvPr/>
+        </p:nvSpPr>
+        <p:spPr>
+          <a:xfrm>
+            <a:off x="7909560" y="3520440"/>
+            <a:ext cx="3154680" cy="1737360"/>
+          </a:xfrm>
+          <a:prstGeom prst="roundRect">
+            <a:avLst>
+              <a:gd name="adj" fmla="val 6316"/>
+            </a:avLst>
+          </a:prstGeom>
+          <a:solidFill>
+            <a:srgbClr val="EAF6F8"/>
+          </a:solidFill>
+          <a:ln w="12700">
+            <a:solidFill>
+              <a:srgbClr val="B9D7E6"/>
+            </a:solidFill>
+            <a:prstDash val="solid"/>
+          </a:ln>
+        </p:spPr>
+      </p:sp>
+      <p:sp>
+        <p:nvSpPr>
+          <p:cNvPr id="15" name="Text 13"/>
+          <p:cNvSpPr/>
+          <p:nvPr/>
+        </p:nvSpPr>
+        <p:spPr>
+          <a:xfrm>
+            <a:off x="8074152" y="3666744"/>
+            <a:ext cx="2825496" cy="201168"/>
+          </a:xfrm>
+          <a:prstGeom prst="rect">
+            <a:avLst/>
+          </a:prstGeom>
+          <a:noFill/>
+          <a:ln/>
+        </p:spPr>
+        <p:txBody>
+          <a:bodyPr wrap="square" lIns="0" tIns="0" rIns="0" bIns="0" rtlCol="0" anchor="ctr"/>
+          <a:lstStyle/>
+          <a:p>
+            <a:pPr indent="0" marL="0">
+              <a:buNone/>
+            </a:pPr>
+            <a:r>
+              <a:rPr lang="en-US" sz="950" b="1" dirty="0">
+                <a:solidFill>
+                  <a:srgbClr val="0068B7"/>
+                </a:solidFill>
+                <a:latin typeface="Aptos" pitchFamily="34" charset="0"/>
+                <a:ea typeface="Aptos" pitchFamily="34" charset="-122"/>
+                <a:cs typeface="Aptos" pitchFamily="34" charset="-120"/>
+              </a:rPr>
+              <a:t>Use this for</a:t>
+            </a:r>
+            <a:endParaRPr lang="en-US" sz="950" dirty="0"/>
+          </a:p>
+        </p:txBody>
+      </p:sp>
+      <p:sp>
+        <p:nvSpPr>
+          <p:cNvPr id="16" name="Text 14"/>
+          <p:cNvSpPr/>
+          <p:nvPr/>
+        </p:nvSpPr>
+        <p:spPr>
+          <a:xfrm>
+            <a:off x="8074152" y="3959352"/>
+            <a:ext cx="2825496" cy="1170432"/>
+          </a:xfrm>
+          <a:prstGeom prst="rect">
+            <a:avLst/>
+          </a:prstGeom>
+          <a:noFill/>
+          <a:ln/>
+        </p:spPr>
+        <p:txBody>
+          <a:bodyPr wrap="square" lIns="0" tIns="0" rIns="0" bIns="0" rtlCol="0" anchor="t">
+            <a:normAutofit/>
+          </a:bodyPr>
+          <a:lstStyle/>
+          <a:p>
+            <a:pPr indent="0" marL="0">
+              <a:buNone/>
+            </a:pPr>
+            <a:r>
+              <a:rPr lang="en-US" sz="1250" dirty="0">
+                <a:solidFill>
+                  <a:srgbClr val="17364A"/>
+                </a:solidFill>
+                <a:latin typeface="Aptos" pitchFamily="34" charset="0"/>
+                <a:ea typeface="Aptos" pitchFamily="34" charset="-122"/>
+                <a:cs typeface="Aptos" pitchFamily="34" charset="-120"/>
+              </a:rPr>
+              <a:t>Connect the concept to public health decisions, safeguards, documentation, or implementation work.</a:t>
+            </a:r>
+            <a:endParaRPr lang="en-US" sz="1250" dirty="0"/>
           </a:p>
         </p:txBody>
       </p:sp>
@@ -3285,7 +4129,32 @@
       </p:sp>
       <p:sp>
         <p:nvSpPr>
-          <p:cNvPr id="3" name="Text 1"/>
+          <p:cNvPr id="3" name="Shape 1"/>
+          <p:cNvSpPr/>
+          <p:nvPr/>
+        </p:nvSpPr>
+        <p:spPr>
+          <a:xfrm>
+            <a:off x="0" y="164592"/>
+            <a:ext cx="146304" cy="6693408"/>
+          </a:xfrm>
+          <a:prstGeom prst="rect">
+            <a:avLst/>
+          </a:prstGeom>
+          <a:solidFill>
+            <a:srgbClr val="2F8A28"/>
+          </a:solidFill>
+          <a:ln w="12700">
+            <a:solidFill>
+              <a:srgbClr val="2F8A28"/>
+            </a:solidFill>
+            <a:prstDash val="solid"/>
+          </a:ln>
+        </p:spPr>
+      </p:sp>
+      <p:sp>
+        <p:nvSpPr>
+          <p:cNvPr id="4" name="Text 2"/>
           <p:cNvSpPr/>
           <p:nvPr/>
         </p:nvSpPr>
@@ -3324,7 +4193,7 @@
       </p:sp>
       <p:sp>
         <p:nvSpPr>
-          <p:cNvPr id="4" name="Text 2"/>
+          <p:cNvPr id="5" name="Text 3"/>
           <p:cNvSpPr/>
           <p:nvPr/>
         </p:nvSpPr>
@@ -3363,7 +4232,7 @@
       </p:sp>
       <p:sp>
         <p:nvSpPr>
-          <p:cNvPr id="5" name="Text 3"/>
+          <p:cNvPr id="6" name="Text 4"/>
           <p:cNvSpPr/>
           <p:nvPr/>
         </p:nvSpPr>
@@ -3402,13 +4271,77 @@
       </p:sp>
       <p:sp>
         <p:nvSpPr>
-          <p:cNvPr id="6" name="Text 4"/>
+          <p:cNvPr id="7" name="Shape 5"/>
           <p:cNvSpPr/>
           <p:nvPr/>
         </p:nvSpPr>
         <p:spPr>
           <a:xfrm>
             <a:off x="640080" y="658368"/>
+            <a:ext cx="420624" cy="420624"/>
+          </a:xfrm>
+          <a:prstGeom prst="ellipse">
+            <a:avLst/>
+          </a:prstGeom>
+          <a:solidFill>
+            <a:srgbClr val="0068B7"/>
+          </a:solidFill>
+          <a:ln w="12700">
+            <a:solidFill>
+              <a:srgbClr val="0068B7"/>
+            </a:solidFill>
+            <a:prstDash val="solid"/>
+          </a:ln>
+        </p:spPr>
+      </p:sp>
+      <p:sp>
+        <p:nvSpPr>
+          <p:cNvPr id="8" name="Text 6"/>
+          <p:cNvSpPr/>
+          <p:nvPr/>
+        </p:nvSpPr>
+        <p:spPr>
+          <a:xfrm>
+            <a:off x="640080" y="731520"/>
+            <a:ext cx="420624" cy="164592"/>
+          </a:xfrm>
+          <a:prstGeom prst="rect">
+            <a:avLst/>
+          </a:prstGeom>
+          <a:noFill/>
+          <a:ln/>
+        </p:spPr>
+        <p:txBody>
+          <a:bodyPr wrap="square" lIns="0" tIns="0" rIns="0" bIns="0" rtlCol="0" anchor="ctr"/>
+          <a:lstStyle/>
+          <a:p>
+            <a:pPr algn="ctr" indent="0" marL="0">
+              <a:buNone/>
+            </a:pPr>
+            <a:r>
+              <a:rPr lang="en-US" sz="1100" b="1" dirty="0">
+                <a:solidFill>
+                  <a:srgbClr val="FFFFFF"/>
+                </a:solidFill>
+                <a:latin typeface="Aptos" pitchFamily="34" charset="0"/>
+                <a:ea typeface="Aptos" pitchFamily="34" charset="-122"/>
+                <a:cs typeface="Aptos" pitchFamily="34" charset="-120"/>
+              </a:rPr>
+              <a:t>7</a:t>
+            </a:r>
+            <a:endParaRPr lang="en-US" sz="1100" dirty="0"/>
+          </a:p>
+        </p:txBody>
+      </p:sp>
+      <p:sp>
+        <p:nvSpPr>
+          <p:cNvPr id="9" name="Text 7"/>
+          <p:cNvSpPr/>
+          <p:nvPr/>
+        </p:nvSpPr>
+        <p:spPr>
+          <a:xfrm>
+            <a:off x="640080" y="621792"/>
             <a:ext cx="10881360" cy="566928"/>
           </a:xfrm>
           <a:prstGeom prst="rect">
@@ -3435,7 +4368,7 @@
                 <a:ea typeface="Aptos Display" pitchFamily="34" charset="-122"/>
                 <a:cs typeface="Aptos Display" pitchFamily="34" charset="-120"/>
               </a:rPr>
-              <a:t>Application to AI-Supported Workflows</a:t>
+              <a:t>Technical Deep Dive</a:t>
             </a:r>
             <a:endParaRPr lang="en-US" sz="2700" dirty="0"/>
           </a:p>
@@ -3443,32 +4376,178 @@
       </p:sp>
       <p:sp>
         <p:nvSpPr>
-          <p:cNvPr id="7" name="Text 5"/>
-          <p:cNvSpPr/>
-          <p:nvPr/>
-        </p:nvSpPr>
-        <p:spPr>
-          <a:xfrm>
-            <a:off x="822960" y="1325880"/>
-            <a:ext cx="10378440" cy="4800600"/>
-          </a:xfrm>
-          <a:prstGeom prst="rect">
-            <a:avLst/>
-          </a:prstGeom>
-          <a:noFill/>
-          <a:ln/>
-        </p:spPr>
-        <p:txBody>
-          <a:bodyPr wrap="square" lIns="1016" tIns="1016" rIns="1016" bIns="1016" rtlCol="0" anchor="t">
+          <p:cNvPr id="10" name="Text 8"/>
+          <p:cNvSpPr/>
+          <p:nvPr/>
+        </p:nvSpPr>
+        <p:spPr>
+          <a:xfrm>
+            <a:off x="868680" y="1417320"/>
+            <a:ext cx="6675120" cy="4434840"/>
+          </a:xfrm>
+          <a:prstGeom prst="rect">
+            <a:avLst/>
+          </a:prstGeom>
+          <a:noFill/>
+          <a:ln/>
+        </p:spPr>
+        <p:txBody>
+          <a:bodyPr wrap="square" lIns="635" tIns="635" rIns="635" bIns="635" rtlCol="0" anchor="t">
             <a:normAutofit/>
           </a:bodyPr>
           <a:lstStyle/>
           <a:p>
+            <a:r>
+              <a:rPr lang="en-US" sz="1700" dirty="0">
+                <a:solidFill>
+                  <a:srgbClr val="17364A"/>
+                </a:solidFill>
+                <a:latin typeface="Aptos" pitchFamily="34" charset="0"/>
+                <a:ea typeface="Aptos" pitchFamily="34" charset="-122"/>
+                <a:cs typeface="Aptos" pitchFamily="34" charset="-120"/>
+              </a:rPr>
+              <a:t>AI documentation should be created before deployment and maintained after launch.</a:t>
+            </a:r>
+            <a:endParaRPr lang="en-US" sz="1700" dirty="0"/>
+          </a:p>
+          <a:p>
+            <a:r>
+              <a:rPr lang="en-US" sz="1700" dirty="0">
+                <a:solidFill>
+                  <a:srgbClr val="17364A"/>
+                </a:solidFill>
+                <a:latin typeface="Aptos" pitchFamily="34" charset="0"/>
+                <a:ea typeface="Aptos" pitchFamily="34" charset="-122"/>
+                <a:cs typeface="Aptos" pitchFamily="34" charset="-120"/>
+              </a:rPr>
+              <a:t>The documentation should identify the system owner, intended users, data inputs, outputs, human review requirements,.</a:t>
+            </a:r>
+            <a:endParaRPr lang="en-US" sz="1700" dirty="0"/>
+          </a:p>
+          <a:p>
+            <a:r>
+              <a:rPr lang="en-US" sz="1700" dirty="0">
+                <a:solidFill>
+                  <a:srgbClr val="17364A"/>
+                </a:solidFill>
+                <a:latin typeface="Aptos" pitchFamily="34" charset="0"/>
+                <a:ea typeface="Aptos" pitchFamily="34" charset="-122"/>
+                <a:cs typeface="Aptos" pitchFamily="34" charset="-120"/>
+              </a:rPr>
+              <a:t>A document that is created once and never updated will not support responsible operations.</a:t>
+            </a:r>
+            <a:endParaRPr lang="en-US" sz="1700" dirty="0"/>
+          </a:p>
+          <a:p>
+            <a:r>
+              <a:rPr lang="en-US" sz="1700" dirty="0">
+                <a:solidFill>
+                  <a:srgbClr val="17364A"/>
+                </a:solidFill>
+                <a:latin typeface="Aptos" pitchFamily="34" charset="0"/>
+                <a:ea typeface="Aptos" pitchFamily="34" charset="-122"/>
+                <a:cs typeface="Aptos" pitchFamily="34" charset="-120"/>
+              </a:rPr>
+              <a:t>Model cards are especially useful for predictive or classification models because they can document training data,.</a:t>
+            </a:r>
+            <a:endParaRPr lang="en-US" sz="1700" dirty="0"/>
+          </a:p>
+        </p:txBody>
+      </p:sp>
+      <p:sp>
+        <p:nvSpPr>
+          <p:cNvPr id="11" name="Shape 9"/>
+          <p:cNvSpPr/>
+          <p:nvPr/>
+        </p:nvSpPr>
+        <p:spPr>
+          <a:xfrm>
+            <a:off x="7909560" y="1417320"/>
+            <a:ext cx="3154680" cy="1828800"/>
+          </a:xfrm>
+          <a:prstGeom prst="roundRect">
+            <a:avLst>
+              <a:gd name="adj" fmla="val 6000"/>
+            </a:avLst>
+          </a:prstGeom>
+          <a:solidFill>
+            <a:srgbClr val="EEF8ED"/>
+          </a:solidFill>
+          <a:ln w="12700">
+            <a:solidFill>
+              <a:srgbClr val="B9D7E6"/>
+            </a:solidFill>
+            <a:prstDash val="solid"/>
+          </a:ln>
+        </p:spPr>
+      </p:sp>
+      <p:sp>
+        <p:nvSpPr>
+          <p:cNvPr id="12" name="Text 10"/>
+          <p:cNvSpPr/>
+          <p:nvPr/>
+        </p:nvSpPr>
+        <p:spPr>
+          <a:xfrm>
+            <a:off x="8074152" y="1563624"/>
+            <a:ext cx="2825496" cy="201168"/>
+          </a:xfrm>
+          <a:prstGeom prst="rect">
+            <a:avLst/>
+          </a:prstGeom>
+          <a:noFill/>
+          <a:ln/>
+        </p:spPr>
+        <p:txBody>
+          <a:bodyPr wrap="square" lIns="0" tIns="0" rIns="0" bIns="0" rtlCol="0" anchor="ctr"/>
+          <a:lstStyle/>
+          <a:p>
             <a:pPr indent="0" marL="0">
               <a:buNone/>
             </a:pPr>
             <a:r>
-              <a:rPr lang="en-US" sz="1420" dirty="0">
+              <a:rPr lang="en-US" sz="950" b="1" dirty="0">
+                <a:solidFill>
+                  <a:srgbClr val="0068B7"/>
+                </a:solidFill>
+                <a:latin typeface="Aptos" pitchFamily="34" charset="0"/>
+                <a:ea typeface="Aptos" pitchFamily="34" charset="-122"/>
+                <a:cs typeface="Aptos" pitchFamily="34" charset="-120"/>
+              </a:rPr>
+              <a:t>Key idea</a:t>
+            </a:r>
+            <a:endParaRPr lang="en-US" sz="950" dirty="0"/>
+          </a:p>
+        </p:txBody>
+      </p:sp>
+      <p:sp>
+        <p:nvSpPr>
+          <p:cNvPr id="13" name="Text 11"/>
+          <p:cNvSpPr/>
+          <p:nvPr/>
+        </p:nvSpPr>
+        <p:spPr>
+          <a:xfrm>
+            <a:off x="8074152" y="1856232"/>
+            <a:ext cx="2825496" cy="1261872"/>
+          </a:xfrm>
+          <a:prstGeom prst="rect">
+            <a:avLst/>
+          </a:prstGeom>
+          <a:noFill/>
+          <a:ln/>
+        </p:spPr>
+        <p:txBody>
+          <a:bodyPr wrap="square" lIns="0" tIns="0" rIns="0" bIns="0" rtlCol="0" anchor="t">
+            <a:normAutofit/>
+          </a:bodyPr>
+          <a:lstStyle/>
+          <a:p>
+            <a:pPr indent="0" marL="0">
+              <a:buNone/>
+            </a:pPr>
+            <a:r>
+              <a:rPr lang="en-US" sz="1250" dirty="0">
                 <a:solidFill>
                   <a:srgbClr val="17364A"/>
                 </a:solidFill>
@@ -3476,9 +4555,116 @@
                 <a:ea typeface="Aptos" pitchFamily="34" charset="-122"/>
                 <a:cs typeface="Aptos" pitchFamily="34" charset="-120"/>
               </a:rPr>
-              <a:t>Generative AI, predictive analytics, RAG, automation, and agentic workflows all depend on the controls described in this module. The controls should be scaled to the risk of the use case. A tool that drafts internal training text may require lighter review than a tool that updates case records, prioritizes outreach, or supports public communication during an emergency. The module should be applied during readiness assessment, procurement, implementation planning, pilot testing, and post-deployment monitoring. Learners should document how the topic affects data, systems, users, safeguards, and decision-making for the selected workflow.</a:t>
-            </a:r>
-            <a:endParaRPr lang="en-US" sz="1420" dirty="0"/>
+              <a:t>AI documentation should be created before deployment and maintained after launch.</a:t>
+            </a:r>
+            <a:endParaRPr lang="en-US" sz="1250" dirty="0"/>
+          </a:p>
+        </p:txBody>
+      </p:sp>
+      <p:sp>
+        <p:nvSpPr>
+          <p:cNvPr id="14" name="Shape 12"/>
+          <p:cNvSpPr/>
+          <p:nvPr/>
+        </p:nvSpPr>
+        <p:spPr>
+          <a:xfrm>
+            <a:off x="7909560" y="3520440"/>
+            <a:ext cx="3154680" cy="1737360"/>
+          </a:xfrm>
+          <a:prstGeom prst="roundRect">
+            <a:avLst>
+              <a:gd name="adj" fmla="val 6316"/>
+            </a:avLst>
+          </a:prstGeom>
+          <a:solidFill>
+            <a:srgbClr val="EAF6F8"/>
+          </a:solidFill>
+          <a:ln w="12700">
+            <a:solidFill>
+              <a:srgbClr val="B9D7E6"/>
+            </a:solidFill>
+            <a:prstDash val="solid"/>
+          </a:ln>
+        </p:spPr>
+      </p:sp>
+      <p:sp>
+        <p:nvSpPr>
+          <p:cNvPr id="15" name="Text 13"/>
+          <p:cNvSpPr/>
+          <p:nvPr/>
+        </p:nvSpPr>
+        <p:spPr>
+          <a:xfrm>
+            <a:off x="8074152" y="3666744"/>
+            <a:ext cx="2825496" cy="201168"/>
+          </a:xfrm>
+          <a:prstGeom prst="rect">
+            <a:avLst/>
+          </a:prstGeom>
+          <a:noFill/>
+          <a:ln/>
+        </p:spPr>
+        <p:txBody>
+          <a:bodyPr wrap="square" lIns="0" tIns="0" rIns="0" bIns="0" rtlCol="0" anchor="ctr"/>
+          <a:lstStyle/>
+          <a:p>
+            <a:pPr indent="0" marL="0">
+              <a:buNone/>
+            </a:pPr>
+            <a:r>
+              <a:rPr lang="en-US" sz="950" b="1" dirty="0">
+                <a:solidFill>
+                  <a:srgbClr val="0068B7"/>
+                </a:solidFill>
+                <a:latin typeface="Aptos" pitchFamily="34" charset="0"/>
+                <a:ea typeface="Aptos" pitchFamily="34" charset="-122"/>
+                <a:cs typeface="Aptos" pitchFamily="34" charset="-120"/>
+              </a:rPr>
+              <a:t>Use this for</a:t>
+            </a:r>
+            <a:endParaRPr lang="en-US" sz="950" dirty="0"/>
+          </a:p>
+        </p:txBody>
+      </p:sp>
+      <p:sp>
+        <p:nvSpPr>
+          <p:cNvPr id="16" name="Text 14"/>
+          <p:cNvSpPr/>
+          <p:nvPr/>
+        </p:nvSpPr>
+        <p:spPr>
+          <a:xfrm>
+            <a:off x="8074152" y="3959352"/>
+            <a:ext cx="2825496" cy="1170432"/>
+          </a:xfrm>
+          <a:prstGeom prst="rect">
+            <a:avLst/>
+          </a:prstGeom>
+          <a:noFill/>
+          <a:ln/>
+        </p:spPr>
+        <p:txBody>
+          <a:bodyPr wrap="square" lIns="0" tIns="0" rIns="0" bIns="0" rtlCol="0" anchor="t">
+            <a:normAutofit/>
+          </a:bodyPr>
+          <a:lstStyle/>
+          <a:p>
+            <a:pPr indent="0" marL="0">
+              <a:buNone/>
+            </a:pPr>
+            <a:r>
+              <a:rPr lang="en-US" sz="1250" dirty="0">
+                <a:solidFill>
+                  <a:srgbClr val="17364A"/>
+                </a:solidFill>
+                <a:latin typeface="Aptos" pitchFamily="34" charset="0"/>
+                <a:ea typeface="Aptos" pitchFamily="34" charset="-122"/>
+                <a:cs typeface="Aptos" pitchFamily="34" charset="-120"/>
+              </a:rPr>
+              <a:t>Connect the concept to public health decisions, safeguards, documentation, or implementation work.</a:t>
+            </a:r>
+            <a:endParaRPr lang="en-US" sz="1250" dirty="0"/>
           </a:p>
         </p:txBody>
       </p:sp>
@@ -3541,7 +4727,32 @@
       </p:sp>
       <p:sp>
         <p:nvSpPr>
-          <p:cNvPr id="3" name="Text 1"/>
+          <p:cNvPr id="3" name="Shape 1"/>
+          <p:cNvSpPr/>
+          <p:nvPr/>
+        </p:nvSpPr>
+        <p:spPr>
+          <a:xfrm>
+            <a:off x="0" y="164592"/>
+            <a:ext cx="146304" cy="6693408"/>
+          </a:xfrm>
+          <a:prstGeom prst="rect">
+            <a:avLst/>
+          </a:prstGeom>
+          <a:solidFill>
+            <a:srgbClr val="2F8A28"/>
+          </a:solidFill>
+          <a:ln w="12700">
+            <a:solidFill>
+              <a:srgbClr val="2F8A28"/>
+            </a:solidFill>
+            <a:prstDash val="solid"/>
+          </a:ln>
+        </p:spPr>
+      </p:sp>
+      <p:sp>
+        <p:nvSpPr>
+          <p:cNvPr id="4" name="Text 2"/>
           <p:cNvSpPr/>
           <p:nvPr/>
         </p:nvSpPr>
@@ -3580,7 +4791,7 @@
       </p:sp>
       <p:sp>
         <p:nvSpPr>
-          <p:cNvPr id="4" name="Text 2"/>
+          <p:cNvPr id="5" name="Text 3"/>
           <p:cNvSpPr/>
           <p:nvPr/>
         </p:nvSpPr>
@@ -3619,7 +4830,7 @@
       </p:sp>
       <p:sp>
         <p:nvSpPr>
-          <p:cNvPr id="5" name="Text 3"/>
+          <p:cNvPr id="6" name="Text 4"/>
           <p:cNvSpPr/>
           <p:nvPr/>
         </p:nvSpPr>
@@ -3658,13 +4869,77 @@
       </p:sp>
       <p:sp>
         <p:nvSpPr>
-          <p:cNvPr id="6" name="Text 4"/>
+          <p:cNvPr id="7" name="Shape 5"/>
           <p:cNvSpPr/>
           <p:nvPr/>
         </p:nvSpPr>
         <p:spPr>
           <a:xfrm>
             <a:off x="640080" y="658368"/>
+            <a:ext cx="420624" cy="420624"/>
+          </a:xfrm>
+          <a:prstGeom prst="ellipse">
+            <a:avLst/>
+          </a:prstGeom>
+          <a:solidFill>
+            <a:srgbClr val="0068B7"/>
+          </a:solidFill>
+          <a:ln w="12700">
+            <a:solidFill>
+              <a:srgbClr val="0068B7"/>
+            </a:solidFill>
+            <a:prstDash val="solid"/>
+          </a:ln>
+        </p:spPr>
+      </p:sp>
+      <p:sp>
+        <p:nvSpPr>
+          <p:cNvPr id="8" name="Text 6"/>
+          <p:cNvSpPr/>
+          <p:nvPr/>
+        </p:nvSpPr>
+        <p:spPr>
+          <a:xfrm>
+            <a:off x="640080" y="731520"/>
+            <a:ext cx="420624" cy="164592"/>
+          </a:xfrm>
+          <a:prstGeom prst="rect">
+            <a:avLst/>
+          </a:prstGeom>
+          <a:noFill/>
+          <a:ln/>
+        </p:spPr>
+        <p:txBody>
+          <a:bodyPr wrap="square" lIns="0" tIns="0" rIns="0" bIns="0" rtlCol="0" anchor="ctr"/>
+          <a:lstStyle/>
+          <a:p>
+            <a:pPr algn="ctr" indent="0" marL="0">
+              <a:buNone/>
+            </a:pPr>
+            <a:r>
+              <a:rPr lang="en-US" sz="1100" b="1" dirty="0">
+                <a:solidFill>
+                  <a:srgbClr val="FFFFFF"/>
+                </a:solidFill>
+                <a:latin typeface="Aptos" pitchFamily="34" charset="0"/>
+                <a:ea typeface="Aptos" pitchFamily="34" charset="-122"/>
+                <a:cs typeface="Aptos" pitchFamily="34" charset="-120"/>
+              </a:rPr>
+              <a:t>8</a:t>
+            </a:r>
+            <a:endParaRPr lang="en-US" sz="1100" dirty="0"/>
+          </a:p>
+        </p:txBody>
+      </p:sp>
+      <p:sp>
+        <p:nvSpPr>
+          <p:cNvPr id="9" name="Text 7"/>
+          <p:cNvSpPr/>
+          <p:nvPr/>
+        </p:nvSpPr>
+        <p:spPr>
+          <a:xfrm>
+            <a:off x="640080" y="621792"/>
             <a:ext cx="10881360" cy="566928"/>
           </a:xfrm>
           <a:prstGeom prst="rect">
@@ -3691,7 +4966,7 @@
                 <a:ea typeface="Aptos Display" pitchFamily="34" charset="-122"/>
                 <a:cs typeface="Aptos Display" pitchFamily="34" charset="-120"/>
               </a:rPr>
-              <a:t>Reflection Questions</a:t>
+              <a:t>Risks, Failure Modes, and Guardrails</a:t>
             </a:r>
             <a:endParaRPr lang="en-US" sz="2700" dirty="0"/>
           </a:p>
@@ -3699,32 +4974,178 @@
       </p:sp>
       <p:sp>
         <p:nvSpPr>
-          <p:cNvPr id="7" name="Text 5"/>
-          <p:cNvSpPr/>
-          <p:nvPr/>
-        </p:nvSpPr>
-        <p:spPr>
-          <a:xfrm>
-            <a:off x="822960" y="1325880"/>
-            <a:ext cx="10378440" cy="4800600"/>
-          </a:xfrm>
-          <a:prstGeom prst="rect">
-            <a:avLst/>
-          </a:prstGeom>
-          <a:noFill/>
-          <a:ln/>
-        </p:spPr>
-        <p:txBody>
-          <a:bodyPr wrap="square" lIns="1016" tIns="1016" rIns="1016" bIns="1016" rtlCol="0" anchor="t">
+          <p:cNvPr id="10" name="Text 8"/>
+          <p:cNvSpPr/>
+          <p:nvPr/>
+        </p:nvSpPr>
+        <p:spPr>
+          <a:xfrm>
+            <a:off x="868680" y="1417320"/>
+            <a:ext cx="6675120" cy="4434840"/>
+          </a:xfrm>
+          <a:prstGeom prst="rect">
+            <a:avLst/>
+          </a:prstGeom>
+          <a:noFill/>
+          <a:ln/>
+        </p:spPr>
+        <p:txBody>
+          <a:bodyPr wrap="square" lIns="635" tIns="635" rIns="635" bIns="635" rtlCol="0" anchor="t">
             <a:normAutofit/>
           </a:bodyPr>
           <a:lstStyle/>
           <a:p>
+            <a:r>
+              <a:rPr lang="en-US" sz="1700" dirty="0">
+                <a:solidFill>
+                  <a:srgbClr val="17364A"/>
+                </a:solidFill>
+                <a:latin typeface="Aptos" pitchFamily="34" charset="0"/>
+                <a:ea typeface="Aptos" pitchFamily="34" charset="-122"/>
+                <a:cs typeface="Aptos" pitchFamily="34" charset="-120"/>
+              </a:rPr>
+              <a:t>A common failure mode is treating the topic as a technical detail rather than a public health control.</a:t>
+            </a:r>
+            <a:endParaRPr lang="en-US" sz="1700" dirty="0"/>
+          </a:p>
+          <a:p>
+            <a:r>
+              <a:rPr lang="en-US" sz="1700" dirty="0">
+                <a:solidFill>
+                  <a:srgbClr val="17364A"/>
+                </a:solidFill>
+                <a:latin typeface="Aptos" pitchFamily="34" charset="0"/>
+                <a:ea typeface="Aptos" pitchFamily="34" charset="-122"/>
+                <a:cs typeface="Aptos" pitchFamily="34" charset="-120"/>
+              </a:rPr>
+              <a:t>When staff do not connect technical decisions to authority, workflow, equity, privacy, security, and accountability, the.</a:t>
+            </a:r>
+            <a:endParaRPr lang="en-US" sz="1700" dirty="0"/>
+          </a:p>
+          <a:p>
+            <a:r>
+              <a:rPr lang="en-US" sz="1700" dirty="0">
+                <a:solidFill>
+                  <a:srgbClr val="17364A"/>
+                </a:solidFill>
+                <a:latin typeface="Aptos" pitchFamily="34" charset="0"/>
+                <a:ea typeface="Aptos" pitchFamily="34" charset="-122"/>
+                <a:cs typeface="Aptos" pitchFamily="34" charset="-120"/>
+              </a:rPr>
+              <a:t>Another risk is relying on vendor claims without agency-defined evidence.</a:t>
+            </a:r>
+            <a:endParaRPr lang="en-US" sz="1700" dirty="0"/>
+          </a:p>
+          <a:p>
+            <a:r>
+              <a:rPr lang="en-US" sz="1700" dirty="0">
+                <a:solidFill>
+                  <a:srgbClr val="17364A"/>
+                </a:solidFill>
+                <a:latin typeface="Aptos" pitchFamily="34" charset="0"/>
+                <a:ea typeface="Aptos" pitchFamily="34" charset="-122"/>
+                <a:cs typeface="Aptos" pitchFamily="34" charset="-120"/>
+              </a:rPr>
+              <a:t>Vendors may provide demonstrations, dashboards, or summary metrics that do not match the agency workflow or data environment.</a:t>
+            </a:r>
+            <a:endParaRPr lang="en-US" sz="1700" dirty="0"/>
+          </a:p>
+        </p:txBody>
+      </p:sp>
+      <p:sp>
+        <p:nvSpPr>
+          <p:cNvPr id="11" name="Shape 9"/>
+          <p:cNvSpPr/>
+          <p:nvPr/>
+        </p:nvSpPr>
+        <p:spPr>
+          <a:xfrm>
+            <a:off x="7909560" y="1417320"/>
+            <a:ext cx="3154680" cy="1828800"/>
+          </a:xfrm>
+          <a:prstGeom prst="roundRect">
+            <a:avLst>
+              <a:gd name="adj" fmla="val 6000"/>
+            </a:avLst>
+          </a:prstGeom>
+          <a:solidFill>
+            <a:srgbClr val="EEF8ED"/>
+          </a:solidFill>
+          <a:ln w="12700">
+            <a:solidFill>
+              <a:srgbClr val="B9D7E6"/>
+            </a:solidFill>
+            <a:prstDash val="solid"/>
+          </a:ln>
+        </p:spPr>
+      </p:sp>
+      <p:sp>
+        <p:nvSpPr>
+          <p:cNvPr id="12" name="Text 10"/>
+          <p:cNvSpPr/>
+          <p:nvPr/>
+        </p:nvSpPr>
+        <p:spPr>
+          <a:xfrm>
+            <a:off x="8074152" y="1563624"/>
+            <a:ext cx="2825496" cy="201168"/>
+          </a:xfrm>
+          <a:prstGeom prst="rect">
+            <a:avLst/>
+          </a:prstGeom>
+          <a:noFill/>
+          <a:ln/>
+        </p:spPr>
+        <p:txBody>
+          <a:bodyPr wrap="square" lIns="0" tIns="0" rIns="0" bIns="0" rtlCol="0" anchor="ctr"/>
+          <a:lstStyle/>
+          <a:p>
             <a:pPr indent="0" marL="0">
               <a:buNone/>
             </a:pPr>
             <a:r>
-              <a:rPr lang="en-US" sz="1420" dirty="0">
+              <a:rPr lang="en-US" sz="950" b="1" dirty="0">
+                <a:solidFill>
+                  <a:srgbClr val="0068B7"/>
+                </a:solidFill>
+                <a:latin typeface="Aptos" pitchFamily="34" charset="0"/>
+                <a:ea typeface="Aptos" pitchFamily="34" charset="-122"/>
+                <a:cs typeface="Aptos" pitchFamily="34" charset="-120"/>
+              </a:rPr>
+              <a:t>Key idea</a:t>
+            </a:r>
+            <a:endParaRPr lang="en-US" sz="950" dirty="0"/>
+          </a:p>
+        </p:txBody>
+      </p:sp>
+      <p:sp>
+        <p:nvSpPr>
+          <p:cNvPr id="13" name="Text 11"/>
+          <p:cNvSpPr/>
+          <p:nvPr/>
+        </p:nvSpPr>
+        <p:spPr>
+          <a:xfrm>
+            <a:off x="8074152" y="1856232"/>
+            <a:ext cx="2825496" cy="1261872"/>
+          </a:xfrm>
+          <a:prstGeom prst="rect">
+            <a:avLst/>
+          </a:prstGeom>
+          <a:noFill/>
+          <a:ln/>
+        </p:spPr>
+        <p:txBody>
+          <a:bodyPr wrap="square" lIns="0" tIns="0" rIns="0" bIns="0" rtlCol="0" anchor="t">
+            <a:normAutofit/>
+          </a:bodyPr>
+          <a:lstStyle/>
+          <a:p>
+            <a:pPr indent="0" marL="0">
+              <a:buNone/>
+            </a:pPr>
+            <a:r>
+              <a:rPr lang="en-US" sz="1250" dirty="0">
                 <a:solidFill>
                   <a:srgbClr val="17364A"/>
                 </a:solidFill>
@@ -3732,9 +5153,116 @@
                 <a:ea typeface="Aptos" pitchFamily="34" charset="-122"/>
                 <a:cs typeface="Aptos" pitchFamily="34" charset="-120"/>
               </a:rPr>
-              <a:t>Where does this topic appear in one current or proposed AI workflow in your agency? What decisions, data sources, users, or partners would be affected if this area is poorly designed? What evidence would governance reviewers need before approving the workflow?</a:t>
-            </a:r>
-            <a:endParaRPr lang="en-US" sz="1420" dirty="0"/>
+              <a:t>A common failure mode is treating the topic as a technical detail rather than a public health control.</a:t>
+            </a:r>
+            <a:endParaRPr lang="en-US" sz="1250" dirty="0"/>
+          </a:p>
+        </p:txBody>
+      </p:sp>
+      <p:sp>
+        <p:nvSpPr>
+          <p:cNvPr id="14" name="Shape 12"/>
+          <p:cNvSpPr/>
+          <p:nvPr/>
+        </p:nvSpPr>
+        <p:spPr>
+          <a:xfrm>
+            <a:off x="7909560" y="3520440"/>
+            <a:ext cx="3154680" cy="1737360"/>
+          </a:xfrm>
+          <a:prstGeom prst="roundRect">
+            <a:avLst>
+              <a:gd name="adj" fmla="val 6316"/>
+            </a:avLst>
+          </a:prstGeom>
+          <a:solidFill>
+            <a:srgbClr val="EAF6F8"/>
+          </a:solidFill>
+          <a:ln w="12700">
+            <a:solidFill>
+              <a:srgbClr val="B9D7E6"/>
+            </a:solidFill>
+            <a:prstDash val="solid"/>
+          </a:ln>
+        </p:spPr>
+      </p:sp>
+      <p:sp>
+        <p:nvSpPr>
+          <p:cNvPr id="15" name="Text 13"/>
+          <p:cNvSpPr/>
+          <p:nvPr/>
+        </p:nvSpPr>
+        <p:spPr>
+          <a:xfrm>
+            <a:off x="8074152" y="3666744"/>
+            <a:ext cx="2825496" cy="201168"/>
+          </a:xfrm>
+          <a:prstGeom prst="rect">
+            <a:avLst/>
+          </a:prstGeom>
+          <a:noFill/>
+          <a:ln/>
+        </p:spPr>
+        <p:txBody>
+          <a:bodyPr wrap="square" lIns="0" tIns="0" rIns="0" bIns="0" rtlCol="0" anchor="ctr"/>
+          <a:lstStyle/>
+          <a:p>
+            <a:pPr indent="0" marL="0">
+              <a:buNone/>
+            </a:pPr>
+            <a:r>
+              <a:rPr lang="en-US" sz="950" b="1" dirty="0">
+                <a:solidFill>
+                  <a:srgbClr val="0068B7"/>
+                </a:solidFill>
+                <a:latin typeface="Aptos" pitchFamily="34" charset="0"/>
+                <a:ea typeface="Aptos" pitchFamily="34" charset="-122"/>
+                <a:cs typeface="Aptos" pitchFamily="34" charset="-120"/>
+              </a:rPr>
+              <a:t>Use this for</a:t>
+            </a:r>
+            <a:endParaRPr lang="en-US" sz="950" dirty="0"/>
+          </a:p>
+        </p:txBody>
+      </p:sp>
+      <p:sp>
+        <p:nvSpPr>
+          <p:cNvPr id="16" name="Text 14"/>
+          <p:cNvSpPr/>
+          <p:nvPr/>
+        </p:nvSpPr>
+        <p:spPr>
+          <a:xfrm>
+            <a:off x="8074152" y="3959352"/>
+            <a:ext cx="2825496" cy="1170432"/>
+          </a:xfrm>
+          <a:prstGeom prst="rect">
+            <a:avLst/>
+          </a:prstGeom>
+          <a:noFill/>
+          <a:ln/>
+        </p:spPr>
+        <p:txBody>
+          <a:bodyPr wrap="square" lIns="0" tIns="0" rIns="0" bIns="0" rtlCol="0" anchor="t">
+            <a:normAutofit/>
+          </a:bodyPr>
+          <a:lstStyle/>
+          <a:p>
+            <a:pPr indent="0" marL="0">
+              <a:buNone/>
+            </a:pPr>
+            <a:r>
+              <a:rPr lang="en-US" sz="1250" dirty="0">
+                <a:solidFill>
+                  <a:srgbClr val="17364A"/>
+                </a:solidFill>
+                <a:latin typeface="Aptos" pitchFamily="34" charset="0"/>
+                <a:ea typeface="Aptos" pitchFamily="34" charset="-122"/>
+                <a:cs typeface="Aptos" pitchFamily="34" charset="-120"/>
+              </a:rPr>
+              <a:t>Connect the concept to public health decisions, safeguards, documentation, or implementation work.</a:t>
+            </a:r>
+            <a:endParaRPr lang="en-US" sz="1250" dirty="0"/>
           </a:p>
         </p:txBody>
       </p:sp>
@@ -3797,7 +5325,32 @@
       </p:sp>
       <p:sp>
         <p:nvSpPr>
-          <p:cNvPr id="3" name="Text 1"/>
+          <p:cNvPr id="3" name="Shape 1"/>
+          <p:cNvSpPr/>
+          <p:nvPr/>
+        </p:nvSpPr>
+        <p:spPr>
+          <a:xfrm>
+            <a:off x="0" y="164592"/>
+            <a:ext cx="146304" cy="6693408"/>
+          </a:xfrm>
+          <a:prstGeom prst="rect">
+            <a:avLst/>
+          </a:prstGeom>
+          <a:solidFill>
+            <a:srgbClr val="2F8A28"/>
+          </a:solidFill>
+          <a:ln w="12700">
+            <a:solidFill>
+              <a:srgbClr val="2F8A28"/>
+            </a:solidFill>
+            <a:prstDash val="solid"/>
+          </a:ln>
+        </p:spPr>
+      </p:sp>
+      <p:sp>
+        <p:nvSpPr>
+          <p:cNvPr id="4" name="Text 2"/>
           <p:cNvSpPr/>
           <p:nvPr/>
         </p:nvSpPr>
@@ -3836,7 +5389,7 @@
       </p:sp>
       <p:sp>
         <p:nvSpPr>
-          <p:cNvPr id="4" name="Text 2"/>
+          <p:cNvPr id="5" name="Text 3"/>
           <p:cNvSpPr/>
           <p:nvPr/>
         </p:nvSpPr>
@@ -3875,7 +5428,7 @@
       </p:sp>
       <p:sp>
         <p:nvSpPr>
-          <p:cNvPr id="5" name="Text 3"/>
+          <p:cNvPr id="6" name="Text 4"/>
           <p:cNvSpPr/>
           <p:nvPr/>
         </p:nvSpPr>
@@ -3914,13 +5467,77 @@
       </p:sp>
       <p:sp>
         <p:nvSpPr>
-          <p:cNvPr id="6" name="Text 4"/>
+          <p:cNvPr id="7" name="Shape 5"/>
           <p:cNvSpPr/>
           <p:nvPr/>
         </p:nvSpPr>
         <p:spPr>
           <a:xfrm>
             <a:off x="640080" y="658368"/>
+            <a:ext cx="420624" cy="420624"/>
+          </a:xfrm>
+          <a:prstGeom prst="ellipse">
+            <a:avLst/>
+          </a:prstGeom>
+          <a:solidFill>
+            <a:srgbClr val="0068B7"/>
+          </a:solidFill>
+          <a:ln w="12700">
+            <a:solidFill>
+              <a:srgbClr val="0068B7"/>
+            </a:solidFill>
+            <a:prstDash val="solid"/>
+          </a:ln>
+        </p:spPr>
+      </p:sp>
+      <p:sp>
+        <p:nvSpPr>
+          <p:cNvPr id="8" name="Text 6"/>
+          <p:cNvSpPr/>
+          <p:nvPr/>
+        </p:nvSpPr>
+        <p:spPr>
+          <a:xfrm>
+            <a:off x="640080" y="731520"/>
+            <a:ext cx="420624" cy="164592"/>
+          </a:xfrm>
+          <a:prstGeom prst="rect">
+            <a:avLst/>
+          </a:prstGeom>
+          <a:noFill/>
+          <a:ln/>
+        </p:spPr>
+        <p:txBody>
+          <a:bodyPr wrap="square" lIns="0" tIns="0" rIns="0" bIns="0" rtlCol="0" anchor="ctr"/>
+          <a:lstStyle/>
+          <a:p>
+            <a:pPr algn="ctr" indent="0" marL="0">
+              <a:buNone/>
+            </a:pPr>
+            <a:r>
+              <a:rPr lang="en-US" sz="1100" b="1" dirty="0">
+                <a:solidFill>
+                  <a:srgbClr val="FFFFFF"/>
+                </a:solidFill>
+                <a:latin typeface="Aptos" pitchFamily="34" charset="0"/>
+                <a:ea typeface="Aptos" pitchFamily="34" charset="-122"/>
+                <a:cs typeface="Aptos" pitchFamily="34" charset="-120"/>
+              </a:rPr>
+              <a:t>9</a:t>
+            </a:r>
+            <a:endParaRPr lang="en-US" sz="1100" dirty="0"/>
+          </a:p>
+        </p:txBody>
+      </p:sp>
+      <p:sp>
+        <p:nvSpPr>
+          <p:cNvPr id="9" name="Text 7"/>
+          <p:cNvSpPr/>
+          <p:nvPr/>
+        </p:nvSpPr>
+        <p:spPr>
+          <a:xfrm>
+            <a:off x="640080" y="621792"/>
             <a:ext cx="10881360" cy="566928"/>
           </a:xfrm>
           <a:prstGeom prst="rect">
@@ -3947,7 +5564,7 @@
                 <a:ea typeface="Aptos Display" pitchFamily="34" charset="-122"/>
                 <a:cs typeface="Aptos Display" pitchFamily="34" charset="-120"/>
               </a:rPr>
-              <a:t>Reflection Questions Continued</a:t>
+              <a:t>Application to AI-Supported Workflows</a:t>
             </a:r>
             <a:endParaRPr lang="en-US" sz="2700" dirty="0"/>
           </a:p>
@@ -3955,32 +5572,178 @@
       </p:sp>
       <p:sp>
         <p:nvSpPr>
-          <p:cNvPr id="7" name="Text 5"/>
-          <p:cNvSpPr/>
-          <p:nvPr/>
-        </p:nvSpPr>
-        <p:spPr>
-          <a:xfrm>
-            <a:off x="822960" y="1325880"/>
-            <a:ext cx="10378440" cy="4800600"/>
-          </a:xfrm>
-          <a:prstGeom prst="rect">
-            <a:avLst/>
-          </a:prstGeom>
-          <a:noFill/>
-          <a:ln/>
-        </p:spPr>
-        <p:txBody>
-          <a:bodyPr wrap="square" lIns="1016" tIns="1016" rIns="1016" bIns="1016" rtlCol="0" anchor="t">
+          <p:cNvPr id="10" name="Text 8"/>
+          <p:cNvSpPr/>
+          <p:nvPr/>
+        </p:nvSpPr>
+        <p:spPr>
+          <a:xfrm>
+            <a:off x="868680" y="1417320"/>
+            <a:ext cx="6675120" cy="4434840"/>
+          </a:xfrm>
+          <a:prstGeom prst="rect">
+            <a:avLst/>
+          </a:prstGeom>
+          <a:noFill/>
+          <a:ln/>
+        </p:spPr>
+        <p:txBody>
+          <a:bodyPr wrap="square" lIns="635" tIns="635" rIns="635" bIns="635" rtlCol="0" anchor="t">
             <a:normAutofit/>
           </a:bodyPr>
           <a:lstStyle/>
           <a:p>
+            <a:r>
+              <a:rPr lang="en-US" sz="1700" dirty="0">
+                <a:solidFill>
+                  <a:srgbClr val="17364A"/>
+                </a:solidFill>
+                <a:latin typeface="Aptos" pitchFamily="34" charset="0"/>
+                <a:ea typeface="Aptos" pitchFamily="34" charset="-122"/>
+                <a:cs typeface="Aptos" pitchFamily="34" charset="-120"/>
+              </a:rPr>
+              <a:t>Generative AI, predictive analytics, RAG, automation, and agentic workflows all depend on the controls described in this.</a:t>
+            </a:r>
+            <a:endParaRPr lang="en-US" sz="1700" dirty="0"/>
+          </a:p>
+          <a:p>
+            <a:r>
+              <a:rPr lang="en-US" sz="1700" dirty="0">
+                <a:solidFill>
+                  <a:srgbClr val="17364A"/>
+                </a:solidFill>
+                <a:latin typeface="Aptos" pitchFamily="34" charset="0"/>
+                <a:ea typeface="Aptos" pitchFamily="34" charset="-122"/>
+                <a:cs typeface="Aptos" pitchFamily="34" charset="-120"/>
+              </a:rPr>
+              <a:t>The controls should be scaled to the risk of the use case.</a:t>
+            </a:r>
+            <a:endParaRPr lang="en-US" sz="1700" dirty="0"/>
+          </a:p>
+          <a:p>
+            <a:r>
+              <a:rPr lang="en-US" sz="1700" dirty="0">
+                <a:solidFill>
+                  <a:srgbClr val="17364A"/>
+                </a:solidFill>
+                <a:latin typeface="Aptos" pitchFamily="34" charset="0"/>
+                <a:ea typeface="Aptos" pitchFamily="34" charset="-122"/>
+                <a:cs typeface="Aptos" pitchFamily="34" charset="-120"/>
+              </a:rPr>
+              <a:t>A tool that drafts internal training text may require lighter review than a tool that updates case records, prioritizes.</a:t>
+            </a:r>
+            <a:endParaRPr lang="en-US" sz="1700" dirty="0"/>
+          </a:p>
+          <a:p>
+            <a:r>
+              <a:rPr lang="en-US" sz="1700" dirty="0">
+                <a:solidFill>
+                  <a:srgbClr val="17364A"/>
+                </a:solidFill>
+                <a:latin typeface="Aptos" pitchFamily="34" charset="0"/>
+                <a:ea typeface="Aptos" pitchFamily="34" charset="-122"/>
+                <a:cs typeface="Aptos" pitchFamily="34" charset="-120"/>
+              </a:rPr>
+              <a:t>The module should be applied during readiness assessment, procurement, implementation planning, pilot testing, and.</a:t>
+            </a:r>
+            <a:endParaRPr lang="en-US" sz="1700" dirty="0"/>
+          </a:p>
+        </p:txBody>
+      </p:sp>
+      <p:sp>
+        <p:nvSpPr>
+          <p:cNvPr id="11" name="Shape 9"/>
+          <p:cNvSpPr/>
+          <p:nvPr/>
+        </p:nvSpPr>
+        <p:spPr>
+          <a:xfrm>
+            <a:off x="7909560" y="1417320"/>
+            <a:ext cx="3154680" cy="1828800"/>
+          </a:xfrm>
+          <a:prstGeom prst="roundRect">
+            <a:avLst>
+              <a:gd name="adj" fmla="val 6000"/>
+            </a:avLst>
+          </a:prstGeom>
+          <a:solidFill>
+            <a:srgbClr val="EEF8ED"/>
+          </a:solidFill>
+          <a:ln w="12700">
+            <a:solidFill>
+              <a:srgbClr val="B9D7E6"/>
+            </a:solidFill>
+            <a:prstDash val="solid"/>
+          </a:ln>
+        </p:spPr>
+      </p:sp>
+      <p:sp>
+        <p:nvSpPr>
+          <p:cNvPr id="12" name="Text 10"/>
+          <p:cNvSpPr/>
+          <p:nvPr/>
+        </p:nvSpPr>
+        <p:spPr>
+          <a:xfrm>
+            <a:off x="8074152" y="1563624"/>
+            <a:ext cx="2825496" cy="201168"/>
+          </a:xfrm>
+          <a:prstGeom prst="rect">
+            <a:avLst/>
+          </a:prstGeom>
+          <a:noFill/>
+          <a:ln/>
+        </p:spPr>
+        <p:txBody>
+          <a:bodyPr wrap="square" lIns="0" tIns="0" rIns="0" bIns="0" rtlCol="0" anchor="ctr"/>
+          <a:lstStyle/>
+          <a:p>
             <a:pPr indent="0" marL="0">
               <a:buNone/>
             </a:pPr>
             <a:r>
-              <a:rPr lang="en-US" sz="1420" dirty="0">
+              <a:rPr lang="en-US" sz="950" b="1" dirty="0">
+                <a:solidFill>
+                  <a:srgbClr val="0068B7"/>
+                </a:solidFill>
+                <a:latin typeface="Aptos" pitchFamily="34" charset="0"/>
+                <a:ea typeface="Aptos" pitchFamily="34" charset="-122"/>
+                <a:cs typeface="Aptos" pitchFamily="34" charset="-120"/>
+              </a:rPr>
+              <a:t>Key idea</a:t>
+            </a:r>
+            <a:endParaRPr lang="en-US" sz="950" dirty="0"/>
+          </a:p>
+        </p:txBody>
+      </p:sp>
+      <p:sp>
+        <p:nvSpPr>
+          <p:cNvPr id="13" name="Text 11"/>
+          <p:cNvSpPr/>
+          <p:nvPr/>
+        </p:nvSpPr>
+        <p:spPr>
+          <a:xfrm>
+            <a:off x="8074152" y="1856232"/>
+            <a:ext cx="2825496" cy="1261872"/>
+          </a:xfrm>
+          <a:prstGeom prst="rect">
+            <a:avLst/>
+          </a:prstGeom>
+          <a:noFill/>
+          <a:ln/>
+        </p:spPr>
+        <p:txBody>
+          <a:bodyPr wrap="square" lIns="0" tIns="0" rIns="0" bIns="0" rtlCol="0" anchor="t">
+            <a:normAutofit/>
+          </a:bodyPr>
+          <a:lstStyle/>
+          <a:p>
+            <a:pPr indent="0" marL="0">
+              <a:buNone/>
+            </a:pPr>
+            <a:r>
+              <a:rPr lang="en-US" sz="1250" dirty="0">
                 <a:solidFill>
                   <a:srgbClr val="17364A"/>
                 </a:solidFill>
@@ -3988,9 +5751,116 @@
                 <a:ea typeface="Aptos" pitchFamily="34" charset="-122"/>
                 <a:cs typeface="Aptos" pitchFamily="34" charset="-120"/>
               </a:rPr>
-              <a:t>Which safeguards should be required before pilot testing? Who owns ongoing monitoring and review?</a:t>
-            </a:r>
-            <a:endParaRPr lang="en-US" sz="1420" dirty="0"/>
+              <a:t>Generative AI, predictive analytics, RAG, automation, and agentic workflows all depend on the controls described in this.</a:t>
+            </a:r>
+            <a:endParaRPr lang="en-US" sz="1250" dirty="0"/>
+          </a:p>
+        </p:txBody>
+      </p:sp>
+      <p:sp>
+        <p:nvSpPr>
+          <p:cNvPr id="14" name="Shape 12"/>
+          <p:cNvSpPr/>
+          <p:nvPr/>
+        </p:nvSpPr>
+        <p:spPr>
+          <a:xfrm>
+            <a:off x="7909560" y="3520440"/>
+            <a:ext cx="3154680" cy="1737360"/>
+          </a:xfrm>
+          <a:prstGeom prst="roundRect">
+            <a:avLst>
+              <a:gd name="adj" fmla="val 6316"/>
+            </a:avLst>
+          </a:prstGeom>
+          <a:solidFill>
+            <a:srgbClr val="EAF6F8"/>
+          </a:solidFill>
+          <a:ln w="12700">
+            <a:solidFill>
+              <a:srgbClr val="B9D7E6"/>
+            </a:solidFill>
+            <a:prstDash val="solid"/>
+          </a:ln>
+        </p:spPr>
+      </p:sp>
+      <p:sp>
+        <p:nvSpPr>
+          <p:cNvPr id="15" name="Text 13"/>
+          <p:cNvSpPr/>
+          <p:nvPr/>
+        </p:nvSpPr>
+        <p:spPr>
+          <a:xfrm>
+            <a:off x="8074152" y="3666744"/>
+            <a:ext cx="2825496" cy="201168"/>
+          </a:xfrm>
+          <a:prstGeom prst="rect">
+            <a:avLst/>
+          </a:prstGeom>
+          <a:noFill/>
+          <a:ln/>
+        </p:spPr>
+        <p:txBody>
+          <a:bodyPr wrap="square" lIns="0" tIns="0" rIns="0" bIns="0" rtlCol="0" anchor="ctr"/>
+          <a:lstStyle/>
+          <a:p>
+            <a:pPr indent="0" marL="0">
+              <a:buNone/>
+            </a:pPr>
+            <a:r>
+              <a:rPr lang="en-US" sz="950" b="1" dirty="0">
+                <a:solidFill>
+                  <a:srgbClr val="0068B7"/>
+                </a:solidFill>
+                <a:latin typeface="Aptos" pitchFamily="34" charset="0"/>
+                <a:ea typeface="Aptos" pitchFamily="34" charset="-122"/>
+                <a:cs typeface="Aptos" pitchFamily="34" charset="-120"/>
+              </a:rPr>
+              <a:t>Use this for</a:t>
+            </a:r>
+            <a:endParaRPr lang="en-US" sz="950" dirty="0"/>
+          </a:p>
+        </p:txBody>
+      </p:sp>
+      <p:sp>
+        <p:nvSpPr>
+          <p:cNvPr id="16" name="Text 14"/>
+          <p:cNvSpPr/>
+          <p:nvPr/>
+        </p:nvSpPr>
+        <p:spPr>
+          <a:xfrm>
+            <a:off x="8074152" y="3959352"/>
+            <a:ext cx="2825496" cy="1170432"/>
+          </a:xfrm>
+          <a:prstGeom prst="rect">
+            <a:avLst/>
+          </a:prstGeom>
+          <a:noFill/>
+          <a:ln/>
+        </p:spPr>
+        <p:txBody>
+          <a:bodyPr wrap="square" lIns="0" tIns="0" rIns="0" bIns="0" rtlCol="0" anchor="t">
+            <a:normAutofit/>
+          </a:bodyPr>
+          <a:lstStyle/>
+          <a:p>
+            <a:pPr indent="0" marL="0">
+              <a:buNone/>
+            </a:pPr>
+            <a:r>
+              <a:rPr lang="en-US" sz="1250" dirty="0">
+                <a:solidFill>
+                  <a:srgbClr val="17364A"/>
+                </a:solidFill>
+                <a:latin typeface="Aptos" pitchFamily="34" charset="0"/>
+                <a:ea typeface="Aptos" pitchFamily="34" charset="-122"/>
+                <a:cs typeface="Aptos" pitchFamily="34" charset="-120"/>
+              </a:rPr>
+              <a:t>Connect the concept to public health decisions, safeguards, documentation, or implementation work.</a:t>
+            </a:r>
+            <a:endParaRPr lang="en-US" sz="1250" dirty="0"/>
           </a:p>
         </p:txBody>
       </p:sp>
@@ -4053,7 +5923,32 @@
       </p:sp>
       <p:sp>
         <p:nvSpPr>
-          <p:cNvPr id="3" name="Text 1"/>
+          <p:cNvPr id="3" name="Shape 1"/>
+          <p:cNvSpPr/>
+          <p:nvPr/>
+        </p:nvSpPr>
+        <p:spPr>
+          <a:xfrm>
+            <a:off x="0" y="164592"/>
+            <a:ext cx="146304" cy="6693408"/>
+          </a:xfrm>
+          <a:prstGeom prst="rect">
+            <a:avLst/>
+          </a:prstGeom>
+          <a:solidFill>
+            <a:srgbClr val="2F8A28"/>
+          </a:solidFill>
+          <a:ln w="12700">
+            <a:solidFill>
+              <a:srgbClr val="2F8A28"/>
+            </a:solidFill>
+            <a:prstDash val="solid"/>
+          </a:ln>
+        </p:spPr>
+      </p:sp>
+      <p:sp>
+        <p:nvSpPr>
+          <p:cNvPr id="4" name="Text 2"/>
           <p:cNvSpPr/>
           <p:nvPr/>
         </p:nvSpPr>
@@ -4092,7 +5987,7 @@
       </p:sp>
       <p:sp>
         <p:nvSpPr>
-          <p:cNvPr id="4" name="Text 2"/>
+          <p:cNvPr id="5" name="Text 3"/>
           <p:cNvSpPr/>
           <p:nvPr/>
         </p:nvSpPr>
@@ -4131,7 +6026,7 @@
       </p:sp>
       <p:sp>
         <p:nvSpPr>
-          <p:cNvPr id="5" name="Text 3"/>
+          <p:cNvPr id="6" name="Text 4"/>
           <p:cNvSpPr/>
           <p:nvPr/>
         </p:nvSpPr>
@@ -4170,13 +6065,77 @@
       </p:sp>
       <p:sp>
         <p:nvSpPr>
-          <p:cNvPr id="6" name="Text 4"/>
+          <p:cNvPr id="7" name="Shape 5"/>
           <p:cNvSpPr/>
           <p:nvPr/>
         </p:nvSpPr>
         <p:spPr>
           <a:xfrm>
             <a:off x="640080" y="658368"/>
+            <a:ext cx="420624" cy="420624"/>
+          </a:xfrm>
+          <a:prstGeom prst="ellipse">
+            <a:avLst/>
+          </a:prstGeom>
+          <a:solidFill>
+            <a:srgbClr val="0068B7"/>
+          </a:solidFill>
+          <a:ln w="12700">
+            <a:solidFill>
+              <a:srgbClr val="0068B7"/>
+            </a:solidFill>
+            <a:prstDash val="solid"/>
+          </a:ln>
+        </p:spPr>
+      </p:sp>
+      <p:sp>
+        <p:nvSpPr>
+          <p:cNvPr id="8" name="Text 6"/>
+          <p:cNvSpPr/>
+          <p:nvPr/>
+        </p:nvSpPr>
+        <p:spPr>
+          <a:xfrm>
+            <a:off x="640080" y="731520"/>
+            <a:ext cx="420624" cy="164592"/>
+          </a:xfrm>
+          <a:prstGeom prst="rect">
+            <a:avLst/>
+          </a:prstGeom>
+          <a:noFill/>
+          <a:ln/>
+        </p:spPr>
+        <p:txBody>
+          <a:bodyPr wrap="square" lIns="0" tIns="0" rIns="0" bIns="0" rtlCol="0" anchor="ctr"/>
+          <a:lstStyle/>
+          <a:p>
+            <a:pPr algn="ctr" indent="0" marL="0">
+              <a:buNone/>
+            </a:pPr>
+            <a:r>
+              <a:rPr lang="en-US" sz="1100" b="1" dirty="0">
+                <a:solidFill>
+                  <a:srgbClr val="FFFFFF"/>
+                </a:solidFill>
+                <a:latin typeface="Aptos" pitchFamily="34" charset="0"/>
+                <a:ea typeface="Aptos" pitchFamily="34" charset="-122"/>
+                <a:cs typeface="Aptos" pitchFamily="34" charset="-120"/>
+              </a:rPr>
+              <a:t>10</a:t>
+            </a:r>
+            <a:endParaRPr lang="en-US" sz="1100" dirty="0"/>
+          </a:p>
+        </p:txBody>
+      </p:sp>
+      <p:sp>
+        <p:nvSpPr>
+          <p:cNvPr id="9" name="Text 7"/>
+          <p:cNvSpPr/>
+          <p:nvPr/>
+        </p:nvSpPr>
+        <p:spPr>
+          <a:xfrm>
+            <a:off x="640080" y="621792"/>
             <a:ext cx="10881360" cy="566928"/>
           </a:xfrm>
           <a:prstGeom prst="rect">
@@ -4203,7 +6162,7 @@
                 <a:ea typeface="Aptos Display" pitchFamily="34" charset="-122"/>
                 <a:cs typeface="Aptos Display" pitchFamily="34" charset="-120"/>
               </a:rPr>
-              <a:t>Practical Exercise</a:t>
+              <a:t>Reflection Questions</a:t>
             </a:r>
             <a:endParaRPr lang="en-US" sz="2700" dirty="0"/>
           </a:p>
@@ -4211,32 +6170,164 @@
       </p:sp>
       <p:sp>
         <p:nvSpPr>
-          <p:cNvPr id="7" name="Text 5"/>
-          <p:cNvSpPr/>
-          <p:nvPr/>
-        </p:nvSpPr>
-        <p:spPr>
-          <a:xfrm>
-            <a:off x="822960" y="1325880"/>
-            <a:ext cx="10378440" cy="4800600"/>
-          </a:xfrm>
-          <a:prstGeom prst="rect">
-            <a:avLst/>
-          </a:prstGeom>
-          <a:noFill/>
-          <a:ln/>
-        </p:spPr>
-        <p:txBody>
-          <a:bodyPr wrap="square" lIns="1016" tIns="1016" rIns="1016" bIns="1016" rtlCol="0" anchor="t">
+          <p:cNvPr id="10" name="Text 8"/>
+          <p:cNvSpPr/>
+          <p:nvPr/>
+        </p:nvSpPr>
+        <p:spPr>
+          <a:xfrm>
+            <a:off x="868680" y="1417320"/>
+            <a:ext cx="6675120" cy="4434840"/>
+          </a:xfrm>
+          <a:prstGeom prst="rect">
+            <a:avLst/>
+          </a:prstGeom>
+          <a:noFill/>
+          <a:ln/>
+        </p:spPr>
+        <p:txBody>
+          <a:bodyPr wrap="square" lIns="635" tIns="635" rIns="635" bIns="635" rtlCol="0" anchor="t">
             <a:normAutofit/>
           </a:bodyPr>
           <a:lstStyle/>
           <a:p>
+            <a:r>
+              <a:rPr lang="en-US" sz="1700" dirty="0">
+                <a:solidFill>
+                  <a:srgbClr val="17364A"/>
+                </a:solidFill>
+                <a:latin typeface="Aptos" pitchFamily="34" charset="0"/>
+                <a:ea typeface="Aptos" pitchFamily="34" charset="-122"/>
+                <a:cs typeface="Aptos" pitchFamily="34" charset="-120"/>
+              </a:rPr>
+              <a:t>Where does this topic appear in one current or proposed AI workflow in your agency?</a:t>
+            </a:r>
+            <a:endParaRPr lang="en-US" sz="1700" dirty="0"/>
+          </a:p>
+          <a:p>
+            <a:r>
+              <a:rPr lang="en-US" sz="1700" dirty="0">
+                <a:solidFill>
+                  <a:srgbClr val="17364A"/>
+                </a:solidFill>
+                <a:latin typeface="Aptos" pitchFamily="34" charset="0"/>
+                <a:ea typeface="Aptos" pitchFamily="34" charset="-122"/>
+                <a:cs typeface="Aptos" pitchFamily="34" charset="-120"/>
+              </a:rPr>
+              <a:t>What decisions, data sources, users, or partners would be affected if this area is poorly designed?</a:t>
+            </a:r>
+            <a:endParaRPr lang="en-US" sz="1700" dirty="0"/>
+          </a:p>
+          <a:p>
+            <a:r>
+              <a:rPr lang="en-US" sz="1700" dirty="0">
+                <a:solidFill>
+                  <a:srgbClr val="17364A"/>
+                </a:solidFill>
+                <a:latin typeface="Aptos" pitchFamily="34" charset="0"/>
+                <a:ea typeface="Aptos" pitchFamily="34" charset="-122"/>
+                <a:cs typeface="Aptos" pitchFamily="34" charset="-120"/>
+              </a:rPr>
+              <a:t>What evidence would governance reviewers need before approving the workflow?</a:t>
+            </a:r>
+            <a:endParaRPr lang="en-US" sz="1700" dirty="0"/>
+          </a:p>
+        </p:txBody>
+      </p:sp>
+      <p:sp>
+        <p:nvSpPr>
+          <p:cNvPr id="11" name="Shape 9"/>
+          <p:cNvSpPr/>
+          <p:nvPr/>
+        </p:nvSpPr>
+        <p:spPr>
+          <a:xfrm>
+            <a:off x="7909560" y="1417320"/>
+            <a:ext cx="3154680" cy="1828800"/>
+          </a:xfrm>
+          <a:prstGeom prst="roundRect">
+            <a:avLst>
+              <a:gd name="adj" fmla="val 6000"/>
+            </a:avLst>
+          </a:prstGeom>
+          <a:solidFill>
+            <a:srgbClr val="EEF8ED"/>
+          </a:solidFill>
+          <a:ln w="12700">
+            <a:solidFill>
+              <a:srgbClr val="B9D7E6"/>
+            </a:solidFill>
+            <a:prstDash val="solid"/>
+          </a:ln>
+        </p:spPr>
+      </p:sp>
+      <p:sp>
+        <p:nvSpPr>
+          <p:cNvPr id="12" name="Text 10"/>
+          <p:cNvSpPr/>
+          <p:nvPr/>
+        </p:nvSpPr>
+        <p:spPr>
+          <a:xfrm>
+            <a:off x="8074152" y="1563624"/>
+            <a:ext cx="2825496" cy="201168"/>
+          </a:xfrm>
+          <a:prstGeom prst="rect">
+            <a:avLst/>
+          </a:prstGeom>
+          <a:noFill/>
+          <a:ln/>
+        </p:spPr>
+        <p:txBody>
+          <a:bodyPr wrap="square" lIns="0" tIns="0" rIns="0" bIns="0" rtlCol="0" anchor="ctr"/>
+          <a:lstStyle/>
+          <a:p>
             <a:pPr indent="0" marL="0">
               <a:buNone/>
             </a:pPr>
             <a:r>
-              <a:rPr lang="en-US" sz="1420" dirty="0">
+              <a:rPr lang="en-US" sz="950" b="1" dirty="0">
+                <a:solidFill>
+                  <a:srgbClr val="0068B7"/>
+                </a:solidFill>
+                <a:latin typeface="Aptos" pitchFamily="34" charset="0"/>
+                <a:ea typeface="Aptos" pitchFamily="34" charset="-122"/>
+                <a:cs typeface="Aptos" pitchFamily="34" charset="-120"/>
+              </a:rPr>
+              <a:t>Key idea</a:t>
+            </a:r>
+            <a:endParaRPr lang="en-US" sz="950" dirty="0"/>
+          </a:p>
+        </p:txBody>
+      </p:sp>
+      <p:sp>
+        <p:nvSpPr>
+          <p:cNvPr id="13" name="Text 11"/>
+          <p:cNvSpPr/>
+          <p:nvPr/>
+        </p:nvSpPr>
+        <p:spPr>
+          <a:xfrm>
+            <a:off x="8074152" y="1856232"/>
+            <a:ext cx="2825496" cy="1261872"/>
+          </a:xfrm>
+          <a:prstGeom prst="rect">
+            <a:avLst/>
+          </a:prstGeom>
+          <a:noFill/>
+          <a:ln/>
+        </p:spPr>
+        <p:txBody>
+          <a:bodyPr wrap="square" lIns="0" tIns="0" rIns="0" bIns="0" rtlCol="0" anchor="t">
+            <a:normAutofit/>
+          </a:bodyPr>
+          <a:lstStyle/>
+          <a:p>
+            <a:pPr indent="0" marL="0">
+              <a:buNone/>
+            </a:pPr>
+            <a:r>
+              <a:rPr lang="en-US" sz="1250" dirty="0">
                 <a:solidFill>
                   <a:srgbClr val="17364A"/>
                 </a:solidFill>
@@ -4244,9 +6335,116 @@
                 <a:ea typeface="Aptos" pitchFamily="34" charset="-122"/>
                 <a:cs typeface="Aptos" pitchFamily="34" charset="-120"/>
               </a:rPr>
-              <a:t>Create a AI documentation packet for one real or realistic public health AI workflow. The artifact should describe the use case, affected users, data sources, system dependencies, risks, guardrails, review points, and unresolved questions. The exercise should produce a work product that could be used in a governance meeting, procurement review, implementation planning session, pilot evaluation, or monitoring review. Learners should document assumptions and identify which staff or partners need to be consulted.</a:t>
-            </a:r>
-            <a:endParaRPr lang="en-US" sz="1420" dirty="0"/>
+              <a:t>Where does this topic appear in one current or proposed AI workflow in your agency?</a:t>
+            </a:r>
+            <a:endParaRPr lang="en-US" sz="1250" dirty="0"/>
+          </a:p>
+        </p:txBody>
+      </p:sp>
+      <p:sp>
+        <p:nvSpPr>
+          <p:cNvPr id="14" name="Shape 12"/>
+          <p:cNvSpPr/>
+          <p:nvPr/>
+        </p:nvSpPr>
+        <p:spPr>
+          <a:xfrm>
+            <a:off x="7909560" y="3520440"/>
+            <a:ext cx="3154680" cy="1737360"/>
+          </a:xfrm>
+          <a:prstGeom prst="roundRect">
+            <a:avLst>
+              <a:gd name="adj" fmla="val 6316"/>
+            </a:avLst>
+          </a:prstGeom>
+          <a:solidFill>
+            <a:srgbClr val="EAF6F8"/>
+          </a:solidFill>
+          <a:ln w="12700">
+            <a:solidFill>
+              <a:srgbClr val="B9D7E6"/>
+            </a:solidFill>
+            <a:prstDash val="solid"/>
+          </a:ln>
+        </p:spPr>
+      </p:sp>
+      <p:sp>
+        <p:nvSpPr>
+          <p:cNvPr id="15" name="Text 13"/>
+          <p:cNvSpPr/>
+          <p:nvPr/>
+        </p:nvSpPr>
+        <p:spPr>
+          <a:xfrm>
+            <a:off x="8074152" y="3666744"/>
+            <a:ext cx="2825496" cy="201168"/>
+          </a:xfrm>
+          <a:prstGeom prst="rect">
+            <a:avLst/>
+          </a:prstGeom>
+          <a:noFill/>
+          <a:ln/>
+        </p:spPr>
+        <p:txBody>
+          <a:bodyPr wrap="square" lIns="0" tIns="0" rIns="0" bIns="0" rtlCol="0" anchor="ctr"/>
+          <a:lstStyle/>
+          <a:p>
+            <a:pPr indent="0" marL="0">
+              <a:buNone/>
+            </a:pPr>
+            <a:r>
+              <a:rPr lang="en-US" sz="950" b="1" dirty="0">
+                <a:solidFill>
+                  <a:srgbClr val="0068B7"/>
+                </a:solidFill>
+                <a:latin typeface="Aptos" pitchFamily="34" charset="0"/>
+                <a:ea typeface="Aptos" pitchFamily="34" charset="-122"/>
+                <a:cs typeface="Aptos" pitchFamily="34" charset="-120"/>
+              </a:rPr>
+              <a:t>Use this for</a:t>
+            </a:r>
+            <a:endParaRPr lang="en-US" sz="950" dirty="0"/>
+          </a:p>
+        </p:txBody>
+      </p:sp>
+      <p:sp>
+        <p:nvSpPr>
+          <p:cNvPr id="16" name="Text 14"/>
+          <p:cNvSpPr/>
+          <p:nvPr/>
+        </p:nvSpPr>
+        <p:spPr>
+          <a:xfrm>
+            <a:off x="8074152" y="3959352"/>
+            <a:ext cx="2825496" cy="1170432"/>
+          </a:xfrm>
+          <a:prstGeom prst="rect">
+            <a:avLst/>
+          </a:prstGeom>
+          <a:noFill/>
+          <a:ln/>
+        </p:spPr>
+        <p:txBody>
+          <a:bodyPr wrap="square" lIns="0" tIns="0" rIns="0" bIns="0" rtlCol="0" anchor="t">
+            <a:normAutofit/>
+          </a:bodyPr>
+          <a:lstStyle/>
+          <a:p>
+            <a:pPr indent="0" marL="0">
+              <a:buNone/>
+            </a:pPr>
+            <a:r>
+              <a:rPr lang="en-US" sz="1250" dirty="0">
+                <a:solidFill>
+                  <a:srgbClr val="17364A"/>
+                </a:solidFill>
+                <a:latin typeface="Aptos" pitchFamily="34" charset="0"/>
+                <a:ea typeface="Aptos" pitchFamily="34" charset="-122"/>
+                <a:cs typeface="Aptos" pitchFamily="34" charset="-120"/>
+              </a:rPr>
+              <a:t>Connect the concept to public health decisions, safeguards, documentation, or implementation work.</a:t>
+            </a:r>
+            <a:endParaRPr lang="en-US" sz="1250" dirty="0"/>
           </a:p>
         </p:txBody>
       </p:sp>
@@ -4309,7 +6507,32 @@
       </p:sp>
       <p:sp>
         <p:nvSpPr>
-          <p:cNvPr id="3" name="Text 1"/>
+          <p:cNvPr id="3" name="Shape 1"/>
+          <p:cNvSpPr/>
+          <p:nvPr/>
+        </p:nvSpPr>
+        <p:spPr>
+          <a:xfrm>
+            <a:off x="0" y="164592"/>
+            <a:ext cx="146304" cy="6693408"/>
+          </a:xfrm>
+          <a:prstGeom prst="rect">
+            <a:avLst/>
+          </a:prstGeom>
+          <a:solidFill>
+            <a:srgbClr val="2F8A28"/>
+          </a:solidFill>
+          <a:ln w="12700">
+            <a:solidFill>
+              <a:srgbClr val="2F8A28"/>
+            </a:solidFill>
+            <a:prstDash val="solid"/>
+          </a:ln>
+        </p:spPr>
+      </p:sp>
+      <p:sp>
+        <p:nvSpPr>
+          <p:cNvPr id="4" name="Text 2"/>
           <p:cNvSpPr/>
           <p:nvPr/>
         </p:nvSpPr>
@@ -4348,7 +6571,7 @@
       </p:sp>
       <p:sp>
         <p:nvSpPr>
-          <p:cNvPr id="4" name="Text 2"/>
+          <p:cNvPr id="5" name="Text 3"/>
           <p:cNvSpPr/>
           <p:nvPr/>
         </p:nvSpPr>
@@ -4387,7 +6610,7 @@
       </p:sp>
       <p:sp>
         <p:nvSpPr>
-          <p:cNvPr id="5" name="Text 3"/>
+          <p:cNvPr id="6" name="Text 4"/>
           <p:cNvSpPr/>
           <p:nvPr/>
         </p:nvSpPr>
@@ -4426,7 +6649,7 @@
       </p:sp>
       <p:sp>
         <p:nvSpPr>
-          <p:cNvPr id="6" name="Text 4"/>
+          <p:cNvPr id="7" name="Text 5"/>
           <p:cNvSpPr/>
           <p:nvPr/>
         </p:nvSpPr>
@@ -4459,7 +6682,7 @@
                 <a:ea typeface="Aptos Display" pitchFamily="34" charset="-122"/>
                 <a:cs typeface="Aptos Display" pitchFamily="34" charset="-120"/>
               </a:rPr>
-              <a:t>Expected Artifact or Evidence</a:t>
+              <a:t>Reflection Questions Continued</a:t>
             </a:r>
             <a:endParaRPr lang="en-US" sz="2700" dirty="0"/>
           </a:p>
@@ -4467,32 +6690,150 @@
       </p:sp>
       <p:sp>
         <p:nvSpPr>
-          <p:cNvPr id="7" name="Text 5"/>
-          <p:cNvSpPr/>
-          <p:nvPr/>
-        </p:nvSpPr>
-        <p:spPr>
-          <a:xfrm>
-            <a:off x="822960" y="1325880"/>
-            <a:ext cx="10378440" cy="4800600"/>
-          </a:xfrm>
-          <a:prstGeom prst="rect">
-            <a:avLst/>
-          </a:prstGeom>
-          <a:noFill/>
-          <a:ln/>
-        </p:spPr>
-        <p:txBody>
-          <a:bodyPr wrap="square" lIns="1016" tIns="1016" rIns="1016" bIns="1016" rtlCol="0" anchor="t">
+          <p:cNvPr id="8" name="Text 6"/>
+          <p:cNvSpPr/>
+          <p:nvPr/>
+        </p:nvSpPr>
+        <p:spPr>
+          <a:xfrm>
+            <a:off x="868680" y="1417320"/>
+            <a:ext cx="6675120" cy="4434840"/>
+          </a:xfrm>
+          <a:prstGeom prst="rect">
+            <a:avLst/>
+          </a:prstGeom>
+          <a:noFill/>
+          <a:ln/>
+        </p:spPr>
+        <p:txBody>
+          <a:bodyPr wrap="square" lIns="635" tIns="635" rIns="635" bIns="635" rtlCol="0" anchor="t">
             <a:normAutofit/>
           </a:bodyPr>
           <a:lstStyle/>
           <a:p>
+            <a:r>
+              <a:rPr lang="en-US" sz="1700" dirty="0">
+                <a:solidFill>
+                  <a:srgbClr val="17364A"/>
+                </a:solidFill>
+                <a:latin typeface="Aptos" pitchFamily="34" charset="0"/>
+                <a:ea typeface="Aptos" pitchFamily="34" charset="-122"/>
+                <a:cs typeface="Aptos" pitchFamily="34" charset="-120"/>
+              </a:rPr>
+              <a:t>Which safeguards should be required before pilot testing?</a:t>
+            </a:r>
+            <a:endParaRPr lang="en-US" sz="1700" dirty="0"/>
+          </a:p>
+          <a:p>
+            <a:r>
+              <a:rPr lang="en-US" sz="1700" dirty="0">
+                <a:solidFill>
+                  <a:srgbClr val="17364A"/>
+                </a:solidFill>
+                <a:latin typeface="Aptos" pitchFamily="34" charset="0"/>
+                <a:ea typeface="Aptos" pitchFamily="34" charset="-122"/>
+                <a:cs typeface="Aptos" pitchFamily="34" charset="-120"/>
+              </a:rPr>
+              <a:t>Who owns ongoing monitoring and review?</a:t>
+            </a:r>
+            <a:endParaRPr lang="en-US" sz="1700" dirty="0"/>
+          </a:p>
+        </p:txBody>
+      </p:sp>
+      <p:sp>
+        <p:nvSpPr>
+          <p:cNvPr id="9" name="Shape 7"/>
+          <p:cNvSpPr/>
+          <p:nvPr/>
+        </p:nvSpPr>
+        <p:spPr>
+          <a:xfrm>
+            <a:off x="7909560" y="1417320"/>
+            <a:ext cx="3154680" cy="1828800"/>
+          </a:xfrm>
+          <a:prstGeom prst="roundRect">
+            <a:avLst>
+              <a:gd name="adj" fmla="val 6000"/>
+            </a:avLst>
+          </a:prstGeom>
+          <a:solidFill>
+            <a:srgbClr val="EEF8ED"/>
+          </a:solidFill>
+          <a:ln w="12700">
+            <a:solidFill>
+              <a:srgbClr val="B9D7E6"/>
+            </a:solidFill>
+            <a:prstDash val="solid"/>
+          </a:ln>
+        </p:spPr>
+      </p:sp>
+      <p:sp>
+        <p:nvSpPr>
+          <p:cNvPr id="10" name="Text 8"/>
+          <p:cNvSpPr/>
+          <p:nvPr/>
+        </p:nvSpPr>
+        <p:spPr>
+          <a:xfrm>
+            <a:off x="8074152" y="1563624"/>
+            <a:ext cx="2825496" cy="201168"/>
+          </a:xfrm>
+          <a:prstGeom prst="rect">
+            <a:avLst/>
+          </a:prstGeom>
+          <a:noFill/>
+          <a:ln/>
+        </p:spPr>
+        <p:txBody>
+          <a:bodyPr wrap="square" lIns="0" tIns="0" rIns="0" bIns="0" rtlCol="0" anchor="ctr"/>
+          <a:lstStyle/>
+          <a:p>
             <a:pPr indent="0" marL="0">
               <a:buNone/>
             </a:pPr>
             <a:r>
-              <a:rPr lang="en-US" sz="1420" dirty="0">
+              <a:rPr lang="en-US" sz="950" b="1" dirty="0">
+                <a:solidFill>
+                  <a:srgbClr val="0068B7"/>
+                </a:solidFill>
+                <a:latin typeface="Aptos" pitchFamily="34" charset="0"/>
+                <a:ea typeface="Aptos" pitchFamily="34" charset="-122"/>
+                <a:cs typeface="Aptos" pitchFamily="34" charset="-120"/>
+              </a:rPr>
+              <a:t>Key idea</a:t>
+            </a:r>
+            <a:endParaRPr lang="en-US" sz="950" dirty="0"/>
+          </a:p>
+        </p:txBody>
+      </p:sp>
+      <p:sp>
+        <p:nvSpPr>
+          <p:cNvPr id="11" name="Text 9"/>
+          <p:cNvSpPr/>
+          <p:nvPr/>
+        </p:nvSpPr>
+        <p:spPr>
+          <a:xfrm>
+            <a:off x="8074152" y="1856232"/>
+            <a:ext cx="2825496" cy="1261872"/>
+          </a:xfrm>
+          <a:prstGeom prst="rect">
+            <a:avLst/>
+          </a:prstGeom>
+          <a:noFill/>
+          <a:ln/>
+        </p:spPr>
+        <p:txBody>
+          <a:bodyPr wrap="square" lIns="0" tIns="0" rIns="0" bIns="0" rtlCol="0" anchor="t">
+            <a:normAutofit/>
+          </a:bodyPr>
+          <a:lstStyle/>
+          <a:p>
+            <a:pPr indent="0" marL="0">
+              <a:buNone/>
+            </a:pPr>
+            <a:r>
+              <a:rPr lang="en-US" sz="1250" dirty="0">
                 <a:solidFill>
                   <a:srgbClr val="17364A"/>
                 </a:solidFill>
@@ -4500,9 +6841,116 @@
                 <a:ea typeface="Aptos" pitchFamily="34" charset="-122"/>
                 <a:cs typeface="Aptos" pitchFamily="34" charset="-120"/>
               </a:rPr>
-              <a:t>The expected artifact is a completed AI documentation packet. It should be specific to a public health workflow and should include technical dependencies, governance questions, human review expectations, monitoring indicators, and unresolved risks.</a:t>
-            </a:r>
-            <a:endParaRPr lang="en-US" sz="1420" dirty="0"/>
+              <a:t>Which safeguards should be required before pilot testing?</a:t>
+            </a:r>
+            <a:endParaRPr lang="en-US" sz="1250" dirty="0"/>
+          </a:p>
+        </p:txBody>
+      </p:sp>
+      <p:sp>
+        <p:nvSpPr>
+          <p:cNvPr id="12" name="Shape 10"/>
+          <p:cNvSpPr/>
+          <p:nvPr/>
+        </p:nvSpPr>
+        <p:spPr>
+          <a:xfrm>
+            <a:off x="7909560" y="3520440"/>
+            <a:ext cx="3154680" cy="1737360"/>
+          </a:xfrm>
+          <a:prstGeom prst="roundRect">
+            <a:avLst>
+              <a:gd name="adj" fmla="val 6316"/>
+            </a:avLst>
+          </a:prstGeom>
+          <a:solidFill>
+            <a:srgbClr val="EAF6F8"/>
+          </a:solidFill>
+          <a:ln w="12700">
+            <a:solidFill>
+              <a:srgbClr val="B9D7E6"/>
+            </a:solidFill>
+            <a:prstDash val="solid"/>
+          </a:ln>
+        </p:spPr>
+      </p:sp>
+      <p:sp>
+        <p:nvSpPr>
+          <p:cNvPr id="13" name="Text 11"/>
+          <p:cNvSpPr/>
+          <p:nvPr/>
+        </p:nvSpPr>
+        <p:spPr>
+          <a:xfrm>
+            <a:off x="8074152" y="3666744"/>
+            <a:ext cx="2825496" cy="201168"/>
+          </a:xfrm>
+          <a:prstGeom prst="rect">
+            <a:avLst/>
+          </a:prstGeom>
+          <a:noFill/>
+          <a:ln/>
+        </p:spPr>
+        <p:txBody>
+          <a:bodyPr wrap="square" lIns="0" tIns="0" rIns="0" bIns="0" rtlCol="0" anchor="ctr"/>
+          <a:lstStyle/>
+          <a:p>
+            <a:pPr indent="0" marL="0">
+              <a:buNone/>
+            </a:pPr>
+            <a:r>
+              <a:rPr lang="en-US" sz="950" b="1" dirty="0">
+                <a:solidFill>
+                  <a:srgbClr val="0068B7"/>
+                </a:solidFill>
+                <a:latin typeface="Aptos" pitchFamily="34" charset="0"/>
+                <a:ea typeface="Aptos" pitchFamily="34" charset="-122"/>
+                <a:cs typeface="Aptos" pitchFamily="34" charset="-120"/>
+              </a:rPr>
+              <a:t>Use this for</a:t>
+            </a:r>
+            <a:endParaRPr lang="en-US" sz="950" dirty="0"/>
+          </a:p>
+        </p:txBody>
+      </p:sp>
+      <p:sp>
+        <p:nvSpPr>
+          <p:cNvPr id="14" name="Text 12"/>
+          <p:cNvSpPr/>
+          <p:nvPr/>
+        </p:nvSpPr>
+        <p:spPr>
+          <a:xfrm>
+            <a:off x="8074152" y="3959352"/>
+            <a:ext cx="2825496" cy="1170432"/>
+          </a:xfrm>
+          <a:prstGeom prst="rect">
+            <a:avLst/>
+          </a:prstGeom>
+          <a:noFill/>
+          <a:ln/>
+        </p:spPr>
+        <p:txBody>
+          <a:bodyPr wrap="square" lIns="0" tIns="0" rIns="0" bIns="0" rtlCol="0" anchor="t">
+            <a:normAutofit/>
+          </a:bodyPr>
+          <a:lstStyle/>
+          <a:p>
+            <a:pPr indent="0" marL="0">
+              <a:buNone/>
+            </a:pPr>
+            <a:r>
+              <a:rPr lang="en-US" sz="1250" dirty="0">
+                <a:solidFill>
+                  <a:srgbClr val="17364A"/>
+                </a:solidFill>
+                <a:latin typeface="Aptos" pitchFamily="34" charset="0"/>
+                <a:ea typeface="Aptos" pitchFamily="34" charset="-122"/>
+                <a:cs typeface="Aptos" pitchFamily="34" charset="-120"/>
+              </a:rPr>
+              <a:t>Connect the concept to public health decisions, safeguards, documentation, or implementation work.</a:t>
+            </a:r>
+            <a:endParaRPr lang="en-US" sz="1250" dirty="0"/>
           </a:p>
         </p:txBody>
       </p:sp>
@@ -4565,7 +7013,32 @@
       </p:sp>
       <p:sp>
         <p:nvSpPr>
-          <p:cNvPr id="3" name="Text 1"/>
+          <p:cNvPr id="3" name="Shape 1"/>
+          <p:cNvSpPr/>
+          <p:nvPr/>
+        </p:nvSpPr>
+        <p:spPr>
+          <a:xfrm>
+            <a:off x="0" y="164592"/>
+            <a:ext cx="146304" cy="6693408"/>
+          </a:xfrm>
+          <a:prstGeom prst="rect">
+            <a:avLst/>
+          </a:prstGeom>
+          <a:solidFill>
+            <a:srgbClr val="2F8A28"/>
+          </a:solidFill>
+          <a:ln w="12700">
+            <a:solidFill>
+              <a:srgbClr val="2F8A28"/>
+            </a:solidFill>
+            <a:prstDash val="solid"/>
+          </a:ln>
+        </p:spPr>
+      </p:sp>
+      <p:sp>
+        <p:nvSpPr>
+          <p:cNvPr id="4" name="Text 2"/>
           <p:cNvSpPr/>
           <p:nvPr/>
         </p:nvSpPr>
@@ -4604,7 +7077,7 @@
       </p:sp>
       <p:sp>
         <p:nvSpPr>
-          <p:cNvPr id="4" name="Text 2"/>
+          <p:cNvPr id="5" name="Text 3"/>
           <p:cNvSpPr/>
           <p:nvPr/>
         </p:nvSpPr>
@@ -4643,7 +7116,7 @@
       </p:sp>
       <p:sp>
         <p:nvSpPr>
-          <p:cNvPr id="5" name="Text 3"/>
+          <p:cNvPr id="6" name="Text 4"/>
           <p:cNvSpPr/>
           <p:nvPr/>
         </p:nvSpPr>
@@ -4682,13 +7155,77 @@
       </p:sp>
       <p:sp>
         <p:nvSpPr>
-          <p:cNvPr id="6" name="Text 4"/>
+          <p:cNvPr id="7" name="Shape 5"/>
           <p:cNvSpPr/>
           <p:nvPr/>
         </p:nvSpPr>
         <p:spPr>
           <a:xfrm>
             <a:off x="640080" y="658368"/>
+            <a:ext cx="420624" cy="420624"/>
+          </a:xfrm>
+          <a:prstGeom prst="ellipse">
+            <a:avLst/>
+          </a:prstGeom>
+          <a:solidFill>
+            <a:srgbClr val="0068B7"/>
+          </a:solidFill>
+          <a:ln w="12700">
+            <a:solidFill>
+              <a:srgbClr val="0068B7"/>
+            </a:solidFill>
+            <a:prstDash val="solid"/>
+          </a:ln>
+        </p:spPr>
+      </p:sp>
+      <p:sp>
+        <p:nvSpPr>
+          <p:cNvPr id="8" name="Text 6"/>
+          <p:cNvSpPr/>
+          <p:nvPr/>
+        </p:nvSpPr>
+        <p:spPr>
+          <a:xfrm>
+            <a:off x="640080" y="731520"/>
+            <a:ext cx="420624" cy="164592"/>
+          </a:xfrm>
+          <a:prstGeom prst="rect">
+            <a:avLst/>
+          </a:prstGeom>
+          <a:noFill/>
+          <a:ln/>
+        </p:spPr>
+        <p:txBody>
+          <a:bodyPr wrap="square" lIns="0" tIns="0" rIns="0" bIns="0" rtlCol="0" anchor="ctr"/>
+          <a:lstStyle/>
+          <a:p>
+            <a:pPr algn="ctr" indent="0" marL="0">
+              <a:buNone/>
+            </a:pPr>
+            <a:r>
+              <a:rPr lang="en-US" sz="1100" b="1" dirty="0">
+                <a:solidFill>
+                  <a:srgbClr val="FFFFFF"/>
+                </a:solidFill>
+                <a:latin typeface="Aptos" pitchFamily="34" charset="0"/>
+                <a:ea typeface="Aptos" pitchFamily="34" charset="-122"/>
+                <a:cs typeface="Aptos" pitchFamily="34" charset="-120"/>
+              </a:rPr>
+              <a:t>11</a:t>
+            </a:r>
+            <a:endParaRPr lang="en-US" sz="1100" dirty="0"/>
+          </a:p>
+        </p:txBody>
+      </p:sp>
+      <p:sp>
+        <p:nvSpPr>
+          <p:cNvPr id="9" name="Text 7"/>
+          <p:cNvSpPr/>
+          <p:nvPr/>
+        </p:nvSpPr>
+        <p:spPr>
+          <a:xfrm>
+            <a:off x="640080" y="621792"/>
             <a:ext cx="10881360" cy="566928"/>
           </a:xfrm>
           <a:prstGeom prst="rect">
@@ -4715,7 +7252,7 @@
                 <a:ea typeface="Aptos Display" pitchFamily="34" charset="-122"/>
                 <a:cs typeface="Aptos Display" pitchFamily="34" charset="-120"/>
               </a:rPr>
-              <a:t>Expected Assignment</a:t>
+              <a:t>Practical Exercise</a:t>
             </a:r>
             <a:endParaRPr lang="en-US" sz="2700" dirty="0"/>
           </a:p>
@@ -4723,14 +7260,14 @@
       </p:sp>
       <p:sp>
         <p:nvSpPr>
-          <p:cNvPr id="7" name="Text 5"/>
-          <p:cNvSpPr/>
-          <p:nvPr/>
-        </p:nvSpPr>
-        <p:spPr>
-          <a:xfrm>
-            <a:off x="822960" y="1325880"/>
-            <a:ext cx="10378440" cy="4800600"/>
+          <p:cNvPr id="10" name="Text 8"/>
+          <p:cNvSpPr/>
+          <p:nvPr/>
+        </p:nvSpPr>
+        <p:spPr>
+          <a:xfrm>
+            <a:off x="868680" y="1417320"/>
+            <a:ext cx="6675120" cy="4434840"/>
           </a:xfrm>
           <a:prstGeom prst="rect">
             <a:avLst/>
@@ -4745,7 +7282,7 @@
           <a:lstStyle/>
           <a:p>
             <a:r>
-              <a:rPr lang="en-US" sz="1450" dirty="0">
+              <a:rPr lang="en-US" sz="1700" dirty="0">
                 <a:solidFill>
                   <a:srgbClr val="17364A"/>
                 </a:solidFill>
@@ -4753,9 +7290,265 @@
                 <a:ea typeface="Aptos" pitchFamily="34" charset="-122"/>
                 <a:cs typeface="Aptos" pitchFamily="34" charset="-120"/>
               </a:rPr>
-              <a:t>The expected artifact is a completed AI documentation packet. It should be specific to a public health workflow and should include technical dependencies, governance questions, human review expectations, monitoring indicators, and unresolved risks.</a:t>
-            </a:r>
-            <a:endParaRPr lang="en-US" sz="1450" dirty="0"/>
+              <a:t>Create a AI documentation packet for one real or realistic public health AI workflow.</a:t>
+            </a:r>
+            <a:endParaRPr lang="en-US" sz="1700" dirty="0"/>
+          </a:p>
+          <a:p>
+            <a:r>
+              <a:rPr lang="en-US" sz="1700" dirty="0">
+                <a:solidFill>
+                  <a:srgbClr val="17364A"/>
+                </a:solidFill>
+                <a:latin typeface="Aptos" pitchFamily="34" charset="0"/>
+                <a:ea typeface="Aptos" pitchFamily="34" charset="-122"/>
+                <a:cs typeface="Aptos" pitchFamily="34" charset="-120"/>
+              </a:rPr>
+              <a:t>The artifact should describe the use case, affected users, data sources, system dependencies, risks, guardrails, review.</a:t>
+            </a:r>
+            <a:endParaRPr lang="en-US" sz="1700" dirty="0"/>
+          </a:p>
+          <a:p>
+            <a:r>
+              <a:rPr lang="en-US" sz="1700" dirty="0">
+                <a:solidFill>
+                  <a:srgbClr val="17364A"/>
+                </a:solidFill>
+                <a:latin typeface="Aptos" pitchFamily="34" charset="0"/>
+                <a:ea typeface="Aptos" pitchFamily="34" charset="-122"/>
+                <a:cs typeface="Aptos" pitchFamily="34" charset="-120"/>
+              </a:rPr>
+              <a:t>The exercise should produce a work product that could be used in a governance meeting, procurement review, implementation.</a:t>
+            </a:r>
+            <a:endParaRPr lang="en-US" sz="1700" dirty="0"/>
+          </a:p>
+          <a:p>
+            <a:r>
+              <a:rPr lang="en-US" sz="1700" dirty="0">
+                <a:solidFill>
+                  <a:srgbClr val="17364A"/>
+                </a:solidFill>
+                <a:latin typeface="Aptos" pitchFamily="34" charset="0"/>
+                <a:ea typeface="Aptos" pitchFamily="34" charset="-122"/>
+                <a:cs typeface="Aptos" pitchFamily="34" charset="-120"/>
+              </a:rPr>
+              <a:t>Learners should document assumptions and identify which staff or partners need to be consulted.</a:t>
+            </a:r>
+            <a:endParaRPr lang="en-US" sz="1700" dirty="0"/>
+          </a:p>
+        </p:txBody>
+      </p:sp>
+      <p:sp>
+        <p:nvSpPr>
+          <p:cNvPr id="11" name="Shape 9"/>
+          <p:cNvSpPr/>
+          <p:nvPr/>
+        </p:nvSpPr>
+        <p:spPr>
+          <a:xfrm>
+            <a:off x="7909560" y="1417320"/>
+            <a:ext cx="3154680" cy="1828800"/>
+          </a:xfrm>
+          <a:prstGeom prst="roundRect">
+            <a:avLst>
+              <a:gd name="adj" fmla="val 6000"/>
+            </a:avLst>
+          </a:prstGeom>
+          <a:solidFill>
+            <a:srgbClr val="EEF8ED"/>
+          </a:solidFill>
+          <a:ln w="12700">
+            <a:solidFill>
+              <a:srgbClr val="B9D7E6"/>
+            </a:solidFill>
+            <a:prstDash val="solid"/>
+          </a:ln>
+        </p:spPr>
+      </p:sp>
+      <p:sp>
+        <p:nvSpPr>
+          <p:cNvPr id="12" name="Text 10"/>
+          <p:cNvSpPr/>
+          <p:nvPr/>
+        </p:nvSpPr>
+        <p:spPr>
+          <a:xfrm>
+            <a:off x="8074152" y="1563624"/>
+            <a:ext cx="2825496" cy="201168"/>
+          </a:xfrm>
+          <a:prstGeom prst="rect">
+            <a:avLst/>
+          </a:prstGeom>
+          <a:noFill/>
+          <a:ln/>
+        </p:spPr>
+        <p:txBody>
+          <a:bodyPr wrap="square" lIns="0" tIns="0" rIns="0" bIns="0" rtlCol="0" anchor="ctr"/>
+          <a:lstStyle/>
+          <a:p>
+            <a:pPr indent="0" marL="0">
+              <a:buNone/>
+            </a:pPr>
+            <a:r>
+              <a:rPr lang="en-US" sz="950" b="1" dirty="0">
+                <a:solidFill>
+                  <a:srgbClr val="0068B7"/>
+                </a:solidFill>
+                <a:latin typeface="Aptos" pitchFamily="34" charset="0"/>
+                <a:ea typeface="Aptos" pitchFamily="34" charset="-122"/>
+                <a:cs typeface="Aptos" pitchFamily="34" charset="-120"/>
+              </a:rPr>
+              <a:t>Key idea</a:t>
+            </a:r>
+            <a:endParaRPr lang="en-US" sz="950" dirty="0"/>
+          </a:p>
+        </p:txBody>
+      </p:sp>
+      <p:sp>
+        <p:nvSpPr>
+          <p:cNvPr id="13" name="Text 11"/>
+          <p:cNvSpPr/>
+          <p:nvPr/>
+        </p:nvSpPr>
+        <p:spPr>
+          <a:xfrm>
+            <a:off x="8074152" y="1856232"/>
+            <a:ext cx="2825496" cy="1261872"/>
+          </a:xfrm>
+          <a:prstGeom prst="rect">
+            <a:avLst/>
+          </a:prstGeom>
+          <a:noFill/>
+          <a:ln/>
+        </p:spPr>
+        <p:txBody>
+          <a:bodyPr wrap="square" lIns="0" tIns="0" rIns="0" bIns="0" rtlCol="0" anchor="t">
+            <a:normAutofit/>
+          </a:bodyPr>
+          <a:lstStyle/>
+          <a:p>
+            <a:pPr indent="0" marL="0">
+              <a:buNone/>
+            </a:pPr>
+            <a:r>
+              <a:rPr lang="en-US" sz="1250" dirty="0">
+                <a:solidFill>
+                  <a:srgbClr val="17364A"/>
+                </a:solidFill>
+                <a:latin typeface="Aptos" pitchFamily="34" charset="0"/>
+                <a:ea typeface="Aptos" pitchFamily="34" charset="-122"/>
+                <a:cs typeface="Aptos" pitchFamily="34" charset="-120"/>
+              </a:rPr>
+              <a:t>Create a AI documentation packet for one real or realistic public health AI workflow.</a:t>
+            </a:r>
+            <a:endParaRPr lang="en-US" sz="1250" dirty="0"/>
+          </a:p>
+        </p:txBody>
+      </p:sp>
+      <p:sp>
+        <p:nvSpPr>
+          <p:cNvPr id="14" name="Shape 12"/>
+          <p:cNvSpPr/>
+          <p:nvPr/>
+        </p:nvSpPr>
+        <p:spPr>
+          <a:xfrm>
+            <a:off x="7909560" y="3520440"/>
+            <a:ext cx="3154680" cy="1737360"/>
+          </a:xfrm>
+          <a:prstGeom prst="roundRect">
+            <a:avLst>
+              <a:gd name="adj" fmla="val 6316"/>
+            </a:avLst>
+          </a:prstGeom>
+          <a:solidFill>
+            <a:srgbClr val="EAF6F8"/>
+          </a:solidFill>
+          <a:ln w="12700">
+            <a:solidFill>
+              <a:srgbClr val="B9D7E6"/>
+            </a:solidFill>
+            <a:prstDash val="solid"/>
+          </a:ln>
+        </p:spPr>
+      </p:sp>
+      <p:sp>
+        <p:nvSpPr>
+          <p:cNvPr id="15" name="Text 13"/>
+          <p:cNvSpPr/>
+          <p:nvPr/>
+        </p:nvSpPr>
+        <p:spPr>
+          <a:xfrm>
+            <a:off x="8074152" y="3666744"/>
+            <a:ext cx="2825496" cy="201168"/>
+          </a:xfrm>
+          <a:prstGeom prst="rect">
+            <a:avLst/>
+          </a:prstGeom>
+          <a:noFill/>
+          <a:ln/>
+        </p:spPr>
+        <p:txBody>
+          <a:bodyPr wrap="square" lIns="0" tIns="0" rIns="0" bIns="0" rtlCol="0" anchor="ctr"/>
+          <a:lstStyle/>
+          <a:p>
+            <a:pPr indent="0" marL="0">
+              <a:buNone/>
+            </a:pPr>
+            <a:r>
+              <a:rPr lang="en-US" sz="950" b="1" dirty="0">
+                <a:solidFill>
+                  <a:srgbClr val="0068B7"/>
+                </a:solidFill>
+                <a:latin typeface="Aptos" pitchFamily="34" charset="0"/>
+                <a:ea typeface="Aptos" pitchFamily="34" charset="-122"/>
+                <a:cs typeface="Aptos" pitchFamily="34" charset="-120"/>
+              </a:rPr>
+              <a:t>Use this for</a:t>
+            </a:r>
+            <a:endParaRPr lang="en-US" sz="950" dirty="0"/>
+          </a:p>
+        </p:txBody>
+      </p:sp>
+      <p:sp>
+        <p:nvSpPr>
+          <p:cNvPr id="16" name="Text 14"/>
+          <p:cNvSpPr/>
+          <p:nvPr/>
+        </p:nvSpPr>
+        <p:spPr>
+          <a:xfrm>
+            <a:off x="8074152" y="3959352"/>
+            <a:ext cx="2825496" cy="1170432"/>
+          </a:xfrm>
+          <a:prstGeom prst="rect">
+            <a:avLst/>
+          </a:prstGeom>
+          <a:noFill/>
+          <a:ln/>
+        </p:spPr>
+        <p:txBody>
+          <a:bodyPr wrap="square" lIns="0" tIns="0" rIns="0" bIns="0" rtlCol="0" anchor="t">
+            <a:normAutofit/>
+          </a:bodyPr>
+          <a:lstStyle/>
+          <a:p>
+            <a:pPr indent="0" marL="0">
+              <a:buNone/>
+            </a:pPr>
+            <a:r>
+              <a:rPr lang="en-US" sz="1250" dirty="0">
+                <a:solidFill>
+                  <a:srgbClr val="17364A"/>
+                </a:solidFill>
+                <a:latin typeface="Aptos" pitchFamily="34" charset="0"/>
+                <a:ea typeface="Aptos" pitchFamily="34" charset="-122"/>
+                <a:cs typeface="Aptos" pitchFamily="34" charset="-120"/>
+              </a:rPr>
+              <a:t>Connect the concept to public health decisions, safeguards, documentation, or implementation work.</a:t>
+            </a:r>
+            <a:endParaRPr lang="en-US" sz="1250" dirty="0"/>
           </a:p>
         </p:txBody>
       </p:sp>
@@ -4818,7 +7611,32 @@
       </p:sp>
       <p:sp>
         <p:nvSpPr>
-          <p:cNvPr id="3" name="Text 1"/>
+          <p:cNvPr id="3" name="Shape 1"/>
+          <p:cNvSpPr/>
+          <p:nvPr/>
+        </p:nvSpPr>
+        <p:spPr>
+          <a:xfrm>
+            <a:off x="0" y="164592"/>
+            <a:ext cx="146304" cy="6693408"/>
+          </a:xfrm>
+          <a:prstGeom prst="rect">
+            <a:avLst/>
+          </a:prstGeom>
+          <a:solidFill>
+            <a:srgbClr val="2F8A28"/>
+          </a:solidFill>
+          <a:ln w="12700">
+            <a:solidFill>
+              <a:srgbClr val="2F8A28"/>
+            </a:solidFill>
+            <a:prstDash val="solid"/>
+          </a:ln>
+        </p:spPr>
+      </p:sp>
+      <p:sp>
+        <p:nvSpPr>
+          <p:cNvPr id="4" name="Text 2"/>
           <p:cNvSpPr/>
           <p:nvPr/>
         </p:nvSpPr>
@@ -4857,7 +7675,7 @@
       </p:sp>
       <p:sp>
         <p:nvSpPr>
-          <p:cNvPr id="4" name="Text 2"/>
+          <p:cNvPr id="5" name="Text 3"/>
           <p:cNvSpPr/>
           <p:nvPr/>
         </p:nvSpPr>
@@ -4896,7 +7714,7 @@
       </p:sp>
       <p:sp>
         <p:nvSpPr>
-          <p:cNvPr id="5" name="Text 3"/>
+          <p:cNvPr id="6" name="Text 4"/>
           <p:cNvSpPr/>
           <p:nvPr/>
         </p:nvSpPr>
@@ -4935,13 +7753,77 @@
       </p:sp>
       <p:sp>
         <p:nvSpPr>
-          <p:cNvPr id="6" name="Text 4"/>
+          <p:cNvPr id="7" name="Shape 5"/>
           <p:cNvSpPr/>
           <p:nvPr/>
         </p:nvSpPr>
         <p:spPr>
           <a:xfrm>
             <a:off x="640080" y="658368"/>
+            <a:ext cx="420624" cy="420624"/>
+          </a:xfrm>
+          <a:prstGeom prst="ellipse">
+            <a:avLst/>
+          </a:prstGeom>
+          <a:solidFill>
+            <a:srgbClr val="0068B7"/>
+          </a:solidFill>
+          <a:ln w="12700">
+            <a:solidFill>
+              <a:srgbClr val="0068B7"/>
+            </a:solidFill>
+            <a:prstDash val="solid"/>
+          </a:ln>
+        </p:spPr>
+      </p:sp>
+      <p:sp>
+        <p:nvSpPr>
+          <p:cNvPr id="8" name="Text 6"/>
+          <p:cNvSpPr/>
+          <p:nvPr/>
+        </p:nvSpPr>
+        <p:spPr>
+          <a:xfrm>
+            <a:off x="640080" y="731520"/>
+            <a:ext cx="420624" cy="164592"/>
+          </a:xfrm>
+          <a:prstGeom prst="rect">
+            <a:avLst/>
+          </a:prstGeom>
+          <a:noFill/>
+          <a:ln/>
+        </p:spPr>
+        <p:txBody>
+          <a:bodyPr wrap="square" lIns="0" tIns="0" rIns="0" bIns="0" rtlCol="0" anchor="ctr"/>
+          <a:lstStyle/>
+          <a:p>
+            <a:pPr algn="ctr" indent="0" marL="0">
+              <a:buNone/>
+            </a:pPr>
+            <a:r>
+              <a:rPr lang="en-US" sz="1100" b="1" dirty="0">
+                <a:solidFill>
+                  <a:srgbClr val="FFFFFF"/>
+                </a:solidFill>
+                <a:latin typeface="Aptos" pitchFamily="34" charset="0"/>
+                <a:ea typeface="Aptos" pitchFamily="34" charset="-122"/>
+                <a:cs typeface="Aptos" pitchFamily="34" charset="-120"/>
+              </a:rPr>
+              <a:t>12</a:t>
+            </a:r>
+            <a:endParaRPr lang="en-US" sz="1100" dirty="0"/>
+          </a:p>
+        </p:txBody>
+      </p:sp>
+      <p:sp>
+        <p:nvSpPr>
+          <p:cNvPr id="9" name="Text 7"/>
+          <p:cNvSpPr/>
+          <p:nvPr/>
+        </p:nvSpPr>
+        <p:spPr>
+          <a:xfrm>
+            <a:off x="640080" y="621792"/>
             <a:ext cx="10881360" cy="566928"/>
           </a:xfrm>
           <a:prstGeom prst="rect">
@@ -4968,7 +7850,7 @@
                 <a:ea typeface="Aptos Display" pitchFamily="34" charset="-122"/>
                 <a:cs typeface="Aptos Display" pitchFamily="34" charset="-120"/>
               </a:rPr>
-              <a:t>Knowledge Check</a:t>
+              <a:t>Expected Artifact or Evidence</a:t>
             </a:r>
             <a:endParaRPr lang="en-US" sz="2700" dirty="0"/>
           </a:p>
@@ -4976,14 +7858,14 @@
       </p:sp>
       <p:sp>
         <p:nvSpPr>
-          <p:cNvPr id="7" name="Text 5"/>
-          <p:cNvSpPr/>
-          <p:nvPr/>
-        </p:nvSpPr>
-        <p:spPr>
-          <a:xfrm>
-            <a:off x="822960" y="1325880"/>
-            <a:ext cx="10378440" cy="4800600"/>
+          <p:cNvPr id="10" name="Text 8"/>
+          <p:cNvSpPr/>
+          <p:nvPr/>
+        </p:nvSpPr>
+        <p:spPr>
+          <a:xfrm>
+            <a:off x="868680" y="1417320"/>
+            <a:ext cx="6675120" cy="4434840"/>
           </a:xfrm>
           <a:prstGeom prst="rect">
             <a:avLst/>
@@ -4998,7 +7880,7 @@
           <a:lstStyle/>
           <a:p>
             <a:r>
-              <a:rPr lang="en-US" sz="1450" dirty="0">
+              <a:rPr lang="en-US" sz="1700" dirty="0">
                 <a:solidFill>
                   <a:srgbClr val="17364A"/>
                 </a:solidFill>
@@ -5006,13 +7888,13 @@
                 <a:ea typeface="Aptos" pitchFamily="34" charset="-122"/>
                 <a:cs typeface="Aptos" pitchFamily="34" charset="-120"/>
               </a:rPr>
-              <a:t>1. What is the best reason to address ai documentation, model cards, and system cards before deployment?</a:t>
-            </a:r>
-            <a:endParaRPr lang="en-US" sz="1450" dirty="0"/>
-          </a:p>
-          <a:p>
-            <a:r>
-              <a:rPr lang="en-US" sz="1450" dirty="0">
+              <a:t>The expected artifact is a completed AI documentation packet.</a:t>
+            </a:r>
+            <a:endParaRPr lang="en-US" sz="1700" dirty="0"/>
+          </a:p>
+          <a:p>
+            <a:r>
+              <a:rPr lang="en-US" sz="1700" dirty="0">
                 <a:solidFill>
                   <a:srgbClr val="17364A"/>
                 </a:solidFill>
@@ -5020,13 +7902,106 @@
                 <a:ea typeface="Aptos" pitchFamily="34" charset="-122"/>
                 <a:cs typeface="Aptos" pitchFamily="34" charset="-120"/>
               </a:rPr>
-              <a:t>2. Which practice best supports responsible implementation?</a:t>
-            </a:r>
-            <a:endParaRPr lang="en-US" sz="1450" dirty="0"/>
-          </a:p>
-          <a:p>
-            <a:r>
-              <a:rPr lang="en-US" sz="1450" dirty="0">
+              <a:t>It should be specific to a public health workflow and should include technical dependencies, governance questions, human.</a:t>
+            </a:r>
+            <a:endParaRPr lang="en-US" sz="1700" dirty="0"/>
+          </a:p>
+        </p:txBody>
+      </p:sp>
+      <p:sp>
+        <p:nvSpPr>
+          <p:cNvPr id="11" name="Shape 9"/>
+          <p:cNvSpPr/>
+          <p:nvPr/>
+        </p:nvSpPr>
+        <p:spPr>
+          <a:xfrm>
+            <a:off x="7909560" y="1417320"/>
+            <a:ext cx="3154680" cy="1828800"/>
+          </a:xfrm>
+          <a:prstGeom prst="roundRect">
+            <a:avLst>
+              <a:gd name="adj" fmla="val 6000"/>
+            </a:avLst>
+          </a:prstGeom>
+          <a:solidFill>
+            <a:srgbClr val="EEF8ED"/>
+          </a:solidFill>
+          <a:ln w="12700">
+            <a:solidFill>
+              <a:srgbClr val="B9D7E6"/>
+            </a:solidFill>
+            <a:prstDash val="solid"/>
+          </a:ln>
+        </p:spPr>
+      </p:sp>
+      <p:sp>
+        <p:nvSpPr>
+          <p:cNvPr id="12" name="Text 10"/>
+          <p:cNvSpPr/>
+          <p:nvPr/>
+        </p:nvSpPr>
+        <p:spPr>
+          <a:xfrm>
+            <a:off x="8074152" y="1563624"/>
+            <a:ext cx="2825496" cy="201168"/>
+          </a:xfrm>
+          <a:prstGeom prst="rect">
+            <a:avLst/>
+          </a:prstGeom>
+          <a:noFill/>
+          <a:ln/>
+        </p:spPr>
+        <p:txBody>
+          <a:bodyPr wrap="square" lIns="0" tIns="0" rIns="0" bIns="0" rtlCol="0" anchor="ctr"/>
+          <a:lstStyle/>
+          <a:p>
+            <a:pPr indent="0" marL="0">
+              <a:buNone/>
+            </a:pPr>
+            <a:r>
+              <a:rPr lang="en-US" sz="950" b="1" dirty="0">
+                <a:solidFill>
+                  <a:srgbClr val="0068B7"/>
+                </a:solidFill>
+                <a:latin typeface="Aptos" pitchFamily="34" charset="0"/>
+                <a:ea typeface="Aptos" pitchFamily="34" charset="-122"/>
+                <a:cs typeface="Aptos" pitchFamily="34" charset="-120"/>
+              </a:rPr>
+              <a:t>Key idea</a:t>
+            </a:r>
+            <a:endParaRPr lang="en-US" sz="950" dirty="0"/>
+          </a:p>
+        </p:txBody>
+      </p:sp>
+      <p:sp>
+        <p:nvSpPr>
+          <p:cNvPr id="13" name="Text 11"/>
+          <p:cNvSpPr/>
+          <p:nvPr/>
+        </p:nvSpPr>
+        <p:spPr>
+          <a:xfrm>
+            <a:off x="8074152" y="1856232"/>
+            <a:ext cx="2825496" cy="1261872"/>
+          </a:xfrm>
+          <a:prstGeom prst="rect">
+            <a:avLst/>
+          </a:prstGeom>
+          <a:noFill/>
+          <a:ln/>
+        </p:spPr>
+        <p:txBody>
+          <a:bodyPr wrap="square" lIns="0" tIns="0" rIns="0" bIns="0" rtlCol="0" anchor="t">
+            <a:normAutofit/>
+          </a:bodyPr>
+          <a:lstStyle/>
+          <a:p>
+            <a:pPr indent="0" marL="0">
+              <a:buNone/>
+            </a:pPr>
+            <a:r>
+              <a:rPr lang="en-US" sz="1250" dirty="0">
                 <a:solidFill>
                   <a:srgbClr val="17364A"/>
                 </a:solidFill>
@@ -5034,13 +8009,106 @@
                 <a:ea typeface="Aptos" pitchFamily="34" charset="-122"/>
                 <a:cs typeface="Aptos" pitchFamily="34" charset="-120"/>
               </a:rPr>
-              <a:t>3. Which statement best describes a common failure mode?</a:t>
-            </a:r>
-            <a:endParaRPr lang="en-US" sz="1450" dirty="0"/>
-          </a:p>
-          <a:p>
-            <a:r>
-              <a:rPr lang="en-US" sz="1450" dirty="0">
+              <a:t>The expected artifact is a completed AI documentation packet.</a:t>
+            </a:r>
+            <a:endParaRPr lang="en-US" sz="1250" dirty="0"/>
+          </a:p>
+        </p:txBody>
+      </p:sp>
+      <p:sp>
+        <p:nvSpPr>
+          <p:cNvPr id="14" name="Shape 12"/>
+          <p:cNvSpPr/>
+          <p:nvPr/>
+        </p:nvSpPr>
+        <p:spPr>
+          <a:xfrm>
+            <a:off x="7909560" y="3520440"/>
+            <a:ext cx="3154680" cy="1737360"/>
+          </a:xfrm>
+          <a:prstGeom prst="roundRect">
+            <a:avLst>
+              <a:gd name="adj" fmla="val 6316"/>
+            </a:avLst>
+          </a:prstGeom>
+          <a:solidFill>
+            <a:srgbClr val="EAF6F8"/>
+          </a:solidFill>
+          <a:ln w="12700">
+            <a:solidFill>
+              <a:srgbClr val="B9D7E6"/>
+            </a:solidFill>
+            <a:prstDash val="solid"/>
+          </a:ln>
+        </p:spPr>
+      </p:sp>
+      <p:sp>
+        <p:nvSpPr>
+          <p:cNvPr id="15" name="Text 13"/>
+          <p:cNvSpPr/>
+          <p:nvPr/>
+        </p:nvSpPr>
+        <p:spPr>
+          <a:xfrm>
+            <a:off x="8074152" y="3666744"/>
+            <a:ext cx="2825496" cy="201168"/>
+          </a:xfrm>
+          <a:prstGeom prst="rect">
+            <a:avLst/>
+          </a:prstGeom>
+          <a:noFill/>
+          <a:ln/>
+        </p:spPr>
+        <p:txBody>
+          <a:bodyPr wrap="square" lIns="0" tIns="0" rIns="0" bIns="0" rtlCol="0" anchor="ctr"/>
+          <a:lstStyle/>
+          <a:p>
+            <a:pPr indent="0" marL="0">
+              <a:buNone/>
+            </a:pPr>
+            <a:r>
+              <a:rPr lang="en-US" sz="950" b="1" dirty="0">
+                <a:solidFill>
+                  <a:srgbClr val="0068B7"/>
+                </a:solidFill>
+                <a:latin typeface="Aptos" pitchFamily="34" charset="0"/>
+                <a:ea typeface="Aptos" pitchFamily="34" charset="-122"/>
+                <a:cs typeface="Aptos" pitchFamily="34" charset="-120"/>
+              </a:rPr>
+              <a:t>Use this for</a:t>
+            </a:r>
+            <a:endParaRPr lang="en-US" sz="950" dirty="0"/>
+          </a:p>
+        </p:txBody>
+      </p:sp>
+      <p:sp>
+        <p:nvSpPr>
+          <p:cNvPr id="16" name="Text 14"/>
+          <p:cNvSpPr/>
+          <p:nvPr/>
+        </p:nvSpPr>
+        <p:spPr>
+          <a:xfrm>
+            <a:off x="8074152" y="3959352"/>
+            <a:ext cx="2825496" cy="1170432"/>
+          </a:xfrm>
+          <a:prstGeom prst="rect">
+            <a:avLst/>
+          </a:prstGeom>
+          <a:noFill/>
+          <a:ln/>
+        </p:spPr>
+        <p:txBody>
+          <a:bodyPr wrap="square" lIns="0" tIns="0" rIns="0" bIns="0" rtlCol="0" anchor="t">
+            <a:normAutofit/>
+          </a:bodyPr>
+          <a:lstStyle/>
+          <a:p>
+            <a:pPr indent="0" marL="0">
+              <a:buNone/>
+            </a:pPr>
+            <a:r>
+              <a:rPr lang="en-US" sz="1250" dirty="0">
                 <a:solidFill>
                   <a:srgbClr val="17364A"/>
                 </a:solidFill>
@@ -5048,23 +8116,9 @@
                 <a:ea typeface="Aptos" pitchFamily="34" charset="-122"/>
                 <a:cs typeface="Aptos" pitchFamily="34" charset="-120"/>
               </a:rPr>
-              <a:t>4. What should be included in the practical artifact for this module?</a:t>
-            </a:r>
-            <a:endParaRPr lang="en-US" sz="1450" dirty="0"/>
-          </a:p>
-          <a:p>
-            <a:r>
-              <a:rPr lang="en-US" sz="1450" dirty="0">
-                <a:solidFill>
-                  <a:srgbClr val="17364A"/>
-                </a:solidFill>
-                <a:latin typeface="Aptos" pitchFamily="34" charset="0"/>
-                <a:ea typeface="Aptos" pitchFamily="34" charset="-122"/>
-                <a:cs typeface="Aptos" pitchFamily="34" charset="-120"/>
-              </a:rPr>
-              <a:t>5. When should the issue be escalated for governance or leadership review?</a:t>
-            </a:r>
-            <a:endParaRPr lang="en-US" sz="1450" dirty="0"/>
+              <a:t>Connect the concept to public health decisions, safeguards, documentation, or implementation work.</a:t>
+            </a:r>
+            <a:endParaRPr lang="en-US" sz="1250" dirty="0"/>
           </a:p>
         </p:txBody>
       </p:sp>
@@ -5127,7 +8181,32 @@
       </p:sp>
       <p:sp>
         <p:nvSpPr>
-          <p:cNvPr id="3" name="Text 1"/>
+          <p:cNvPr id="3" name="Shape 1"/>
+          <p:cNvSpPr/>
+          <p:nvPr/>
+        </p:nvSpPr>
+        <p:spPr>
+          <a:xfrm>
+            <a:off x="0" y="164592"/>
+            <a:ext cx="146304" cy="6693408"/>
+          </a:xfrm>
+          <a:prstGeom prst="rect">
+            <a:avLst/>
+          </a:prstGeom>
+          <a:solidFill>
+            <a:srgbClr val="2F8A28"/>
+          </a:solidFill>
+          <a:ln w="12700">
+            <a:solidFill>
+              <a:srgbClr val="2F8A28"/>
+            </a:solidFill>
+            <a:prstDash val="solid"/>
+          </a:ln>
+        </p:spPr>
+      </p:sp>
+      <p:sp>
+        <p:nvSpPr>
+          <p:cNvPr id="4" name="Text 2"/>
           <p:cNvSpPr/>
           <p:nvPr/>
         </p:nvSpPr>
@@ -5166,7 +8245,7 @@
       </p:sp>
       <p:sp>
         <p:nvSpPr>
-          <p:cNvPr id="4" name="Text 2"/>
+          <p:cNvPr id="5" name="Text 3"/>
           <p:cNvSpPr/>
           <p:nvPr/>
         </p:nvSpPr>
@@ -5205,7 +8284,7 @@
       </p:sp>
       <p:sp>
         <p:nvSpPr>
-          <p:cNvPr id="5" name="Text 3"/>
+          <p:cNvPr id="6" name="Text 4"/>
           <p:cNvSpPr/>
           <p:nvPr/>
         </p:nvSpPr>
@@ -5244,13 +8323,77 @@
       </p:sp>
       <p:sp>
         <p:nvSpPr>
-          <p:cNvPr id="6" name="Text 4"/>
+          <p:cNvPr id="7" name="Shape 5"/>
           <p:cNvSpPr/>
           <p:nvPr/>
         </p:nvSpPr>
         <p:spPr>
           <a:xfrm>
             <a:off x="640080" y="658368"/>
+            <a:ext cx="420624" cy="420624"/>
+          </a:xfrm>
+          <a:prstGeom prst="ellipse">
+            <a:avLst/>
+          </a:prstGeom>
+          <a:solidFill>
+            <a:srgbClr val="0068B7"/>
+          </a:solidFill>
+          <a:ln w="12700">
+            <a:solidFill>
+              <a:srgbClr val="0068B7"/>
+            </a:solidFill>
+            <a:prstDash val="solid"/>
+          </a:ln>
+        </p:spPr>
+      </p:sp>
+      <p:sp>
+        <p:nvSpPr>
+          <p:cNvPr id="8" name="Text 6"/>
+          <p:cNvSpPr/>
+          <p:nvPr/>
+        </p:nvSpPr>
+        <p:spPr>
+          <a:xfrm>
+            <a:off x="640080" y="731520"/>
+            <a:ext cx="420624" cy="164592"/>
+          </a:xfrm>
+          <a:prstGeom prst="rect">
+            <a:avLst/>
+          </a:prstGeom>
+          <a:noFill/>
+          <a:ln/>
+        </p:spPr>
+        <p:txBody>
+          <a:bodyPr wrap="square" lIns="0" tIns="0" rIns="0" bIns="0" rtlCol="0" anchor="ctr"/>
+          <a:lstStyle/>
+          <a:p>
+            <a:pPr algn="ctr" indent="0" marL="0">
+              <a:buNone/>
+            </a:pPr>
+            <a:r>
+              <a:rPr lang="en-US" sz="1100" b="1" dirty="0">
+                <a:solidFill>
+                  <a:srgbClr val="FFFFFF"/>
+                </a:solidFill>
+                <a:latin typeface="Aptos" pitchFamily="34" charset="0"/>
+                <a:ea typeface="Aptos" pitchFamily="34" charset="-122"/>
+                <a:cs typeface="Aptos" pitchFamily="34" charset="-120"/>
+              </a:rPr>
+              <a:t>13</a:t>
+            </a:r>
+            <a:endParaRPr lang="en-US" sz="1100" dirty="0"/>
+          </a:p>
+        </p:txBody>
+      </p:sp>
+      <p:sp>
+        <p:nvSpPr>
+          <p:cNvPr id="9" name="Text 7"/>
+          <p:cNvSpPr/>
+          <p:nvPr/>
+        </p:nvSpPr>
+        <p:spPr>
+          <a:xfrm>
+            <a:off x="640080" y="621792"/>
             <a:ext cx="10881360" cy="566928"/>
           </a:xfrm>
           <a:prstGeom prst="rect">
@@ -5277,7 +8420,7 @@
                 <a:ea typeface="Aptos Display" pitchFamily="34" charset="-122"/>
                 <a:cs typeface="Aptos Display" pitchFamily="34" charset="-120"/>
               </a:rPr>
-              <a:t>References and Resources</a:t>
+              <a:t>Expected Assignment</a:t>
             </a:r>
             <a:endParaRPr lang="en-US" sz="2700" dirty="0"/>
           </a:p>
@@ -5285,14 +8428,14 @@
       </p:sp>
       <p:sp>
         <p:nvSpPr>
-          <p:cNvPr id="7" name="Text 5"/>
-          <p:cNvSpPr/>
-          <p:nvPr/>
-        </p:nvSpPr>
-        <p:spPr>
-          <a:xfrm>
-            <a:off x="822960" y="1325880"/>
-            <a:ext cx="10378440" cy="4800600"/>
+          <p:cNvPr id="10" name="Text 8"/>
+          <p:cNvSpPr/>
+          <p:nvPr/>
+        </p:nvSpPr>
+        <p:spPr>
+          <a:xfrm>
+            <a:off x="868680" y="1417320"/>
+            <a:ext cx="6675120" cy="4434840"/>
           </a:xfrm>
           <a:prstGeom prst="rect">
             <a:avLst/>
@@ -5307,7 +8450,7 @@
           <a:lstStyle/>
           <a:p>
             <a:r>
-              <a:rPr lang="en-US" sz="1450" dirty="0">
+              <a:rPr lang="en-US" sz="1700" dirty="0">
                 <a:solidFill>
                   <a:srgbClr val="17364A"/>
                 </a:solidFill>
@@ -5315,13 +8458,106 @@
                 <a:ea typeface="Aptos" pitchFamily="34" charset="-122"/>
                 <a:cs typeface="Aptos" pitchFamily="34" charset="-120"/>
               </a:rPr>
-              <a:t>NIST AI Risk Management Framework: https://www.nist.gov/itl/ai-risk-management-framework</a:t>
-            </a:r>
-            <a:endParaRPr lang="en-US" sz="1450" dirty="0"/>
-          </a:p>
-          <a:p>
-            <a:r>
-              <a:rPr lang="en-US" sz="1450" dirty="0">
+              <a:t>The expected artifact is a completed AI documentation packet. It should be specific to a public health workflow and should.</a:t>
+            </a:r>
+            <a:endParaRPr lang="en-US" sz="1700" dirty="0"/>
+          </a:p>
+        </p:txBody>
+      </p:sp>
+      <p:sp>
+        <p:nvSpPr>
+          <p:cNvPr id="11" name="Shape 9"/>
+          <p:cNvSpPr/>
+          <p:nvPr/>
+        </p:nvSpPr>
+        <p:spPr>
+          <a:xfrm>
+            <a:off x="7909560" y="1417320"/>
+            <a:ext cx="3154680" cy="1828800"/>
+          </a:xfrm>
+          <a:prstGeom prst="roundRect">
+            <a:avLst>
+              <a:gd name="adj" fmla="val 6000"/>
+            </a:avLst>
+          </a:prstGeom>
+          <a:solidFill>
+            <a:srgbClr val="EEF8ED"/>
+          </a:solidFill>
+          <a:ln w="12700">
+            <a:solidFill>
+              <a:srgbClr val="B9D7E6"/>
+            </a:solidFill>
+            <a:prstDash val="solid"/>
+          </a:ln>
+        </p:spPr>
+      </p:sp>
+      <p:sp>
+        <p:nvSpPr>
+          <p:cNvPr id="12" name="Text 10"/>
+          <p:cNvSpPr/>
+          <p:nvPr/>
+        </p:nvSpPr>
+        <p:spPr>
+          <a:xfrm>
+            <a:off x="8074152" y="1563624"/>
+            <a:ext cx="2825496" cy="201168"/>
+          </a:xfrm>
+          <a:prstGeom prst="rect">
+            <a:avLst/>
+          </a:prstGeom>
+          <a:noFill/>
+          <a:ln/>
+        </p:spPr>
+        <p:txBody>
+          <a:bodyPr wrap="square" lIns="0" tIns="0" rIns="0" bIns="0" rtlCol="0" anchor="ctr"/>
+          <a:lstStyle/>
+          <a:p>
+            <a:pPr indent="0" marL="0">
+              <a:buNone/>
+            </a:pPr>
+            <a:r>
+              <a:rPr lang="en-US" sz="950" b="1" dirty="0">
+                <a:solidFill>
+                  <a:srgbClr val="0068B7"/>
+                </a:solidFill>
+                <a:latin typeface="Aptos" pitchFamily="34" charset="0"/>
+                <a:ea typeface="Aptos" pitchFamily="34" charset="-122"/>
+                <a:cs typeface="Aptos" pitchFamily="34" charset="-120"/>
+              </a:rPr>
+              <a:t>Key idea</a:t>
+            </a:r>
+            <a:endParaRPr lang="en-US" sz="950" dirty="0"/>
+          </a:p>
+        </p:txBody>
+      </p:sp>
+      <p:sp>
+        <p:nvSpPr>
+          <p:cNvPr id="13" name="Text 11"/>
+          <p:cNvSpPr/>
+          <p:nvPr/>
+        </p:nvSpPr>
+        <p:spPr>
+          <a:xfrm>
+            <a:off x="8074152" y="1856232"/>
+            <a:ext cx="2825496" cy="1261872"/>
+          </a:xfrm>
+          <a:prstGeom prst="rect">
+            <a:avLst/>
+          </a:prstGeom>
+          <a:noFill/>
+          <a:ln/>
+        </p:spPr>
+        <p:txBody>
+          <a:bodyPr wrap="square" lIns="0" tIns="0" rIns="0" bIns="0" rtlCol="0" anchor="t">
+            <a:normAutofit/>
+          </a:bodyPr>
+          <a:lstStyle/>
+          <a:p>
+            <a:pPr indent="0" marL="0">
+              <a:buNone/>
+            </a:pPr>
+            <a:r>
+              <a:rPr lang="en-US" sz="1250" dirty="0">
                 <a:solidFill>
                   <a:srgbClr val="17364A"/>
                 </a:solidFill>
@@ -5329,13 +8565,106 @@
                 <a:ea typeface="Aptos" pitchFamily="34" charset="-122"/>
                 <a:cs typeface="Aptos" pitchFamily="34" charset="-120"/>
               </a:rPr>
-              <a:t>NIST Generative AI Profile: https://www.nist.gov/publications/artificial-intelligence-risk-management-framework-generative-artificial-intelligence</a:t>
-            </a:r>
-            <a:endParaRPr lang="en-US" sz="1450" dirty="0"/>
-          </a:p>
-          <a:p>
-            <a:r>
-              <a:rPr lang="en-US" sz="1450" dirty="0">
+              <a:t>The expected artifact is a completed AI documentation packet. It should be specific to a public health workflow and should.</a:t>
+            </a:r>
+            <a:endParaRPr lang="en-US" sz="1250" dirty="0"/>
+          </a:p>
+        </p:txBody>
+      </p:sp>
+      <p:sp>
+        <p:nvSpPr>
+          <p:cNvPr id="14" name="Shape 12"/>
+          <p:cNvSpPr/>
+          <p:nvPr/>
+        </p:nvSpPr>
+        <p:spPr>
+          <a:xfrm>
+            <a:off x="7909560" y="3520440"/>
+            <a:ext cx="3154680" cy="1737360"/>
+          </a:xfrm>
+          <a:prstGeom prst="roundRect">
+            <a:avLst>
+              <a:gd name="adj" fmla="val 6316"/>
+            </a:avLst>
+          </a:prstGeom>
+          <a:solidFill>
+            <a:srgbClr val="EAF6F8"/>
+          </a:solidFill>
+          <a:ln w="12700">
+            <a:solidFill>
+              <a:srgbClr val="B9D7E6"/>
+            </a:solidFill>
+            <a:prstDash val="solid"/>
+          </a:ln>
+        </p:spPr>
+      </p:sp>
+      <p:sp>
+        <p:nvSpPr>
+          <p:cNvPr id="15" name="Text 13"/>
+          <p:cNvSpPr/>
+          <p:nvPr/>
+        </p:nvSpPr>
+        <p:spPr>
+          <a:xfrm>
+            <a:off x="8074152" y="3666744"/>
+            <a:ext cx="2825496" cy="201168"/>
+          </a:xfrm>
+          <a:prstGeom prst="rect">
+            <a:avLst/>
+          </a:prstGeom>
+          <a:noFill/>
+          <a:ln/>
+        </p:spPr>
+        <p:txBody>
+          <a:bodyPr wrap="square" lIns="0" tIns="0" rIns="0" bIns="0" rtlCol="0" anchor="ctr"/>
+          <a:lstStyle/>
+          <a:p>
+            <a:pPr indent="0" marL="0">
+              <a:buNone/>
+            </a:pPr>
+            <a:r>
+              <a:rPr lang="en-US" sz="950" b="1" dirty="0">
+                <a:solidFill>
+                  <a:srgbClr val="0068B7"/>
+                </a:solidFill>
+                <a:latin typeface="Aptos" pitchFamily="34" charset="0"/>
+                <a:ea typeface="Aptos" pitchFamily="34" charset="-122"/>
+                <a:cs typeface="Aptos" pitchFamily="34" charset="-120"/>
+              </a:rPr>
+              <a:t>Use this for</a:t>
+            </a:r>
+            <a:endParaRPr lang="en-US" sz="950" dirty="0"/>
+          </a:p>
+        </p:txBody>
+      </p:sp>
+      <p:sp>
+        <p:nvSpPr>
+          <p:cNvPr id="16" name="Text 14"/>
+          <p:cNvSpPr/>
+          <p:nvPr/>
+        </p:nvSpPr>
+        <p:spPr>
+          <a:xfrm>
+            <a:off x="8074152" y="3959352"/>
+            <a:ext cx="2825496" cy="1170432"/>
+          </a:xfrm>
+          <a:prstGeom prst="rect">
+            <a:avLst/>
+          </a:prstGeom>
+          <a:noFill/>
+          <a:ln/>
+        </p:spPr>
+        <p:txBody>
+          <a:bodyPr wrap="square" lIns="0" tIns="0" rIns="0" bIns="0" rtlCol="0" anchor="t">
+            <a:normAutofit/>
+          </a:bodyPr>
+          <a:lstStyle/>
+          <a:p>
+            <a:pPr indent="0" marL="0">
+              <a:buNone/>
+            </a:pPr>
+            <a:r>
+              <a:rPr lang="en-US" sz="1250" dirty="0">
                 <a:solidFill>
                   <a:srgbClr val="17364A"/>
                 </a:solidFill>
@@ -5343,37 +8672,9 @@
                 <a:ea typeface="Aptos" pitchFamily="34" charset="-122"/>
                 <a:cs typeface="Aptos" pitchFamily="34" charset="-120"/>
               </a:rPr>
-              <a:t>CDC Public Health Data Strategy and Data Modernization resources: https://www.cdc.gov/public-health-data-strategy/php/about/index.html</a:t>
-            </a:r>
-            <a:endParaRPr lang="en-US" sz="1450" dirty="0"/>
-          </a:p>
-          <a:p>
-            <a:r>
-              <a:rPr lang="en-US" sz="1450" dirty="0">
-                <a:solidFill>
-                  <a:srgbClr val="17364A"/>
-                </a:solidFill>
-                <a:latin typeface="Aptos" pitchFamily="34" charset="0"/>
-                <a:ea typeface="Aptos" pitchFamily="34" charset="-122"/>
-                <a:cs typeface="Aptos" pitchFamily="34" charset="-120"/>
-              </a:rPr>
-              <a:t>OWASP Top 10 for LLM Applications, when security or AI integrations are relevant</a:t>
-            </a:r>
-            <a:endParaRPr lang="en-US" sz="1450" dirty="0"/>
-          </a:p>
-          <a:p>
-            <a:r>
-              <a:rPr lang="en-US" sz="1450" dirty="0">
-                <a:solidFill>
-                  <a:srgbClr val="17364A"/>
-                </a:solidFill>
-                <a:latin typeface="Aptos" pitchFamily="34" charset="0"/>
-                <a:ea typeface="Aptos" pitchFamily="34" charset="-122"/>
-                <a:cs typeface="Aptos" pitchFamily="34" charset="-120"/>
-              </a:rPr>
-              <a:t>Agency privacy, cybersecurity, data governance, procurement, and records management policies</a:t>
-            </a:r>
-            <a:endParaRPr lang="en-US" sz="1450" dirty="0"/>
+              <a:t>Connect the concept to public health decisions, safeguards, documentation, or implementation work.</a:t>
+            </a:r>
+            <a:endParaRPr lang="en-US" sz="1250" dirty="0"/>
           </a:p>
         </p:txBody>
       </p:sp>
@@ -5436,7 +8737,32 @@
       </p:sp>
       <p:sp>
         <p:nvSpPr>
-          <p:cNvPr id="3" name="Text 1"/>
+          <p:cNvPr id="3" name="Shape 1"/>
+          <p:cNvSpPr/>
+          <p:nvPr/>
+        </p:nvSpPr>
+        <p:spPr>
+          <a:xfrm>
+            <a:off x="0" y="164592"/>
+            <a:ext cx="146304" cy="6693408"/>
+          </a:xfrm>
+          <a:prstGeom prst="rect">
+            <a:avLst/>
+          </a:prstGeom>
+          <a:solidFill>
+            <a:srgbClr val="2F8A28"/>
+          </a:solidFill>
+          <a:ln w="12700">
+            <a:solidFill>
+              <a:srgbClr val="2F8A28"/>
+            </a:solidFill>
+            <a:prstDash val="solid"/>
+          </a:ln>
+        </p:spPr>
+      </p:sp>
+      <p:sp>
+        <p:nvSpPr>
+          <p:cNvPr id="4" name="Text 2"/>
           <p:cNvSpPr/>
           <p:nvPr/>
         </p:nvSpPr>
@@ -5475,7 +8801,7 @@
       </p:sp>
       <p:sp>
         <p:nvSpPr>
-          <p:cNvPr id="4" name="Text 2"/>
+          <p:cNvPr id="5" name="Text 3"/>
           <p:cNvSpPr/>
           <p:nvPr/>
         </p:nvSpPr>
@@ -5514,7 +8840,7 @@
       </p:sp>
       <p:sp>
         <p:nvSpPr>
-          <p:cNvPr id="5" name="Text 3"/>
+          <p:cNvPr id="6" name="Text 4"/>
           <p:cNvSpPr/>
           <p:nvPr/>
         </p:nvSpPr>
@@ -5553,7 +8879,7 @@
       </p:sp>
       <p:sp>
         <p:nvSpPr>
-          <p:cNvPr id="6" name="Text 4"/>
+          <p:cNvPr id="7" name="Text 5"/>
           <p:cNvSpPr/>
           <p:nvPr/>
         </p:nvSpPr>
@@ -5586,7 +8912,7 @@
                 <a:ea typeface="Aptos Display" pitchFamily="34" charset="-122"/>
                 <a:cs typeface="Aptos Display" pitchFamily="34" charset="-120"/>
               </a:rPr>
-              <a:t>Module Context</a:t>
+              <a:t>What this module helps you do</a:t>
             </a:r>
             <a:endParaRPr lang="en-US" sz="2700" dirty="0"/>
           </a:p>
@@ -5594,14 +8920,14 @@
       </p:sp>
       <p:sp>
         <p:nvSpPr>
-          <p:cNvPr id="7" name="Text 5"/>
-          <p:cNvSpPr/>
-          <p:nvPr/>
-        </p:nvSpPr>
-        <p:spPr>
-          <a:xfrm>
-            <a:off x="822960" y="1325880"/>
-            <a:ext cx="10378440" cy="1371600"/>
+          <p:cNvPr id="8" name="Text 6"/>
+          <p:cNvSpPr/>
+          <p:nvPr/>
+        </p:nvSpPr>
+        <p:spPr>
+          <a:xfrm>
+            <a:off x="868680" y="1417320"/>
+            <a:ext cx="6675120" cy="3291840"/>
           </a:xfrm>
           <a:prstGeom prst="rect">
             <a:avLst/>
@@ -5616,7 +8942,7 @@
           <a:lstStyle/>
           <a:p>
             <a:r>
-              <a:rPr lang="en-US" sz="1600" dirty="0">
+              <a:rPr lang="en-US" sz="1700" dirty="0">
                 <a:solidFill>
                   <a:srgbClr val="17364A"/>
                 </a:solidFill>
@@ -5624,13 +8950,13 @@
                 <a:ea typeface="Aptos" pitchFamily="34" charset="-122"/>
                 <a:cs typeface="Aptos" pitchFamily="34" charset="-120"/>
               </a:rPr>
-              <a:t>Level: intermediate/practitioner</a:t>
-            </a:r>
-            <a:endParaRPr lang="en-US" sz="1600" dirty="0"/>
-          </a:p>
-          <a:p>
-            <a:r>
-              <a:rPr lang="en-US" sz="1600" dirty="0">
+              <a:t>AI documentation makes systems understandable, reviewable, and accountable.</a:t>
+            </a:r>
+            <a:endParaRPr lang="en-US" sz="1700" dirty="0"/>
+          </a:p>
+          <a:p>
+            <a:r>
+              <a:rPr lang="en-US" sz="1700" dirty="0">
                 <a:solidFill>
                   <a:srgbClr val="17364A"/>
                 </a:solidFill>
@@ -5638,13 +8964,13 @@
                 <a:ea typeface="Aptos" pitchFamily="34" charset="-122"/>
                 <a:cs typeface="Aptos" pitchFamily="34" charset="-120"/>
               </a:rPr>
-              <a:t>Primary track: Governance and Security Track</a:t>
-            </a:r>
-            <a:endParaRPr lang="en-US" sz="1600" dirty="0"/>
-          </a:p>
-          <a:p>
-            <a:r>
-              <a:rPr lang="en-US" sz="1600" dirty="0">
+              <a:t>Model cards and system cards are structured documentation tools that describe intended use, data, evaluation, limitations, risks, human oversight,.</a:t>
+            </a:r>
+            <a:endParaRPr lang="en-US" sz="1700" dirty="0"/>
+          </a:p>
+          <a:p>
+            <a:r>
+              <a:rPr lang="en-US" sz="1700" dirty="0">
                 <a:solidFill>
                   <a:srgbClr val="17364A"/>
                 </a:solidFill>
@@ -5652,31 +8978,97 @@
                 <a:ea typeface="Aptos" pitchFamily="34" charset="-122"/>
                 <a:cs typeface="Aptos" pitchFamily="34" charset="-120"/>
               </a:rPr>
-              <a:t>Appears in tracks: operations-data-quality</a:t>
-            </a:r>
-            <a:endParaRPr lang="en-US" sz="1600" dirty="0"/>
-          </a:p>
-        </p:txBody>
-      </p:sp>
-      <p:sp>
-        <p:nvSpPr>
-          <p:cNvPr id="8" name="Text 6"/>
-          <p:cNvSpPr/>
-          <p:nvPr/>
-        </p:nvSpPr>
-        <p:spPr>
-          <a:xfrm>
-            <a:off x="822960" y="2743200"/>
-            <a:ext cx="10378440" cy="2834640"/>
-          </a:xfrm>
-          <a:prstGeom prst="rect">
-            <a:avLst/>
-          </a:prstGeom>
-          <a:noFill/>
-          <a:ln/>
-        </p:spPr>
-        <p:txBody>
-          <a:bodyPr wrap="square" lIns="1016" tIns="1016" rIns="1016" bIns="1016" rtlCol="0" anchor="t">
+              <a:t>This module helps public health staff create documentation that supports governance review, vendor oversight, public accountability, and incident.</a:t>
+            </a:r>
+            <a:endParaRPr lang="en-US" sz="1700" dirty="0"/>
+          </a:p>
+        </p:txBody>
+      </p:sp>
+      <p:sp>
+        <p:nvSpPr>
+          <p:cNvPr id="9" name="Shape 7"/>
+          <p:cNvSpPr/>
+          <p:nvPr/>
+        </p:nvSpPr>
+        <p:spPr>
+          <a:xfrm>
+            <a:off x="7909560" y="1417320"/>
+            <a:ext cx="3154680" cy="1920240"/>
+          </a:xfrm>
+          <a:prstGeom prst="roundRect">
+            <a:avLst>
+              <a:gd name="adj" fmla="val 5714"/>
+            </a:avLst>
+          </a:prstGeom>
+          <a:solidFill>
+            <a:srgbClr val="EAF6F8"/>
+          </a:solidFill>
+          <a:ln w="12700">
+            <a:solidFill>
+              <a:srgbClr val="B9D7E6"/>
+            </a:solidFill>
+            <a:prstDash val="solid"/>
+          </a:ln>
+        </p:spPr>
+      </p:sp>
+      <p:sp>
+        <p:nvSpPr>
+          <p:cNvPr id="10" name="Text 8"/>
+          <p:cNvSpPr/>
+          <p:nvPr/>
+        </p:nvSpPr>
+        <p:spPr>
+          <a:xfrm>
+            <a:off x="8074152" y="1563624"/>
+            <a:ext cx="2825496" cy="201168"/>
+          </a:xfrm>
+          <a:prstGeom prst="rect">
+            <a:avLst/>
+          </a:prstGeom>
+          <a:noFill/>
+          <a:ln/>
+        </p:spPr>
+        <p:txBody>
+          <a:bodyPr wrap="square" lIns="0" tIns="0" rIns="0" bIns="0" rtlCol="0" anchor="ctr"/>
+          <a:lstStyle/>
+          <a:p>
+            <a:pPr indent="0" marL="0">
+              <a:buNone/>
+            </a:pPr>
+            <a:r>
+              <a:rPr lang="en-US" sz="950" b="1" dirty="0">
+                <a:solidFill>
+                  <a:srgbClr val="0068B7"/>
+                </a:solidFill>
+                <a:latin typeface="Aptos" pitchFamily="34" charset="0"/>
+                <a:ea typeface="Aptos" pitchFamily="34" charset="-122"/>
+                <a:cs typeface="Aptos" pitchFamily="34" charset="-120"/>
+              </a:rPr>
+              <a:t>Module details</a:t>
+            </a:r>
+            <a:endParaRPr lang="en-US" sz="950" dirty="0"/>
+          </a:p>
+        </p:txBody>
+      </p:sp>
+      <p:sp>
+        <p:nvSpPr>
+          <p:cNvPr id="11" name="Text 9"/>
+          <p:cNvSpPr/>
+          <p:nvPr/>
+        </p:nvSpPr>
+        <p:spPr>
+          <a:xfrm>
+            <a:off x="8074152" y="1856232"/>
+            <a:ext cx="2825496" cy="1353312"/>
+          </a:xfrm>
+          <a:prstGeom prst="rect">
+            <a:avLst/>
+          </a:prstGeom>
+          <a:noFill/>
+          <a:ln/>
+        </p:spPr>
+        <p:txBody>
+          <a:bodyPr wrap="square" lIns="0" tIns="0" rIns="0" bIns="0" rtlCol="0" anchor="t">
             <a:normAutofit/>
           </a:bodyPr>
           <a:lstStyle/>
@@ -5685,7 +9077,7 @@
               <a:buNone/>
             </a:pPr>
             <a:r>
-              <a:rPr lang="en-US" sz="1400" dirty="0">
+              <a:rPr lang="en-US" sz="1250" dirty="0">
                 <a:solidFill>
                   <a:srgbClr val="17364A"/>
                 </a:solidFill>
@@ -5693,9 +9085,1346 @@
                 <a:ea typeface="Aptos" pitchFamily="34" charset="-122"/>
                 <a:cs typeface="Aptos" pitchFamily="34" charset="-120"/>
               </a:rPr>
-              <a:t>AI documentation makes systems understandable, reviewable, and accountable. Model cards and system cards are structured documentation tools that describe intended use, data, evaluation, limitations, risks, human oversight, and monitoring. This module helps public health staff create documentation that supports governance review, vendor oversight, public accountability, and incident response.</a:t>
-            </a:r>
-            <a:endParaRPr lang="en-US" sz="1400" dirty="0"/>
+              <a:t>Level: intermediate/practitioner</a:t>
+            </a:r>
+            <a:endParaRPr lang="en-US" sz="1250" dirty="0"/>
+          </a:p>
+          <a:p>
+            <a:pPr indent="0" marL="0">
+              <a:buNone/>
+            </a:pPr>
+            <a:r>
+              <a:rPr lang="en-US" sz="1250" dirty="0">
+                <a:solidFill>
+                  <a:srgbClr val="17364A"/>
+                </a:solidFill>
+                <a:latin typeface="Aptos" pitchFamily="34" charset="0"/>
+                <a:ea typeface="Aptos" pitchFamily="34" charset="-122"/>
+                <a:cs typeface="Aptos" pitchFamily="34" charset="-120"/>
+              </a:rPr>
+              <a:t>Primary track: Governance and Security Track</a:t>
+            </a:r>
+            <a:endParaRPr lang="en-US" sz="1250" dirty="0"/>
+          </a:p>
+          <a:p>
+            <a:pPr indent="0" marL="0">
+              <a:buNone/>
+            </a:pPr>
+            <a:r>
+              <a:rPr lang="en-US" sz="1250" dirty="0">
+                <a:solidFill>
+                  <a:srgbClr val="17364A"/>
+                </a:solidFill>
+                <a:latin typeface="Aptos" pitchFamily="34" charset="0"/>
+                <a:ea typeface="Aptos" pitchFamily="34" charset="-122"/>
+                <a:cs typeface="Aptos" pitchFamily="34" charset="-120"/>
+              </a:rPr>
+              <a:t>Appears in tracks: operations-data-quality</a:t>
+            </a:r>
+            <a:endParaRPr lang="en-US" sz="1250" dirty="0"/>
+          </a:p>
+        </p:txBody>
+      </p:sp>
+      <p:sp>
+        <p:nvSpPr>
+          <p:cNvPr id="12" name="Shape 10"/>
+          <p:cNvSpPr/>
+          <p:nvPr/>
+        </p:nvSpPr>
+        <p:spPr>
+          <a:xfrm>
+            <a:off x="7909560" y="3611880"/>
+            <a:ext cx="3154680" cy="1783080"/>
+          </a:xfrm>
+          <a:prstGeom prst="roundRect">
+            <a:avLst>
+              <a:gd name="adj" fmla="val 6154"/>
+            </a:avLst>
+          </a:prstGeom>
+          <a:solidFill>
+            <a:srgbClr val="EEF8ED"/>
+          </a:solidFill>
+          <a:ln w="12700">
+            <a:solidFill>
+              <a:srgbClr val="B9D7E6"/>
+            </a:solidFill>
+            <a:prstDash val="solid"/>
+          </a:ln>
+        </p:spPr>
+      </p:sp>
+      <p:sp>
+        <p:nvSpPr>
+          <p:cNvPr id="13" name="Text 11"/>
+          <p:cNvSpPr/>
+          <p:nvPr/>
+        </p:nvSpPr>
+        <p:spPr>
+          <a:xfrm>
+            <a:off x="8074152" y="3758184"/>
+            <a:ext cx="2825496" cy="201168"/>
+          </a:xfrm>
+          <a:prstGeom prst="rect">
+            <a:avLst/>
+          </a:prstGeom>
+          <a:noFill/>
+          <a:ln/>
+        </p:spPr>
+        <p:txBody>
+          <a:bodyPr wrap="square" lIns="0" tIns="0" rIns="0" bIns="0" rtlCol="0" anchor="ctr"/>
+          <a:lstStyle/>
+          <a:p>
+            <a:pPr indent="0" marL="0">
+              <a:buNone/>
+            </a:pPr>
+            <a:r>
+              <a:rPr lang="en-US" sz="950" b="1" dirty="0">
+                <a:solidFill>
+                  <a:srgbClr val="0068B7"/>
+                </a:solidFill>
+                <a:latin typeface="Aptos" pitchFamily="34" charset="0"/>
+                <a:ea typeface="Aptos" pitchFamily="34" charset="-122"/>
+                <a:cs typeface="Aptos" pitchFamily="34" charset="-120"/>
+              </a:rPr>
+              <a:t>Learning approach</a:t>
+            </a:r>
+            <a:endParaRPr lang="en-US" sz="950" dirty="0"/>
+          </a:p>
+        </p:txBody>
+      </p:sp>
+      <p:sp>
+        <p:nvSpPr>
+          <p:cNvPr id="14" name="Text 12"/>
+          <p:cNvSpPr/>
+          <p:nvPr/>
+        </p:nvSpPr>
+        <p:spPr>
+          <a:xfrm>
+            <a:off x="8074152" y="4050792"/>
+            <a:ext cx="2825496" cy="1216152"/>
+          </a:xfrm>
+          <a:prstGeom prst="rect">
+            <a:avLst/>
+          </a:prstGeom>
+          <a:noFill/>
+          <a:ln/>
+        </p:spPr>
+        <p:txBody>
+          <a:bodyPr wrap="square" lIns="0" tIns="0" rIns="0" bIns="0" rtlCol="0" anchor="t">
+            <a:normAutofit/>
+          </a:bodyPr>
+          <a:lstStyle/>
+          <a:p>
+            <a:pPr indent="0" marL="0">
+              <a:buNone/>
+            </a:pPr>
+            <a:r>
+              <a:rPr lang="en-US" sz="1250" dirty="0">
+                <a:solidFill>
+                  <a:srgbClr val="17364A"/>
+                </a:solidFill>
+                <a:latin typeface="Aptos" pitchFamily="34" charset="0"/>
+                <a:ea typeface="Aptos" pitchFamily="34" charset="-122"/>
+                <a:cs typeface="Aptos" pitchFamily="34" charset="-120"/>
+              </a:rPr>
+              <a:t>Review the core ideas, complete the practical exercise, check your understanding, and use the related plays and tools to apply the lesson.</a:t>
+            </a:r>
+            <a:endParaRPr lang="en-US" sz="1250" dirty="0"/>
+          </a:p>
+        </p:txBody>
+      </p:sp>
+    </p:spTree>
+  </p:cSld>
+  <p:clrMapOvr>
+    <a:masterClrMapping/>
+  </p:clrMapOvr>
+</p:sld>
+</file>
+
+<file path=ppt/slides/slide20.xml><?xml version="1.0" encoding="utf-8"?>
+<p:sld xmlns:a="http://schemas.openxmlformats.org/drawingml/2006/main" xmlns:r="http://schemas.openxmlformats.org/officeDocument/2006/relationships" xmlns:p="http://schemas.openxmlformats.org/presentationml/2006/main">
+  <p:cSld name="Slide 20">
+    <p:bg>
+      <p:bgPr>
+        <a:solidFill>
+          <a:srgbClr val="F7FBFD"/>
+        </a:solidFill>
+      </p:bgPr>
+    </p:bg>
+    <p:spTree>
+      <p:nvGrpSpPr>
+        <p:cNvPr id="1" name=""/>
+        <p:cNvGrpSpPr/>
+        <p:nvPr/>
+      </p:nvGrpSpPr>
+      <p:grpSpPr>
+        <a:xfrm>
+          <a:off x="0" y="0"/>
+          <a:ext cx="0" cy="0"/>
+          <a:chOff x="0" y="0"/>
+          <a:chExt cx="0" cy="0"/>
+        </a:xfrm>
+      </p:grpSpPr>
+      <p:sp>
+        <p:nvSpPr>
+          <p:cNvPr id="2" name="Shape 0"/>
+          <p:cNvSpPr/>
+          <p:nvPr/>
+        </p:nvSpPr>
+        <p:spPr>
+          <a:xfrm>
+            <a:off x="0" y="0"/>
+            <a:ext cx="12191695" cy="164592"/>
+          </a:xfrm>
+          <a:prstGeom prst="rect">
+            <a:avLst/>
+          </a:prstGeom>
+          <a:solidFill>
+            <a:srgbClr val="0068B7"/>
+          </a:solidFill>
+          <a:ln w="12700">
+            <a:solidFill>
+              <a:srgbClr val="0068B7"/>
+            </a:solidFill>
+            <a:prstDash val="solid"/>
+          </a:ln>
+        </p:spPr>
+      </p:sp>
+      <p:sp>
+        <p:nvSpPr>
+          <p:cNvPr id="3" name="Shape 1"/>
+          <p:cNvSpPr/>
+          <p:nvPr/>
+        </p:nvSpPr>
+        <p:spPr>
+          <a:xfrm>
+            <a:off x="0" y="164592"/>
+            <a:ext cx="146304" cy="6693408"/>
+          </a:xfrm>
+          <a:prstGeom prst="rect">
+            <a:avLst/>
+          </a:prstGeom>
+          <a:solidFill>
+            <a:srgbClr val="2F8A28"/>
+          </a:solidFill>
+          <a:ln w="12700">
+            <a:solidFill>
+              <a:srgbClr val="2F8A28"/>
+            </a:solidFill>
+            <a:prstDash val="solid"/>
+          </a:ln>
+        </p:spPr>
+      </p:sp>
+      <p:sp>
+        <p:nvSpPr>
+          <p:cNvPr id="4" name="Text 2"/>
+          <p:cNvSpPr/>
+          <p:nvPr/>
+        </p:nvSpPr>
+        <p:spPr>
+          <a:xfrm>
+            <a:off x="502920" y="292608"/>
+            <a:ext cx="10149840" cy="256032"/>
+          </a:xfrm>
+          <a:prstGeom prst="rect">
+            <a:avLst/>
+          </a:prstGeom>
+          <a:noFill/>
+          <a:ln/>
+        </p:spPr>
+        <p:txBody>
+          <a:bodyPr wrap="square" lIns="0" tIns="0" rIns="0" bIns="0" rtlCol="0" anchor="ctr"/>
+          <a:lstStyle/>
+          <a:p>
+            <a:pPr indent="0" marL="0">
+              <a:buNone/>
+            </a:pPr>
+            <a:r>
+              <a:rPr lang="en-US" sz="900" b="1" dirty="0">
+                <a:solidFill>
+                  <a:srgbClr val="5F7181"/>
+                </a:solidFill>
+                <a:latin typeface="Aptos" pitchFamily="34" charset="0"/>
+                <a:ea typeface="Aptos" pitchFamily="34" charset="-122"/>
+                <a:cs typeface="Aptos" pitchFamily="34" charset="-120"/>
+              </a:rPr>
+              <a:t>AI Documentation, Model Cards, and System Cards</a:t>
+            </a:r>
+            <a:endParaRPr lang="en-US" sz="900" dirty="0"/>
+          </a:p>
+        </p:txBody>
+      </p:sp>
+      <p:sp>
+        <p:nvSpPr>
+          <p:cNvPr id="5" name="Text 3"/>
+          <p:cNvSpPr/>
+          <p:nvPr/>
+        </p:nvSpPr>
+        <p:spPr>
+          <a:xfrm>
+            <a:off x="502920" y="6537960"/>
+            <a:ext cx="7772400" cy="201168"/>
+          </a:xfrm>
+          <a:prstGeom prst="rect">
+            <a:avLst/>
+          </a:prstGeom>
+          <a:noFill/>
+          <a:ln/>
+        </p:spPr>
+        <p:txBody>
+          <a:bodyPr wrap="square" lIns="0" tIns="0" rIns="0" bIns="0" rtlCol="0" anchor="ctr"/>
+          <a:lstStyle/>
+          <a:p>
+            <a:pPr indent="0" marL="0">
+              <a:buNone/>
+            </a:pPr>
+            <a:r>
+              <a:rPr lang="en-US" sz="800" dirty="0">
+                <a:solidFill>
+                  <a:srgbClr val="5F7181"/>
+                </a:solidFill>
+                <a:latin typeface="Aptos" pitchFamily="34" charset="0"/>
+                <a:ea typeface="Aptos" pitchFamily="34" charset="-122"/>
+                <a:cs typeface="Aptos" pitchFamily="34" charset="-120"/>
+              </a:rPr>
+              <a:t>AI Playbook and Toolkit for Public Health Departments</a:t>
+            </a:r>
+            <a:endParaRPr lang="en-US" sz="800" dirty="0"/>
+          </a:p>
+        </p:txBody>
+      </p:sp>
+      <p:sp>
+        <p:nvSpPr>
+          <p:cNvPr id="6" name="Text 4"/>
+          <p:cNvSpPr/>
+          <p:nvPr/>
+        </p:nvSpPr>
+        <p:spPr>
+          <a:xfrm>
+            <a:off x="9966960" y="6537960"/>
+            <a:ext cx="1645920" cy="201168"/>
+          </a:xfrm>
+          <a:prstGeom prst="rect">
+            <a:avLst/>
+          </a:prstGeom>
+          <a:noFill/>
+          <a:ln/>
+        </p:spPr>
+        <p:txBody>
+          <a:bodyPr wrap="square" lIns="0" tIns="0" rIns="0" bIns="0" rtlCol="0" anchor="ctr"/>
+          <a:lstStyle/>
+          <a:p>
+            <a:pPr algn="r" indent="0" marL="0">
+              <a:buNone/>
+            </a:pPr>
+            <a:r>
+              <a:rPr lang="en-US" sz="800" dirty="0">
+                <a:solidFill>
+                  <a:srgbClr val="5F7181"/>
+                </a:solidFill>
+                <a:latin typeface="Aptos" pitchFamily="34" charset="0"/>
+                <a:ea typeface="Aptos" pitchFamily="34" charset="-122"/>
+                <a:cs typeface="Aptos" pitchFamily="34" charset="-120"/>
+              </a:rPr>
+              <a:t>© Paula Soper</a:t>
+            </a:r>
+            <a:endParaRPr lang="en-US" sz="800" dirty="0"/>
+          </a:p>
+        </p:txBody>
+      </p:sp>
+      <p:sp>
+        <p:nvSpPr>
+          <p:cNvPr id="7" name="Shape 5"/>
+          <p:cNvSpPr/>
+          <p:nvPr/>
+        </p:nvSpPr>
+        <p:spPr>
+          <a:xfrm>
+            <a:off x="640080" y="658368"/>
+            <a:ext cx="420624" cy="420624"/>
+          </a:xfrm>
+          <a:prstGeom prst="ellipse">
+            <a:avLst/>
+          </a:prstGeom>
+          <a:solidFill>
+            <a:srgbClr val="0068B7"/>
+          </a:solidFill>
+          <a:ln w="12700">
+            <a:solidFill>
+              <a:srgbClr val="0068B7"/>
+            </a:solidFill>
+            <a:prstDash val="solid"/>
+          </a:ln>
+        </p:spPr>
+      </p:sp>
+      <p:sp>
+        <p:nvSpPr>
+          <p:cNvPr id="8" name="Text 6"/>
+          <p:cNvSpPr/>
+          <p:nvPr/>
+        </p:nvSpPr>
+        <p:spPr>
+          <a:xfrm>
+            <a:off x="640080" y="731520"/>
+            <a:ext cx="420624" cy="164592"/>
+          </a:xfrm>
+          <a:prstGeom prst="rect">
+            <a:avLst/>
+          </a:prstGeom>
+          <a:noFill/>
+          <a:ln/>
+        </p:spPr>
+        <p:txBody>
+          <a:bodyPr wrap="square" lIns="0" tIns="0" rIns="0" bIns="0" rtlCol="0" anchor="ctr"/>
+          <a:lstStyle/>
+          <a:p>
+            <a:pPr algn="ctr" indent="0" marL="0">
+              <a:buNone/>
+            </a:pPr>
+            <a:r>
+              <a:rPr lang="en-US" sz="1100" b="1" dirty="0">
+                <a:solidFill>
+                  <a:srgbClr val="FFFFFF"/>
+                </a:solidFill>
+                <a:latin typeface="Aptos" pitchFamily="34" charset="0"/>
+                <a:ea typeface="Aptos" pitchFamily="34" charset="-122"/>
+                <a:cs typeface="Aptos" pitchFamily="34" charset="-120"/>
+              </a:rPr>
+              <a:t>14</a:t>
+            </a:r>
+            <a:endParaRPr lang="en-US" sz="1100" dirty="0"/>
+          </a:p>
+        </p:txBody>
+      </p:sp>
+      <p:sp>
+        <p:nvSpPr>
+          <p:cNvPr id="9" name="Text 7"/>
+          <p:cNvSpPr/>
+          <p:nvPr/>
+        </p:nvSpPr>
+        <p:spPr>
+          <a:xfrm>
+            <a:off x="640080" y="621792"/>
+            <a:ext cx="10881360" cy="566928"/>
+          </a:xfrm>
+          <a:prstGeom prst="rect">
+            <a:avLst/>
+          </a:prstGeom>
+          <a:noFill/>
+          <a:ln/>
+        </p:spPr>
+        <p:txBody>
+          <a:bodyPr wrap="square" lIns="0" tIns="0" rIns="0" bIns="0" rtlCol="0" anchor="ctr">
+            <a:normAutofit/>
+          </a:bodyPr>
+          <a:lstStyle/>
+          <a:p>
+            <a:pPr indent="0" marL="0">
+              <a:buNone/>
+            </a:pPr>
+            <a:r>
+              <a:rPr lang="en-US" sz="2700" b="1" dirty="0">
+                <a:solidFill>
+                  <a:srgbClr val="003A63"/>
+                </a:solidFill>
+                <a:latin typeface="Aptos Display" pitchFamily="34" charset="0"/>
+                <a:ea typeface="Aptos Display" pitchFamily="34" charset="-122"/>
+                <a:cs typeface="Aptos Display" pitchFamily="34" charset="-120"/>
+              </a:rPr>
+              <a:t>Knowledge Check</a:t>
+            </a:r>
+            <a:endParaRPr lang="en-US" sz="2700" dirty="0"/>
+          </a:p>
+        </p:txBody>
+      </p:sp>
+      <p:sp>
+        <p:nvSpPr>
+          <p:cNvPr id="10" name="Text 8"/>
+          <p:cNvSpPr/>
+          <p:nvPr/>
+        </p:nvSpPr>
+        <p:spPr>
+          <a:xfrm>
+            <a:off x="868680" y="1417320"/>
+            <a:ext cx="6675120" cy="4434840"/>
+          </a:xfrm>
+          <a:prstGeom prst="rect">
+            <a:avLst/>
+          </a:prstGeom>
+          <a:noFill/>
+          <a:ln/>
+        </p:spPr>
+        <p:txBody>
+          <a:bodyPr wrap="square" lIns="635" tIns="635" rIns="635" bIns="635" rtlCol="0" anchor="t">
+            <a:normAutofit/>
+          </a:bodyPr>
+          <a:lstStyle/>
+          <a:p>
+            <a:r>
+              <a:rPr lang="en-US" sz="1700" dirty="0">
+                <a:solidFill>
+                  <a:srgbClr val="17364A"/>
+                </a:solidFill>
+                <a:latin typeface="Aptos" pitchFamily="34" charset="0"/>
+                <a:ea typeface="Aptos" pitchFamily="34" charset="-122"/>
+                <a:cs typeface="Aptos" pitchFamily="34" charset="-120"/>
+              </a:rPr>
+              <a:t>1. What is the best reason to address ai documentation, model cards, and system cards before deployment?</a:t>
+            </a:r>
+            <a:endParaRPr lang="en-US" sz="1700" dirty="0"/>
+          </a:p>
+          <a:p>
+            <a:r>
+              <a:rPr lang="en-US" sz="1700" dirty="0">
+                <a:solidFill>
+                  <a:srgbClr val="17364A"/>
+                </a:solidFill>
+                <a:latin typeface="Aptos" pitchFamily="34" charset="0"/>
+                <a:ea typeface="Aptos" pitchFamily="34" charset="-122"/>
+                <a:cs typeface="Aptos" pitchFamily="34" charset="-120"/>
+              </a:rPr>
+              <a:t>2. Which practice best supports responsible implementation?</a:t>
+            </a:r>
+            <a:endParaRPr lang="en-US" sz="1700" dirty="0"/>
+          </a:p>
+          <a:p>
+            <a:r>
+              <a:rPr lang="en-US" sz="1700" dirty="0">
+                <a:solidFill>
+                  <a:srgbClr val="17364A"/>
+                </a:solidFill>
+                <a:latin typeface="Aptos" pitchFamily="34" charset="0"/>
+                <a:ea typeface="Aptos" pitchFamily="34" charset="-122"/>
+                <a:cs typeface="Aptos" pitchFamily="34" charset="-120"/>
+              </a:rPr>
+              <a:t>3. Which statement best describes a common failure mode?</a:t>
+            </a:r>
+            <a:endParaRPr lang="en-US" sz="1700" dirty="0"/>
+          </a:p>
+          <a:p>
+            <a:r>
+              <a:rPr lang="en-US" sz="1700" dirty="0">
+                <a:solidFill>
+                  <a:srgbClr val="17364A"/>
+                </a:solidFill>
+                <a:latin typeface="Aptos" pitchFamily="34" charset="0"/>
+                <a:ea typeface="Aptos" pitchFamily="34" charset="-122"/>
+                <a:cs typeface="Aptos" pitchFamily="34" charset="-120"/>
+              </a:rPr>
+              <a:t>4. What should be included in the practical artifact for this module?</a:t>
+            </a:r>
+            <a:endParaRPr lang="en-US" sz="1700" dirty="0"/>
+          </a:p>
+        </p:txBody>
+      </p:sp>
+      <p:sp>
+        <p:nvSpPr>
+          <p:cNvPr id="11" name="Shape 9"/>
+          <p:cNvSpPr/>
+          <p:nvPr/>
+        </p:nvSpPr>
+        <p:spPr>
+          <a:xfrm>
+            <a:off x="7909560" y="1417320"/>
+            <a:ext cx="3154680" cy="1828800"/>
+          </a:xfrm>
+          <a:prstGeom prst="roundRect">
+            <a:avLst>
+              <a:gd name="adj" fmla="val 6000"/>
+            </a:avLst>
+          </a:prstGeom>
+          <a:solidFill>
+            <a:srgbClr val="EEF8ED"/>
+          </a:solidFill>
+          <a:ln w="12700">
+            <a:solidFill>
+              <a:srgbClr val="B9D7E6"/>
+            </a:solidFill>
+            <a:prstDash val="solid"/>
+          </a:ln>
+        </p:spPr>
+      </p:sp>
+      <p:sp>
+        <p:nvSpPr>
+          <p:cNvPr id="12" name="Text 10"/>
+          <p:cNvSpPr/>
+          <p:nvPr/>
+        </p:nvSpPr>
+        <p:spPr>
+          <a:xfrm>
+            <a:off x="8074152" y="1563624"/>
+            <a:ext cx="2825496" cy="201168"/>
+          </a:xfrm>
+          <a:prstGeom prst="rect">
+            <a:avLst/>
+          </a:prstGeom>
+          <a:noFill/>
+          <a:ln/>
+        </p:spPr>
+        <p:txBody>
+          <a:bodyPr wrap="square" lIns="0" tIns="0" rIns="0" bIns="0" rtlCol="0" anchor="ctr"/>
+          <a:lstStyle/>
+          <a:p>
+            <a:pPr indent="0" marL="0">
+              <a:buNone/>
+            </a:pPr>
+            <a:r>
+              <a:rPr lang="en-US" sz="950" b="1" dirty="0">
+                <a:solidFill>
+                  <a:srgbClr val="0068B7"/>
+                </a:solidFill>
+                <a:latin typeface="Aptos" pitchFamily="34" charset="0"/>
+                <a:ea typeface="Aptos" pitchFamily="34" charset="-122"/>
+                <a:cs typeface="Aptos" pitchFamily="34" charset="-120"/>
+              </a:rPr>
+              <a:t>Key idea</a:t>
+            </a:r>
+            <a:endParaRPr lang="en-US" sz="950" dirty="0"/>
+          </a:p>
+        </p:txBody>
+      </p:sp>
+      <p:sp>
+        <p:nvSpPr>
+          <p:cNvPr id="13" name="Text 11"/>
+          <p:cNvSpPr/>
+          <p:nvPr/>
+        </p:nvSpPr>
+        <p:spPr>
+          <a:xfrm>
+            <a:off x="8074152" y="1856232"/>
+            <a:ext cx="2825496" cy="1261872"/>
+          </a:xfrm>
+          <a:prstGeom prst="rect">
+            <a:avLst/>
+          </a:prstGeom>
+          <a:noFill/>
+          <a:ln/>
+        </p:spPr>
+        <p:txBody>
+          <a:bodyPr wrap="square" lIns="0" tIns="0" rIns="0" bIns="0" rtlCol="0" anchor="t">
+            <a:normAutofit/>
+          </a:bodyPr>
+          <a:lstStyle/>
+          <a:p>
+            <a:pPr indent="0" marL="0">
+              <a:buNone/>
+            </a:pPr>
+            <a:r>
+              <a:rPr lang="en-US" sz="1250" dirty="0">
+                <a:solidFill>
+                  <a:srgbClr val="17364A"/>
+                </a:solidFill>
+                <a:latin typeface="Aptos" pitchFamily="34" charset="0"/>
+                <a:ea typeface="Aptos" pitchFamily="34" charset="-122"/>
+                <a:cs typeface="Aptos" pitchFamily="34" charset="-120"/>
+              </a:rPr>
+              <a:t>1. What is the best reason to address ai documentation, model cards, and system cards before deployment?</a:t>
+            </a:r>
+            <a:endParaRPr lang="en-US" sz="1250" dirty="0"/>
+          </a:p>
+        </p:txBody>
+      </p:sp>
+      <p:sp>
+        <p:nvSpPr>
+          <p:cNvPr id="14" name="Shape 12"/>
+          <p:cNvSpPr/>
+          <p:nvPr/>
+        </p:nvSpPr>
+        <p:spPr>
+          <a:xfrm>
+            <a:off x="7909560" y="3520440"/>
+            <a:ext cx="3154680" cy="1737360"/>
+          </a:xfrm>
+          <a:prstGeom prst="roundRect">
+            <a:avLst>
+              <a:gd name="adj" fmla="val 6316"/>
+            </a:avLst>
+          </a:prstGeom>
+          <a:solidFill>
+            <a:srgbClr val="EAF6F8"/>
+          </a:solidFill>
+          <a:ln w="12700">
+            <a:solidFill>
+              <a:srgbClr val="B9D7E6"/>
+            </a:solidFill>
+            <a:prstDash val="solid"/>
+          </a:ln>
+        </p:spPr>
+      </p:sp>
+      <p:sp>
+        <p:nvSpPr>
+          <p:cNvPr id="15" name="Text 13"/>
+          <p:cNvSpPr/>
+          <p:nvPr/>
+        </p:nvSpPr>
+        <p:spPr>
+          <a:xfrm>
+            <a:off x="8074152" y="3666744"/>
+            <a:ext cx="2825496" cy="201168"/>
+          </a:xfrm>
+          <a:prstGeom prst="rect">
+            <a:avLst/>
+          </a:prstGeom>
+          <a:noFill/>
+          <a:ln/>
+        </p:spPr>
+        <p:txBody>
+          <a:bodyPr wrap="square" lIns="0" tIns="0" rIns="0" bIns="0" rtlCol="0" anchor="ctr"/>
+          <a:lstStyle/>
+          <a:p>
+            <a:pPr indent="0" marL="0">
+              <a:buNone/>
+            </a:pPr>
+            <a:r>
+              <a:rPr lang="en-US" sz="950" b="1" dirty="0">
+                <a:solidFill>
+                  <a:srgbClr val="0068B7"/>
+                </a:solidFill>
+                <a:latin typeface="Aptos" pitchFamily="34" charset="0"/>
+                <a:ea typeface="Aptos" pitchFamily="34" charset="-122"/>
+                <a:cs typeface="Aptos" pitchFamily="34" charset="-120"/>
+              </a:rPr>
+              <a:t>Use this for</a:t>
+            </a:r>
+            <a:endParaRPr lang="en-US" sz="950" dirty="0"/>
+          </a:p>
+        </p:txBody>
+      </p:sp>
+      <p:sp>
+        <p:nvSpPr>
+          <p:cNvPr id="16" name="Text 14"/>
+          <p:cNvSpPr/>
+          <p:nvPr/>
+        </p:nvSpPr>
+        <p:spPr>
+          <a:xfrm>
+            <a:off x="8074152" y="3959352"/>
+            <a:ext cx="2825496" cy="1170432"/>
+          </a:xfrm>
+          <a:prstGeom prst="rect">
+            <a:avLst/>
+          </a:prstGeom>
+          <a:noFill/>
+          <a:ln/>
+        </p:spPr>
+        <p:txBody>
+          <a:bodyPr wrap="square" lIns="0" tIns="0" rIns="0" bIns="0" rtlCol="0" anchor="t">
+            <a:normAutofit/>
+          </a:bodyPr>
+          <a:lstStyle/>
+          <a:p>
+            <a:pPr indent="0" marL="0">
+              <a:buNone/>
+            </a:pPr>
+            <a:r>
+              <a:rPr lang="en-US" sz="1250" dirty="0">
+                <a:solidFill>
+                  <a:srgbClr val="17364A"/>
+                </a:solidFill>
+                <a:latin typeface="Aptos" pitchFamily="34" charset="0"/>
+                <a:ea typeface="Aptos" pitchFamily="34" charset="-122"/>
+                <a:cs typeface="Aptos" pitchFamily="34" charset="-120"/>
+              </a:rPr>
+              <a:t>Connect the concept to public health decisions, safeguards, documentation, or implementation work.</a:t>
+            </a:r>
+            <a:endParaRPr lang="en-US" sz="1250" dirty="0"/>
+          </a:p>
+        </p:txBody>
+      </p:sp>
+    </p:spTree>
+  </p:cSld>
+  <p:clrMapOvr>
+    <a:masterClrMapping/>
+  </p:clrMapOvr>
+</p:sld>
+</file>
+
+<file path=ppt/slides/slide21.xml><?xml version="1.0" encoding="utf-8"?>
+<p:sld xmlns:a="http://schemas.openxmlformats.org/drawingml/2006/main" xmlns:r="http://schemas.openxmlformats.org/officeDocument/2006/relationships" xmlns:p="http://schemas.openxmlformats.org/presentationml/2006/main">
+  <p:cSld name="Slide 21">
+    <p:bg>
+      <p:bgPr>
+        <a:solidFill>
+          <a:srgbClr val="F7FBFD"/>
+        </a:solidFill>
+      </p:bgPr>
+    </p:bg>
+    <p:spTree>
+      <p:nvGrpSpPr>
+        <p:cNvPr id="1" name=""/>
+        <p:cNvGrpSpPr/>
+        <p:nvPr/>
+      </p:nvGrpSpPr>
+      <p:grpSpPr>
+        <a:xfrm>
+          <a:off x="0" y="0"/>
+          <a:ext cx="0" cy="0"/>
+          <a:chOff x="0" y="0"/>
+          <a:chExt cx="0" cy="0"/>
+        </a:xfrm>
+      </p:grpSpPr>
+      <p:sp>
+        <p:nvSpPr>
+          <p:cNvPr id="2" name="Shape 0"/>
+          <p:cNvSpPr/>
+          <p:nvPr/>
+        </p:nvSpPr>
+        <p:spPr>
+          <a:xfrm>
+            <a:off x="0" y="0"/>
+            <a:ext cx="12191695" cy="164592"/>
+          </a:xfrm>
+          <a:prstGeom prst="rect">
+            <a:avLst/>
+          </a:prstGeom>
+          <a:solidFill>
+            <a:srgbClr val="0068B7"/>
+          </a:solidFill>
+          <a:ln w="12700">
+            <a:solidFill>
+              <a:srgbClr val="0068B7"/>
+            </a:solidFill>
+            <a:prstDash val="solid"/>
+          </a:ln>
+        </p:spPr>
+      </p:sp>
+      <p:sp>
+        <p:nvSpPr>
+          <p:cNvPr id="3" name="Shape 1"/>
+          <p:cNvSpPr/>
+          <p:nvPr/>
+        </p:nvSpPr>
+        <p:spPr>
+          <a:xfrm>
+            <a:off x="0" y="164592"/>
+            <a:ext cx="146304" cy="6693408"/>
+          </a:xfrm>
+          <a:prstGeom prst="rect">
+            <a:avLst/>
+          </a:prstGeom>
+          <a:solidFill>
+            <a:srgbClr val="2F8A28"/>
+          </a:solidFill>
+          <a:ln w="12700">
+            <a:solidFill>
+              <a:srgbClr val="2F8A28"/>
+            </a:solidFill>
+            <a:prstDash val="solid"/>
+          </a:ln>
+        </p:spPr>
+      </p:sp>
+      <p:sp>
+        <p:nvSpPr>
+          <p:cNvPr id="4" name="Text 2"/>
+          <p:cNvSpPr/>
+          <p:nvPr/>
+        </p:nvSpPr>
+        <p:spPr>
+          <a:xfrm>
+            <a:off x="502920" y="292608"/>
+            <a:ext cx="10149840" cy="256032"/>
+          </a:xfrm>
+          <a:prstGeom prst="rect">
+            <a:avLst/>
+          </a:prstGeom>
+          <a:noFill/>
+          <a:ln/>
+        </p:spPr>
+        <p:txBody>
+          <a:bodyPr wrap="square" lIns="0" tIns="0" rIns="0" bIns="0" rtlCol="0" anchor="ctr"/>
+          <a:lstStyle/>
+          <a:p>
+            <a:pPr indent="0" marL="0">
+              <a:buNone/>
+            </a:pPr>
+            <a:r>
+              <a:rPr lang="en-US" sz="900" b="1" dirty="0">
+                <a:solidFill>
+                  <a:srgbClr val="5F7181"/>
+                </a:solidFill>
+                <a:latin typeface="Aptos" pitchFamily="34" charset="0"/>
+                <a:ea typeface="Aptos" pitchFamily="34" charset="-122"/>
+                <a:cs typeface="Aptos" pitchFamily="34" charset="-120"/>
+              </a:rPr>
+              <a:t>AI Documentation, Model Cards, and System Cards</a:t>
+            </a:r>
+            <a:endParaRPr lang="en-US" sz="900" dirty="0"/>
+          </a:p>
+        </p:txBody>
+      </p:sp>
+      <p:sp>
+        <p:nvSpPr>
+          <p:cNvPr id="5" name="Text 3"/>
+          <p:cNvSpPr/>
+          <p:nvPr/>
+        </p:nvSpPr>
+        <p:spPr>
+          <a:xfrm>
+            <a:off x="502920" y="6537960"/>
+            <a:ext cx="7772400" cy="201168"/>
+          </a:xfrm>
+          <a:prstGeom prst="rect">
+            <a:avLst/>
+          </a:prstGeom>
+          <a:noFill/>
+          <a:ln/>
+        </p:spPr>
+        <p:txBody>
+          <a:bodyPr wrap="square" lIns="0" tIns="0" rIns="0" bIns="0" rtlCol="0" anchor="ctr"/>
+          <a:lstStyle/>
+          <a:p>
+            <a:pPr indent="0" marL="0">
+              <a:buNone/>
+            </a:pPr>
+            <a:r>
+              <a:rPr lang="en-US" sz="800" dirty="0">
+                <a:solidFill>
+                  <a:srgbClr val="5F7181"/>
+                </a:solidFill>
+                <a:latin typeface="Aptos" pitchFamily="34" charset="0"/>
+                <a:ea typeface="Aptos" pitchFamily="34" charset="-122"/>
+                <a:cs typeface="Aptos" pitchFamily="34" charset="-120"/>
+              </a:rPr>
+              <a:t>AI Playbook and Toolkit for Public Health Departments</a:t>
+            </a:r>
+            <a:endParaRPr lang="en-US" sz="800" dirty="0"/>
+          </a:p>
+        </p:txBody>
+      </p:sp>
+      <p:sp>
+        <p:nvSpPr>
+          <p:cNvPr id="6" name="Text 4"/>
+          <p:cNvSpPr/>
+          <p:nvPr/>
+        </p:nvSpPr>
+        <p:spPr>
+          <a:xfrm>
+            <a:off x="9966960" y="6537960"/>
+            <a:ext cx="1645920" cy="201168"/>
+          </a:xfrm>
+          <a:prstGeom prst="rect">
+            <a:avLst/>
+          </a:prstGeom>
+          <a:noFill/>
+          <a:ln/>
+        </p:spPr>
+        <p:txBody>
+          <a:bodyPr wrap="square" lIns="0" tIns="0" rIns="0" bIns="0" rtlCol="0" anchor="ctr"/>
+          <a:lstStyle/>
+          <a:p>
+            <a:pPr algn="r" indent="0" marL="0">
+              <a:buNone/>
+            </a:pPr>
+            <a:r>
+              <a:rPr lang="en-US" sz="800" dirty="0">
+                <a:solidFill>
+                  <a:srgbClr val="5F7181"/>
+                </a:solidFill>
+                <a:latin typeface="Aptos" pitchFamily="34" charset="0"/>
+                <a:ea typeface="Aptos" pitchFamily="34" charset="-122"/>
+                <a:cs typeface="Aptos" pitchFamily="34" charset="-120"/>
+              </a:rPr>
+              <a:t>© Paula Soper</a:t>
+            </a:r>
+            <a:endParaRPr lang="en-US" sz="800" dirty="0"/>
+          </a:p>
+        </p:txBody>
+      </p:sp>
+      <p:sp>
+        <p:nvSpPr>
+          <p:cNvPr id="7" name="Shape 5"/>
+          <p:cNvSpPr/>
+          <p:nvPr/>
+        </p:nvSpPr>
+        <p:spPr>
+          <a:xfrm>
+            <a:off x="640080" y="658368"/>
+            <a:ext cx="420624" cy="420624"/>
+          </a:xfrm>
+          <a:prstGeom prst="ellipse">
+            <a:avLst/>
+          </a:prstGeom>
+          <a:solidFill>
+            <a:srgbClr val="0068B7"/>
+          </a:solidFill>
+          <a:ln w="12700">
+            <a:solidFill>
+              <a:srgbClr val="0068B7"/>
+            </a:solidFill>
+            <a:prstDash val="solid"/>
+          </a:ln>
+        </p:spPr>
+      </p:sp>
+      <p:sp>
+        <p:nvSpPr>
+          <p:cNvPr id="8" name="Text 6"/>
+          <p:cNvSpPr/>
+          <p:nvPr/>
+        </p:nvSpPr>
+        <p:spPr>
+          <a:xfrm>
+            <a:off x="640080" y="731520"/>
+            <a:ext cx="420624" cy="164592"/>
+          </a:xfrm>
+          <a:prstGeom prst="rect">
+            <a:avLst/>
+          </a:prstGeom>
+          <a:noFill/>
+          <a:ln/>
+        </p:spPr>
+        <p:txBody>
+          <a:bodyPr wrap="square" lIns="0" tIns="0" rIns="0" bIns="0" rtlCol="0" anchor="ctr"/>
+          <a:lstStyle/>
+          <a:p>
+            <a:pPr algn="ctr" indent="0" marL="0">
+              <a:buNone/>
+            </a:pPr>
+            <a:r>
+              <a:rPr lang="en-US" sz="1100" b="1" dirty="0">
+                <a:solidFill>
+                  <a:srgbClr val="FFFFFF"/>
+                </a:solidFill>
+                <a:latin typeface="Aptos" pitchFamily="34" charset="0"/>
+                <a:ea typeface="Aptos" pitchFamily="34" charset="-122"/>
+                <a:cs typeface="Aptos" pitchFamily="34" charset="-120"/>
+              </a:rPr>
+              <a:t>15</a:t>
+            </a:r>
+            <a:endParaRPr lang="en-US" sz="1100" dirty="0"/>
+          </a:p>
+        </p:txBody>
+      </p:sp>
+      <p:sp>
+        <p:nvSpPr>
+          <p:cNvPr id="9" name="Text 7"/>
+          <p:cNvSpPr/>
+          <p:nvPr/>
+        </p:nvSpPr>
+        <p:spPr>
+          <a:xfrm>
+            <a:off x="640080" y="621792"/>
+            <a:ext cx="10881360" cy="566928"/>
+          </a:xfrm>
+          <a:prstGeom prst="rect">
+            <a:avLst/>
+          </a:prstGeom>
+          <a:noFill/>
+          <a:ln/>
+        </p:spPr>
+        <p:txBody>
+          <a:bodyPr wrap="square" lIns="0" tIns="0" rIns="0" bIns="0" rtlCol="0" anchor="ctr">
+            <a:normAutofit/>
+          </a:bodyPr>
+          <a:lstStyle/>
+          <a:p>
+            <a:pPr indent="0" marL="0">
+              <a:buNone/>
+            </a:pPr>
+            <a:r>
+              <a:rPr lang="en-US" sz="2700" b="1" dirty="0">
+                <a:solidFill>
+                  <a:srgbClr val="003A63"/>
+                </a:solidFill>
+                <a:latin typeface="Aptos Display" pitchFamily="34" charset="0"/>
+                <a:ea typeface="Aptos Display" pitchFamily="34" charset="-122"/>
+                <a:cs typeface="Aptos Display" pitchFamily="34" charset="-120"/>
+              </a:rPr>
+              <a:t>References and Resources</a:t>
+            </a:r>
+            <a:endParaRPr lang="en-US" sz="2700" dirty="0"/>
+          </a:p>
+        </p:txBody>
+      </p:sp>
+      <p:sp>
+        <p:nvSpPr>
+          <p:cNvPr id="10" name="Text 8"/>
+          <p:cNvSpPr/>
+          <p:nvPr/>
+        </p:nvSpPr>
+        <p:spPr>
+          <a:xfrm>
+            <a:off x="868680" y="1417320"/>
+            <a:ext cx="6675120" cy="4434840"/>
+          </a:xfrm>
+          <a:prstGeom prst="rect">
+            <a:avLst/>
+          </a:prstGeom>
+          <a:noFill/>
+          <a:ln/>
+        </p:spPr>
+        <p:txBody>
+          <a:bodyPr wrap="square" lIns="635" tIns="635" rIns="635" bIns="635" rtlCol="0" anchor="t">
+            <a:normAutofit/>
+          </a:bodyPr>
+          <a:lstStyle/>
+          <a:p>
+            <a:r>
+              <a:rPr lang="en-US" sz="1700" dirty="0">
+                <a:solidFill>
+                  <a:srgbClr val="17364A"/>
+                </a:solidFill>
+                <a:latin typeface="Aptos" pitchFamily="34" charset="0"/>
+                <a:ea typeface="Aptos" pitchFamily="34" charset="-122"/>
+                <a:cs typeface="Aptos" pitchFamily="34" charset="-120"/>
+              </a:rPr>
+              <a:t>NIST AI Risk Management Framework: https://www.nist.gov/itl/ai-risk-management-framework</a:t>
+            </a:r>
+            <a:endParaRPr lang="en-US" sz="1700" dirty="0"/>
+          </a:p>
+          <a:p>
+            <a:r>
+              <a:rPr lang="en-US" sz="1700" dirty="0">
+                <a:solidFill>
+                  <a:srgbClr val="17364A"/>
+                </a:solidFill>
+                <a:latin typeface="Aptos" pitchFamily="34" charset="0"/>
+                <a:ea typeface="Aptos" pitchFamily="34" charset="-122"/>
+                <a:cs typeface="Aptos" pitchFamily="34" charset="-120"/>
+              </a:rPr>
+              <a:t>NIST Generative AI Profile:.</a:t>
+            </a:r>
+            <a:endParaRPr lang="en-US" sz="1700" dirty="0"/>
+          </a:p>
+          <a:p>
+            <a:r>
+              <a:rPr lang="en-US" sz="1700" dirty="0">
+                <a:solidFill>
+                  <a:srgbClr val="17364A"/>
+                </a:solidFill>
+                <a:latin typeface="Aptos" pitchFamily="34" charset="0"/>
+                <a:ea typeface="Aptos" pitchFamily="34" charset="-122"/>
+                <a:cs typeface="Aptos" pitchFamily="34" charset="-120"/>
+              </a:rPr>
+              <a:t>CDC Public Health Data Strategy and Data Modernization resources:.</a:t>
+            </a:r>
+            <a:endParaRPr lang="en-US" sz="1700" dirty="0"/>
+          </a:p>
+          <a:p>
+            <a:r>
+              <a:rPr lang="en-US" sz="1700" dirty="0">
+                <a:solidFill>
+                  <a:srgbClr val="17364A"/>
+                </a:solidFill>
+                <a:latin typeface="Aptos" pitchFamily="34" charset="0"/>
+                <a:ea typeface="Aptos" pitchFamily="34" charset="-122"/>
+                <a:cs typeface="Aptos" pitchFamily="34" charset="-120"/>
+              </a:rPr>
+              <a:t>OWASP Top 10 for LLM Applications, when security or AI integrations are relevant</a:t>
+            </a:r>
+            <a:endParaRPr lang="en-US" sz="1700" dirty="0"/>
+          </a:p>
+        </p:txBody>
+      </p:sp>
+      <p:sp>
+        <p:nvSpPr>
+          <p:cNvPr id="11" name="Shape 9"/>
+          <p:cNvSpPr/>
+          <p:nvPr/>
+        </p:nvSpPr>
+        <p:spPr>
+          <a:xfrm>
+            <a:off x="7909560" y="1417320"/>
+            <a:ext cx="3154680" cy="1828800"/>
+          </a:xfrm>
+          <a:prstGeom prst="roundRect">
+            <a:avLst>
+              <a:gd name="adj" fmla="val 6000"/>
+            </a:avLst>
+          </a:prstGeom>
+          <a:solidFill>
+            <a:srgbClr val="EEF8ED"/>
+          </a:solidFill>
+          <a:ln w="12700">
+            <a:solidFill>
+              <a:srgbClr val="B9D7E6"/>
+            </a:solidFill>
+            <a:prstDash val="solid"/>
+          </a:ln>
+        </p:spPr>
+      </p:sp>
+      <p:sp>
+        <p:nvSpPr>
+          <p:cNvPr id="12" name="Text 10"/>
+          <p:cNvSpPr/>
+          <p:nvPr/>
+        </p:nvSpPr>
+        <p:spPr>
+          <a:xfrm>
+            <a:off x="8074152" y="1563624"/>
+            <a:ext cx="2825496" cy="201168"/>
+          </a:xfrm>
+          <a:prstGeom prst="rect">
+            <a:avLst/>
+          </a:prstGeom>
+          <a:noFill/>
+          <a:ln/>
+        </p:spPr>
+        <p:txBody>
+          <a:bodyPr wrap="square" lIns="0" tIns="0" rIns="0" bIns="0" rtlCol="0" anchor="ctr"/>
+          <a:lstStyle/>
+          <a:p>
+            <a:pPr indent="0" marL="0">
+              <a:buNone/>
+            </a:pPr>
+            <a:r>
+              <a:rPr lang="en-US" sz="950" b="1" dirty="0">
+                <a:solidFill>
+                  <a:srgbClr val="0068B7"/>
+                </a:solidFill>
+                <a:latin typeface="Aptos" pitchFamily="34" charset="0"/>
+                <a:ea typeface="Aptos" pitchFamily="34" charset="-122"/>
+                <a:cs typeface="Aptos" pitchFamily="34" charset="-120"/>
+              </a:rPr>
+              <a:t>Key idea</a:t>
+            </a:r>
+            <a:endParaRPr lang="en-US" sz="950" dirty="0"/>
+          </a:p>
+        </p:txBody>
+      </p:sp>
+      <p:sp>
+        <p:nvSpPr>
+          <p:cNvPr id="13" name="Text 11"/>
+          <p:cNvSpPr/>
+          <p:nvPr/>
+        </p:nvSpPr>
+        <p:spPr>
+          <a:xfrm>
+            <a:off x="8074152" y="1856232"/>
+            <a:ext cx="2825496" cy="1261872"/>
+          </a:xfrm>
+          <a:prstGeom prst="rect">
+            <a:avLst/>
+          </a:prstGeom>
+          <a:noFill/>
+          <a:ln/>
+        </p:spPr>
+        <p:txBody>
+          <a:bodyPr wrap="square" lIns="0" tIns="0" rIns="0" bIns="0" rtlCol="0" anchor="t">
+            <a:normAutofit/>
+          </a:bodyPr>
+          <a:lstStyle/>
+          <a:p>
+            <a:pPr indent="0" marL="0">
+              <a:buNone/>
+            </a:pPr>
+            <a:r>
+              <a:rPr lang="en-US" sz="1250" dirty="0">
+                <a:solidFill>
+                  <a:srgbClr val="17364A"/>
+                </a:solidFill>
+                <a:latin typeface="Aptos" pitchFamily="34" charset="0"/>
+                <a:ea typeface="Aptos" pitchFamily="34" charset="-122"/>
+                <a:cs typeface="Aptos" pitchFamily="34" charset="-120"/>
+              </a:rPr>
+              <a:t>NIST AI Risk Management Framework: https://www.nist.gov/itl/ai-risk-management-framework</a:t>
+            </a:r>
+            <a:endParaRPr lang="en-US" sz="1250" dirty="0"/>
+          </a:p>
+        </p:txBody>
+      </p:sp>
+      <p:sp>
+        <p:nvSpPr>
+          <p:cNvPr id="14" name="Shape 12"/>
+          <p:cNvSpPr/>
+          <p:nvPr/>
+        </p:nvSpPr>
+        <p:spPr>
+          <a:xfrm>
+            <a:off x="7909560" y="3520440"/>
+            <a:ext cx="3154680" cy="1737360"/>
+          </a:xfrm>
+          <a:prstGeom prst="roundRect">
+            <a:avLst>
+              <a:gd name="adj" fmla="val 6316"/>
+            </a:avLst>
+          </a:prstGeom>
+          <a:solidFill>
+            <a:srgbClr val="EAF6F8"/>
+          </a:solidFill>
+          <a:ln w="12700">
+            <a:solidFill>
+              <a:srgbClr val="B9D7E6"/>
+            </a:solidFill>
+            <a:prstDash val="solid"/>
+          </a:ln>
+        </p:spPr>
+      </p:sp>
+      <p:sp>
+        <p:nvSpPr>
+          <p:cNvPr id="15" name="Text 13"/>
+          <p:cNvSpPr/>
+          <p:nvPr/>
+        </p:nvSpPr>
+        <p:spPr>
+          <a:xfrm>
+            <a:off x="8074152" y="3666744"/>
+            <a:ext cx="2825496" cy="201168"/>
+          </a:xfrm>
+          <a:prstGeom prst="rect">
+            <a:avLst/>
+          </a:prstGeom>
+          <a:noFill/>
+          <a:ln/>
+        </p:spPr>
+        <p:txBody>
+          <a:bodyPr wrap="square" lIns="0" tIns="0" rIns="0" bIns="0" rtlCol="0" anchor="ctr"/>
+          <a:lstStyle/>
+          <a:p>
+            <a:pPr indent="0" marL="0">
+              <a:buNone/>
+            </a:pPr>
+            <a:r>
+              <a:rPr lang="en-US" sz="950" b="1" dirty="0">
+                <a:solidFill>
+                  <a:srgbClr val="0068B7"/>
+                </a:solidFill>
+                <a:latin typeface="Aptos" pitchFamily="34" charset="0"/>
+                <a:ea typeface="Aptos" pitchFamily="34" charset="-122"/>
+                <a:cs typeface="Aptos" pitchFamily="34" charset="-120"/>
+              </a:rPr>
+              <a:t>Use this for</a:t>
+            </a:r>
+            <a:endParaRPr lang="en-US" sz="950" dirty="0"/>
+          </a:p>
+        </p:txBody>
+      </p:sp>
+      <p:sp>
+        <p:nvSpPr>
+          <p:cNvPr id="16" name="Text 14"/>
+          <p:cNvSpPr/>
+          <p:nvPr/>
+        </p:nvSpPr>
+        <p:spPr>
+          <a:xfrm>
+            <a:off x="8074152" y="3959352"/>
+            <a:ext cx="2825496" cy="1170432"/>
+          </a:xfrm>
+          <a:prstGeom prst="rect">
+            <a:avLst/>
+          </a:prstGeom>
+          <a:noFill/>
+          <a:ln/>
+        </p:spPr>
+        <p:txBody>
+          <a:bodyPr wrap="square" lIns="0" tIns="0" rIns="0" bIns="0" rtlCol="0" anchor="t">
+            <a:normAutofit/>
+          </a:bodyPr>
+          <a:lstStyle/>
+          <a:p>
+            <a:pPr indent="0" marL="0">
+              <a:buNone/>
+            </a:pPr>
+            <a:r>
+              <a:rPr lang="en-US" sz="1250" dirty="0">
+                <a:solidFill>
+                  <a:srgbClr val="17364A"/>
+                </a:solidFill>
+                <a:latin typeface="Aptos" pitchFamily="34" charset="0"/>
+                <a:ea typeface="Aptos" pitchFamily="34" charset="-122"/>
+                <a:cs typeface="Aptos" pitchFamily="34" charset="-120"/>
+              </a:rPr>
+              <a:t>Connect the concept to public health decisions, safeguards, documentation, or implementation work.</a:t>
+            </a:r>
+            <a:endParaRPr lang="en-US" sz="1250" dirty="0"/>
           </a:p>
         </p:txBody>
       </p:sp>
@@ -5758,7 +10487,32 @@
       </p:sp>
       <p:sp>
         <p:nvSpPr>
-          <p:cNvPr id="3" name="Text 1"/>
+          <p:cNvPr id="3" name="Shape 1"/>
+          <p:cNvSpPr/>
+          <p:nvPr/>
+        </p:nvSpPr>
+        <p:spPr>
+          <a:xfrm>
+            <a:off x="0" y="164592"/>
+            <a:ext cx="146304" cy="6693408"/>
+          </a:xfrm>
+          <a:prstGeom prst="rect">
+            <a:avLst/>
+          </a:prstGeom>
+          <a:solidFill>
+            <a:srgbClr val="2F8A28"/>
+          </a:solidFill>
+          <a:ln w="12700">
+            <a:solidFill>
+              <a:srgbClr val="2F8A28"/>
+            </a:solidFill>
+            <a:prstDash val="solid"/>
+          </a:ln>
+        </p:spPr>
+      </p:sp>
+      <p:sp>
+        <p:nvSpPr>
+          <p:cNvPr id="4" name="Text 2"/>
           <p:cNvSpPr/>
           <p:nvPr/>
         </p:nvSpPr>
@@ -5797,7 +10551,7 @@
       </p:sp>
       <p:sp>
         <p:nvSpPr>
-          <p:cNvPr id="4" name="Text 2"/>
+          <p:cNvPr id="5" name="Text 3"/>
           <p:cNvSpPr/>
           <p:nvPr/>
         </p:nvSpPr>
@@ -5836,7 +10590,7 @@
       </p:sp>
       <p:sp>
         <p:nvSpPr>
-          <p:cNvPr id="5" name="Text 3"/>
+          <p:cNvPr id="6" name="Text 4"/>
           <p:cNvSpPr/>
           <p:nvPr/>
         </p:nvSpPr>
@@ -5875,7 +10629,7 @@
       </p:sp>
       <p:sp>
         <p:nvSpPr>
-          <p:cNvPr id="6" name="Text 4"/>
+          <p:cNvPr id="7" name="Text 5"/>
           <p:cNvSpPr/>
           <p:nvPr/>
         </p:nvSpPr>
@@ -5908,7 +10662,7 @@
                 <a:ea typeface="Aptos Display" pitchFamily="34" charset="-122"/>
                 <a:cs typeface="Aptos Display" pitchFamily="34" charset="-120"/>
               </a:rPr>
-              <a:t>Learning Objectives</a:t>
+              <a:t>How this module connects to the playbook</a:t>
             </a:r>
             <a:endParaRPr lang="en-US" sz="2700" dirty="0"/>
           </a:p>
@@ -5916,14 +10670,14 @@
       </p:sp>
       <p:sp>
         <p:nvSpPr>
-          <p:cNvPr id="7" name="Text 5"/>
-          <p:cNvSpPr/>
-          <p:nvPr/>
-        </p:nvSpPr>
-        <p:spPr>
-          <a:xfrm>
-            <a:off x="822960" y="1325880"/>
-            <a:ext cx="10378440" cy="4800600"/>
+          <p:cNvPr id="8" name="Text 6"/>
+          <p:cNvSpPr/>
+          <p:nvPr/>
+        </p:nvSpPr>
+        <p:spPr>
+          <a:xfrm>
+            <a:off x="868680" y="1417320"/>
+            <a:ext cx="6903720" cy="4480560"/>
           </a:xfrm>
           <a:prstGeom prst="rect">
             <a:avLst/>
@@ -5938,7 +10692,7 @@
           <a:lstStyle/>
           <a:p>
             <a:r>
-              <a:rPr lang="en-US" sz="1450" dirty="0">
+              <a:rPr lang="en-US" sz="1540" dirty="0">
                 <a:solidFill>
                   <a:srgbClr val="17364A"/>
                 </a:solidFill>
@@ -5946,13 +10700,13 @@
                 <a:ea typeface="Aptos" pitchFamily="34" charset="-122"/>
                 <a:cs typeface="Aptos" pitchFamily="34" charset="-120"/>
               </a:rPr>
-              <a:t>Explain the purpose of ai documentation, model cards, and system cards in public health AI work.</a:t>
-            </a:r>
-            <a:endParaRPr lang="en-US" sz="1450" dirty="0"/>
-          </a:p>
-          <a:p>
-            <a:r>
-              <a:rPr lang="en-US" sz="1450" dirty="0">
+              <a:t>Play 11: Build and Deploy AI Solutions - This lesson informs Play 11 by helping learners connect the lesson topic to build and deploy.</a:t>
+            </a:r>
+            <a:endParaRPr lang="en-US" sz="1540" dirty="0"/>
+          </a:p>
+          <a:p>
+            <a:r>
+              <a:rPr lang="en-US" sz="1540" dirty="0">
                 <a:solidFill>
                   <a:srgbClr val="17364A"/>
                 </a:solidFill>
@@ -5960,13 +10714,13 @@
                 <a:ea typeface="Aptos" pitchFamily="34" charset="-122"/>
                 <a:cs typeface="Aptos" pitchFamily="34" charset="-120"/>
               </a:rPr>
-              <a:t>Identify the technical, operational, privacy, security, equity, and governance issues associated with the topic.</a:t>
-            </a:r>
-            <a:endParaRPr lang="en-US" sz="1450" dirty="0"/>
-          </a:p>
-          <a:p>
-            <a:r>
-              <a:rPr lang="en-US" sz="1450" dirty="0">
+              <a:t>Play 2: Readiness Assessment - This lesson informs Play 2 by helping learners connect the lesson topic to readiness assessment work.</a:t>
+            </a:r>
+            <a:endParaRPr lang="en-US" sz="1540" dirty="0"/>
+          </a:p>
+          <a:p>
+            <a:r>
+              <a:rPr lang="en-US" sz="1540" dirty="0">
                 <a:solidFill>
                   <a:srgbClr val="17364A"/>
                 </a:solidFill>
@@ -5974,13 +10728,13 @@
                 <a:ea typeface="Aptos" pitchFamily="34" charset="-122"/>
                 <a:cs typeface="Aptos" pitchFamily="34" charset="-120"/>
               </a:rPr>
-              <a:t>Apply the topic to a real or realistic public health workflow, system, or implementation scenario.</a:t>
-            </a:r>
-            <a:endParaRPr lang="en-US" sz="1450" dirty="0"/>
-          </a:p>
-          <a:p>
-            <a:r>
-              <a:rPr lang="en-US" sz="1450" dirty="0">
+              <a:t>Play 3: Establish AI Governance - This lesson informs Play 3 by helping learners connect the lesson topic to establish ai governance.</a:t>
+            </a:r>
+            <a:endParaRPr lang="en-US" sz="1540" dirty="0"/>
+          </a:p>
+          <a:p>
+            <a:r>
+              <a:rPr lang="en-US" sz="1540" dirty="0">
                 <a:solidFill>
                   <a:srgbClr val="17364A"/>
                 </a:solidFill>
@@ -5988,13 +10742,106 @@
                 <a:ea typeface="Aptos" pitchFamily="34" charset="-122"/>
                 <a:cs typeface="Aptos" pitchFamily="34" charset="-120"/>
               </a:rPr>
-              <a:t>Recognize common failure modes that can affect safety, accuracy, trust, workflow fit, or sustainability.</a:t>
-            </a:r>
-            <a:endParaRPr lang="en-US" sz="1450" dirty="0"/>
-          </a:p>
-          <a:p>
-            <a:r>
-              <a:rPr lang="en-US" sz="1450" dirty="0">
+              <a:t>Play 1: Vision &amp; Guardrails - This lesson informs Play 1 by helping learners connect the lesson topic to vision &amp; guardrails work in.</a:t>
+            </a:r>
+            <a:endParaRPr lang="en-US" sz="1540" dirty="0"/>
+          </a:p>
+        </p:txBody>
+      </p:sp>
+      <p:sp>
+        <p:nvSpPr>
+          <p:cNvPr id="9" name="Shape 7"/>
+          <p:cNvSpPr/>
+          <p:nvPr/>
+        </p:nvSpPr>
+        <p:spPr>
+          <a:xfrm>
+            <a:off x="8046720" y="1417320"/>
+            <a:ext cx="3063240" cy="2103120"/>
+          </a:xfrm>
+          <a:prstGeom prst="roundRect">
+            <a:avLst>
+              <a:gd name="adj" fmla="val 5217"/>
+            </a:avLst>
+          </a:prstGeom>
+          <a:solidFill>
+            <a:srgbClr val="EEF8ED"/>
+          </a:solidFill>
+          <a:ln w="12700">
+            <a:solidFill>
+              <a:srgbClr val="B9D7E6"/>
+            </a:solidFill>
+            <a:prstDash val="solid"/>
+          </a:ln>
+        </p:spPr>
+      </p:sp>
+      <p:sp>
+        <p:nvSpPr>
+          <p:cNvPr id="10" name="Text 8"/>
+          <p:cNvSpPr/>
+          <p:nvPr/>
+        </p:nvSpPr>
+        <p:spPr>
+          <a:xfrm>
+            <a:off x="8211312" y="1563624"/>
+            <a:ext cx="2734056" cy="201168"/>
+          </a:xfrm>
+          <a:prstGeom prst="rect">
+            <a:avLst/>
+          </a:prstGeom>
+          <a:noFill/>
+          <a:ln/>
+        </p:spPr>
+        <p:txBody>
+          <a:bodyPr wrap="square" lIns="0" tIns="0" rIns="0" bIns="0" rtlCol="0" anchor="ctr"/>
+          <a:lstStyle/>
+          <a:p>
+            <a:pPr indent="0" marL="0">
+              <a:buNone/>
+            </a:pPr>
+            <a:r>
+              <a:rPr lang="en-US" sz="950" b="1" dirty="0">
+                <a:solidFill>
+                  <a:srgbClr val="0068B7"/>
+                </a:solidFill>
+                <a:latin typeface="Aptos" pitchFamily="34" charset="0"/>
+                <a:ea typeface="Aptos" pitchFamily="34" charset="-122"/>
+                <a:cs typeface="Aptos" pitchFamily="34" charset="-120"/>
+              </a:rPr>
+              <a:t>Apply the lesson</a:t>
+            </a:r>
+            <a:endParaRPr lang="en-US" sz="950" dirty="0"/>
+          </a:p>
+        </p:txBody>
+      </p:sp>
+      <p:sp>
+        <p:nvSpPr>
+          <p:cNvPr id="11" name="Text 9"/>
+          <p:cNvSpPr/>
+          <p:nvPr/>
+        </p:nvSpPr>
+        <p:spPr>
+          <a:xfrm>
+            <a:off x="8211312" y="1856232"/>
+            <a:ext cx="2734056" cy="1536192"/>
+          </a:xfrm>
+          <a:prstGeom prst="rect">
+            <a:avLst/>
+          </a:prstGeom>
+          <a:noFill/>
+          <a:ln/>
+        </p:spPr>
+        <p:txBody>
+          <a:bodyPr wrap="square" lIns="0" tIns="0" rIns="0" bIns="0" rtlCol="0" anchor="t">
+            <a:normAutofit/>
+          </a:bodyPr>
+          <a:lstStyle/>
+          <a:p>
+            <a:pPr indent="0" marL="0">
+              <a:buNone/>
+            </a:pPr>
+            <a:r>
+              <a:rPr lang="en-US" sz="1250" dirty="0">
                 <a:solidFill>
                   <a:srgbClr val="17364A"/>
                 </a:solidFill>
@@ -6002,9 +10849,116 @@
                 <a:ea typeface="Aptos" pitchFamily="34" charset="-122"/>
                 <a:cs typeface="Aptos" pitchFamily="34" charset="-120"/>
               </a:rPr>
-              <a:t>Identify practical guardrails that should be documented before implementation.</a:t>
-            </a:r>
-            <a:endParaRPr lang="en-US" sz="1450" dirty="0"/>
+              <a:t>Use the related plays to identify decisions, participants, timing, approvals, and documentation needed for responsible implementation.</a:t>
+            </a:r>
+            <a:endParaRPr lang="en-US" sz="1250" dirty="0"/>
+          </a:p>
+        </p:txBody>
+      </p:sp>
+      <p:sp>
+        <p:nvSpPr>
+          <p:cNvPr id="12" name="Shape 10"/>
+          <p:cNvSpPr/>
+          <p:nvPr/>
+        </p:nvSpPr>
+        <p:spPr>
+          <a:xfrm>
+            <a:off x="8046720" y="3794760"/>
+            <a:ext cx="3063240" cy="1508760"/>
+          </a:xfrm>
+          <a:prstGeom prst="roundRect">
+            <a:avLst>
+              <a:gd name="adj" fmla="val 7273"/>
+            </a:avLst>
+          </a:prstGeom>
+          <a:solidFill>
+            <a:srgbClr val="FFF4D9"/>
+          </a:solidFill>
+          <a:ln w="12700">
+            <a:solidFill>
+              <a:srgbClr val="B9D7E6"/>
+            </a:solidFill>
+            <a:prstDash val="solid"/>
+          </a:ln>
+        </p:spPr>
+      </p:sp>
+      <p:sp>
+        <p:nvSpPr>
+          <p:cNvPr id="13" name="Text 11"/>
+          <p:cNvSpPr/>
+          <p:nvPr/>
+        </p:nvSpPr>
+        <p:spPr>
+          <a:xfrm>
+            <a:off x="8211312" y="3941064"/>
+            <a:ext cx="2734056" cy="201168"/>
+          </a:xfrm>
+          <a:prstGeom prst="rect">
+            <a:avLst/>
+          </a:prstGeom>
+          <a:noFill/>
+          <a:ln/>
+        </p:spPr>
+        <p:txBody>
+          <a:bodyPr wrap="square" lIns="0" tIns="0" rIns="0" bIns="0" rtlCol="0" anchor="ctr"/>
+          <a:lstStyle/>
+          <a:p>
+            <a:pPr indent="0" marL="0">
+              <a:buNone/>
+            </a:pPr>
+            <a:r>
+              <a:rPr lang="en-US" sz="950" b="1" dirty="0">
+                <a:solidFill>
+                  <a:srgbClr val="0068B7"/>
+                </a:solidFill>
+                <a:latin typeface="Aptos" pitchFamily="34" charset="0"/>
+                <a:ea typeface="Aptos" pitchFamily="34" charset="-122"/>
+                <a:cs typeface="Aptos" pitchFamily="34" charset="-120"/>
+              </a:rPr>
+              <a:t>Keep in mind</a:t>
+            </a:r>
+            <a:endParaRPr lang="en-US" sz="950" dirty="0"/>
+          </a:p>
+        </p:txBody>
+      </p:sp>
+      <p:sp>
+        <p:nvSpPr>
+          <p:cNvPr id="14" name="Text 12"/>
+          <p:cNvSpPr/>
+          <p:nvPr/>
+        </p:nvSpPr>
+        <p:spPr>
+          <a:xfrm>
+            <a:off x="8211312" y="4233672"/>
+            <a:ext cx="2734056" cy="941832"/>
+          </a:xfrm>
+          <a:prstGeom prst="rect">
+            <a:avLst/>
+          </a:prstGeom>
+          <a:noFill/>
+          <a:ln/>
+        </p:spPr>
+        <p:txBody>
+          <a:bodyPr wrap="square" lIns="0" tIns="0" rIns="0" bIns="0" rtlCol="0" anchor="t">
+            <a:normAutofit/>
+          </a:bodyPr>
+          <a:lstStyle/>
+          <a:p>
+            <a:pPr indent="0" marL="0">
+              <a:buNone/>
+            </a:pPr>
+            <a:r>
+              <a:rPr lang="en-US" sz="1250" dirty="0">
+                <a:solidFill>
+                  <a:srgbClr val="17364A"/>
+                </a:solidFill>
+                <a:latin typeface="Aptos" pitchFamily="34" charset="0"/>
+                <a:ea typeface="Aptos" pitchFamily="34" charset="-122"/>
+                <a:cs typeface="Aptos" pitchFamily="34" charset="-120"/>
+              </a:rPr>
+              <a:t>The playbook connection helps turn training into agency work, not just individual knowledge.</a:t>
+            </a:r>
+            <a:endParaRPr lang="en-US" sz="1250" dirty="0"/>
           </a:p>
         </p:txBody>
       </p:sp>
@@ -6067,7 +11021,32 @@
       </p:sp>
       <p:sp>
         <p:nvSpPr>
-          <p:cNvPr id="3" name="Text 1"/>
+          <p:cNvPr id="3" name="Shape 1"/>
+          <p:cNvSpPr/>
+          <p:nvPr/>
+        </p:nvSpPr>
+        <p:spPr>
+          <a:xfrm>
+            <a:off x="0" y="164592"/>
+            <a:ext cx="146304" cy="6693408"/>
+          </a:xfrm>
+          <a:prstGeom prst="rect">
+            <a:avLst/>
+          </a:prstGeom>
+          <a:solidFill>
+            <a:srgbClr val="2F8A28"/>
+          </a:solidFill>
+          <a:ln w="12700">
+            <a:solidFill>
+              <a:srgbClr val="2F8A28"/>
+            </a:solidFill>
+            <a:prstDash val="solid"/>
+          </a:ln>
+        </p:spPr>
+      </p:sp>
+      <p:sp>
+        <p:nvSpPr>
+          <p:cNvPr id="4" name="Text 2"/>
           <p:cNvSpPr/>
           <p:nvPr/>
         </p:nvSpPr>
@@ -6106,7 +11085,7 @@
       </p:sp>
       <p:sp>
         <p:nvSpPr>
-          <p:cNvPr id="4" name="Text 2"/>
+          <p:cNvPr id="5" name="Text 3"/>
           <p:cNvSpPr/>
           <p:nvPr/>
         </p:nvSpPr>
@@ -6145,7 +11124,7 @@
       </p:sp>
       <p:sp>
         <p:nvSpPr>
-          <p:cNvPr id="5" name="Text 3"/>
+          <p:cNvPr id="6" name="Text 4"/>
           <p:cNvSpPr/>
           <p:nvPr/>
         </p:nvSpPr>
@@ -6184,7 +11163,7 @@
       </p:sp>
       <p:sp>
         <p:nvSpPr>
-          <p:cNvPr id="6" name="Text 4"/>
+          <p:cNvPr id="7" name="Text 5"/>
           <p:cNvSpPr/>
           <p:nvPr/>
         </p:nvSpPr>
@@ -6217,7 +11196,7 @@
                 <a:ea typeface="Aptos Display" pitchFamily="34" charset="-122"/>
                 <a:cs typeface="Aptos Display" pitchFamily="34" charset="-120"/>
               </a:rPr>
-              <a:t>Learning Objectives Continued</a:t>
+              <a:t>Related toolkit resources</a:t>
             </a:r>
             <a:endParaRPr lang="en-US" sz="2700" dirty="0"/>
           </a:p>
@@ -6225,14 +11204,14 @@
       </p:sp>
       <p:sp>
         <p:nvSpPr>
-          <p:cNvPr id="7" name="Text 5"/>
-          <p:cNvSpPr/>
-          <p:nvPr/>
-        </p:nvSpPr>
-        <p:spPr>
-          <a:xfrm>
-            <a:off x="822960" y="1325880"/>
-            <a:ext cx="10378440" cy="4800600"/>
+          <p:cNvPr id="8" name="Text 6"/>
+          <p:cNvSpPr/>
+          <p:nvPr/>
+        </p:nvSpPr>
+        <p:spPr>
+          <a:xfrm>
+            <a:off x="868680" y="1417320"/>
+            <a:ext cx="6903720" cy="4480560"/>
           </a:xfrm>
           <a:prstGeom prst="rect">
             <a:avLst/>
@@ -6247,7 +11226,7 @@
           <a:lstStyle/>
           <a:p>
             <a:r>
-              <a:rPr lang="en-US" sz="1450" dirty="0">
+              <a:rPr lang="en-US" sz="1460" dirty="0">
                 <a:solidFill>
                   <a:srgbClr val="17364A"/>
                 </a:solidFill>
@@ -6255,9 +11234,279 @@
                 <a:ea typeface="Aptos" pitchFamily="34" charset="-122"/>
                 <a:cs typeface="Aptos" pitchFamily="34" charset="-120"/>
               </a:rPr>
-              <a:t>Produce a AI documentation packet that can support readiness assessment, governance review, procurement, implementation, or monitoring.</a:t>
-            </a:r>
-            <a:endParaRPr lang="en-US" sz="1450" dirty="0"/>
+              <a:t>Tool 4: AI Policy Landscape Scan (Worksheet) - Use AI Policy Landscape Scan to translate this lesson into a documented public health.</a:t>
+            </a:r>
+            <a:endParaRPr lang="en-US" sz="1460" dirty="0"/>
+          </a:p>
+          <a:p>
+            <a:r>
+              <a:rPr lang="en-US" sz="1460" dirty="0">
+                <a:solidFill>
+                  <a:srgbClr val="17364A"/>
+                </a:solidFill>
+                <a:latin typeface="Aptos" pitchFamily="34" charset="0"/>
+                <a:ea typeface="Aptos" pitchFamily="34" charset="-122"/>
+                <a:cs typeface="Aptos" pitchFamily="34" charset="-120"/>
+              </a:rPr>
+              <a:t>Tool 5: AI Environmental and Resource Impact Review (Checklist) - Use this tool to complete or strengthen the practical exercise for.</a:t>
+            </a:r>
+            <a:endParaRPr lang="en-US" sz="1460" dirty="0"/>
+          </a:p>
+          <a:p>
+            <a:r>
+              <a:rPr lang="en-US" sz="1460" dirty="0">
+                <a:solidFill>
+                  <a:srgbClr val="17364A"/>
+                </a:solidFill>
+                <a:latin typeface="Aptos" pitchFamily="34" charset="0"/>
+                <a:ea typeface="Aptos" pitchFamily="34" charset="-122"/>
+                <a:cs typeface="Aptos" pitchFamily="34" charset="-120"/>
+              </a:rPr>
+              <a:t>Tool 6: Human-Centered AI Decision Rule Checklist (Checklist) - Use this tool to complete or strengthen the practical exercise for.</a:t>
+            </a:r>
+            <a:endParaRPr lang="en-US" sz="1460" dirty="0"/>
+          </a:p>
+          <a:p>
+            <a:r>
+              <a:rPr lang="en-US" sz="1460" dirty="0">
+                <a:solidFill>
+                  <a:srgbClr val="17364A"/>
+                </a:solidFill>
+                <a:latin typeface="Aptos" pitchFamily="34" charset="0"/>
+                <a:ea typeface="Aptos" pitchFamily="34" charset="-122"/>
+                <a:cs typeface="Aptos" pitchFamily="34" charset="-120"/>
+              </a:rPr>
+              <a:t>Tool 8: AI Project Charter (Planning) - Use AI Project Charter to translate this lesson into a documented public health AI planning,.</a:t>
+            </a:r>
+            <a:endParaRPr lang="en-US" sz="1460" dirty="0"/>
+          </a:p>
+          <a:p>
+            <a:r>
+              <a:rPr lang="en-US" sz="1460" dirty="0">
+                <a:solidFill>
+                  <a:srgbClr val="17364A"/>
+                </a:solidFill>
+                <a:latin typeface="Aptos" pitchFamily="34" charset="0"/>
+                <a:ea typeface="Aptos" pitchFamily="34" charset="-122"/>
+                <a:cs typeface="Aptos" pitchFamily="34" charset="-120"/>
+              </a:rPr>
+              <a:t>Tool 9: Data Quality Assessment Checklist (Checklist) - Use this tool to complete or strengthen the practical exercise for the module.</a:t>
+            </a:r>
+            <a:endParaRPr lang="en-US" sz="1460" dirty="0"/>
+          </a:p>
+        </p:txBody>
+      </p:sp>
+      <p:sp>
+        <p:nvSpPr>
+          <p:cNvPr id="9" name="Shape 7"/>
+          <p:cNvSpPr/>
+          <p:nvPr/>
+        </p:nvSpPr>
+        <p:spPr>
+          <a:xfrm>
+            <a:off x="8046720" y="1417320"/>
+            <a:ext cx="3063240" cy="2103120"/>
+          </a:xfrm>
+          <a:prstGeom prst="roundRect">
+            <a:avLst>
+              <a:gd name="adj" fmla="val 5217"/>
+            </a:avLst>
+          </a:prstGeom>
+          <a:solidFill>
+            <a:srgbClr val="EAF6F8"/>
+          </a:solidFill>
+          <a:ln w="12700">
+            <a:solidFill>
+              <a:srgbClr val="B9D7E6"/>
+            </a:solidFill>
+            <a:prstDash val="solid"/>
+          </a:ln>
+        </p:spPr>
+      </p:sp>
+      <p:sp>
+        <p:nvSpPr>
+          <p:cNvPr id="10" name="Text 8"/>
+          <p:cNvSpPr/>
+          <p:nvPr/>
+        </p:nvSpPr>
+        <p:spPr>
+          <a:xfrm>
+            <a:off x="8211312" y="1563624"/>
+            <a:ext cx="2734056" cy="201168"/>
+          </a:xfrm>
+          <a:prstGeom prst="rect">
+            <a:avLst/>
+          </a:prstGeom>
+          <a:noFill/>
+          <a:ln/>
+        </p:spPr>
+        <p:txBody>
+          <a:bodyPr wrap="square" lIns="0" tIns="0" rIns="0" bIns="0" rtlCol="0" anchor="ctr"/>
+          <a:lstStyle/>
+          <a:p>
+            <a:pPr indent="0" marL="0">
+              <a:buNone/>
+            </a:pPr>
+            <a:r>
+              <a:rPr lang="en-US" sz="950" b="1" dirty="0">
+                <a:solidFill>
+                  <a:srgbClr val="0068B7"/>
+                </a:solidFill>
+                <a:latin typeface="Aptos" pitchFamily="34" charset="0"/>
+                <a:ea typeface="Aptos" pitchFamily="34" charset="-122"/>
+                <a:cs typeface="Aptos" pitchFamily="34" charset="-120"/>
+              </a:rPr>
+              <a:t>Use the tools</a:t>
+            </a:r>
+            <a:endParaRPr lang="en-US" sz="950" dirty="0"/>
+          </a:p>
+        </p:txBody>
+      </p:sp>
+      <p:sp>
+        <p:nvSpPr>
+          <p:cNvPr id="11" name="Text 9"/>
+          <p:cNvSpPr/>
+          <p:nvPr/>
+        </p:nvSpPr>
+        <p:spPr>
+          <a:xfrm>
+            <a:off x="8211312" y="1856232"/>
+            <a:ext cx="2734056" cy="1536192"/>
+          </a:xfrm>
+          <a:prstGeom prst="rect">
+            <a:avLst/>
+          </a:prstGeom>
+          <a:noFill/>
+          <a:ln/>
+        </p:spPr>
+        <p:txBody>
+          <a:bodyPr wrap="square" lIns="0" tIns="0" rIns="0" bIns="0" rtlCol="0" anchor="t">
+            <a:normAutofit/>
+          </a:bodyPr>
+          <a:lstStyle/>
+          <a:p>
+            <a:pPr indent="0" marL="0">
+              <a:buNone/>
+            </a:pPr>
+            <a:r>
+              <a:rPr lang="en-US" sz="1250" dirty="0">
+                <a:solidFill>
+                  <a:srgbClr val="17364A"/>
+                </a:solidFill>
+                <a:latin typeface="Aptos" pitchFamily="34" charset="0"/>
+                <a:ea typeface="Aptos" pitchFamily="34" charset="-122"/>
+                <a:cs typeface="Aptos" pitchFamily="34" charset="-120"/>
+              </a:rPr>
+              <a:t>Use linked tools when your department needs a structured worksheet, template, checklist, review process, or documentation artifact.</a:t>
+            </a:r>
+            <a:endParaRPr lang="en-US" sz="1250" dirty="0"/>
+          </a:p>
+        </p:txBody>
+      </p:sp>
+      <p:sp>
+        <p:nvSpPr>
+          <p:cNvPr id="12" name="Shape 10"/>
+          <p:cNvSpPr/>
+          <p:nvPr/>
+        </p:nvSpPr>
+        <p:spPr>
+          <a:xfrm>
+            <a:off x="8046720" y="3794760"/>
+            <a:ext cx="3063240" cy="1508760"/>
+          </a:xfrm>
+          <a:prstGeom prst="roundRect">
+            <a:avLst>
+              <a:gd name="adj" fmla="val 7273"/>
+            </a:avLst>
+          </a:prstGeom>
+          <a:solidFill>
+            <a:srgbClr val="EEF8ED"/>
+          </a:solidFill>
+          <a:ln w="12700">
+            <a:solidFill>
+              <a:srgbClr val="B9D7E6"/>
+            </a:solidFill>
+            <a:prstDash val="solid"/>
+          </a:ln>
+        </p:spPr>
+      </p:sp>
+      <p:sp>
+        <p:nvSpPr>
+          <p:cNvPr id="13" name="Text 11"/>
+          <p:cNvSpPr/>
+          <p:nvPr/>
+        </p:nvSpPr>
+        <p:spPr>
+          <a:xfrm>
+            <a:off x="8211312" y="3941064"/>
+            <a:ext cx="2734056" cy="201168"/>
+          </a:xfrm>
+          <a:prstGeom prst="rect">
+            <a:avLst/>
+          </a:prstGeom>
+          <a:noFill/>
+          <a:ln/>
+        </p:spPr>
+        <p:txBody>
+          <a:bodyPr wrap="square" lIns="0" tIns="0" rIns="0" bIns="0" rtlCol="0" anchor="ctr"/>
+          <a:lstStyle/>
+          <a:p>
+            <a:pPr indent="0" marL="0">
+              <a:buNone/>
+            </a:pPr>
+            <a:r>
+              <a:rPr lang="en-US" sz="950" b="1" dirty="0">
+                <a:solidFill>
+                  <a:srgbClr val="0068B7"/>
+                </a:solidFill>
+                <a:latin typeface="Aptos" pitchFamily="34" charset="0"/>
+                <a:ea typeface="Aptos" pitchFamily="34" charset="-122"/>
+                <a:cs typeface="Aptos" pitchFamily="34" charset="-120"/>
+              </a:rPr>
+              <a:t>Avoid duplication</a:t>
+            </a:r>
+            <a:endParaRPr lang="en-US" sz="950" dirty="0"/>
+          </a:p>
+        </p:txBody>
+      </p:sp>
+      <p:sp>
+        <p:nvSpPr>
+          <p:cNvPr id="14" name="Text 12"/>
+          <p:cNvSpPr/>
+          <p:nvPr/>
+        </p:nvSpPr>
+        <p:spPr>
+          <a:xfrm>
+            <a:off x="8211312" y="4233672"/>
+            <a:ext cx="2734056" cy="941832"/>
+          </a:xfrm>
+          <a:prstGeom prst="rect">
+            <a:avLst/>
+          </a:prstGeom>
+          <a:noFill/>
+          <a:ln/>
+        </p:spPr>
+        <p:txBody>
+          <a:bodyPr wrap="square" lIns="0" tIns="0" rIns="0" bIns="0" rtlCol="0" anchor="t">
+            <a:normAutofit/>
+          </a:bodyPr>
+          <a:lstStyle/>
+          <a:p>
+            <a:pPr indent="0" marL="0">
+              <a:buNone/>
+            </a:pPr>
+            <a:r>
+              <a:rPr lang="en-US" sz="1250" dirty="0">
+                <a:solidFill>
+                  <a:srgbClr val="17364A"/>
+                </a:solidFill>
+                <a:latin typeface="Aptos" pitchFamily="34" charset="0"/>
+                <a:ea typeface="Aptos" pitchFamily="34" charset="-122"/>
+                <a:cs typeface="Aptos" pitchFamily="34" charset="-120"/>
+              </a:rPr>
+              <a:t>If your department already has a strong equivalent tool, adapt or use the existing process instead of recreating it.</a:t>
+            </a:r>
+            <a:endParaRPr lang="en-US" sz="1250" dirty="0"/>
           </a:p>
         </p:txBody>
       </p:sp>
@@ -6320,7 +11569,32 @@
       </p:sp>
       <p:sp>
         <p:nvSpPr>
-          <p:cNvPr id="3" name="Text 1"/>
+          <p:cNvPr id="3" name="Shape 1"/>
+          <p:cNvSpPr/>
+          <p:nvPr/>
+        </p:nvSpPr>
+        <p:spPr>
+          <a:xfrm>
+            <a:off x="0" y="164592"/>
+            <a:ext cx="146304" cy="6693408"/>
+          </a:xfrm>
+          <a:prstGeom prst="rect">
+            <a:avLst/>
+          </a:prstGeom>
+          <a:solidFill>
+            <a:srgbClr val="2F8A28"/>
+          </a:solidFill>
+          <a:ln w="12700">
+            <a:solidFill>
+              <a:srgbClr val="2F8A28"/>
+            </a:solidFill>
+            <a:prstDash val="solid"/>
+          </a:ln>
+        </p:spPr>
+      </p:sp>
+      <p:sp>
+        <p:nvSpPr>
+          <p:cNvPr id="4" name="Text 2"/>
           <p:cNvSpPr/>
           <p:nvPr/>
         </p:nvSpPr>
@@ -6359,7 +11633,7 @@
       </p:sp>
       <p:sp>
         <p:nvSpPr>
-          <p:cNvPr id="4" name="Text 2"/>
+          <p:cNvPr id="5" name="Text 3"/>
           <p:cNvSpPr/>
           <p:nvPr/>
         </p:nvSpPr>
@@ -6398,7 +11672,7 @@
       </p:sp>
       <p:sp>
         <p:nvSpPr>
-          <p:cNvPr id="5" name="Text 3"/>
+          <p:cNvPr id="6" name="Text 4"/>
           <p:cNvSpPr/>
           <p:nvPr/>
         </p:nvSpPr>
@@ -6437,13 +11711,77 @@
       </p:sp>
       <p:sp>
         <p:nvSpPr>
-          <p:cNvPr id="6" name="Text 4"/>
+          <p:cNvPr id="7" name="Shape 5"/>
           <p:cNvSpPr/>
           <p:nvPr/>
         </p:nvSpPr>
         <p:spPr>
           <a:xfrm>
             <a:off x="640080" y="658368"/>
+            <a:ext cx="420624" cy="420624"/>
+          </a:xfrm>
+          <a:prstGeom prst="ellipse">
+            <a:avLst/>
+          </a:prstGeom>
+          <a:solidFill>
+            <a:srgbClr val="0068B7"/>
+          </a:solidFill>
+          <a:ln w="12700">
+            <a:solidFill>
+              <a:srgbClr val="0068B7"/>
+            </a:solidFill>
+            <a:prstDash val="solid"/>
+          </a:ln>
+        </p:spPr>
+      </p:sp>
+      <p:sp>
+        <p:nvSpPr>
+          <p:cNvPr id="8" name="Text 6"/>
+          <p:cNvSpPr/>
+          <p:nvPr/>
+        </p:nvSpPr>
+        <p:spPr>
+          <a:xfrm>
+            <a:off x="640080" y="731520"/>
+            <a:ext cx="420624" cy="164592"/>
+          </a:xfrm>
+          <a:prstGeom prst="rect">
+            <a:avLst/>
+          </a:prstGeom>
+          <a:noFill/>
+          <a:ln/>
+        </p:spPr>
+        <p:txBody>
+          <a:bodyPr wrap="square" lIns="0" tIns="0" rIns="0" bIns="0" rtlCol="0" anchor="ctr"/>
+          <a:lstStyle/>
+          <a:p>
+            <a:pPr algn="ctr" indent="0" marL="0">
+              <a:buNone/>
+            </a:pPr>
+            <a:r>
+              <a:rPr lang="en-US" sz="1100" b="1" dirty="0">
+                <a:solidFill>
+                  <a:srgbClr val="FFFFFF"/>
+                </a:solidFill>
+                <a:latin typeface="Aptos" pitchFamily="34" charset="0"/>
+                <a:ea typeface="Aptos" pitchFamily="34" charset="-122"/>
+                <a:cs typeface="Aptos" pitchFamily="34" charset="-120"/>
+              </a:rPr>
+              <a:t>1</a:t>
+            </a:r>
+            <a:endParaRPr lang="en-US" sz="1100" dirty="0"/>
+          </a:p>
+        </p:txBody>
+      </p:sp>
+      <p:sp>
+        <p:nvSpPr>
+          <p:cNvPr id="9" name="Text 7"/>
+          <p:cNvSpPr/>
+          <p:nvPr/>
+        </p:nvSpPr>
+        <p:spPr>
+          <a:xfrm>
+            <a:off x="640080" y="621792"/>
             <a:ext cx="10881360" cy="566928"/>
           </a:xfrm>
           <a:prstGeom prst="rect">
@@ -6470,7 +11808,7 @@
                 <a:ea typeface="Aptos Display" pitchFamily="34" charset="-122"/>
                 <a:cs typeface="Aptos Display" pitchFamily="34" charset="-120"/>
               </a:rPr>
-              <a:t>Module Overview</a:t>
+              <a:t>Learning Objectives</a:t>
             </a:r>
             <a:endParaRPr lang="en-US" sz="2700" dirty="0"/>
           </a:p>
@@ -6478,32 +11816,178 @@
       </p:sp>
       <p:sp>
         <p:nvSpPr>
-          <p:cNvPr id="7" name="Text 5"/>
-          <p:cNvSpPr/>
-          <p:nvPr/>
-        </p:nvSpPr>
-        <p:spPr>
-          <a:xfrm>
-            <a:off x="822960" y="1325880"/>
-            <a:ext cx="10378440" cy="4800600"/>
-          </a:xfrm>
-          <a:prstGeom prst="rect">
-            <a:avLst/>
-          </a:prstGeom>
-          <a:noFill/>
-          <a:ln/>
-        </p:spPr>
-        <p:txBody>
-          <a:bodyPr wrap="square" lIns="1016" tIns="1016" rIns="1016" bIns="1016" rtlCol="0" anchor="t">
+          <p:cNvPr id="10" name="Text 8"/>
+          <p:cNvSpPr/>
+          <p:nvPr/>
+        </p:nvSpPr>
+        <p:spPr>
+          <a:xfrm>
+            <a:off x="868680" y="1417320"/>
+            <a:ext cx="6675120" cy="4434840"/>
+          </a:xfrm>
+          <a:prstGeom prst="rect">
+            <a:avLst/>
+          </a:prstGeom>
+          <a:noFill/>
+          <a:ln/>
+        </p:spPr>
+        <p:txBody>
+          <a:bodyPr wrap="square" lIns="635" tIns="635" rIns="635" bIns="635" rtlCol="0" anchor="t">
             <a:normAutofit/>
           </a:bodyPr>
           <a:lstStyle/>
           <a:p>
+            <a:r>
+              <a:rPr lang="en-US" sz="1700" dirty="0">
+                <a:solidFill>
+                  <a:srgbClr val="17364A"/>
+                </a:solidFill>
+                <a:latin typeface="Aptos" pitchFamily="34" charset="0"/>
+                <a:ea typeface="Aptos" pitchFamily="34" charset="-122"/>
+                <a:cs typeface="Aptos" pitchFamily="34" charset="-120"/>
+              </a:rPr>
+              <a:t>Explain the purpose of ai documentation, model cards, and system cards in public health AI work.</a:t>
+            </a:r>
+            <a:endParaRPr lang="en-US" sz="1700" dirty="0"/>
+          </a:p>
+          <a:p>
+            <a:r>
+              <a:rPr lang="en-US" sz="1700" dirty="0">
+                <a:solidFill>
+                  <a:srgbClr val="17364A"/>
+                </a:solidFill>
+                <a:latin typeface="Aptos" pitchFamily="34" charset="0"/>
+                <a:ea typeface="Aptos" pitchFamily="34" charset="-122"/>
+                <a:cs typeface="Aptos" pitchFamily="34" charset="-120"/>
+              </a:rPr>
+              <a:t>Identify the technical, operational, privacy, security, equity, and governance issues associated with the topic.</a:t>
+            </a:r>
+            <a:endParaRPr lang="en-US" sz="1700" dirty="0"/>
+          </a:p>
+          <a:p>
+            <a:r>
+              <a:rPr lang="en-US" sz="1700" dirty="0">
+                <a:solidFill>
+                  <a:srgbClr val="17364A"/>
+                </a:solidFill>
+                <a:latin typeface="Aptos" pitchFamily="34" charset="0"/>
+                <a:ea typeface="Aptos" pitchFamily="34" charset="-122"/>
+                <a:cs typeface="Aptos" pitchFamily="34" charset="-120"/>
+              </a:rPr>
+              <a:t>Apply the topic to a real or realistic public health workflow, system, or implementation scenario.</a:t>
+            </a:r>
+            <a:endParaRPr lang="en-US" sz="1700" dirty="0"/>
+          </a:p>
+          <a:p>
+            <a:r>
+              <a:rPr lang="en-US" sz="1700" dirty="0">
+                <a:solidFill>
+                  <a:srgbClr val="17364A"/>
+                </a:solidFill>
+                <a:latin typeface="Aptos" pitchFamily="34" charset="0"/>
+                <a:ea typeface="Aptos" pitchFamily="34" charset="-122"/>
+                <a:cs typeface="Aptos" pitchFamily="34" charset="-120"/>
+              </a:rPr>
+              <a:t>Recognize common failure modes that can affect safety, accuracy, trust, workflow fit, or sustainability.</a:t>
+            </a:r>
+            <a:endParaRPr lang="en-US" sz="1700" dirty="0"/>
+          </a:p>
+        </p:txBody>
+      </p:sp>
+      <p:sp>
+        <p:nvSpPr>
+          <p:cNvPr id="11" name="Shape 9"/>
+          <p:cNvSpPr/>
+          <p:nvPr/>
+        </p:nvSpPr>
+        <p:spPr>
+          <a:xfrm>
+            <a:off x="7909560" y="1417320"/>
+            <a:ext cx="3154680" cy="1828800"/>
+          </a:xfrm>
+          <a:prstGeom prst="roundRect">
+            <a:avLst>
+              <a:gd name="adj" fmla="val 6000"/>
+            </a:avLst>
+          </a:prstGeom>
+          <a:solidFill>
+            <a:srgbClr val="EEF8ED"/>
+          </a:solidFill>
+          <a:ln w="12700">
+            <a:solidFill>
+              <a:srgbClr val="B9D7E6"/>
+            </a:solidFill>
+            <a:prstDash val="solid"/>
+          </a:ln>
+        </p:spPr>
+      </p:sp>
+      <p:sp>
+        <p:nvSpPr>
+          <p:cNvPr id="12" name="Text 10"/>
+          <p:cNvSpPr/>
+          <p:nvPr/>
+        </p:nvSpPr>
+        <p:spPr>
+          <a:xfrm>
+            <a:off x="8074152" y="1563624"/>
+            <a:ext cx="2825496" cy="201168"/>
+          </a:xfrm>
+          <a:prstGeom prst="rect">
+            <a:avLst/>
+          </a:prstGeom>
+          <a:noFill/>
+          <a:ln/>
+        </p:spPr>
+        <p:txBody>
+          <a:bodyPr wrap="square" lIns="0" tIns="0" rIns="0" bIns="0" rtlCol="0" anchor="ctr"/>
+          <a:lstStyle/>
+          <a:p>
             <a:pPr indent="0" marL="0">
               <a:buNone/>
             </a:pPr>
             <a:r>
-              <a:rPr lang="en-US" sz="1420" dirty="0">
+              <a:rPr lang="en-US" sz="950" b="1" dirty="0">
+                <a:solidFill>
+                  <a:srgbClr val="0068B7"/>
+                </a:solidFill>
+                <a:latin typeface="Aptos" pitchFamily="34" charset="0"/>
+                <a:ea typeface="Aptos" pitchFamily="34" charset="-122"/>
+                <a:cs typeface="Aptos" pitchFamily="34" charset="-120"/>
+              </a:rPr>
+              <a:t>Key idea</a:t>
+            </a:r>
+            <a:endParaRPr lang="en-US" sz="950" dirty="0"/>
+          </a:p>
+        </p:txBody>
+      </p:sp>
+      <p:sp>
+        <p:nvSpPr>
+          <p:cNvPr id="13" name="Text 11"/>
+          <p:cNvSpPr/>
+          <p:nvPr/>
+        </p:nvSpPr>
+        <p:spPr>
+          <a:xfrm>
+            <a:off x="8074152" y="1856232"/>
+            <a:ext cx="2825496" cy="1261872"/>
+          </a:xfrm>
+          <a:prstGeom prst="rect">
+            <a:avLst/>
+          </a:prstGeom>
+          <a:noFill/>
+          <a:ln/>
+        </p:spPr>
+        <p:txBody>
+          <a:bodyPr wrap="square" lIns="0" tIns="0" rIns="0" bIns="0" rtlCol="0" anchor="t">
+            <a:normAutofit/>
+          </a:bodyPr>
+          <a:lstStyle/>
+          <a:p>
+            <a:pPr indent="0" marL="0">
+              <a:buNone/>
+            </a:pPr>
+            <a:r>
+              <a:rPr lang="en-US" sz="1250" dirty="0">
                 <a:solidFill>
                   <a:srgbClr val="17364A"/>
                 </a:solidFill>
@@ -6511,9 +11995,116 @@
                 <a:ea typeface="Aptos" pitchFamily="34" charset="-122"/>
                 <a:cs typeface="Aptos" pitchFamily="34" charset="-120"/>
               </a:rPr>
-              <a:t>AI documentation makes systems understandable, reviewable, and accountable. Model cards and system cards are structured documentation tools that describe intended use, data, evaluation, limitations, risks, human oversight, and monitoring. This module helps public health staff create documentation that supports governance review, vendor oversight, public accountability, and incident response.</a:t>
-            </a:r>
-            <a:endParaRPr lang="en-US" sz="1420" dirty="0"/>
+              <a:t>Explain the purpose of ai documentation, model cards, and system cards in public health AI work.</a:t>
+            </a:r>
+            <a:endParaRPr lang="en-US" sz="1250" dirty="0"/>
+          </a:p>
+        </p:txBody>
+      </p:sp>
+      <p:sp>
+        <p:nvSpPr>
+          <p:cNvPr id="14" name="Shape 12"/>
+          <p:cNvSpPr/>
+          <p:nvPr/>
+        </p:nvSpPr>
+        <p:spPr>
+          <a:xfrm>
+            <a:off x="7909560" y="3520440"/>
+            <a:ext cx="3154680" cy="1737360"/>
+          </a:xfrm>
+          <a:prstGeom prst="roundRect">
+            <a:avLst>
+              <a:gd name="adj" fmla="val 6316"/>
+            </a:avLst>
+          </a:prstGeom>
+          <a:solidFill>
+            <a:srgbClr val="EAF6F8"/>
+          </a:solidFill>
+          <a:ln w="12700">
+            <a:solidFill>
+              <a:srgbClr val="B9D7E6"/>
+            </a:solidFill>
+            <a:prstDash val="solid"/>
+          </a:ln>
+        </p:spPr>
+      </p:sp>
+      <p:sp>
+        <p:nvSpPr>
+          <p:cNvPr id="15" name="Text 13"/>
+          <p:cNvSpPr/>
+          <p:nvPr/>
+        </p:nvSpPr>
+        <p:spPr>
+          <a:xfrm>
+            <a:off x="8074152" y="3666744"/>
+            <a:ext cx="2825496" cy="201168"/>
+          </a:xfrm>
+          <a:prstGeom prst="rect">
+            <a:avLst/>
+          </a:prstGeom>
+          <a:noFill/>
+          <a:ln/>
+        </p:spPr>
+        <p:txBody>
+          <a:bodyPr wrap="square" lIns="0" tIns="0" rIns="0" bIns="0" rtlCol="0" anchor="ctr"/>
+          <a:lstStyle/>
+          <a:p>
+            <a:pPr indent="0" marL="0">
+              <a:buNone/>
+            </a:pPr>
+            <a:r>
+              <a:rPr lang="en-US" sz="950" b="1" dirty="0">
+                <a:solidFill>
+                  <a:srgbClr val="0068B7"/>
+                </a:solidFill>
+                <a:latin typeface="Aptos" pitchFamily="34" charset="0"/>
+                <a:ea typeface="Aptos" pitchFamily="34" charset="-122"/>
+                <a:cs typeface="Aptos" pitchFamily="34" charset="-120"/>
+              </a:rPr>
+              <a:t>Use this for</a:t>
+            </a:r>
+            <a:endParaRPr lang="en-US" sz="950" dirty="0"/>
+          </a:p>
+        </p:txBody>
+      </p:sp>
+      <p:sp>
+        <p:nvSpPr>
+          <p:cNvPr id="16" name="Text 14"/>
+          <p:cNvSpPr/>
+          <p:nvPr/>
+        </p:nvSpPr>
+        <p:spPr>
+          <a:xfrm>
+            <a:off x="8074152" y="3959352"/>
+            <a:ext cx="2825496" cy="1170432"/>
+          </a:xfrm>
+          <a:prstGeom prst="rect">
+            <a:avLst/>
+          </a:prstGeom>
+          <a:noFill/>
+          <a:ln/>
+        </p:spPr>
+        <p:txBody>
+          <a:bodyPr wrap="square" lIns="0" tIns="0" rIns="0" bIns="0" rtlCol="0" anchor="t">
+            <a:normAutofit/>
+          </a:bodyPr>
+          <a:lstStyle/>
+          <a:p>
+            <a:pPr indent="0" marL="0">
+              <a:buNone/>
+            </a:pPr>
+            <a:r>
+              <a:rPr lang="en-US" sz="1250" dirty="0">
+                <a:solidFill>
+                  <a:srgbClr val="17364A"/>
+                </a:solidFill>
+                <a:latin typeface="Aptos" pitchFamily="34" charset="0"/>
+                <a:ea typeface="Aptos" pitchFamily="34" charset="-122"/>
+                <a:cs typeface="Aptos" pitchFamily="34" charset="-120"/>
+              </a:rPr>
+              <a:t>Connect the concept to public health decisions, safeguards, documentation, or implementation work.</a:t>
+            </a:r>
+            <a:endParaRPr lang="en-US" sz="1250" dirty="0"/>
           </a:p>
         </p:txBody>
       </p:sp>
@@ -6576,7 +12167,32 @@
       </p:sp>
       <p:sp>
         <p:nvSpPr>
-          <p:cNvPr id="3" name="Text 1"/>
+          <p:cNvPr id="3" name="Shape 1"/>
+          <p:cNvSpPr/>
+          <p:nvPr/>
+        </p:nvSpPr>
+        <p:spPr>
+          <a:xfrm>
+            <a:off x="0" y="164592"/>
+            <a:ext cx="146304" cy="6693408"/>
+          </a:xfrm>
+          <a:prstGeom prst="rect">
+            <a:avLst/>
+          </a:prstGeom>
+          <a:solidFill>
+            <a:srgbClr val="2F8A28"/>
+          </a:solidFill>
+          <a:ln w="12700">
+            <a:solidFill>
+              <a:srgbClr val="2F8A28"/>
+            </a:solidFill>
+            <a:prstDash val="solid"/>
+          </a:ln>
+        </p:spPr>
+      </p:sp>
+      <p:sp>
+        <p:nvSpPr>
+          <p:cNvPr id="4" name="Text 2"/>
           <p:cNvSpPr/>
           <p:nvPr/>
         </p:nvSpPr>
@@ -6615,7 +12231,7 @@
       </p:sp>
       <p:sp>
         <p:nvSpPr>
-          <p:cNvPr id="4" name="Text 2"/>
+          <p:cNvPr id="5" name="Text 3"/>
           <p:cNvSpPr/>
           <p:nvPr/>
         </p:nvSpPr>
@@ -6654,7 +12270,7 @@
       </p:sp>
       <p:sp>
         <p:nvSpPr>
-          <p:cNvPr id="5" name="Text 3"/>
+          <p:cNvPr id="6" name="Text 4"/>
           <p:cNvSpPr/>
           <p:nvPr/>
         </p:nvSpPr>
@@ -6693,7 +12309,7 @@
       </p:sp>
       <p:sp>
         <p:nvSpPr>
-          <p:cNvPr id="6" name="Text 4"/>
+          <p:cNvPr id="7" name="Text 5"/>
           <p:cNvSpPr/>
           <p:nvPr/>
         </p:nvSpPr>
@@ -6726,7 +12342,7 @@
                 <a:ea typeface="Aptos Display" pitchFamily="34" charset="-122"/>
                 <a:cs typeface="Aptos Display" pitchFamily="34" charset="-120"/>
               </a:rPr>
-              <a:t>Jurisdiction and Agency Policy Note</a:t>
+              <a:t>Learning Objectives Continued</a:t>
             </a:r>
             <a:endParaRPr lang="en-US" sz="2700" dirty="0"/>
           </a:p>
@@ -6734,32 +12350,136 @@
       </p:sp>
       <p:sp>
         <p:nvSpPr>
-          <p:cNvPr id="7" name="Text 5"/>
-          <p:cNvSpPr/>
-          <p:nvPr/>
-        </p:nvSpPr>
-        <p:spPr>
-          <a:xfrm>
-            <a:off x="822960" y="1325880"/>
-            <a:ext cx="10378440" cy="4800600"/>
-          </a:xfrm>
-          <a:prstGeom prst="rect">
-            <a:avLst/>
-          </a:prstGeom>
-          <a:noFill/>
-          <a:ln/>
-        </p:spPr>
-        <p:txBody>
-          <a:bodyPr wrap="square" lIns="1016" tIns="1016" rIns="1016" bIns="1016" rtlCol="0" anchor="t">
+          <p:cNvPr id="8" name="Text 6"/>
+          <p:cNvSpPr/>
+          <p:nvPr/>
+        </p:nvSpPr>
+        <p:spPr>
+          <a:xfrm>
+            <a:off x="868680" y="1417320"/>
+            <a:ext cx="6675120" cy="4434840"/>
+          </a:xfrm>
+          <a:prstGeom prst="rect">
+            <a:avLst/>
+          </a:prstGeom>
+          <a:noFill/>
+          <a:ln/>
+        </p:spPr>
+        <p:txBody>
+          <a:bodyPr wrap="square" lIns="635" tIns="635" rIns="635" bIns="635" rtlCol="0" anchor="t">
             <a:normAutofit/>
           </a:bodyPr>
           <a:lstStyle/>
           <a:p>
+            <a:r>
+              <a:rPr lang="en-US" sz="1700" dirty="0">
+                <a:solidFill>
+                  <a:srgbClr val="17364A"/>
+                </a:solidFill>
+                <a:latin typeface="Aptos" pitchFamily="34" charset="0"/>
+                <a:ea typeface="Aptos" pitchFamily="34" charset="-122"/>
+                <a:cs typeface="Aptos" pitchFamily="34" charset="-120"/>
+              </a:rPr>
+              <a:t>Produce a AI documentation packet that can support readiness assessment, governance review, procurement, implementation, or.</a:t>
+            </a:r>
+            <a:endParaRPr lang="en-US" sz="1700" dirty="0"/>
+          </a:p>
+        </p:txBody>
+      </p:sp>
+      <p:sp>
+        <p:nvSpPr>
+          <p:cNvPr id="9" name="Shape 7"/>
+          <p:cNvSpPr/>
+          <p:nvPr/>
+        </p:nvSpPr>
+        <p:spPr>
+          <a:xfrm>
+            <a:off x="7909560" y="1417320"/>
+            <a:ext cx="3154680" cy="1828800"/>
+          </a:xfrm>
+          <a:prstGeom prst="roundRect">
+            <a:avLst>
+              <a:gd name="adj" fmla="val 6000"/>
+            </a:avLst>
+          </a:prstGeom>
+          <a:solidFill>
+            <a:srgbClr val="EEF8ED"/>
+          </a:solidFill>
+          <a:ln w="12700">
+            <a:solidFill>
+              <a:srgbClr val="B9D7E6"/>
+            </a:solidFill>
+            <a:prstDash val="solid"/>
+          </a:ln>
+        </p:spPr>
+      </p:sp>
+      <p:sp>
+        <p:nvSpPr>
+          <p:cNvPr id="10" name="Text 8"/>
+          <p:cNvSpPr/>
+          <p:nvPr/>
+        </p:nvSpPr>
+        <p:spPr>
+          <a:xfrm>
+            <a:off x="8074152" y="1563624"/>
+            <a:ext cx="2825496" cy="201168"/>
+          </a:xfrm>
+          <a:prstGeom prst="rect">
+            <a:avLst/>
+          </a:prstGeom>
+          <a:noFill/>
+          <a:ln/>
+        </p:spPr>
+        <p:txBody>
+          <a:bodyPr wrap="square" lIns="0" tIns="0" rIns="0" bIns="0" rtlCol="0" anchor="ctr"/>
+          <a:lstStyle/>
+          <a:p>
             <a:pPr indent="0" marL="0">
               <a:buNone/>
             </a:pPr>
             <a:r>
-              <a:rPr lang="en-US" sz="1420" dirty="0">
+              <a:rPr lang="en-US" sz="950" b="1" dirty="0">
+                <a:solidFill>
+                  <a:srgbClr val="0068B7"/>
+                </a:solidFill>
+                <a:latin typeface="Aptos" pitchFamily="34" charset="0"/>
+                <a:ea typeface="Aptos" pitchFamily="34" charset="-122"/>
+                <a:cs typeface="Aptos" pitchFamily="34" charset="-120"/>
+              </a:rPr>
+              <a:t>Key idea</a:t>
+            </a:r>
+            <a:endParaRPr lang="en-US" sz="950" dirty="0"/>
+          </a:p>
+        </p:txBody>
+      </p:sp>
+      <p:sp>
+        <p:nvSpPr>
+          <p:cNvPr id="11" name="Text 9"/>
+          <p:cNvSpPr/>
+          <p:nvPr/>
+        </p:nvSpPr>
+        <p:spPr>
+          <a:xfrm>
+            <a:off x="8074152" y="1856232"/>
+            <a:ext cx="2825496" cy="1261872"/>
+          </a:xfrm>
+          <a:prstGeom prst="rect">
+            <a:avLst/>
+          </a:prstGeom>
+          <a:noFill/>
+          <a:ln/>
+        </p:spPr>
+        <p:txBody>
+          <a:bodyPr wrap="square" lIns="0" tIns="0" rIns="0" bIns="0" rtlCol="0" anchor="t">
+            <a:normAutofit/>
+          </a:bodyPr>
+          <a:lstStyle/>
+          <a:p>
+            <a:pPr indent="0" marL="0">
+              <a:buNone/>
+            </a:pPr>
+            <a:r>
+              <a:rPr lang="en-US" sz="1250" dirty="0">
                 <a:solidFill>
                   <a:srgbClr val="17364A"/>
                 </a:solidFill>
@@ -6767,9 +12487,116 @@
                 <a:ea typeface="Aptos" pitchFamily="34" charset="-122"/>
                 <a:cs typeface="Aptos" pitchFamily="34" charset="-120"/>
               </a:rPr>
-              <a:t>This national-level module is intended for training and planning purposes. It does not replace legal, privacy, procurement, civil rights, records, or agency policy review. Learners should confirm applicable requirements in their own jurisdiction and organization before implementing AI-supported workflows.</a:t>
-            </a:r>
-            <a:endParaRPr lang="en-US" sz="1420" dirty="0"/>
+              <a:t>Produce a AI documentation packet that can support readiness assessment, governance review, procurement, implementation, or.</a:t>
+            </a:r>
+            <a:endParaRPr lang="en-US" sz="1250" dirty="0"/>
+          </a:p>
+        </p:txBody>
+      </p:sp>
+      <p:sp>
+        <p:nvSpPr>
+          <p:cNvPr id="12" name="Shape 10"/>
+          <p:cNvSpPr/>
+          <p:nvPr/>
+        </p:nvSpPr>
+        <p:spPr>
+          <a:xfrm>
+            <a:off x="7909560" y="3520440"/>
+            <a:ext cx="3154680" cy="1737360"/>
+          </a:xfrm>
+          <a:prstGeom prst="roundRect">
+            <a:avLst>
+              <a:gd name="adj" fmla="val 6316"/>
+            </a:avLst>
+          </a:prstGeom>
+          <a:solidFill>
+            <a:srgbClr val="EAF6F8"/>
+          </a:solidFill>
+          <a:ln w="12700">
+            <a:solidFill>
+              <a:srgbClr val="B9D7E6"/>
+            </a:solidFill>
+            <a:prstDash val="solid"/>
+          </a:ln>
+        </p:spPr>
+      </p:sp>
+      <p:sp>
+        <p:nvSpPr>
+          <p:cNvPr id="13" name="Text 11"/>
+          <p:cNvSpPr/>
+          <p:nvPr/>
+        </p:nvSpPr>
+        <p:spPr>
+          <a:xfrm>
+            <a:off x="8074152" y="3666744"/>
+            <a:ext cx="2825496" cy="201168"/>
+          </a:xfrm>
+          <a:prstGeom prst="rect">
+            <a:avLst/>
+          </a:prstGeom>
+          <a:noFill/>
+          <a:ln/>
+        </p:spPr>
+        <p:txBody>
+          <a:bodyPr wrap="square" lIns="0" tIns="0" rIns="0" bIns="0" rtlCol="0" anchor="ctr"/>
+          <a:lstStyle/>
+          <a:p>
+            <a:pPr indent="0" marL="0">
+              <a:buNone/>
+            </a:pPr>
+            <a:r>
+              <a:rPr lang="en-US" sz="950" b="1" dirty="0">
+                <a:solidFill>
+                  <a:srgbClr val="0068B7"/>
+                </a:solidFill>
+                <a:latin typeface="Aptos" pitchFamily="34" charset="0"/>
+                <a:ea typeface="Aptos" pitchFamily="34" charset="-122"/>
+                <a:cs typeface="Aptos" pitchFamily="34" charset="-120"/>
+              </a:rPr>
+              <a:t>Use this for</a:t>
+            </a:r>
+            <a:endParaRPr lang="en-US" sz="950" dirty="0"/>
+          </a:p>
+        </p:txBody>
+      </p:sp>
+      <p:sp>
+        <p:nvSpPr>
+          <p:cNvPr id="14" name="Text 12"/>
+          <p:cNvSpPr/>
+          <p:nvPr/>
+        </p:nvSpPr>
+        <p:spPr>
+          <a:xfrm>
+            <a:off x="8074152" y="3959352"/>
+            <a:ext cx="2825496" cy="1170432"/>
+          </a:xfrm>
+          <a:prstGeom prst="rect">
+            <a:avLst/>
+          </a:prstGeom>
+          <a:noFill/>
+          <a:ln/>
+        </p:spPr>
+        <p:txBody>
+          <a:bodyPr wrap="square" lIns="0" tIns="0" rIns="0" bIns="0" rtlCol="0" anchor="t">
+            <a:normAutofit/>
+          </a:bodyPr>
+          <a:lstStyle/>
+          <a:p>
+            <a:pPr indent="0" marL="0">
+              <a:buNone/>
+            </a:pPr>
+            <a:r>
+              <a:rPr lang="en-US" sz="1250" dirty="0">
+                <a:solidFill>
+                  <a:srgbClr val="17364A"/>
+                </a:solidFill>
+                <a:latin typeface="Aptos" pitchFamily="34" charset="0"/>
+                <a:ea typeface="Aptos" pitchFamily="34" charset="-122"/>
+                <a:cs typeface="Aptos" pitchFamily="34" charset="-120"/>
+              </a:rPr>
+              <a:t>Connect the concept to public health decisions, safeguards, documentation, or implementation work.</a:t>
+            </a:r>
+            <a:endParaRPr lang="en-US" sz="1250" dirty="0"/>
           </a:p>
         </p:txBody>
       </p:sp>
@@ -6832,7 +12659,32 @@
       </p:sp>
       <p:sp>
         <p:nvSpPr>
-          <p:cNvPr id="3" name="Text 1"/>
+          <p:cNvPr id="3" name="Shape 1"/>
+          <p:cNvSpPr/>
+          <p:nvPr/>
+        </p:nvSpPr>
+        <p:spPr>
+          <a:xfrm>
+            <a:off x="0" y="164592"/>
+            <a:ext cx="146304" cy="6693408"/>
+          </a:xfrm>
+          <a:prstGeom prst="rect">
+            <a:avLst/>
+          </a:prstGeom>
+          <a:solidFill>
+            <a:srgbClr val="2F8A28"/>
+          </a:solidFill>
+          <a:ln w="12700">
+            <a:solidFill>
+              <a:srgbClr val="2F8A28"/>
+            </a:solidFill>
+            <a:prstDash val="solid"/>
+          </a:ln>
+        </p:spPr>
+      </p:sp>
+      <p:sp>
+        <p:nvSpPr>
+          <p:cNvPr id="4" name="Text 2"/>
           <p:cNvSpPr/>
           <p:nvPr/>
         </p:nvSpPr>
@@ -6871,7 +12723,7 @@
       </p:sp>
       <p:sp>
         <p:nvSpPr>
-          <p:cNvPr id="4" name="Text 2"/>
+          <p:cNvPr id="5" name="Text 3"/>
           <p:cNvSpPr/>
           <p:nvPr/>
         </p:nvSpPr>
@@ -6910,7 +12762,7 @@
       </p:sp>
       <p:sp>
         <p:nvSpPr>
-          <p:cNvPr id="5" name="Text 3"/>
+          <p:cNvPr id="6" name="Text 4"/>
           <p:cNvSpPr/>
           <p:nvPr/>
         </p:nvSpPr>
@@ -6949,13 +12801,77 @@
       </p:sp>
       <p:sp>
         <p:nvSpPr>
-          <p:cNvPr id="6" name="Text 4"/>
+          <p:cNvPr id="7" name="Shape 5"/>
           <p:cNvSpPr/>
           <p:nvPr/>
         </p:nvSpPr>
         <p:spPr>
           <a:xfrm>
             <a:off x="640080" y="658368"/>
+            <a:ext cx="420624" cy="420624"/>
+          </a:xfrm>
+          <a:prstGeom prst="ellipse">
+            <a:avLst/>
+          </a:prstGeom>
+          <a:solidFill>
+            <a:srgbClr val="0068B7"/>
+          </a:solidFill>
+          <a:ln w="12700">
+            <a:solidFill>
+              <a:srgbClr val="0068B7"/>
+            </a:solidFill>
+            <a:prstDash val="solid"/>
+          </a:ln>
+        </p:spPr>
+      </p:sp>
+      <p:sp>
+        <p:nvSpPr>
+          <p:cNvPr id="8" name="Text 6"/>
+          <p:cNvSpPr/>
+          <p:nvPr/>
+        </p:nvSpPr>
+        <p:spPr>
+          <a:xfrm>
+            <a:off x="640080" y="731520"/>
+            <a:ext cx="420624" cy="164592"/>
+          </a:xfrm>
+          <a:prstGeom prst="rect">
+            <a:avLst/>
+          </a:prstGeom>
+          <a:noFill/>
+          <a:ln/>
+        </p:spPr>
+        <p:txBody>
+          <a:bodyPr wrap="square" lIns="0" tIns="0" rIns="0" bIns="0" rtlCol="0" anchor="ctr"/>
+          <a:lstStyle/>
+          <a:p>
+            <a:pPr algn="ctr" indent="0" marL="0">
+              <a:buNone/>
+            </a:pPr>
+            <a:r>
+              <a:rPr lang="en-US" sz="1100" b="1" dirty="0">
+                <a:solidFill>
+                  <a:srgbClr val="FFFFFF"/>
+                </a:solidFill>
+                <a:latin typeface="Aptos" pitchFamily="34" charset="0"/>
+                <a:ea typeface="Aptos" pitchFamily="34" charset="-122"/>
+                <a:cs typeface="Aptos" pitchFamily="34" charset="-120"/>
+              </a:rPr>
+              <a:t>2</a:t>
+            </a:r>
+            <a:endParaRPr lang="en-US" sz="1100" dirty="0"/>
+          </a:p>
+        </p:txBody>
+      </p:sp>
+      <p:sp>
+        <p:nvSpPr>
+          <p:cNvPr id="9" name="Text 7"/>
+          <p:cNvSpPr/>
+          <p:nvPr/>
+        </p:nvSpPr>
+        <p:spPr>
+          <a:xfrm>
+            <a:off x="640080" y="621792"/>
             <a:ext cx="10881360" cy="566928"/>
           </a:xfrm>
           <a:prstGeom prst="rect">
@@ -6982,7 +12898,7 @@
                 <a:ea typeface="Aptos Display" pitchFamily="34" charset="-122"/>
                 <a:cs typeface="Aptos Display" pitchFamily="34" charset="-120"/>
               </a:rPr>
-              <a:t>Why This Topic Matters for Public Health AI</a:t>
+              <a:t>Module Overview</a:t>
             </a:r>
             <a:endParaRPr lang="en-US" sz="2700" dirty="0"/>
           </a:p>
@@ -6990,32 +12906,164 @@
       </p:sp>
       <p:sp>
         <p:nvSpPr>
-          <p:cNvPr id="7" name="Text 5"/>
-          <p:cNvSpPr/>
-          <p:nvPr/>
-        </p:nvSpPr>
-        <p:spPr>
-          <a:xfrm>
-            <a:off x="822960" y="1325880"/>
-            <a:ext cx="10378440" cy="4800600"/>
-          </a:xfrm>
-          <a:prstGeom prst="rect">
-            <a:avLst/>
-          </a:prstGeom>
-          <a:noFill/>
-          <a:ln/>
-        </p:spPr>
-        <p:txBody>
-          <a:bodyPr wrap="square" lIns="1016" tIns="1016" rIns="1016" bIns="1016" rtlCol="0" anchor="t">
+          <p:cNvPr id="10" name="Text 8"/>
+          <p:cNvSpPr/>
+          <p:nvPr/>
+        </p:nvSpPr>
+        <p:spPr>
+          <a:xfrm>
+            <a:off x="868680" y="1417320"/>
+            <a:ext cx="6675120" cy="4434840"/>
+          </a:xfrm>
+          <a:prstGeom prst="rect">
+            <a:avLst/>
+          </a:prstGeom>
+          <a:noFill/>
+          <a:ln/>
+        </p:spPr>
+        <p:txBody>
+          <a:bodyPr wrap="square" lIns="635" tIns="635" rIns="635" bIns="635" rtlCol="0" anchor="t">
             <a:normAutofit/>
           </a:bodyPr>
           <a:lstStyle/>
           <a:p>
+            <a:r>
+              <a:rPr lang="en-US" sz="1700" dirty="0">
+                <a:solidFill>
+                  <a:srgbClr val="17364A"/>
+                </a:solidFill>
+                <a:latin typeface="Aptos" pitchFamily="34" charset="0"/>
+                <a:ea typeface="Aptos" pitchFamily="34" charset="-122"/>
+                <a:cs typeface="Aptos" pitchFamily="34" charset="-120"/>
+              </a:rPr>
+              <a:t>AI documentation makes systems understandable, reviewable, and accountable.</a:t>
+            </a:r>
+            <a:endParaRPr lang="en-US" sz="1700" dirty="0"/>
+          </a:p>
+          <a:p>
+            <a:r>
+              <a:rPr lang="en-US" sz="1700" dirty="0">
+                <a:solidFill>
+                  <a:srgbClr val="17364A"/>
+                </a:solidFill>
+                <a:latin typeface="Aptos" pitchFamily="34" charset="0"/>
+                <a:ea typeface="Aptos" pitchFamily="34" charset="-122"/>
+                <a:cs typeface="Aptos" pitchFamily="34" charset="-120"/>
+              </a:rPr>
+              <a:t>Model cards and system cards are structured documentation tools that describe intended use, data, evaluation, limitations,.</a:t>
+            </a:r>
+            <a:endParaRPr lang="en-US" sz="1700" dirty="0"/>
+          </a:p>
+          <a:p>
+            <a:r>
+              <a:rPr lang="en-US" sz="1700" dirty="0">
+                <a:solidFill>
+                  <a:srgbClr val="17364A"/>
+                </a:solidFill>
+                <a:latin typeface="Aptos" pitchFamily="34" charset="0"/>
+                <a:ea typeface="Aptos" pitchFamily="34" charset="-122"/>
+                <a:cs typeface="Aptos" pitchFamily="34" charset="-120"/>
+              </a:rPr>
+              <a:t>This module helps public health staff create documentation that supports governance review, vendor oversight, public.</a:t>
+            </a:r>
+            <a:endParaRPr lang="en-US" sz="1700" dirty="0"/>
+          </a:p>
+        </p:txBody>
+      </p:sp>
+      <p:sp>
+        <p:nvSpPr>
+          <p:cNvPr id="11" name="Shape 9"/>
+          <p:cNvSpPr/>
+          <p:nvPr/>
+        </p:nvSpPr>
+        <p:spPr>
+          <a:xfrm>
+            <a:off x="7909560" y="1417320"/>
+            <a:ext cx="3154680" cy="1828800"/>
+          </a:xfrm>
+          <a:prstGeom prst="roundRect">
+            <a:avLst>
+              <a:gd name="adj" fmla="val 6000"/>
+            </a:avLst>
+          </a:prstGeom>
+          <a:solidFill>
+            <a:srgbClr val="EEF8ED"/>
+          </a:solidFill>
+          <a:ln w="12700">
+            <a:solidFill>
+              <a:srgbClr val="B9D7E6"/>
+            </a:solidFill>
+            <a:prstDash val="solid"/>
+          </a:ln>
+        </p:spPr>
+      </p:sp>
+      <p:sp>
+        <p:nvSpPr>
+          <p:cNvPr id="12" name="Text 10"/>
+          <p:cNvSpPr/>
+          <p:nvPr/>
+        </p:nvSpPr>
+        <p:spPr>
+          <a:xfrm>
+            <a:off x="8074152" y="1563624"/>
+            <a:ext cx="2825496" cy="201168"/>
+          </a:xfrm>
+          <a:prstGeom prst="rect">
+            <a:avLst/>
+          </a:prstGeom>
+          <a:noFill/>
+          <a:ln/>
+        </p:spPr>
+        <p:txBody>
+          <a:bodyPr wrap="square" lIns="0" tIns="0" rIns="0" bIns="0" rtlCol="0" anchor="ctr"/>
+          <a:lstStyle/>
+          <a:p>
             <a:pPr indent="0" marL="0">
               <a:buNone/>
             </a:pPr>
             <a:r>
-              <a:rPr lang="en-US" sz="1420" dirty="0">
+              <a:rPr lang="en-US" sz="950" b="1" dirty="0">
+                <a:solidFill>
+                  <a:srgbClr val="0068B7"/>
+                </a:solidFill>
+                <a:latin typeface="Aptos" pitchFamily="34" charset="0"/>
+                <a:ea typeface="Aptos" pitchFamily="34" charset="-122"/>
+                <a:cs typeface="Aptos" pitchFamily="34" charset="-120"/>
+              </a:rPr>
+              <a:t>Key idea</a:t>
+            </a:r>
+            <a:endParaRPr lang="en-US" sz="950" dirty="0"/>
+          </a:p>
+        </p:txBody>
+      </p:sp>
+      <p:sp>
+        <p:nvSpPr>
+          <p:cNvPr id="13" name="Text 11"/>
+          <p:cNvSpPr/>
+          <p:nvPr/>
+        </p:nvSpPr>
+        <p:spPr>
+          <a:xfrm>
+            <a:off x="8074152" y="1856232"/>
+            <a:ext cx="2825496" cy="1261872"/>
+          </a:xfrm>
+          <a:prstGeom prst="rect">
+            <a:avLst/>
+          </a:prstGeom>
+          <a:noFill/>
+          <a:ln/>
+        </p:spPr>
+        <p:txBody>
+          <a:bodyPr wrap="square" lIns="0" tIns="0" rIns="0" bIns="0" rtlCol="0" anchor="t">
+            <a:normAutofit/>
+          </a:bodyPr>
+          <a:lstStyle/>
+          <a:p>
+            <a:pPr indent="0" marL="0">
+              <a:buNone/>
+            </a:pPr>
+            <a:r>
+              <a:rPr lang="en-US" sz="1250" dirty="0">
                 <a:solidFill>
                   <a:srgbClr val="17364A"/>
                 </a:solidFill>
@@ -7023,9 +13071,116 @@
                 <a:ea typeface="Aptos" pitchFamily="34" charset="-122"/>
                 <a:cs typeface="Aptos" pitchFamily="34" charset="-120"/>
               </a:rPr>
-              <a:t>AI Documentation, Model Cards, and System Cards matters because AI systems are embedded in public health programs, data systems, and decision processes rather than operating in isolation. The topic affects whether AI outputs are accurate, explainable, safe, equitable, secure, and sustainable. Agencies that ignore this area may create tools that work in a demonstration but fail in actual practice. The topic also affects accountability. Public health agencies must be able to explain how data are used, why a tool was approved, what evidence supports the workflow, who reviews outputs, and what happens when the system fails. These responsibilities become more important as AI tools move from experimentation into operational use.</a:t>
-            </a:r>
-            <a:endParaRPr lang="en-US" sz="1420" dirty="0"/>
+              <a:t>AI documentation makes systems understandable, reviewable, and accountable.</a:t>
+            </a:r>
+            <a:endParaRPr lang="en-US" sz="1250" dirty="0"/>
+          </a:p>
+        </p:txBody>
+      </p:sp>
+      <p:sp>
+        <p:nvSpPr>
+          <p:cNvPr id="14" name="Shape 12"/>
+          <p:cNvSpPr/>
+          <p:nvPr/>
+        </p:nvSpPr>
+        <p:spPr>
+          <a:xfrm>
+            <a:off x="7909560" y="3520440"/>
+            <a:ext cx="3154680" cy="1737360"/>
+          </a:xfrm>
+          <a:prstGeom prst="roundRect">
+            <a:avLst>
+              <a:gd name="adj" fmla="val 6316"/>
+            </a:avLst>
+          </a:prstGeom>
+          <a:solidFill>
+            <a:srgbClr val="EAF6F8"/>
+          </a:solidFill>
+          <a:ln w="12700">
+            <a:solidFill>
+              <a:srgbClr val="B9D7E6"/>
+            </a:solidFill>
+            <a:prstDash val="solid"/>
+          </a:ln>
+        </p:spPr>
+      </p:sp>
+      <p:sp>
+        <p:nvSpPr>
+          <p:cNvPr id="15" name="Text 13"/>
+          <p:cNvSpPr/>
+          <p:nvPr/>
+        </p:nvSpPr>
+        <p:spPr>
+          <a:xfrm>
+            <a:off x="8074152" y="3666744"/>
+            <a:ext cx="2825496" cy="201168"/>
+          </a:xfrm>
+          <a:prstGeom prst="rect">
+            <a:avLst/>
+          </a:prstGeom>
+          <a:noFill/>
+          <a:ln/>
+        </p:spPr>
+        <p:txBody>
+          <a:bodyPr wrap="square" lIns="0" tIns="0" rIns="0" bIns="0" rtlCol="0" anchor="ctr"/>
+          <a:lstStyle/>
+          <a:p>
+            <a:pPr indent="0" marL="0">
+              <a:buNone/>
+            </a:pPr>
+            <a:r>
+              <a:rPr lang="en-US" sz="950" b="1" dirty="0">
+                <a:solidFill>
+                  <a:srgbClr val="0068B7"/>
+                </a:solidFill>
+                <a:latin typeface="Aptos" pitchFamily="34" charset="0"/>
+                <a:ea typeface="Aptos" pitchFamily="34" charset="-122"/>
+                <a:cs typeface="Aptos" pitchFamily="34" charset="-120"/>
+              </a:rPr>
+              <a:t>Use this for</a:t>
+            </a:r>
+            <a:endParaRPr lang="en-US" sz="950" dirty="0"/>
+          </a:p>
+        </p:txBody>
+      </p:sp>
+      <p:sp>
+        <p:nvSpPr>
+          <p:cNvPr id="16" name="Text 14"/>
+          <p:cNvSpPr/>
+          <p:nvPr/>
+        </p:nvSpPr>
+        <p:spPr>
+          <a:xfrm>
+            <a:off x="8074152" y="3959352"/>
+            <a:ext cx="2825496" cy="1170432"/>
+          </a:xfrm>
+          <a:prstGeom prst="rect">
+            <a:avLst/>
+          </a:prstGeom>
+          <a:noFill/>
+          <a:ln/>
+        </p:spPr>
+        <p:txBody>
+          <a:bodyPr wrap="square" lIns="0" tIns="0" rIns="0" bIns="0" rtlCol="0" anchor="t">
+            <a:normAutofit/>
+          </a:bodyPr>
+          <a:lstStyle/>
+          <a:p>
+            <a:pPr indent="0" marL="0">
+              <a:buNone/>
+            </a:pPr>
+            <a:r>
+              <a:rPr lang="en-US" sz="1250" dirty="0">
+                <a:solidFill>
+                  <a:srgbClr val="17364A"/>
+                </a:solidFill>
+                <a:latin typeface="Aptos" pitchFamily="34" charset="0"/>
+                <a:ea typeface="Aptos" pitchFamily="34" charset="-122"/>
+                <a:cs typeface="Aptos" pitchFamily="34" charset="-120"/>
+              </a:rPr>
+              <a:t>Connect the concept to public health decisions, safeguards, documentation, or implementation work.</a:t>
+            </a:r>
+            <a:endParaRPr lang="en-US" sz="1250" dirty="0"/>
           </a:p>
         </p:txBody>
       </p:sp>
@@ -7088,7 +13243,32 @@
       </p:sp>
       <p:sp>
         <p:nvSpPr>
-          <p:cNvPr id="3" name="Text 1"/>
+          <p:cNvPr id="3" name="Shape 1"/>
+          <p:cNvSpPr/>
+          <p:nvPr/>
+        </p:nvSpPr>
+        <p:spPr>
+          <a:xfrm>
+            <a:off x="0" y="164592"/>
+            <a:ext cx="146304" cy="6693408"/>
+          </a:xfrm>
+          <a:prstGeom prst="rect">
+            <a:avLst/>
+          </a:prstGeom>
+          <a:solidFill>
+            <a:srgbClr val="2F8A28"/>
+          </a:solidFill>
+          <a:ln w="12700">
+            <a:solidFill>
+              <a:srgbClr val="2F8A28"/>
+            </a:solidFill>
+            <a:prstDash val="solid"/>
+          </a:ln>
+        </p:spPr>
+      </p:sp>
+      <p:sp>
+        <p:nvSpPr>
+          <p:cNvPr id="4" name="Text 2"/>
           <p:cNvSpPr/>
           <p:nvPr/>
         </p:nvSpPr>
@@ -7127,7 +13307,7 @@
       </p:sp>
       <p:sp>
         <p:nvSpPr>
-          <p:cNvPr id="4" name="Text 2"/>
+          <p:cNvPr id="5" name="Text 3"/>
           <p:cNvSpPr/>
           <p:nvPr/>
         </p:nvSpPr>
@@ -7166,7 +13346,7 @@
       </p:sp>
       <p:sp>
         <p:nvSpPr>
-          <p:cNvPr id="5" name="Text 3"/>
+          <p:cNvPr id="6" name="Text 4"/>
           <p:cNvSpPr/>
           <p:nvPr/>
         </p:nvSpPr>
@@ -7205,13 +13385,77 @@
       </p:sp>
       <p:sp>
         <p:nvSpPr>
-          <p:cNvPr id="6" name="Text 4"/>
+          <p:cNvPr id="7" name="Shape 5"/>
           <p:cNvSpPr/>
           <p:nvPr/>
         </p:nvSpPr>
         <p:spPr>
           <a:xfrm>
             <a:off x="640080" y="658368"/>
+            <a:ext cx="420624" cy="420624"/>
+          </a:xfrm>
+          <a:prstGeom prst="ellipse">
+            <a:avLst/>
+          </a:prstGeom>
+          <a:solidFill>
+            <a:srgbClr val="0068B7"/>
+          </a:solidFill>
+          <a:ln w="12700">
+            <a:solidFill>
+              <a:srgbClr val="0068B7"/>
+            </a:solidFill>
+            <a:prstDash val="solid"/>
+          </a:ln>
+        </p:spPr>
+      </p:sp>
+      <p:sp>
+        <p:nvSpPr>
+          <p:cNvPr id="8" name="Text 6"/>
+          <p:cNvSpPr/>
+          <p:nvPr/>
+        </p:nvSpPr>
+        <p:spPr>
+          <a:xfrm>
+            <a:off x="640080" y="731520"/>
+            <a:ext cx="420624" cy="164592"/>
+          </a:xfrm>
+          <a:prstGeom prst="rect">
+            <a:avLst/>
+          </a:prstGeom>
+          <a:noFill/>
+          <a:ln/>
+        </p:spPr>
+        <p:txBody>
+          <a:bodyPr wrap="square" lIns="0" tIns="0" rIns="0" bIns="0" rtlCol="0" anchor="ctr"/>
+          <a:lstStyle/>
+          <a:p>
+            <a:pPr algn="ctr" indent="0" marL="0">
+              <a:buNone/>
+            </a:pPr>
+            <a:r>
+              <a:rPr lang="en-US" sz="1100" b="1" dirty="0">
+                <a:solidFill>
+                  <a:srgbClr val="FFFFFF"/>
+                </a:solidFill>
+                <a:latin typeface="Aptos" pitchFamily="34" charset="0"/>
+                <a:ea typeface="Aptos" pitchFamily="34" charset="-122"/>
+                <a:cs typeface="Aptos" pitchFamily="34" charset="-120"/>
+              </a:rPr>
+              <a:t>3</a:t>
+            </a:r>
+            <a:endParaRPr lang="en-US" sz="1100" dirty="0"/>
+          </a:p>
+        </p:txBody>
+      </p:sp>
+      <p:sp>
+        <p:nvSpPr>
+          <p:cNvPr id="9" name="Text 7"/>
+          <p:cNvSpPr/>
+          <p:nvPr/>
+        </p:nvSpPr>
+        <p:spPr>
+          <a:xfrm>
+            <a:off x="640080" y="621792"/>
             <a:ext cx="10881360" cy="566928"/>
           </a:xfrm>
           <a:prstGeom prst="rect">
@@ -7238,7 +13482,7 @@
                 <a:ea typeface="Aptos Display" pitchFamily="34" charset="-122"/>
                 <a:cs typeface="Aptos Display" pitchFamily="34" charset="-120"/>
               </a:rPr>
-              <a:t>Core Concepts</a:t>
+              <a:t>Jurisdiction and Agency Policy Note</a:t>
             </a:r>
             <a:endParaRPr lang="en-US" sz="2700" dirty="0"/>
           </a:p>
@@ -7246,32 +13490,164 @@
       </p:sp>
       <p:sp>
         <p:nvSpPr>
-          <p:cNvPr id="7" name="Text 5"/>
-          <p:cNvSpPr/>
-          <p:nvPr/>
-        </p:nvSpPr>
-        <p:spPr>
-          <a:xfrm>
-            <a:off x="822960" y="1325880"/>
-            <a:ext cx="10378440" cy="4800600"/>
-          </a:xfrm>
-          <a:prstGeom prst="rect">
-            <a:avLst/>
-          </a:prstGeom>
-          <a:noFill/>
-          <a:ln/>
-        </p:spPr>
-        <p:txBody>
-          <a:bodyPr wrap="square" lIns="1016" tIns="1016" rIns="1016" bIns="1016" rtlCol="0" anchor="t">
+          <p:cNvPr id="10" name="Text 8"/>
+          <p:cNvSpPr/>
+          <p:nvPr/>
+        </p:nvSpPr>
+        <p:spPr>
+          <a:xfrm>
+            <a:off x="868680" y="1417320"/>
+            <a:ext cx="6675120" cy="4434840"/>
+          </a:xfrm>
+          <a:prstGeom prst="rect">
+            <a:avLst/>
+          </a:prstGeom>
+          <a:noFill/>
+          <a:ln/>
+        </p:spPr>
+        <p:txBody>
+          <a:bodyPr wrap="square" lIns="635" tIns="635" rIns="635" bIns="635" rtlCol="0" anchor="t">
             <a:normAutofit/>
           </a:bodyPr>
           <a:lstStyle/>
           <a:p>
+            <a:r>
+              <a:rPr lang="en-US" sz="1700" dirty="0">
+                <a:solidFill>
+                  <a:srgbClr val="17364A"/>
+                </a:solidFill>
+                <a:latin typeface="Aptos" pitchFamily="34" charset="0"/>
+                <a:ea typeface="Aptos" pitchFamily="34" charset="-122"/>
+                <a:cs typeface="Aptos" pitchFamily="34" charset="-120"/>
+              </a:rPr>
+              <a:t>This national-level module is intended for training and planning purposes.</a:t>
+            </a:r>
+            <a:endParaRPr lang="en-US" sz="1700" dirty="0"/>
+          </a:p>
+          <a:p>
+            <a:r>
+              <a:rPr lang="en-US" sz="1700" dirty="0">
+                <a:solidFill>
+                  <a:srgbClr val="17364A"/>
+                </a:solidFill>
+                <a:latin typeface="Aptos" pitchFamily="34" charset="0"/>
+                <a:ea typeface="Aptos" pitchFamily="34" charset="-122"/>
+                <a:cs typeface="Aptos" pitchFamily="34" charset="-120"/>
+              </a:rPr>
+              <a:t>It does not replace legal, privacy, procurement, civil rights, records, or agency policy review.</a:t>
+            </a:r>
+            <a:endParaRPr lang="en-US" sz="1700" dirty="0"/>
+          </a:p>
+          <a:p>
+            <a:r>
+              <a:rPr lang="en-US" sz="1700" dirty="0">
+                <a:solidFill>
+                  <a:srgbClr val="17364A"/>
+                </a:solidFill>
+                <a:latin typeface="Aptos" pitchFamily="34" charset="0"/>
+                <a:ea typeface="Aptos" pitchFamily="34" charset="-122"/>
+                <a:cs typeface="Aptos" pitchFamily="34" charset="-120"/>
+              </a:rPr>
+              <a:t>Learners should confirm applicable requirements in their own jurisdiction and organization before implementing AI-supported.</a:t>
+            </a:r>
+            <a:endParaRPr lang="en-US" sz="1700" dirty="0"/>
+          </a:p>
+        </p:txBody>
+      </p:sp>
+      <p:sp>
+        <p:nvSpPr>
+          <p:cNvPr id="11" name="Shape 9"/>
+          <p:cNvSpPr/>
+          <p:nvPr/>
+        </p:nvSpPr>
+        <p:spPr>
+          <a:xfrm>
+            <a:off x="7909560" y="1417320"/>
+            <a:ext cx="3154680" cy="1828800"/>
+          </a:xfrm>
+          <a:prstGeom prst="roundRect">
+            <a:avLst>
+              <a:gd name="adj" fmla="val 6000"/>
+            </a:avLst>
+          </a:prstGeom>
+          <a:solidFill>
+            <a:srgbClr val="EEF8ED"/>
+          </a:solidFill>
+          <a:ln w="12700">
+            <a:solidFill>
+              <a:srgbClr val="B9D7E6"/>
+            </a:solidFill>
+            <a:prstDash val="solid"/>
+          </a:ln>
+        </p:spPr>
+      </p:sp>
+      <p:sp>
+        <p:nvSpPr>
+          <p:cNvPr id="12" name="Text 10"/>
+          <p:cNvSpPr/>
+          <p:nvPr/>
+        </p:nvSpPr>
+        <p:spPr>
+          <a:xfrm>
+            <a:off x="8074152" y="1563624"/>
+            <a:ext cx="2825496" cy="201168"/>
+          </a:xfrm>
+          <a:prstGeom prst="rect">
+            <a:avLst/>
+          </a:prstGeom>
+          <a:noFill/>
+          <a:ln/>
+        </p:spPr>
+        <p:txBody>
+          <a:bodyPr wrap="square" lIns="0" tIns="0" rIns="0" bIns="0" rtlCol="0" anchor="ctr"/>
+          <a:lstStyle/>
+          <a:p>
             <a:pPr indent="0" marL="0">
               <a:buNone/>
             </a:pPr>
             <a:r>
-              <a:rPr lang="en-US" sz="1420" dirty="0">
+              <a:rPr lang="en-US" sz="950" b="1" dirty="0">
+                <a:solidFill>
+                  <a:srgbClr val="0068B7"/>
+                </a:solidFill>
+                <a:latin typeface="Aptos" pitchFamily="34" charset="0"/>
+                <a:ea typeface="Aptos" pitchFamily="34" charset="-122"/>
+                <a:cs typeface="Aptos" pitchFamily="34" charset="-120"/>
+              </a:rPr>
+              <a:t>Key idea</a:t>
+            </a:r>
+            <a:endParaRPr lang="en-US" sz="950" dirty="0"/>
+          </a:p>
+        </p:txBody>
+      </p:sp>
+      <p:sp>
+        <p:nvSpPr>
+          <p:cNvPr id="13" name="Text 11"/>
+          <p:cNvSpPr/>
+          <p:nvPr/>
+        </p:nvSpPr>
+        <p:spPr>
+          <a:xfrm>
+            <a:off x="8074152" y="1856232"/>
+            <a:ext cx="2825496" cy="1261872"/>
+          </a:xfrm>
+          <a:prstGeom prst="rect">
+            <a:avLst/>
+          </a:prstGeom>
+          <a:noFill/>
+          <a:ln/>
+        </p:spPr>
+        <p:txBody>
+          <a:bodyPr wrap="square" lIns="0" tIns="0" rIns="0" bIns="0" rtlCol="0" anchor="t">
+            <a:normAutofit/>
+          </a:bodyPr>
+          <a:lstStyle/>
+          <a:p>
+            <a:pPr indent="0" marL="0">
+              <a:buNone/>
+            </a:pPr>
+            <a:r>
+              <a:rPr lang="en-US" sz="1250" dirty="0">
                 <a:solidFill>
                   <a:srgbClr val="17364A"/>
                 </a:solidFill>
@@ -7279,9 +13655,116 @@
                 <a:ea typeface="Aptos" pitchFamily="34" charset="-122"/>
                 <a:cs typeface="Aptos" pitchFamily="34" charset="-120"/>
               </a:rPr>
-              <a:t>AI documentation records what the system is intended to do, how it was developed or configured, what data it uses, how it was evaluated, what limitations are known, and how it is monitored. Documentation supports accountability across the AI lifecycle. A model card is a structured summary of a model, including intended use, data, evaluation, limitations, risks, and appropriate use. A system card extends documentation to the broader system, including workflow integration, interfaces, user roles, retrieval sources, human oversight, and operational controls. Documentation is not a paperwork exercise. It is how agencies preserve institutional memory, support governance review, answer vendor questions, investigate incidents, train staff, and explain decisions to leaders or the public when appropriate.</a:t>
-            </a:r>
-            <a:endParaRPr lang="en-US" sz="1420" dirty="0"/>
+              <a:t>This national-level module is intended for training and planning purposes.</a:t>
+            </a:r>
+            <a:endParaRPr lang="en-US" sz="1250" dirty="0"/>
+          </a:p>
+        </p:txBody>
+      </p:sp>
+      <p:sp>
+        <p:nvSpPr>
+          <p:cNvPr id="14" name="Shape 12"/>
+          <p:cNvSpPr/>
+          <p:nvPr/>
+        </p:nvSpPr>
+        <p:spPr>
+          <a:xfrm>
+            <a:off x="7909560" y="3520440"/>
+            <a:ext cx="3154680" cy="1737360"/>
+          </a:xfrm>
+          <a:prstGeom prst="roundRect">
+            <a:avLst>
+              <a:gd name="adj" fmla="val 6316"/>
+            </a:avLst>
+          </a:prstGeom>
+          <a:solidFill>
+            <a:srgbClr val="EAF6F8"/>
+          </a:solidFill>
+          <a:ln w="12700">
+            <a:solidFill>
+              <a:srgbClr val="B9D7E6"/>
+            </a:solidFill>
+            <a:prstDash val="solid"/>
+          </a:ln>
+        </p:spPr>
+      </p:sp>
+      <p:sp>
+        <p:nvSpPr>
+          <p:cNvPr id="15" name="Text 13"/>
+          <p:cNvSpPr/>
+          <p:nvPr/>
+        </p:nvSpPr>
+        <p:spPr>
+          <a:xfrm>
+            <a:off x="8074152" y="3666744"/>
+            <a:ext cx="2825496" cy="201168"/>
+          </a:xfrm>
+          <a:prstGeom prst="rect">
+            <a:avLst/>
+          </a:prstGeom>
+          <a:noFill/>
+          <a:ln/>
+        </p:spPr>
+        <p:txBody>
+          <a:bodyPr wrap="square" lIns="0" tIns="0" rIns="0" bIns="0" rtlCol="0" anchor="ctr"/>
+          <a:lstStyle/>
+          <a:p>
+            <a:pPr indent="0" marL="0">
+              <a:buNone/>
+            </a:pPr>
+            <a:r>
+              <a:rPr lang="en-US" sz="950" b="1" dirty="0">
+                <a:solidFill>
+                  <a:srgbClr val="0068B7"/>
+                </a:solidFill>
+                <a:latin typeface="Aptos" pitchFamily="34" charset="0"/>
+                <a:ea typeface="Aptos" pitchFamily="34" charset="-122"/>
+                <a:cs typeface="Aptos" pitchFamily="34" charset="-120"/>
+              </a:rPr>
+              <a:t>Use this for</a:t>
+            </a:r>
+            <a:endParaRPr lang="en-US" sz="950" dirty="0"/>
+          </a:p>
+        </p:txBody>
+      </p:sp>
+      <p:sp>
+        <p:nvSpPr>
+          <p:cNvPr id="16" name="Text 14"/>
+          <p:cNvSpPr/>
+          <p:nvPr/>
+        </p:nvSpPr>
+        <p:spPr>
+          <a:xfrm>
+            <a:off x="8074152" y="3959352"/>
+            <a:ext cx="2825496" cy="1170432"/>
+          </a:xfrm>
+          <a:prstGeom prst="rect">
+            <a:avLst/>
+          </a:prstGeom>
+          <a:noFill/>
+          <a:ln/>
+        </p:spPr>
+        <p:txBody>
+          <a:bodyPr wrap="square" lIns="0" tIns="0" rIns="0" bIns="0" rtlCol="0" anchor="t">
+            <a:normAutofit/>
+          </a:bodyPr>
+          <a:lstStyle/>
+          <a:p>
+            <a:pPr indent="0" marL="0">
+              <a:buNone/>
+            </a:pPr>
+            <a:r>
+              <a:rPr lang="en-US" sz="1250" dirty="0">
+                <a:solidFill>
+                  <a:srgbClr val="17364A"/>
+                </a:solidFill>
+                <a:latin typeface="Aptos" pitchFamily="34" charset="0"/>
+                <a:ea typeface="Aptos" pitchFamily="34" charset="-122"/>
+                <a:cs typeface="Aptos" pitchFamily="34" charset="-120"/>
+              </a:rPr>
+              <a:t>Connect the concept to public health decisions, safeguards, documentation, or implementation work.</a:t>
+            </a:r>
+            <a:endParaRPr lang="en-US" sz="1250" dirty="0"/>
           </a:p>
         </p:txBody>
       </p:sp>
@@ -7344,7 +13827,32 @@
       </p:sp>
       <p:sp>
         <p:nvSpPr>
-          <p:cNvPr id="3" name="Text 1"/>
+          <p:cNvPr id="3" name="Shape 1"/>
+          <p:cNvSpPr/>
+          <p:nvPr/>
+        </p:nvSpPr>
+        <p:spPr>
+          <a:xfrm>
+            <a:off x="0" y="164592"/>
+            <a:ext cx="146304" cy="6693408"/>
+          </a:xfrm>
+          <a:prstGeom prst="rect">
+            <a:avLst/>
+          </a:prstGeom>
+          <a:solidFill>
+            <a:srgbClr val="2F8A28"/>
+          </a:solidFill>
+          <a:ln w="12700">
+            <a:solidFill>
+              <a:srgbClr val="2F8A28"/>
+            </a:solidFill>
+            <a:prstDash val="solid"/>
+          </a:ln>
+        </p:spPr>
+      </p:sp>
+      <p:sp>
+        <p:nvSpPr>
+          <p:cNvPr id="4" name="Text 2"/>
           <p:cNvSpPr/>
           <p:nvPr/>
         </p:nvSpPr>
@@ -7383,7 +13891,7 @@
       </p:sp>
       <p:sp>
         <p:nvSpPr>
-          <p:cNvPr id="4" name="Text 2"/>
+          <p:cNvPr id="5" name="Text 3"/>
           <p:cNvSpPr/>
           <p:nvPr/>
         </p:nvSpPr>
@@ -7422,7 +13930,7 @@
       </p:sp>
       <p:sp>
         <p:nvSpPr>
-          <p:cNvPr id="5" name="Text 3"/>
+          <p:cNvPr id="6" name="Text 4"/>
           <p:cNvSpPr/>
           <p:nvPr/>
         </p:nvSpPr>
@@ -7461,13 +13969,77 @@
       </p:sp>
       <p:sp>
         <p:nvSpPr>
-          <p:cNvPr id="6" name="Text 4"/>
+          <p:cNvPr id="7" name="Shape 5"/>
           <p:cNvSpPr/>
           <p:nvPr/>
         </p:nvSpPr>
         <p:spPr>
           <a:xfrm>
             <a:off x="640080" y="658368"/>
+            <a:ext cx="420624" cy="420624"/>
+          </a:xfrm>
+          <a:prstGeom prst="ellipse">
+            <a:avLst/>
+          </a:prstGeom>
+          <a:solidFill>
+            <a:srgbClr val="0068B7"/>
+          </a:solidFill>
+          <a:ln w="12700">
+            <a:solidFill>
+              <a:srgbClr val="0068B7"/>
+            </a:solidFill>
+            <a:prstDash val="solid"/>
+          </a:ln>
+        </p:spPr>
+      </p:sp>
+      <p:sp>
+        <p:nvSpPr>
+          <p:cNvPr id="8" name="Text 6"/>
+          <p:cNvSpPr/>
+          <p:nvPr/>
+        </p:nvSpPr>
+        <p:spPr>
+          <a:xfrm>
+            <a:off x="640080" y="731520"/>
+            <a:ext cx="420624" cy="164592"/>
+          </a:xfrm>
+          <a:prstGeom prst="rect">
+            <a:avLst/>
+          </a:prstGeom>
+          <a:noFill/>
+          <a:ln/>
+        </p:spPr>
+        <p:txBody>
+          <a:bodyPr wrap="square" lIns="0" tIns="0" rIns="0" bIns="0" rtlCol="0" anchor="ctr"/>
+          <a:lstStyle/>
+          <a:p>
+            <a:pPr algn="ctr" indent="0" marL="0">
+              <a:buNone/>
+            </a:pPr>
+            <a:r>
+              <a:rPr lang="en-US" sz="1100" b="1" dirty="0">
+                <a:solidFill>
+                  <a:srgbClr val="FFFFFF"/>
+                </a:solidFill>
+                <a:latin typeface="Aptos" pitchFamily="34" charset="0"/>
+                <a:ea typeface="Aptos" pitchFamily="34" charset="-122"/>
+                <a:cs typeface="Aptos" pitchFamily="34" charset="-120"/>
+              </a:rPr>
+              <a:t>4</a:t>
+            </a:r>
+            <a:endParaRPr lang="en-US" sz="1100" dirty="0"/>
+          </a:p>
+        </p:txBody>
+      </p:sp>
+      <p:sp>
+        <p:nvSpPr>
+          <p:cNvPr id="9" name="Text 7"/>
+          <p:cNvSpPr/>
+          <p:nvPr/>
+        </p:nvSpPr>
+        <p:spPr>
+          <a:xfrm>
+            <a:off x="640080" y="621792"/>
             <a:ext cx="10881360" cy="566928"/>
           </a:xfrm>
           <a:prstGeom prst="rect">
@@ -7494,7 +14066,7 @@
                 <a:ea typeface="Aptos Display" pitchFamily="34" charset="-122"/>
                 <a:cs typeface="Aptos Display" pitchFamily="34" charset="-120"/>
               </a:rPr>
-              <a:t>Public Health Example</a:t>
+              <a:t>Why This Topic Matters for Public Health AI</a:t>
             </a:r>
             <a:endParaRPr lang="en-US" sz="2700" dirty="0"/>
           </a:p>
@@ -7502,32 +14074,178 @@
       </p:sp>
       <p:sp>
         <p:nvSpPr>
-          <p:cNvPr id="7" name="Text 5"/>
-          <p:cNvSpPr/>
-          <p:nvPr/>
-        </p:nvSpPr>
-        <p:spPr>
-          <a:xfrm>
-            <a:off x="822960" y="1325880"/>
-            <a:ext cx="10378440" cy="4800600"/>
-          </a:xfrm>
-          <a:prstGeom prst="rect">
-            <a:avLst/>
-          </a:prstGeom>
-          <a:noFill/>
-          <a:ln/>
-        </p:spPr>
-        <p:txBody>
-          <a:bodyPr wrap="square" lIns="1016" tIns="1016" rIns="1016" bIns="1016" rtlCol="0" anchor="t">
+          <p:cNvPr id="10" name="Text 8"/>
+          <p:cNvSpPr/>
+          <p:nvPr/>
+        </p:nvSpPr>
+        <p:spPr>
+          <a:xfrm>
+            <a:off x="868680" y="1417320"/>
+            <a:ext cx="6675120" cy="4434840"/>
+          </a:xfrm>
+          <a:prstGeom prst="rect">
+            <a:avLst/>
+          </a:prstGeom>
+          <a:noFill/>
+          <a:ln/>
+        </p:spPr>
+        <p:txBody>
+          <a:bodyPr wrap="square" lIns="635" tIns="635" rIns="635" bIns="635" rtlCol="0" anchor="t">
             <a:normAutofit/>
           </a:bodyPr>
           <a:lstStyle/>
           <a:p>
+            <a:r>
+              <a:rPr lang="en-US" sz="1700" dirty="0">
+                <a:solidFill>
+                  <a:srgbClr val="17364A"/>
+                </a:solidFill>
+                <a:latin typeface="Aptos" pitchFamily="34" charset="0"/>
+                <a:ea typeface="Aptos" pitchFamily="34" charset="-122"/>
+                <a:cs typeface="Aptos" pitchFamily="34" charset="-120"/>
+              </a:rPr>
+              <a:t>AI Documentation, Model Cards, and System Cards matters because AI systems are embedded in public health programs, data.</a:t>
+            </a:r>
+            <a:endParaRPr lang="en-US" sz="1700" dirty="0"/>
+          </a:p>
+          <a:p>
+            <a:r>
+              <a:rPr lang="en-US" sz="1700" dirty="0">
+                <a:solidFill>
+                  <a:srgbClr val="17364A"/>
+                </a:solidFill>
+                <a:latin typeface="Aptos" pitchFamily="34" charset="0"/>
+                <a:ea typeface="Aptos" pitchFamily="34" charset="-122"/>
+                <a:cs typeface="Aptos" pitchFamily="34" charset="-120"/>
+              </a:rPr>
+              <a:t>The topic affects whether AI outputs are accurate, explainable, safe, equitable, secure, and sustainable.</a:t>
+            </a:r>
+            <a:endParaRPr lang="en-US" sz="1700" dirty="0"/>
+          </a:p>
+          <a:p>
+            <a:r>
+              <a:rPr lang="en-US" sz="1700" dirty="0">
+                <a:solidFill>
+                  <a:srgbClr val="17364A"/>
+                </a:solidFill>
+                <a:latin typeface="Aptos" pitchFamily="34" charset="0"/>
+                <a:ea typeface="Aptos" pitchFamily="34" charset="-122"/>
+                <a:cs typeface="Aptos" pitchFamily="34" charset="-120"/>
+              </a:rPr>
+              <a:t>Agencies that ignore this area may create tools that work in a demonstration but fail in actual practice.</a:t>
+            </a:r>
+            <a:endParaRPr lang="en-US" sz="1700" dirty="0"/>
+          </a:p>
+          <a:p>
+            <a:r>
+              <a:rPr lang="en-US" sz="1700" dirty="0">
+                <a:solidFill>
+                  <a:srgbClr val="17364A"/>
+                </a:solidFill>
+                <a:latin typeface="Aptos" pitchFamily="34" charset="0"/>
+                <a:ea typeface="Aptos" pitchFamily="34" charset="-122"/>
+                <a:cs typeface="Aptos" pitchFamily="34" charset="-120"/>
+              </a:rPr>
+              <a:t>The topic also affects accountability.</a:t>
+            </a:r>
+            <a:endParaRPr lang="en-US" sz="1700" dirty="0"/>
+          </a:p>
+        </p:txBody>
+      </p:sp>
+      <p:sp>
+        <p:nvSpPr>
+          <p:cNvPr id="11" name="Shape 9"/>
+          <p:cNvSpPr/>
+          <p:nvPr/>
+        </p:nvSpPr>
+        <p:spPr>
+          <a:xfrm>
+            <a:off x="7909560" y="1417320"/>
+            <a:ext cx="3154680" cy="1828800"/>
+          </a:xfrm>
+          <a:prstGeom prst="roundRect">
+            <a:avLst>
+              <a:gd name="adj" fmla="val 6000"/>
+            </a:avLst>
+          </a:prstGeom>
+          <a:solidFill>
+            <a:srgbClr val="EEF8ED"/>
+          </a:solidFill>
+          <a:ln w="12700">
+            <a:solidFill>
+              <a:srgbClr val="B9D7E6"/>
+            </a:solidFill>
+            <a:prstDash val="solid"/>
+          </a:ln>
+        </p:spPr>
+      </p:sp>
+      <p:sp>
+        <p:nvSpPr>
+          <p:cNvPr id="12" name="Text 10"/>
+          <p:cNvSpPr/>
+          <p:nvPr/>
+        </p:nvSpPr>
+        <p:spPr>
+          <a:xfrm>
+            <a:off x="8074152" y="1563624"/>
+            <a:ext cx="2825496" cy="201168"/>
+          </a:xfrm>
+          <a:prstGeom prst="rect">
+            <a:avLst/>
+          </a:prstGeom>
+          <a:noFill/>
+          <a:ln/>
+        </p:spPr>
+        <p:txBody>
+          <a:bodyPr wrap="square" lIns="0" tIns="0" rIns="0" bIns="0" rtlCol="0" anchor="ctr"/>
+          <a:lstStyle/>
+          <a:p>
             <a:pPr indent="0" marL="0">
               <a:buNone/>
             </a:pPr>
             <a:r>
-              <a:rPr lang="en-US" sz="1420" dirty="0">
+              <a:rPr lang="en-US" sz="950" b="1" dirty="0">
+                <a:solidFill>
+                  <a:srgbClr val="0068B7"/>
+                </a:solidFill>
+                <a:latin typeface="Aptos" pitchFamily="34" charset="0"/>
+                <a:ea typeface="Aptos" pitchFamily="34" charset="-122"/>
+                <a:cs typeface="Aptos" pitchFamily="34" charset="-120"/>
+              </a:rPr>
+              <a:t>Key idea</a:t>
+            </a:r>
+            <a:endParaRPr lang="en-US" sz="950" dirty="0"/>
+          </a:p>
+        </p:txBody>
+      </p:sp>
+      <p:sp>
+        <p:nvSpPr>
+          <p:cNvPr id="13" name="Text 11"/>
+          <p:cNvSpPr/>
+          <p:nvPr/>
+        </p:nvSpPr>
+        <p:spPr>
+          <a:xfrm>
+            <a:off x="8074152" y="1856232"/>
+            <a:ext cx="2825496" cy="1261872"/>
+          </a:xfrm>
+          <a:prstGeom prst="rect">
+            <a:avLst/>
+          </a:prstGeom>
+          <a:noFill/>
+          <a:ln/>
+        </p:spPr>
+        <p:txBody>
+          <a:bodyPr wrap="square" lIns="0" tIns="0" rIns="0" bIns="0" rtlCol="0" anchor="t">
+            <a:normAutofit/>
+          </a:bodyPr>
+          <a:lstStyle/>
+          <a:p>
+            <a:pPr indent="0" marL="0">
+              <a:buNone/>
+            </a:pPr>
+            <a:r>
+              <a:rPr lang="en-US" sz="1250" dirty="0">
                 <a:solidFill>
                   <a:srgbClr val="17364A"/>
                 </a:solidFill>
@@ -7535,9 +14253,116 @@
                 <a:ea typeface="Aptos" pitchFamily="34" charset="-122"/>
                 <a:cs typeface="Aptos" pitchFamily="34" charset="-120"/>
               </a:rPr>
-              <a:t>An agency using a generative AI assistant to draft public health messages should document the approved use, source materials, prohibited content, review process, accessibility expectations, language review, hallucination controls, user training, monitoring process, and incident response pathway. A system card would help reviewers understand the whole workflow rather than only the model.</a:t>
-            </a:r>
-            <a:endParaRPr lang="en-US" sz="1420" dirty="0"/>
+              <a:t>AI Documentation, Model Cards, and System Cards matters because AI systems are embedded in public health programs, data.</a:t>
+            </a:r>
+            <a:endParaRPr lang="en-US" sz="1250" dirty="0"/>
+          </a:p>
+        </p:txBody>
+      </p:sp>
+      <p:sp>
+        <p:nvSpPr>
+          <p:cNvPr id="14" name="Shape 12"/>
+          <p:cNvSpPr/>
+          <p:nvPr/>
+        </p:nvSpPr>
+        <p:spPr>
+          <a:xfrm>
+            <a:off x="7909560" y="3520440"/>
+            <a:ext cx="3154680" cy="1737360"/>
+          </a:xfrm>
+          <a:prstGeom prst="roundRect">
+            <a:avLst>
+              <a:gd name="adj" fmla="val 6316"/>
+            </a:avLst>
+          </a:prstGeom>
+          <a:solidFill>
+            <a:srgbClr val="EAF6F8"/>
+          </a:solidFill>
+          <a:ln w="12700">
+            <a:solidFill>
+              <a:srgbClr val="B9D7E6"/>
+            </a:solidFill>
+            <a:prstDash val="solid"/>
+          </a:ln>
+        </p:spPr>
+      </p:sp>
+      <p:sp>
+        <p:nvSpPr>
+          <p:cNvPr id="15" name="Text 13"/>
+          <p:cNvSpPr/>
+          <p:nvPr/>
+        </p:nvSpPr>
+        <p:spPr>
+          <a:xfrm>
+            <a:off x="8074152" y="3666744"/>
+            <a:ext cx="2825496" cy="201168"/>
+          </a:xfrm>
+          <a:prstGeom prst="rect">
+            <a:avLst/>
+          </a:prstGeom>
+          <a:noFill/>
+          <a:ln/>
+        </p:spPr>
+        <p:txBody>
+          <a:bodyPr wrap="square" lIns="0" tIns="0" rIns="0" bIns="0" rtlCol="0" anchor="ctr"/>
+          <a:lstStyle/>
+          <a:p>
+            <a:pPr indent="0" marL="0">
+              <a:buNone/>
+            </a:pPr>
+            <a:r>
+              <a:rPr lang="en-US" sz="950" b="1" dirty="0">
+                <a:solidFill>
+                  <a:srgbClr val="0068B7"/>
+                </a:solidFill>
+                <a:latin typeface="Aptos" pitchFamily="34" charset="0"/>
+                <a:ea typeface="Aptos" pitchFamily="34" charset="-122"/>
+                <a:cs typeface="Aptos" pitchFamily="34" charset="-120"/>
+              </a:rPr>
+              <a:t>Use this for</a:t>
+            </a:r>
+            <a:endParaRPr lang="en-US" sz="950" dirty="0"/>
+          </a:p>
+        </p:txBody>
+      </p:sp>
+      <p:sp>
+        <p:nvSpPr>
+          <p:cNvPr id="16" name="Text 14"/>
+          <p:cNvSpPr/>
+          <p:nvPr/>
+        </p:nvSpPr>
+        <p:spPr>
+          <a:xfrm>
+            <a:off x="8074152" y="3959352"/>
+            <a:ext cx="2825496" cy="1170432"/>
+          </a:xfrm>
+          <a:prstGeom prst="rect">
+            <a:avLst/>
+          </a:prstGeom>
+          <a:noFill/>
+          <a:ln/>
+        </p:spPr>
+        <p:txBody>
+          <a:bodyPr wrap="square" lIns="0" tIns="0" rIns="0" bIns="0" rtlCol="0" anchor="t">
+            <a:normAutofit/>
+          </a:bodyPr>
+          <a:lstStyle/>
+          <a:p>
+            <a:pPr indent="0" marL="0">
+              <a:buNone/>
+            </a:pPr>
+            <a:r>
+              <a:rPr lang="en-US" sz="1250" dirty="0">
+                <a:solidFill>
+                  <a:srgbClr val="17364A"/>
+                </a:solidFill>
+                <a:latin typeface="Aptos" pitchFamily="34" charset="0"/>
+                <a:ea typeface="Aptos" pitchFamily="34" charset="-122"/>
+                <a:cs typeface="Aptos" pitchFamily="34" charset="-120"/>
+              </a:rPr>
+              <a:t>Connect the concept to public health decisions, safeguards, documentation, or implementation work.</a:t>
+            </a:r>
+            <a:endParaRPr lang="en-US" sz="1250" dirty="0"/>
           </a:p>
         </p:txBody>
       </p:sp>

--- a/downloads/presentations/modules/lesson-42-ai-documentation-model-cards-and-system-cards.pptx
+++ b/downloads/presentations/modules/lesson-42-ai-documentation-model-cards-and-system-cards.pptx
@@ -2902,6 +2902,45 @@
           </a:p>
         </p:txBody>
       </p:sp>
+      <p:sp>
+        <p:nvSpPr>
+          <p:cNvPr id="8" name="Text 5"/>
+          <p:cNvSpPr/>
+          <p:nvPr/>
+        </p:nvSpPr>
+        <p:spPr>
+          <a:xfrm>
+            <a:off x="11137392" y="6510528"/>
+            <a:ext cx="411480" cy="201168"/>
+          </a:xfrm>
+          <a:prstGeom prst="rect">
+            <a:avLst/>
+          </a:prstGeom>
+          <a:noFill/>
+          <a:ln/>
+        </p:spPr>
+        <p:txBody>
+          <a:bodyPr wrap="square" lIns="0" tIns="0" rIns="0" bIns="0" rtlCol="0" anchor="ctr"/>
+          <a:lstStyle/>
+          <a:p>
+            <a:pPr algn="r" indent="0" marL="0">
+              <a:buNone/>
+            </a:pPr>
+            <a:r>
+              <a:rPr lang="en-US" sz="900" dirty="0">
+                <a:solidFill>
+                  <a:srgbClr val="5F7181"/>
+                </a:solidFill>
+                <a:latin typeface="Aptos" pitchFamily="34" charset="0"/>
+                <a:ea typeface="Aptos" pitchFamily="34" charset="-122"/>
+                <a:cs typeface="Aptos" pitchFamily="34" charset="-120"/>
+              </a:rPr>
+              <a:t>1</a:t>
+            </a:r>
+            <a:endParaRPr lang="en-US" sz="900" dirty="0"/>
+          </a:p>
+        </p:txBody>
+      </p:sp>
     </p:spTree>
   </p:cSld>
   <p:clrMapOvr>
@@ -3095,7 +3134,7 @@
                 <a:ea typeface="Aptos" pitchFamily="34" charset="-122"/>
                 <a:cs typeface="Aptos" pitchFamily="34" charset="-120"/>
               </a:rPr>
-              <a:t>© Paula Soper</a:t>
+              <a:t>Â© Paula Soper</a:t>
             </a:r>
             <a:endParaRPr lang="en-US" sz="800" dirty="0"/>
           </a:p>
@@ -3103,7 +3142,46 @@
       </p:sp>
       <p:sp>
         <p:nvSpPr>
-          <p:cNvPr id="7" name="Shape 5"/>
+          <p:cNvPr id="7" name="Text 5"/>
+          <p:cNvSpPr/>
+          <p:nvPr/>
+        </p:nvSpPr>
+        <p:spPr>
+          <a:xfrm>
+            <a:off x="11137392" y="6510528"/>
+            <a:ext cx="411480" cy="201168"/>
+          </a:xfrm>
+          <a:prstGeom prst="rect">
+            <a:avLst/>
+          </a:prstGeom>
+          <a:noFill/>
+          <a:ln/>
+        </p:spPr>
+        <p:txBody>
+          <a:bodyPr wrap="square" lIns="0" tIns="0" rIns="0" bIns="0" rtlCol="0" anchor="ctr"/>
+          <a:lstStyle/>
+          <a:p>
+            <a:pPr algn="r" indent="0" marL="0">
+              <a:buNone/>
+            </a:pPr>
+            <a:r>
+              <a:rPr lang="en-US" sz="900" dirty="0">
+                <a:solidFill>
+                  <a:srgbClr val="5F7181"/>
+                </a:solidFill>
+                <a:latin typeface="Aptos" pitchFamily="34" charset="0"/>
+                <a:ea typeface="Aptos" pitchFamily="34" charset="-122"/>
+                <a:cs typeface="Aptos" pitchFamily="34" charset="-120"/>
+              </a:rPr>
+              <a:t>10</a:t>
+            </a:r>
+            <a:endParaRPr lang="en-US" sz="900" dirty="0"/>
+          </a:p>
+        </p:txBody>
+      </p:sp>
+      <p:sp>
+        <p:nvSpPr>
+          <p:cNvPr id="8" name="Shape 6"/>
           <p:cNvSpPr/>
           <p:nvPr/>
         </p:nvSpPr>
@@ -3128,7 +3206,7 @@
       </p:sp>
       <p:sp>
         <p:nvSpPr>
-          <p:cNvPr id="8" name="Text 6"/>
+          <p:cNvPr id="9" name="Text 7"/>
           <p:cNvSpPr/>
           <p:nvPr/>
         </p:nvSpPr>
@@ -3167,14 +3245,14 @@
       </p:sp>
       <p:sp>
         <p:nvSpPr>
-          <p:cNvPr id="9" name="Text 7"/>
+          <p:cNvPr id="10" name="Text 8"/>
           <p:cNvSpPr/>
           <p:nvPr/>
         </p:nvSpPr>
         <p:spPr>
           <a:xfrm>
             <a:off x="640080" y="621792"/>
-            <a:ext cx="10881360" cy="566928"/>
+            <a:ext cx="10881360" cy="713232"/>
           </a:xfrm>
           <a:prstGeom prst="rect">
             <a:avLst/>
@@ -3192,7 +3270,7 @@
               <a:buNone/>
             </a:pPr>
             <a:r>
-              <a:rPr lang="en-US" sz="2700" b="1" dirty="0">
+              <a:rPr lang="en-US" sz="3400" b="1" dirty="0">
                 <a:solidFill>
                   <a:srgbClr val="003A63"/>
                 </a:solidFill>
@@ -3202,20 +3280,20 @@
               </a:rPr>
               <a:t>Core Concepts</a:t>
             </a:r>
-            <a:endParaRPr lang="en-US" sz="2700" dirty="0"/>
-          </a:p>
-        </p:txBody>
-      </p:sp>
-      <p:sp>
-        <p:nvSpPr>
-          <p:cNvPr id="10" name="Text 8"/>
-          <p:cNvSpPr/>
-          <p:nvPr/>
-        </p:nvSpPr>
-        <p:spPr>
-          <a:xfrm>
-            <a:off x="868680" y="1417320"/>
-            <a:ext cx="6675120" cy="4434840"/>
+            <a:endParaRPr lang="en-US" sz="3400" dirty="0"/>
+          </a:p>
+        </p:txBody>
+      </p:sp>
+      <p:sp>
+        <p:nvSpPr>
+          <p:cNvPr id="11" name="Text 9"/>
+          <p:cNvSpPr/>
+          <p:nvPr/>
+        </p:nvSpPr>
+        <p:spPr>
+          <a:xfrm>
+            <a:off x="868680" y="1508760"/>
+            <a:ext cx="6537960" cy="4160520"/>
           </a:xfrm>
           <a:prstGeom prst="rect">
             <a:avLst/>
@@ -3230,7 +3308,7 @@
           <a:lstStyle/>
           <a:p>
             <a:r>
-              <a:rPr lang="en-US" sz="1700" dirty="0">
+              <a:rPr lang="en-US" sz="2100" dirty="0">
                 <a:solidFill>
                   <a:srgbClr val="17364A"/>
                 </a:solidFill>
@@ -3238,13 +3316,13 @@
                 <a:ea typeface="Aptos" pitchFamily="34" charset="-122"/>
                 <a:cs typeface="Aptos" pitchFamily="34" charset="-120"/>
               </a:rPr>
-              <a:t>AI documentation records what the system is intended to do, how it was developed or configured, what data it uses, how it.</a:t>
-            </a:r>
-            <a:endParaRPr lang="en-US" sz="1700" dirty="0"/>
-          </a:p>
-          <a:p>
-            <a:r>
-              <a:rPr lang="en-US" sz="1700" dirty="0">
+              <a:t>AI documentation records what the system is intended to do, how it was developed or configured, what.</a:t>
+            </a:r>
+            <a:endParaRPr lang="en-US" sz="2100" dirty="0"/>
+          </a:p>
+          <a:p>
+            <a:r>
+              <a:rPr lang="en-US" sz="2100" dirty="0">
                 <a:solidFill>
                   <a:srgbClr val="17364A"/>
                 </a:solidFill>
@@ -3254,11 +3332,11 @@
               </a:rPr>
               <a:t>Documentation supports accountability across the AI lifecycle.</a:t>
             </a:r>
-            <a:endParaRPr lang="en-US" sz="1700" dirty="0"/>
-          </a:p>
-          <a:p>
-            <a:r>
-              <a:rPr lang="en-US" sz="1700" dirty="0">
+            <a:endParaRPr lang="en-US" sz="2100" dirty="0"/>
+          </a:p>
+          <a:p>
+            <a:r>
+              <a:rPr lang="en-US" sz="2100" dirty="0">
                 <a:solidFill>
                   <a:srgbClr val="17364A"/>
                 </a:solidFill>
@@ -3266,29 +3344,15 @@
                 <a:ea typeface="Aptos" pitchFamily="34" charset="-122"/>
                 <a:cs typeface="Aptos" pitchFamily="34" charset="-120"/>
               </a:rPr>
-              <a:t>A model card is a structured summary of a model, including intended use, data, evaluation, limitations, risks, and.</a:t>
-            </a:r>
-            <a:endParaRPr lang="en-US" sz="1700" dirty="0"/>
-          </a:p>
-          <a:p>
-            <a:r>
-              <a:rPr lang="en-US" sz="1700" dirty="0">
-                <a:solidFill>
-                  <a:srgbClr val="17364A"/>
-                </a:solidFill>
-                <a:latin typeface="Aptos" pitchFamily="34" charset="0"/>
-                <a:ea typeface="Aptos" pitchFamily="34" charset="-122"/>
-                <a:cs typeface="Aptos" pitchFamily="34" charset="-120"/>
-              </a:rPr>
-              <a:t>A system card extends documentation to the broader system, including workflow integration, interfaces, user roles,.</a:t>
-            </a:r>
-            <a:endParaRPr lang="en-US" sz="1700" dirty="0"/>
-          </a:p>
-        </p:txBody>
-      </p:sp>
-      <p:sp>
-        <p:nvSpPr>
-          <p:cNvPr id="11" name="Shape 9"/>
+              <a:t>A model card is a structured summary of a model, including intended use, data, evaluation, limitations,.</a:t>
+            </a:r>
+            <a:endParaRPr lang="en-US" sz="2100" dirty="0"/>
+          </a:p>
+        </p:txBody>
+      </p:sp>
+      <p:sp>
+        <p:nvSpPr>
+          <p:cNvPr id="12" name="Shape 10"/>
           <p:cNvSpPr/>
           <p:nvPr/>
         </p:nvSpPr>
@@ -3315,14 +3379,14 @@
       </p:sp>
       <p:sp>
         <p:nvSpPr>
-          <p:cNvPr id="12" name="Text 10"/>
+          <p:cNvPr id="13" name="Text 11"/>
           <p:cNvSpPr/>
           <p:nvPr/>
         </p:nvSpPr>
         <p:spPr>
           <a:xfrm>
             <a:off x="8074152" y="1563624"/>
-            <a:ext cx="2825496" cy="201168"/>
+            <a:ext cx="2825496" cy="256032"/>
           </a:xfrm>
           <a:prstGeom prst="rect">
             <a:avLst/>
@@ -3338,7 +3402,7 @@
               <a:buNone/>
             </a:pPr>
             <a:r>
-              <a:rPr lang="en-US" sz="950" b="1" dirty="0">
+              <a:rPr lang="en-US" sz="1300" b="1" dirty="0">
                 <a:solidFill>
                   <a:srgbClr val="0068B7"/>
                 </a:solidFill>
@@ -3348,20 +3412,20 @@
               </a:rPr>
               <a:t>Key idea</a:t>
             </a:r>
-            <a:endParaRPr lang="en-US" sz="950" dirty="0"/>
-          </a:p>
-        </p:txBody>
-      </p:sp>
-      <p:sp>
-        <p:nvSpPr>
-          <p:cNvPr id="13" name="Text 11"/>
-          <p:cNvSpPr/>
-          <p:nvPr/>
-        </p:nvSpPr>
-        <p:spPr>
-          <a:xfrm>
-            <a:off x="8074152" y="1856232"/>
-            <a:ext cx="2825496" cy="1261872"/>
+            <a:endParaRPr lang="en-US" sz="1300" dirty="0"/>
+          </a:p>
+        </p:txBody>
+      </p:sp>
+      <p:sp>
+        <p:nvSpPr>
+          <p:cNvPr id="14" name="Text 12"/>
+          <p:cNvSpPr/>
+          <p:nvPr/>
+        </p:nvSpPr>
+        <p:spPr>
+          <a:xfrm>
+            <a:off x="8074152" y="1920240"/>
+            <a:ext cx="2825496" cy="1188720"/>
           </a:xfrm>
           <a:prstGeom prst="rect">
             <a:avLst/>
@@ -3379,7 +3443,7 @@
               <a:buNone/>
             </a:pPr>
             <a:r>
-              <a:rPr lang="en-US" sz="1250" dirty="0">
+              <a:rPr lang="en-US" sz="1550" dirty="0">
                 <a:solidFill>
                   <a:srgbClr val="17364A"/>
                 </a:solidFill>
@@ -3387,15 +3451,15 @@
                 <a:ea typeface="Aptos" pitchFamily="34" charset="-122"/>
                 <a:cs typeface="Aptos" pitchFamily="34" charset="-120"/>
               </a:rPr>
-              <a:t>AI documentation records what the system is intended to do, how it was developed or configured, what data it uses, how it.</a:t>
-            </a:r>
-            <a:endParaRPr lang="en-US" sz="1250" dirty="0"/>
-          </a:p>
-        </p:txBody>
-      </p:sp>
-      <p:sp>
-        <p:nvSpPr>
-          <p:cNvPr id="14" name="Shape 12"/>
+              <a:t>AI documentation records what the system is intended to do, how it was developed or configured, what.</a:t>
+            </a:r>
+            <a:endParaRPr lang="en-US" sz="1550" dirty="0"/>
+          </a:p>
+        </p:txBody>
+      </p:sp>
+      <p:sp>
+        <p:nvSpPr>
+          <p:cNvPr id="15" name="Shape 13"/>
           <p:cNvSpPr/>
           <p:nvPr/>
         </p:nvSpPr>
@@ -3422,14 +3486,14 @@
       </p:sp>
       <p:sp>
         <p:nvSpPr>
-          <p:cNvPr id="15" name="Text 13"/>
+          <p:cNvPr id="16" name="Text 14"/>
           <p:cNvSpPr/>
           <p:nvPr/>
         </p:nvSpPr>
         <p:spPr>
           <a:xfrm>
             <a:off x="8074152" y="3666744"/>
-            <a:ext cx="2825496" cy="201168"/>
+            <a:ext cx="2825496" cy="256032"/>
           </a:xfrm>
           <a:prstGeom prst="rect">
             <a:avLst/>
@@ -3445,7 +3509,7 @@
               <a:buNone/>
             </a:pPr>
             <a:r>
-              <a:rPr lang="en-US" sz="950" b="1" dirty="0">
+              <a:rPr lang="en-US" sz="1300" b="1" dirty="0">
                 <a:solidFill>
                   <a:srgbClr val="0068B7"/>
                 </a:solidFill>
@@ -3455,20 +3519,20 @@
               </a:rPr>
               <a:t>Use this for</a:t>
             </a:r>
-            <a:endParaRPr lang="en-US" sz="950" dirty="0"/>
-          </a:p>
-        </p:txBody>
-      </p:sp>
-      <p:sp>
-        <p:nvSpPr>
-          <p:cNvPr id="16" name="Text 14"/>
-          <p:cNvSpPr/>
-          <p:nvPr/>
-        </p:nvSpPr>
-        <p:spPr>
-          <a:xfrm>
-            <a:off x="8074152" y="3959352"/>
-            <a:ext cx="2825496" cy="1170432"/>
+            <a:endParaRPr lang="en-US" sz="1300" dirty="0"/>
+          </a:p>
+        </p:txBody>
+      </p:sp>
+      <p:sp>
+        <p:nvSpPr>
+          <p:cNvPr id="17" name="Text 15"/>
+          <p:cNvSpPr/>
+          <p:nvPr/>
+        </p:nvSpPr>
+        <p:spPr>
+          <a:xfrm>
+            <a:off x="8074152" y="4023360"/>
+            <a:ext cx="2825496" cy="1097280"/>
           </a:xfrm>
           <a:prstGeom prst="rect">
             <a:avLst/>
@@ -3486,7 +3550,7 @@
               <a:buNone/>
             </a:pPr>
             <a:r>
-              <a:rPr lang="en-US" sz="1250" dirty="0">
+              <a:rPr lang="en-US" sz="1550" dirty="0">
                 <a:solidFill>
                   <a:srgbClr val="17364A"/>
                 </a:solidFill>
@@ -3496,7 +3560,7 @@
               </a:rPr>
               <a:t>Connect the concept to public health decisions, safeguards, documentation, or implementation work.</a:t>
             </a:r>
-            <a:endParaRPr lang="en-US" sz="1250" dirty="0"/>
+            <a:endParaRPr lang="en-US" sz="1550" dirty="0"/>
           </a:p>
         </p:txBody>
       </p:sp>
@@ -3693,7 +3757,7 @@
                 <a:ea typeface="Aptos" pitchFamily="34" charset="-122"/>
                 <a:cs typeface="Aptos" pitchFamily="34" charset="-120"/>
               </a:rPr>
-              <a:t>© Paula Soper</a:t>
+              <a:t>Â© Paula Soper</a:t>
             </a:r>
             <a:endParaRPr lang="en-US" sz="800" dirty="0"/>
           </a:p>
@@ -3701,7 +3765,46 @@
       </p:sp>
       <p:sp>
         <p:nvSpPr>
-          <p:cNvPr id="7" name="Shape 5"/>
+          <p:cNvPr id="7" name="Text 5"/>
+          <p:cNvSpPr/>
+          <p:nvPr/>
+        </p:nvSpPr>
+        <p:spPr>
+          <a:xfrm>
+            <a:off x="11137392" y="6510528"/>
+            <a:ext cx="411480" cy="201168"/>
+          </a:xfrm>
+          <a:prstGeom prst="rect">
+            <a:avLst/>
+          </a:prstGeom>
+          <a:noFill/>
+          <a:ln/>
+        </p:spPr>
+        <p:txBody>
+          <a:bodyPr wrap="square" lIns="0" tIns="0" rIns="0" bIns="0" rtlCol="0" anchor="ctr"/>
+          <a:lstStyle/>
+          <a:p>
+            <a:pPr algn="r" indent="0" marL="0">
+              <a:buNone/>
+            </a:pPr>
+            <a:r>
+              <a:rPr lang="en-US" sz="900" dirty="0">
+                <a:solidFill>
+                  <a:srgbClr val="5F7181"/>
+                </a:solidFill>
+                <a:latin typeface="Aptos" pitchFamily="34" charset="0"/>
+                <a:ea typeface="Aptos" pitchFamily="34" charset="-122"/>
+                <a:cs typeface="Aptos" pitchFamily="34" charset="-120"/>
+              </a:rPr>
+              <a:t>11</a:t>
+            </a:r>
+            <a:endParaRPr lang="en-US" sz="900" dirty="0"/>
+          </a:p>
+        </p:txBody>
+      </p:sp>
+      <p:sp>
+        <p:nvSpPr>
+          <p:cNvPr id="8" name="Shape 6"/>
           <p:cNvSpPr/>
           <p:nvPr/>
         </p:nvSpPr>
@@ -3726,7 +3829,7 @@
       </p:sp>
       <p:sp>
         <p:nvSpPr>
-          <p:cNvPr id="8" name="Text 6"/>
+          <p:cNvPr id="9" name="Text 7"/>
           <p:cNvSpPr/>
           <p:nvPr/>
         </p:nvSpPr>
@@ -3765,14 +3868,14 @@
       </p:sp>
       <p:sp>
         <p:nvSpPr>
-          <p:cNvPr id="9" name="Text 7"/>
+          <p:cNvPr id="10" name="Text 8"/>
           <p:cNvSpPr/>
           <p:nvPr/>
         </p:nvSpPr>
         <p:spPr>
           <a:xfrm>
             <a:off x="640080" y="621792"/>
-            <a:ext cx="10881360" cy="566928"/>
+            <a:ext cx="10881360" cy="713232"/>
           </a:xfrm>
           <a:prstGeom prst="rect">
             <a:avLst/>
@@ -3790,7 +3893,7 @@
               <a:buNone/>
             </a:pPr>
             <a:r>
-              <a:rPr lang="en-US" sz="2700" b="1" dirty="0">
+              <a:rPr lang="en-US" sz="3400" b="1" dirty="0">
                 <a:solidFill>
                   <a:srgbClr val="003A63"/>
                 </a:solidFill>
@@ -3800,20 +3903,20 @@
               </a:rPr>
               <a:t>Public Health Example</a:t>
             </a:r>
-            <a:endParaRPr lang="en-US" sz="2700" dirty="0"/>
-          </a:p>
-        </p:txBody>
-      </p:sp>
-      <p:sp>
-        <p:nvSpPr>
-          <p:cNvPr id="10" name="Text 8"/>
-          <p:cNvSpPr/>
-          <p:nvPr/>
-        </p:nvSpPr>
-        <p:spPr>
-          <a:xfrm>
-            <a:off x="868680" y="1417320"/>
-            <a:ext cx="6675120" cy="4434840"/>
+            <a:endParaRPr lang="en-US" sz="3400" dirty="0"/>
+          </a:p>
+        </p:txBody>
+      </p:sp>
+      <p:sp>
+        <p:nvSpPr>
+          <p:cNvPr id="11" name="Text 9"/>
+          <p:cNvSpPr/>
+          <p:nvPr/>
+        </p:nvSpPr>
+        <p:spPr>
+          <a:xfrm>
+            <a:off x="868680" y="1508760"/>
+            <a:ext cx="6537960" cy="4160520"/>
           </a:xfrm>
           <a:prstGeom prst="rect">
             <a:avLst/>
@@ -3828,7 +3931,7 @@
           <a:lstStyle/>
           <a:p>
             <a:r>
-              <a:rPr lang="en-US" sz="1700" dirty="0">
+              <a:rPr lang="en-US" sz="2100" dirty="0">
                 <a:solidFill>
                   <a:srgbClr val="17364A"/>
                 </a:solidFill>
@@ -3836,13 +3939,13 @@
                 <a:ea typeface="Aptos" pitchFamily="34" charset="-122"/>
                 <a:cs typeface="Aptos" pitchFamily="34" charset="-120"/>
               </a:rPr>
-              <a:t>An agency using a generative AI assistant to draft public health messages should document the approved use, source.</a:t>
-            </a:r>
-            <a:endParaRPr lang="en-US" sz="1700" dirty="0"/>
-          </a:p>
-          <a:p>
-            <a:r>
-              <a:rPr lang="en-US" sz="1700" dirty="0">
+              <a:t>An agency using a generative AI assistant to draft public health messages should document the approved.</a:t>
+            </a:r>
+            <a:endParaRPr lang="en-US" sz="2100" dirty="0"/>
+          </a:p>
+          <a:p>
+            <a:r>
+              <a:rPr lang="en-US" sz="2100" dirty="0">
                 <a:solidFill>
                   <a:srgbClr val="17364A"/>
                 </a:solidFill>
@@ -3852,13 +3955,13 @@
               </a:rPr>
               <a:t>A system card would help reviewers understand the whole workflow rather than only the model.</a:t>
             </a:r>
-            <a:endParaRPr lang="en-US" sz="1700" dirty="0"/>
-          </a:p>
-        </p:txBody>
-      </p:sp>
-      <p:sp>
-        <p:nvSpPr>
-          <p:cNvPr id="11" name="Shape 9"/>
+            <a:endParaRPr lang="en-US" sz="2100" dirty="0"/>
+          </a:p>
+        </p:txBody>
+      </p:sp>
+      <p:sp>
+        <p:nvSpPr>
+          <p:cNvPr id="12" name="Shape 10"/>
           <p:cNvSpPr/>
           <p:nvPr/>
         </p:nvSpPr>
@@ -3885,14 +3988,14 @@
       </p:sp>
       <p:sp>
         <p:nvSpPr>
-          <p:cNvPr id="12" name="Text 10"/>
+          <p:cNvPr id="13" name="Text 11"/>
           <p:cNvSpPr/>
           <p:nvPr/>
         </p:nvSpPr>
         <p:spPr>
           <a:xfrm>
             <a:off x="8074152" y="1563624"/>
-            <a:ext cx="2825496" cy="201168"/>
+            <a:ext cx="2825496" cy="256032"/>
           </a:xfrm>
           <a:prstGeom prst="rect">
             <a:avLst/>
@@ -3908,7 +4011,7 @@
               <a:buNone/>
             </a:pPr>
             <a:r>
-              <a:rPr lang="en-US" sz="950" b="1" dirty="0">
+              <a:rPr lang="en-US" sz="1300" b="1" dirty="0">
                 <a:solidFill>
                   <a:srgbClr val="0068B7"/>
                 </a:solidFill>
@@ -3918,20 +4021,20 @@
               </a:rPr>
               <a:t>Key idea</a:t>
             </a:r>
-            <a:endParaRPr lang="en-US" sz="950" dirty="0"/>
-          </a:p>
-        </p:txBody>
-      </p:sp>
-      <p:sp>
-        <p:nvSpPr>
-          <p:cNvPr id="13" name="Text 11"/>
-          <p:cNvSpPr/>
-          <p:nvPr/>
-        </p:nvSpPr>
-        <p:spPr>
-          <a:xfrm>
-            <a:off x="8074152" y="1856232"/>
-            <a:ext cx="2825496" cy="1261872"/>
+            <a:endParaRPr lang="en-US" sz="1300" dirty="0"/>
+          </a:p>
+        </p:txBody>
+      </p:sp>
+      <p:sp>
+        <p:nvSpPr>
+          <p:cNvPr id="14" name="Text 12"/>
+          <p:cNvSpPr/>
+          <p:nvPr/>
+        </p:nvSpPr>
+        <p:spPr>
+          <a:xfrm>
+            <a:off x="8074152" y="1920240"/>
+            <a:ext cx="2825496" cy="1188720"/>
           </a:xfrm>
           <a:prstGeom prst="rect">
             <a:avLst/>
@@ -3949,7 +4052,7 @@
               <a:buNone/>
             </a:pPr>
             <a:r>
-              <a:rPr lang="en-US" sz="1250" dirty="0">
+              <a:rPr lang="en-US" sz="1550" dirty="0">
                 <a:solidFill>
                   <a:srgbClr val="17364A"/>
                 </a:solidFill>
@@ -3957,15 +4060,15 @@
                 <a:ea typeface="Aptos" pitchFamily="34" charset="-122"/>
                 <a:cs typeface="Aptos" pitchFamily="34" charset="-120"/>
               </a:rPr>
-              <a:t>An agency using a generative AI assistant to draft public health messages should document the approved use, source.</a:t>
-            </a:r>
-            <a:endParaRPr lang="en-US" sz="1250" dirty="0"/>
-          </a:p>
-        </p:txBody>
-      </p:sp>
-      <p:sp>
-        <p:nvSpPr>
-          <p:cNvPr id="14" name="Shape 12"/>
+              <a:t>An agency using a generative AI assistant to draft public health messages should document the approved.</a:t>
+            </a:r>
+            <a:endParaRPr lang="en-US" sz="1550" dirty="0"/>
+          </a:p>
+        </p:txBody>
+      </p:sp>
+      <p:sp>
+        <p:nvSpPr>
+          <p:cNvPr id="15" name="Shape 13"/>
           <p:cNvSpPr/>
           <p:nvPr/>
         </p:nvSpPr>
@@ -3992,14 +4095,14 @@
       </p:sp>
       <p:sp>
         <p:nvSpPr>
-          <p:cNvPr id="15" name="Text 13"/>
+          <p:cNvPr id="16" name="Text 14"/>
           <p:cNvSpPr/>
           <p:nvPr/>
         </p:nvSpPr>
         <p:spPr>
           <a:xfrm>
             <a:off x="8074152" y="3666744"/>
-            <a:ext cx="2825496" cy="201168"/>
+            <a:ext cx="2825496" cy="256032"/>
           </a:xfrm>
           <a:prstGeom prst="rect">
             <a:avLst/>
@@ -4015,7 +4118,7 @@
               <a:buNone/>
             </a:pPr>
             <a:r>
-              <a:rPr lang="en-US" sz="950" b="1" dirty="0">
+              <a:rPr lang="en-US" sz="1300" b="1" dirty="0">
                 <a:solidFill>
                   <a:srgbClr val="0068B7"/>
                 </a:solidFill>
@@ -4025,20 +4128,20 @@
               </a:rPr>
               <a:t>Use this for</a:t>
             </a:r>
-            <a:endParaRPr lang="en-US" sz="950" dirty="0"/>
-          </a:p>
-        </p:txBody>
-      </p:sp>
-      <p:sp>
-        <p:nvSpPr>
-          <p:cNvPr id="16" name="Text 14"/>
-          <p:cNvSpPr/>
-          <p:nvPr/>
-        </p:nvSpPr>
-        <p:spPr>
-          <a:xfrm>
-            <a:off x="8074152" y="3959352"/>
-            <a:ext cx="2825496" cy="1170432"/>
+            <a:endParaRPr lang="en-US" sz="1300" dirty="0"/>
+          </a:p>
+        </p:txBody>
+      </p:sp>
+      <p:sp>
+        <p:nvSpPr>
+          <p:cNvPr id="17" name="Text 15"/>
+          <p:cNvSpPr/>
+          <p:nvPr/>
+        </p:nvSpPr>
+        <p:spPr>
+          <a:xfrm>
+            <a:off x="8074152" y="4023360"/>
+            <a:ext cx="2825496" cy="1097280"/>
           </a:xfrm>
           <a:prstGeom prst="rect">
             <a:avLst/>
@@ -4056,7 +4159,7 @@
               <a:buNone/>
             </a:pPr>
             <a:r>
-              <a:rPr lang="en-US" sz="1250" dirty="0">
+              <a:rPr lang="en-US" sz="1550" dirty="0">
                 <a:solidFill>
                   <a:srgbClr val="17364A"/>
                 </a:solidFill>
@@ -4066,7 +4169,7 @@
               </a:rPr>
               <a:t>Connect the concept to public health decisions, safeguards, documentation, or implementation work.</a:t>
             </a:r>
-            <a:endParaRPr lang="en-US" sz="1250" dirty="0"/>
+            <a:endParaRPr lang="en-US" sz="1550" dirty="0"/>
           </a:p>
         </p:txBody>
       </p:sp>
@@ -4263,7 +4366,7 @@
                 <a:ea typeface="Aptos" pitchFamily="34" charset="-122"/>
                 <a:cs typeface="Aptos" pitchFamily="34" charset="-120"/>
               </a:rPr>
-              <a:t>© Paula Soper</a:t>
+              <a:t>Â© Paula Soper</a:t>
             </a:r>
             <a:endParaRPr lang="en-US" sz="800" dirty="0"/>
           </a:p>
@@ -4271,7 +4374,46 @@
       </p:sp>
       <p:sp>
         <p:nvSpPr>
-          <p:cNvPr id="7" name="Shape 5"/>
+          <p:cNvPr id="7" name="Text 5"/>
+          <p:cNvSpPr/>
+          <p:nvPr/>
+        </p:nvSpPr>
+        <p:spPr>
+          <a:xfrm>
+            <a:off x="11137392" y="6510528"/>
+            <a:ext cx="411480" cy="201168"/>
+          </a:xfrm>
+          <a:prstGeom prst="rect">
+            <a:avLst/>
+          </a:prstGeom>
+          <a:noFill/>
+          <a:ln/>
+        </p:spPr>
+        <p:txBody>
+          <a:bodyPr wrap="square" lIns="0" tIns="0" rIns="0" bIns="0" rtlCol="0" anchor="ctr"/>
+          <a:lstStyle/>
+          <a:p>
+            <a:pPr algn="r" indent="0" marL="0">
+              <a:buNone/>
+            </a:pPr>
+            <a:r>
+              <a:rPr lang="en-US" sz="900" dirty="0">
+                <a:solidFill>
+                  <a:srgbClr val="5F7181"/>
+                </a:solidFill>
+                <a:latin typeface="Aptos" pitchFamily="34" charset="0"/>
+                <a:ea typeface="Aptos" pitchFamily="34" charset="-122"/>
+                <a:cs typeface="Aptos" pitchFamily="34" charset="-120"/>
+              </a:rPr>
+              <a:t>12</a:t>
+            </a:r>
+            <a:endParaRPr lang="en-US" sz="900" dirty="0"/>
+          </a:p>
+        </p:txBody>
+      </p:sp>
+      <p:sp>
+        <p:nvSpPr>
+          <p:cNvPr id="8" name="Shape 6"/>
           <p:cNvSpPr/>
           <p:nvPr/>
         </p:nvSpPr>
@@ -4296,7 +4438,7 @@
       </p:sp>
       <p:sp>
         <p:nvSpPr>
-          <p:cNvPr id="8" name="Text 6"/>
+          <p:cNvPr id="9" name="Text 7"/>
           <p:cNvSpPr/>
           <p:nvPr/>
         </p:nvSpPr>
@@ -4335,14 +4477,14 @@
       </p:sp>
       <p:sp>
         <p:nvSpPr>
-          <p:cNvPr id="9" name="Text 7"/>
+          <p:cNvPr id="10" name="Text 8"/>
           <p:cNvSpPr/>
           <p:nvPr/>
         </p:nvSpPr>
         <p:spPr>
           <a:xfrm>
             <a:off x="640080" y="621792"/>
-            <a:ext cx="10881360" cy="566928"/>
+            <a:ext cx="10881360" cy="713232"/>
           </a:xfrm>
           <a:prstGeom prst="rect">
             <a:avLst/>
@@ -4360,7 +4502,7 @@
               <a:buNone/>
             </a:pPr>
             <a:r>
-              <a:rPr lang="en-US" sz="2700" b="1" dirty="0">
+              <a:rPr lang="en-US" sz="3400" b="1" dirty="0">
                 <a:solidFill>
                   <a:srgbClr val="003A63"/>
                 </a:solidFill>
@@ -4370,20 +4512,20 @@
               </a:rPr>
               <a:t>Technical Deep Dive</a:t>
             </a:r>
-            <a:endParaRPr lang="en-US" sz="2700" dirty="0"/>
-          </a:p>
-        </p:txBody>
-      </p:sp>
-      <p:sp>
-        <p:nvSpPr>
-          <p:cNvPr id="10" name="Text 8"/>
-          <p:cNvSpPr/>
-          <p:nvPr/>
-        </p:nvSpPr>
-        <p:spPr>
-          <a:xfrm>
-            <a:off x="868680" y="1417320"/>
-            <a:ext cx="6675120" cy="4434840"/>
+            <a:endParaRPr lang="en-US" sz="3400" dirty="0"/>
+          </a:p>
+        </p:txBody>
+      </p:sp>
+      <p:sp>
+        <p:nvSpPr>
+          <p:cNvPr id="11" name="Text 9"/>
+          <p:cNvSpPr/>
+          <p:nvPr/>
+        </p:nvSpPr>
+        <p:spPr>
+          <a:xfrm>
+            <a:off x="868680" y="1508760"/>
+            <a:ext cx="6537960" cy="4160520"/>
           </a:xfrm>
           <a:prstGeom prst="rect">
             <a:avLst/>
@@ -4398,7 +4540,7 @@
           <a:lstStyle/>
           <a:p>
             <a:r>
-              <a:rPr lang="en-US" sz="1700" dirty="0">
+              <a:rPr lang="en-US" sz="2100" dirty="0">
                 <a:solidFill>
                   <a:srgbClr val="17364A"/>
                 </a:solidFill>
@@ -4408,11 +4550,11 @@
               </a:rPr>
               <a:t>AI documentation should be created before deployment and maintained after launch.</a:t>
             </a:r>
-            <a:endParaRPr lang="en-US" sz="1700" dirty="0"/>
-          </a:p>
-          <a:p>
-            <a:r>
-              <a:rPr lang="en-US" sz="1700" dirty="0">
+            <a:endParaRPr lang="en-US" sz="2100" dirty="0"/>
+          </a:p>
+          <a:p>
+            <a:r>
+              <a:rPr lang="en-US" sz="2100" dirty="0">
                 <a:solidFill>
                   <a:srgbClr val="17364A"/>
                 </a:solidFill>
@@ -4420,13 +4562,13 @@
                 <a:ea typeface="Aptos" pitchFamily="34" charset="-122"/>
                 <a:cs typeface="Aptos" pitchFamily="34" charset="-120"/>
               </a:rPr>
-              <a:t>The documentation should identify the system owner, intended users, data inputs, outputs, human review requirements,.</a:t>
-            </a:r>
-            <a:endParaRPr lang="en-US" sz="1700" dirty="0"/>
-          </a:p>
-          <a:p>
-            <a:r>
-              <a:rPr lang="en-US" sz="1700" dirty="0">
+              <a:t>The documentation should identify the system owner, intended users, data inputs, outputs, human review.</a:t>
+            </a:r>
+            <a:endParaRPr lang="en-US" sz="2100" dirty="0"/>
+          </a:p>
+          <a:p>
+            <a:r>
+              <a:rPr lang="en-US" sz="2100" dirty="0">
                 <a:solidFill>
                   <a:srgbClr val="17364A"/>
                 </a:solidFill>
@@ -4436,27 +4578,13 @@
               </a:rPr>
               <a:t>A document that is created once and never updated will not support responsible operations.</a:t>
             </a:r>
-            <a:endParaRPr lang="en-US" sz="1700" dirty="0"/>
-          </a:p>
-          <a:p>
-            <a:r>
-              <a:rPr lang="en-US" sz="1700" dirty="0">
-                <a:solidFill>
-                  <a:srgbClr val="17364A"/>
-                </a:solidFill>
-                <a:latin typeface="Aptos" pitchFamily="34" charset="0"/>
-                <a:ea typeface="Aptos" pitchFamily="34" charset="-122"/>
-                <a:cs typeface="Aptos" pitchFamily="34" charset="-120"/>
-              </a:rPr>
-              <a:t>Model cards are especially useful for predictive or classification models because they can document training data,.</a:t>
-            </a:r>
-            <a:endParaRPr lang="en-US" sz="1700" dirty="0"/>
-          </a:p>
-        </p:txBody>
-      </p:sp>
-      <p:sp>
-        <p:nvSpPr>
-          <p:cNvPr id="11" name="Shape 9"/>
+            <a:endParaRPr lang="en-US" sz="2100" dirty="0"/>
+          </a:p>
+        </p:txBody>
+      </p:sp>
+      <p:sp>
+        <p:nvSpPr>
+          <p:cNvPr id="12" name="Shape 10"/>
           <p:cNvSpPr/>
           <p:nvPr/>
         </p:nvSpPr>
@@ -4483,14 +4611,14 @@
       </p:sp>
       <p:sp>
         <p:nvSpPr>
-          <p:cNvPr id="12" name="Text 10"/>
+          <p:cNvPr id="13" name="Text 11"/>
           <p:cNvSpPr/>
           <p:nvPr/>
         </p:nvSpPr>
         <p:spPr>
           <a:xfrm>
             <a:off x="8074152" y="1563624"/>
-            <a:ext cx="2825496" cy="201168"/>
+            <a:ext cx="2825496" cy="256032"/>
           </a:xfrm>
           <a:prstGeom prst="rect">
             <a:avLst/>
@@ -4506,7 +4634,7 @@
               <a:buNone/>
             </a:pPr>
             <a:r>
-              <a:rPr lang="en-US" sz="950" b="1" dirty="0">
+              <a:rPr lang="en-US" sz="1300" b="1" dirty="0">
                 <a:solidFill>
                   <a:srgbClr val="0068B7"/>
                 </a:solidFill>
@@ -4516,20 +4644,20 @@
               </a:rPr>
               <a:t>Key idea</a:t>
             </a:r>
-            <a:endParaRPr lang="en-US" sz="950" dirty="0"/>
-          </a:p>
-        </p:txBody>
-      </p:sp>
-      <p:sp>
-        <p:nvSpPr>
-          <p:cNvPr id="13" name="Text 11"/>
-          <p:cNvSpPr/>
-          <p:nvPr/>
-        </p:nvSpPr>
-        <p:spPr>
-          <a:xfrm>
-            <a:off x="8074152" y="1856232"/>
-            <a:ext cx="2825496" cy="1261872"/>
+            <a:endParaRPr lang="en-US" sz="1300" dirty="0"/>
+          </a:p>
+        </p:txBody>
+      </p:sp>
+      <p:sp>
+        <p:nvSpPr>
+          <p:cNvPr id="14" name="Text 12"/>
+          <p:cNvSpPr/>
+          <p:nvPr/>
+        </p:nvSpPr>
+        <p:spPr>
+          <a:xfrm>
+            <a:off x="8074152" y="1920240"/>
+            <a:ext cx="2825496" cy="1188720"/>
           </a:xfrm>
           <a:prstGeom prst="rect">
             <a:avLst/>
@@ -4547,7 +4675,7 @@
               <a:buNone/>
             </a:pPr>
             <a:r>
-              <a:rPr lang="en-US" sz="1250" dirty="0">
+              <a:rPr lang="en-US" sz="1550" dirty="0">
                 <a:solidFill>
                   <a:srgbClr val="17364A"/>
                 </a:solidFill>
@@ -4557,13 +4685,13 @@
               </a:rPr>
               <a:t>AI documentation should be created before deployment and maintained after launch.</a:t>
             </a:r>
-            <a:endParaRPr lang="en-US" sz="1250" dirty="0"/>
-          </a:p>
-        </p:txBody>
-      </p:sp>
-      <p:sp>
-        <p:nvSpPr>
-          <p:cNvPr id="14" name="Shape 12"/>
+            <a:endParaRPr lang="en-US" sz="1550" dirty="0"/>
+          </a:p>
+        </p:txBody>
+      </p:sp>
+      <p:sp>
+        <p:nvSpPr>
+          <p:cNvPr id="15" name="Shape 13"/>
           <p:cNvSpPr/>
           <p:nvPr/>
         </p:nvSpPr>
@@ -4590,14 +4718,14 @@
       </p:sp>
       <p:sp>
         <p:nvSpPr>
-          <p:cNvPr id="15" name="Text 13"/>
+          <p:cNvPr id="16" name="Text 14"/>
           <p:cNvSpPr/>
           <p:nvPr/>
         </p:nvSpPr>
         <p:spPr>
           <a:xfrm>
             <a:off x="8074152" y="3666744"/>
-            <a:ext cx="2825496" cy="201168"/>
+            <a:ext cx="2825496" cy="256032"/>
           </a:xfrm>
           <a:prstGeom prst="rect">
             <a:avLst/>
@@ -4613,7 +4741,7 @@
               <a:buNone/>
             </a:pPr>
             <a:r>
-              <a:rPr lang="en-US" sz="950" b="1" dirty="0">
+              <a:rPr lang="en-US" sz="1300" b="1" dirty="0">
                 <a:solidFill>
                   <a:srgbClr val="0068B7"/>
                 </a:solidFill>
@@ -4623,20 +4751,20 @@
               </a:rPr>
               <a:t>Use this for</a:t>
             </a:r>
-            <a:endParaRPr lang="en-US" sz="950" dirty="0"/>
-          </a:p>
-        </p:txBody>
-      </p:sp>
-      <p:sp>
-        <p:nvSpPr>
-          <p:cNvPr id="16" name="Text 14"/>
-          <p:cNvSpPr/>
-          <p:nvPr/>
-        </p:nvSpPr>
-        <p:spPr>
-          <a:xfrm>
-            <a:off x="8074152" y="3959352"/>
-            <a:ext cx="2825496" cy="1170432"/>
+            <a:endParaRPr lang="en-US" sz="1300" dirty="0"/>
+          </a:p>
+        </p:txBody>
+      </p:sp>
+      <p:sp>
+        <p:nvSpPr>
+          <p:cNvPr id="17" name="Text 15"/>
+          <p:cNvSpPr/>
+          <p:nvPr/>
+        </p:nvSpPr>
+        <p:spPr>
+          <a:xfrm>
+            <a:off x="8074152" y="4023360"/>
+            <a:ext cx="2825496" cy="1097280"/>
           </a:xfrm>
           <a:prstGeom prst="rect">
             <a:avLst/>
@@ -4654,7 +4782,7 @@
               <a:buNone/>
             </a:pPr>
             <a:r>
-              <a:rPr lang="en-US" sz="1250" dirty="0">
+              <a:rPr lang="en-US" sz="1550" dirty="0">
                 <a:solidFill>
                   <a:srgbClr val="17364A"/>
                 </a:solidFill>
@@ -4664,7 +4792,7 @@
               </a:rPr>
               <a:t>Connect the concept to public health decisions, safeguards, documentation, or implementation work.</a:t>
             </a:r>
-            <a:endParaRPr lang="en-US" sz="1250" dirty="0"/>
+            <a:endParaRPr lang="en-US" sz="1550" dirty="0"/>
           </a:p>
         </p:txBody>
       </p:sp>
@@ -4861,7 +4989,7 @@
                 <a:ea typeface="Aptos" pitchFamily="34" charset="-122"/>
                 <a:cs typeface="Aptos" pitchFamily="34" charset="-120"/>
               </a:rPr>
-              <a:t>© Paula Soper</a:t>
+              <a:t>Â© Paula Soper</a:t>
             </a:r>
             <a:endParaRPr lang="en-US" sz="800" dirty="0"/>
           </a:p>
@@ -4869,7 +4997,46 @@
       </p:sp>
       <p:sp>
         <p:nvSpPr>
-          <p:cNvPr id="7" name="Shape 5"/>
+          <p:cNvPr id="7" name="Text 5"/>
+          <p:cNvSpPr/>
+          <p:nvPr/>
+        </p:nvSpPr>
+        <p:spPr>
+          <a:xfrm>
+            <a:off x="11137392" y="6510528"/>
+            <a:ext cx="411480" cy="201168"/>
+          </a:xfrm>
+          <a:prstGeom prst="rect">
+            <a:avLst/>
+          </a:prstGeom>
+          <a:noFill/>
+          <a:ln/>
+        </p:spPr>
+        <p:txBody>
+          <a:bodyPr wrap="square" lIns="0" tIns="0" rIns="0" bIns="0" rtlCol="0" anchor="ctr"/>
+          <a:lstStyle/>
+          <a:p>
+            <a:pPr algn="r" indent="0" marL="0">
+              <a:buNone/>
+            </a:pPr>
+            <a:r>
+              <a:rPr lang="en-US" sz="900" dirty="0">
+                <a:solidFill>
+                  <a:srgbClr val="5F7181"/>
+                </a:solidFill>
+                <a:latin typeface="Aptos" pitchFamily="34" charset="0"/>
+                <a:ea typeface="Aptos" pitchFamily="34" charset="-122"/>
+                <a:cs typeface="Aptos" pitchFamily="34" charset="-120"/>
+              </a:rPr>
+              <a:t>13</a:t>
+            </a:r>
+            <a:endParaRPr lang="en-US" sz="900" dirty="0"/>
+          </a:p>
+        </p:txBody>
+      </p:sp>
+      <p:sp>
+        <p:nvSpPr>
+          <p:cNvPr id="8" name="Shape 6"/>
           <p:cNvSpPr/>
           <p:nvPr/>
         </p:nvSpPr>
@@ -4894,7 +5061,7 @@
       </p:sp>
       <p:sp>
         <p:nvSpPr>
-          <p:cNvPr id="8" name="Text 6"/>
+          <p:cNvPr id="9" name="Text 7"/>
           <p:cNvSpPr/>
           <p:nvPr/>
         </p:nvSpPr>
@@ -4933,14 +5100,14 @@
       </p:sp>
       <p:sp>
         <p:nvSpPr>
-          <p:cNvPr id="9" name="Text 7"/>
+          <p:cNvPr id="10" name="Text 8"/>
           <p:cNvSpPr/>
           <p:nvPr/>
         </p:nvSpPr>
         <p:spPr>
           <a:xfrm>
             <a:off x="640080" y="621792"/>
-            <a:ext cx="10881360" cy="566928"/>
+            <a:ext cx="10881360" cy="713232"/>
           </a:xfrm>
           <a:prstGeom prst="rect">
             <a:avLst/>
@@ -4958,7 +5125,7 @@
               <a:buNone/>
             </a:pPr>
             <a:r>
-              <a:rPr lang="en-US" sz="2700" b="1" dirty="0">
+              <a:rPr lang="en-US" sz="3400" b="1" dirty="0">
                 <a:solidFill>
                   <a:srgbClr val="003A63"/>
                 </a:solidFill>
@@ -4968,20 +5135,20 @@
               </a:rPr>
               <a:t>Risks, Failure Modes, and Guardrails</a:t>
             </a:r>
-            <a:endParaRPr lang="en-US" sz="2700" dirty="0"/>
-          </a:p>
-        </p:txBody>
-      </p:sp>
-      <p:sp>
-        <p:nvSpPr>
-          <p:cNvPr id="10" name="Text 8"/>
-          <p:cNvSpPr/>
-          <p:nvPr/>
-        </p:nvSpPr>
-        <p:spPr>
-          <a:xfrm>
-            <a:off x="868680" y="1417320"/>
-            <a:ext cx="6675120" cy="4434840"/>
+            <a:endParaRPr lang="en-US" sz="3400" dirty="0"/>
+          </a:p>
+        </p:txBody>
+      </p:sp>
+      <p:sp>
+        <p:nvSpPr>
+          <p:cNvPr id="11" name="Text 9"/>
+          <p:cNvSpPr/>
+          <p:nvPr/>
+        </p:nvSpPr>
+        <p:spPr>
+          <a:xfrm>
+            <a:off x="868680" y="1508760"/>
+            <a:ext cx="6537960" cy="4160520"/>
           </a:xfrm>
           <a:prstGeom prst="rect">
             <a:avLst/>
@@ -4996,7 +5163,7 @@
           <a:lstStyle/>
           <a:p>
             <a:r>
-              <a:rPr lang="en-US" sz="1700" dirty="0">
+              <a:rPr lang="en-US" sz="2100" dirty="0">
                 <a:solidFill>
                   <a:srgbClr val="17364A"/>
                 </a:solidFill>
@@ -5006,11 +5173,11 @@
               </a:rPr>
               <a:t>A common failure mode is treating the topic as a technical detail rather than a public health control.</a:t>
             </a:r>
-            <a:endParaRPr lang="en-US" sz="1700" dirty="0"/>
-          </a:p>
-          <a:p>
-            <a:r>
-              <a:rPr lang="en-US" sz="1700" dirty="0">
+            <a:endParaRPr lang="en-US" sz="2100" dirty="0"/>
+          </a:p>
+          <a:p>
+            <a:r>
+              <a:rPr lang="en-US" sz="2100" dirty="0">
                 <a:solidFill>
                   <a:srgbClr val="17364A"/>
                 </a:solidFill>
@@ -5018,13 +5185,13 @@
                 <a:ea typeface="Aptos" pitchFamily="34" charset="-122"/>
                 <a:cs typeface="Aptos" pitchFamily="34" charset="-120"/>
               </a:rPr>
-              <a:t>When staff do not connect technical decisions to authority, workflow, equity, privacy, security, and accountability, the.</a:t>
-            </a:r>
-            <a:endParaRPr lang="en-US" sz="1700" dirty="0"/>
-          </a:p>
-          <a:p>
-            <a:r>
-              <a:rPr lang="en-US" sz="1700" dirty="0">
+              <a:t>When staff do not connect technical decisions to authority, workflow, equity, privacy, security, and.</a:t>
+            </a:r>
+            <a:endParaRPr lang="en-US" sz="2100" dirty="0"/>
+          </a:p>
+          <a:p>
+            <a:r>
+              <a:rPr lang="en-US" sz="2100" dirty="0">
                 <a:solidFill>
                   <a:srgbClr val="17364A"/>
                 </a:solidFill>
@@ -5034,27 +5201,13 @@
               </a:rPr>
               <a:t>Another risk is relying on vendor claims without agency-defined evidence.</a:t>
             </a:r>
-            <a:endParaRPr lang="en-US" sz="1700" dirty="0"/>
-          </a:p>
-          <a:p>
-            <a:r>
-              <a:rPr lang="en-US" sz="1700" dirty="0">
-                <a:solidFill>
-                  <a:srgbClr val="17364A"/>
-                </a:solidFill>
-                <a:latin typeface="Aptos" pitchFamily="34" charset="0"/>
-                <a:ea typeface="Aptos" pitchFamily="34" charset="-122"/>
-                <a:cs typeface="Aptos" pitchFamily="34" charset="-120"/>
-              </a:rPr>
-              <a:t>Vendors may provide demonstrations, dashboards, or summary metrics that do not match the agency workflow or data environment.</a:t>
-            </a:r>
-            <a:endParaRPr lang="en-US" sz="1700" dirty="0"/>
-          </a:p>
-        </p:txBody>
-      </p:sp>
-      <p:sp>
-        <p:nvSpPr>
-          <p:cNvPr id="11" name="Shape 9"/>
+            <a:endParaRPr lang="en-US" sz="2100" dirty="0"/>
+          </a:p>
+        </p:txBody>
+      </p:sp>
+      <p:sp>
+        <p:nvSpPr>
+          <p:cNvPr id="12" name="Shape 10"/>
           <p:cNvSpPr/>
           <p:nvPr/>
         </p:nvSpPr>
@@ -5081,14 +5234,14 @@
       </p:sp>
       <p:sp>
         <p:nvSpPr>
-          <p:cNvPr id="12" name="Text 10"/>
+          <p:cNvPr id="13" name="Text 11"/>
           <p:cNvSpPr/>
           <p:nvPr/>
         </p:nvSpPr>
         <p:spPr>
           <a:xfrm>
             <a:off x="8074152" y="1563624"/>
-            <a:ext cx="2825496" cy="201168"/>
+            <a:ext cx="2825496" cy="256032"/>
           </a:xfrm>
           <a:prstGeom prst="rect">
             <a:avLst/>
@@ -5104,7 +5257,7 @@
               <a:buNone/>
             </a:pPr>
             <a:r>
-              <a:rPr lang="en-US" sz="950" b="1" dirty="0">
+              <a:rPr lang="en-US" sz="1300" b="1" dirty="0">
                 <a:solidFill>
                   <a:srgbClr val="0068B7"/>
                 </a:solidFill>
@@ -5114,20 +5267,20 @@
               </a:rPr>
               <a:t>Key idea</a:t>
             </a:r>
-            <a:endParaRPr lang="en-US" sz="950" dirty="0"/>
-          </a:p>
-        </p:txBody>
-      </p:sp>
-      <p:sp>
-        <p:nvSpPr>
-          <p:cNvPr id="13" name="Text 11"/>
-          <p:cNvSpPr/>
-          <p:nvPr/>
-        </p:nvSpPr>
-        <p:spPr>
-          <a:xfrm>
-            <a:off x="8074152" y="1856232"/>
-            <a:ext cx="2825496" cy="1261872"/>
+            <a:endParaRPr lang="en-US" sz="1300" dirty="0"/>
+          </a:p>
+        </p:txBody>
+      </p:sp>
+      <p:sp>
+        <p:nvSpPr>
+          <p:cNvPr id="14" name="Text 12"/>
+          <p:cNvSpPr/>
+          <p:nvPr/>
+        </p:nvSpPr>
+        <p:spPr>
+          <a:xfrm>
+            <a:off x="8074152" y="1920240"/>
+            <a:ext cx="2825496" cy="1188720"/>
           </a:xfrm>
           <a:prstGeom prst="rect">
             <a:avLst/>
@@ -5145,7 +5298,7 @@
               <a:buNone/>
             </a:pPr>
             <a:r>
-              <a:rPr lang="en-US" sz="1250" dirty="0">
+              <a:rPr lang="en-US" sz="1550" dirty="0">
                 <a:solidFill>
                   <a:srgbClr val="17364A"/>
                 </a:solidFill>
@@ -5155,13 +5308,13 @@
               </a:rPr>
               <a:t>A common failure mode is treating the topic as a technical detail rather than a public health control.</a:t>
             </a:r>
-            <a:endParaRPr lang="en-US" sz="1250" dirty="0"/>
-          </a:p>
-        </p:txBody>
-      </p:sp>
-      <p:sp>
-        <p:nvSpPr>
-          <p:cNvPr id="14" name="Shape 12"/>
+            <a:endParaRPr lang="en-US" sz="1550" dirty="0"/>
+          </a:p>
+        </p:txBody>
+      </p:sp>
+      <p:sp>
+        <p:nvSpPr>
+          <p:cNvPr id="15" name="Shape 13"/>
           <p:cNvSpPr/>
           <p:nvPr/>
         </p:nvSpPr>
@@ -5188,14 +5341,14 @@
       </p:sp>
       <p:sp>
         <p:nvSpPr>
-          <p:cNvPr id="15" name="Text 13"/>
+          <p:cNvPr id="16" name="Text 14"/>
           <p:cNvSpPr/>
           <p:nvPr/>
         </p:nvSpPr>
         <p:spPr>
           <a:xfrm>
             <a:off x="8074152" y="3666744"/>
-            <a:ext cx="2825496" cy="201168"/>
+            <a:ext cx="2825496" cy="256032"/>
           </a:xfrm>
           <a:prstGeom prst="rect">
             <a:avLst/>
@@ -5211,7 +5364,7 @@
               <a:buNone/>
             </a:pPr>
             <a:r>
-              <a:rPr lang="en-US" sz="950" b="1" dirty="0">
+              <a:rPr lang="en-US" sz="1300" b="1" dirty="0">
                 <a:solidFill>
                   <a:srgbClr val="0068B7"/>
                 </a:solidFill>
@@ -5221,20 +5374,20 @@
               </a:rPr>
               <a:t>Use this for</a:t>
             </a:r>
-            <a:endParaRPr lang="en-US" sz="950" dirty="0"/>
-          </a:p>
-        </p:txBody>
-      </p:sp>
-      <p:sp>
-        <p:nvSpPr>
-          <p:cNvPr id="16" name="Text 14"/>
-          <p:cNvSpPr/>
-          <p:nvPr/>
-        </p:nvSpPr>
-        <p:spPr>
-          <a:xfrm>
-            <a:off x="8074152" y="3959352"/>
-            <a:ext cx="2825496" cy="1170432"/>
+            <a:endParaRPr lang="en-US" sz="1300" dirty="0"/>
+          </a:p>
+        </p:txBody>
+      </p:sp>
+      <p:sp>
+        <p:nvSpPr>
+          <p:cNvPr id="17" name="Text 15"/>
+          <p:cNvSpPr/>
+          <p:nvPr/>
+        </p:nvSpPr>
+        <p:spPr>
+          <a:xfrm>
+            <a:off x="8074152" y="4023360"/>
+            <a:ext cx="2825496" cy="1097280"/>
           </a:xfrm>
           <a:prstGeom prst="rect">
             <a:avLst/>
@@ -5252,7 +5405,7 @@
               <a:buNone/>
             </a:pPr>
             <a:r>
-              <a:rPr lang="en-US" sz="1250" dirty="0">
+              <a:rPr lang="en-US" sz="1550" dirty="0">
                 <a:solidFill>
                   <a:srgbClr val="17364A"/>
                 </a:solidFill>
@@ -5262,7 +5415,7 @@
               </a:rPr>
               <a:t>Connect the concept to public health decisions, safeguards, documentation, or implementation work.</a:t>
             </a:r>
-            <a:endParaRPr lang="en-US" sz="1250" dirty="0"/>
+            <a:endParaRPr lang="en-US" sz="1550" dirty="0"/>
           </a:p>
         </p:txBody>
       </p:sp>
@@ -5459,7 +5612,7 @@
                 <a:ea typeface="Aptos" pitchFamily="34" charset="-122"/>
                 <a:cs typeface="Aptos" pitchFamily="34" charset="-120"/>
               </a:rPr>
-              <a:t>© Paula Soper</a:t>
+              <a:t>Â© Paula Soper</a:t>
             </a:r>
             <a:endParaRPr lang="en-US" sz="800" dirty="0"/>
           </a:p>
@@ -5467,7 +5620,46 @@
       </p:sp>
       <p:sp>
         <p:nvSpPr>
-          <p:cNvPr id="7" name="Shape 5"/>
+          <p:cNvPr id="7" name="Text 5"/>
+          <p:cNvSpPr/>
+          <p:nvPr/>
+        </p:nvSpPr>
+        <p:spPr>
+          <a:xfrm>
+            <a:off x="11137392" y="6510528"/>
+            <a:ext cx="411480" cy="201168"/>
+          </a:xfrm>
+          <a:prstGeom prst="rect">
+            <a:avLst/>
+          </a:prstGeom>
+          <a:noFill/>
+          <a:ln/>
+        </p:spPr>
+        <p:txBody>
+          <a:bodyPr wrap="square" lIns="0" tIns="0" rIns="0" bIns="0" rtlCol="0" anchor="ctr"/>
+          <a:lstStyle/>
+          <a:p>
+            <a:pPr algn="r" indent="0" marL="0">
+              <a:buNone/>
+            </a:pPr>
+            <a:r>
+              <a:rPr lang="en-US" sz="900" dirty="0">
+                <a:solidFill>
+                  <a:srgbClr val="5F7181"/>
+                </a:solidFill>
+                <a:latin typeface="Aptos" pitchFamily="34" charset="0"/>
+                <a:ea typeface="Aptos" pitchFamily="34" charset="-122"/>
+                <a:cs typeface="Aptos" pitchFamily="34" charset="-120"/>
+              </a:rPr>
+              <a:t>14</a:t>
+            </a:r>
+            <a:endParaRPr lang="en-US" sz="900" dirty="0"/>
+          </a:p>
+        </p:txBody>
+      </p:sp>
+      <p:sp>
+        <p:nvSpPr>
+          <p:cNvPr id="8" name="Shape 6"/>
           <p:cNvSpPr/>
           <p:nvPr/>
         </p:nvSpPr>
@@ -5492,7 +5684,7 @@
       </p:sp>
       <p:sp>
         <p:nvSpPr>
-          <p:cNvPr id="8" name="Text 6"/>
+          <p:cNvPr id="9" name="Text 7"/>
           <p:cNvSpPr/>
           <p:nvPr/>
         </p:nvSpPr>
@@ -5531,14 +5723,14 @@
       </p:sp>
       <p:sp>
         <p:nvSpPr>
-          <p:cNvPr id="9" name="Text 7"/>
+          <p:cNvPr id="10" name="Text 8"/>
           <p:cNvSpPr/>
           <p:nvPr/>
         </p:nvSpPr>
         <p:spPr>
           <a:xfrm>
             <a:off x="640080" y="621792"/>
-            <a:ext cx="10881360" cy="566928"/>
+            <a:ext cx="10881360" cy="713232"/>
           </a:xfrm>
           <a:prstGeom prst="rect">
             <a:avLst/>
@@ -5556,7 +5748,7 @@
               <a:buNone/>
             </a:pPr>
             <a:r>
-              <a:rPr lang="en-US" sz="2700" b="1" dirty="0">
+              <a:rPr lang="en-US" sz="3400" b="1" dirty="0">
                 <a:solidFill>
                   <a:srgbClr val="003A63"/>
                 </a:solidFill>
@@ -5566,20 +5758,20 @@
               </a:rPr>
               <a:t>Application to AI-Supported Workflows</a:t>
             </a:r>
-            <a:endParaRPr lang="en-US" sz="2700" dirty="0"/>
-          </a:p>
-        </p:txBody>
-      </p:sp>
-      <p:sp>
-        <p:nvSpPr>
-          <p:cNvPr id="10" name="Text 8"/>
-          <p:cNvSpPr/>
-          <p:nvPr/>
-        </p:nvSpPr>
-        <p:spPr>
-          <a:xfrm>
-            <a:off x="868680" y="1417320"/>
-            <a:ext cx="6675120" cy="4434840"/>
+            <a:endParaRPr lang="en-US" sz="3400" dirty="0"/>
+          </a:p>
+        </p:txBody>
+      </p:sp>
+      <p:sp>
+        <p:nvSpPr>
+          <p:cNvPr id="11" name="Text 9"/>
+          <p:cNvSpPr/>
+          <p:nvPr/>
+        </p:nvSpPr>
+        <p:spPr>
+          <a:xfrm>
+            <a:off x="868680" y="1508760"/>
+            <a:ext cx="6537960" cy="4160520"/>
           </a:xfrm>
           <a:prstGeom prst="rect">
             <a:avLst/>
@@ -5594,7 +5786,7 @@
           <a:lstStyle/>
           <a:p>
             <a:r>
-              <a:rPr lang="en-US" sz="1700" dirty="0">
+              <a:rPr lang="en-US" sz="2100" dirty="0">
                 <a:solidFill>
                   <a:srgbClr val="17364A"/>
                 </a:solidFill>
@@ -5602,13 +5794,13 @@
                 <a:ea typeface="Aptos" pitchFamily="34" charset="-122"/>
                 <a:cs typeface="Aptos" pitchFamily="34" charset="-120"/>
               </a:rPr>
-              <a:t>Generative AI, predictive analytics, RAG, automation, and agentic workflows all depend on the controls described in this.</a:t>
-            </a:r>
-            <a:endParaRPr lang="en-US" sz="1700" dirty="0"/>
-          </a:p>
-          <a:p>
-            <a:r>
-              <a:rPr lang="en-US" sz="1700" dirty="0">
+              <a:t>Generative AI, predictive analytics, RAG, automation, and agentic workflows all depend on the controls.</a:t>
+            </a:r>
+            <a:endParaRPr lang="en-US" sz="2100" dirty="0"/>
+          </a:p>
+          <a:p>
+            <a:r>
+              <a:rPr lang="en-US" sz="2100" dirty="0">
                 <a:solidFill>
                   <a:srgbClr val="17364A"/>
                 </a:solidFill>
@@ -5618,11 +5810,11 @@
               </a:rPr>
               <a:t>The controls should be scaled to the risk of the use case.</a:t>
             </a:r>
-            <a:endParaRPr lang="en-US" sz="1700" dirty="0"/>
-          </a:p>
-          <a:p>
-            <a:r>
-              <a:rPr lang="en-US" sz="1700" dirty="0">
+            <a:endParaRPr lang="en-US" sz="2100" dirty="0"/>
+          </a:p>
+          <a:p>
+            <a:r>
+              <a:rPr lang="en-US" sz="2100" dirty="0">
                 <a:solidFill>
                   <a:srgbClr val="17364A"/>
                 </a:solidFill>
@@ -5630,29 +5822,15 @@
                 <a:ea typeface="Aptos" pitchFamily="34" charset="-122"/>
                 <a:cs typeface="Aptos" pitchFamily="34" charset="-120"/>
               </a:rPr>
-              <a:t>A tool that drafts internal training text may require lighter review than a tool that updates case records, prioritizes.</a:t>
-            </a:r>
-            <a:endParaRPr lang="en-US" sz="1700" dirty="0"/>
-          </a:p>
-          <a:p>
-            <a:r>
-              <a:rPr lang="en-US" sz="1700" dirty="0">
-                <a:solidFill>
-                  <a:srgbClr val="17364A"/>
-                </a:solidFill>
-                <a:latin typeface="Aptos" pitchFamily="34" charset="0"/>
-                <a:ea typeface="Aptos" pitchFamily="34" charset="-122"/>
-                <a:cs typeface="Aptos" pitchFamily="34" charset="-120"/>
-              </a:rPr>
-              <a:t>The module should be applied during readiness assessment, procurement, implementation planning, pilot testing, and.</a:t>
-            </a:r>
-            <a:endParaRPr lang="en-US" sz="1700" dirty="0"/>
-          </a:p>
-        </p:txBody>
-      </p:sp>
-      <p:sp>
-        <p:nvSpPr>
-          <p:cNvPr id="11" name="Shape 9"/>
+              <a:t>A tool that drafts internal training text may require lighter review than a tool that updates case.</a:t>
+            </a:r>
+            <a:endParaRPr lang="en-US" sz="2100" dirty="0"/>
+          </a:p>
+        </p:txBody>
+      </p:sp>
+      <p:sp>
+        <p:nvSpPr>
+          <p:cNvPr id="12" name="Shape 10"/>
           <p:cNvSpPr/>
           <p:nvPr/>
         </p:nvSpPr>
@@ -5679,14 +5857,14 @@
       </p:sp>
       <p:sp>
         <p:nvSpPr>
-          <p:cNvPr id="12" name="Text 10"/>
+          <p:cNvPr id="13" name="Text 11"/>
           <p:cNvSpPr/>
           <p:nvPr/>
         </p:nvSpPr>
         <p:spPr>
           <a:xfrm>
             <a:off x="8074152" y="1563624"/>
-            <a:ext cx="2825496" cy="201168"/>
+            <a:ext cx="2825496" cy="256032"/>
           </a:xfrm>
           <a:prstGeom prst="rect">
             <a:avLst/>
@@ -5702,7 +5880,7 @@
               <a:buNone/>
             </a:pPr>
             <a:r>
-              <a:rPr lang="en-US" sz="950" b="1" dirty="0">
+              <a:rPr lang="en-US" sz="1300" b="1" dirty="0">
                 <a:solidFill>
                   <a:srgbClr val="0068B7"/>
                 </a:solidFill>
@@ -5712,20 +5890,20 @@
               </a:rPr>
               <a:t>Key idea</a:t>
             </a:r>
-            <a:endParaRPr lang="en-US" sz="950" dirty="0"/>
-          </a:p>
-        </p:txBody>
-      </p:sp>
-      <p:sp>
-        <p:nvSpPr>
-          <p:cNvPr id="13" name="Text 11"/>
-          <p:cNvSpPr/>
-          <p:nvPr/>
-        </p:nvSpPr>
-        <p:spPr>
-          <a:xfrm>
-            <a:off x="8074152" y="1856232"/>
-            <a:ext cx="2825496" cy="1261872"/>
+            <a:endParaRPr lang="en-US" sz="1300" dirty="0"/>
+          </a:p>
+        </p:txBody>
+      </p:sp>
+      <p:sp>
+        <p:nvSpPr>
+          <p:cNvPr id="14" name="Text 12"/>
+          <p:cNvSpPr/>
+          <p:nvPr/>
+        </p:nvSpPr>
+        <p:spPr>
+          <a:xfrm>
+            <a:off x="8074152" y="1920240"/>
+            <a:ext cx="2825496" cy="1188720"/>
           </a:xfrm>
           <a:prstGeom prst="rect">
             <a:avLst/>
@@ -5743,7 +5921,7 @@
               <a:buNone/>
             </a:pPr>
             <a:r>
-              <a:rPr lang="en-US" sz="1250" dirty="0">
+              <a:rPr lang="en-US" sz="1550" dirty="0">
                 <a:solidFill>
                   <a:srgbClr val="17364A"/>
                 </a:solidFill>
@@ -5751,15 +5929,15 @@
                 <a:ea typeface="Aptos" pitchFamily="34" charset="-122"/>
                 <a:cs typeface="Aptos" pitchFamily="34" charset="-120"/>
               </a:rPr>
-              <a:t>Generative AI, predictive analytics, RAG, automation, and agentic workflows all depend on the controls described in this.</a:t>
-            </a:r>
-            <a:endParaRPr lang="en-US" sz="1250" dirty="0"/>
-          </a:p>
-        </p:txBody>
-      </p:sp>
-      <p:sp>
-        <p:nvSpPr>
-          <p:cNvPr id="14" name="Shape 12"/>
+              <a:t>Generative AI, predictive analytics, RAG, automation, and agentic workflows all depend on the controls.</a:t>
+            </a:r>
+            <a:endParaRPr lang="en-US" sz="1550" dirty="0"/>
+          </a:p>
+        </p:txBody>
+      </p:sp>
+      <p:sp>
+        <p:nvSpPr>
+          <p:cNvPr id="15" name="Shape 13"/>
           <p:cNvSpPr/>
           <p:nvPr/>
         </p:nvSpPr>
@@ -5786,14 +5964,14 @@
       </p:sp>
       <p:sp>
         <p:nvSpPr>
-          <p:cNvPr id="15" name="Text 13"/>
+          <p:cNvPr id="16" name="Text 14"/>
           <p:cNvSpPr/>
           <p:nvPr/>
         </p:nvSpPr>
         <p:spPr>
           <a:xfrm>
             <a:off x="8074152" y="3666744"/>
-            <a:ext cx="2825496" cy="201168"/>
+            <a:ext cx="2825496" cy="256032"/>
           </a:xfrm>
           <a:prstGeom prst="rect">
             <a:avLst/>
@@ -5809,7 +5987,7 @@
               <a:buNone/>
             </a:pPr>
             <a:r>
-              <a:rPr lang="en-US" sz="950" b="1" dirty="0">
+              <a:rPr lang="en-US" sz="1300" b="1" dirty="0">
                 <a:solidFill>
                   <a:srgbClr val="0068B7"/>
                 </a:solidFill>
@@ -5819,20 +5997,20 @@
               </a:rPr>
               <a:t>Use this for</a:t>
             </a:r>
-            <a:endParaRPr lang="en-US" sz="950" dirty="0"/>
-          </a:p>
-        </p:txBody>
-      </p:sp>
-      <p:sp>
-        <p:nvSpPr>
-          <p:cNvPr id="16" name="Text 14"/>
-          <p:cNvSpPr/>
-          <p:nvPr/>
-        </p:nvSpPr>
-        <p:spPr>
-          <a:xfrm>
-            <a:off x="8074152" y="3959352"/>
-            <a:ext cx="2825496" cy="1170432"/>
+            <a:endParaRPr lang="en-US" sz="1300" dirty="0"/>
+          </a:p>
+        </p:txBody>
+      </p:sp>
+      <p:sp>
+        <p:nvSpPr>
+          <p:cNvPr id="17" name="Text 15"/>
+          <p:cNvSpPr/>
+          <p:nvPr/>
+        </p:nvSpPr>
+        <p:spPr>
+          <a:xfrm>
+            <a:off x="8074152" y="4023360"/>
+            <a:ext cx="2825496" cy="1097280"/>
           </a:xfrm>
           <a:prstGeom prst="rect">
             <a:avLst/>
@@ -5850,7 +6028,7 @@
               <a:buNone/>
             </a:pPr>
             <a:r>
-              <a:rPr lang="en-US" sz="1250" dirty="0">
+              <a:rPr lang="en-US" sz="1550" dirty="0">
                 <a:solidFill>
                   <a:srgbClr val="17364A"/>
                 </a:solidFill>
@@ -5860,7 +6038,7 @@
               </a:rPr>
               <a:t>Connect the concept to public health decisions, safeguards, documentation, or implementation work.</a:t>
             </a:r>
-            <a:endParaRPr lang="en-US" sz="1250" dirty="0"/>
+            <a:endParaRPr lang="en-US" sz="1550" dirty="0"/>
           </a:p>
         </p:txBody>
       </p:sp>
@@ -6057,7 +6235,7 @@
                 <a:ea typeface="Aptos" pitchFamily="34" charset="-122"/>
                 <a:cs typeface="Aptos" pitchFamily="34" charset="-120"/>
               </a:rPr>
-              <a:t>© Paula Soper</a:t>
+              <a:t>Â© Paula Soper</a:t>
             </a:r>
             <a:endParaRPr lang="en-US" sz="800" dirty="0"/>
           </a:p>
@@ -6065,7 +6243,46 @@
       </p:sp>
       <p:sp>
         <p:nvSpPr>
-          <p:cNvPr id="7" name="Shape 5"/>
+          <p:cNvPr id="7" name="Text 5"/>
+          <p:cNvSpPr/>
+          <p:nvPr/>
+        </p:nvSpPr>
+        <p:spPr>
+          <a:xfrm>
+            <a:off x="11137392" y="6510528"/>
+            <a:ext cx="411480" cy="201168"/>
+          </a:xfrm>
+          <a:prstGeom prst="rect">
+            <a:avLst/>
+          </a:prstGeom>
+          <a:noFill/>
+          <a:ln/>
+        </p:spPr>
+        <p:txBody>
+          <a:bodyPr wrap="square" lIns="0" tIns="0" rIns="0" bIns="0" rtlCol="0" anchor="ctr"/>
+          <a:lstStyle/>
+          <a:p>
+            <a:pPr algn="r" indent="0" marL="0">
+              <a:buNone/>
+            </a:pPr>
+            <a:r>
+              <a:rPr lang="en-US" sz="900" dirty="0">
+                <a:solidFill>
+                  <a:srgbClr val="5F7181"/>
+                </a:solidFill>
+                <a:latin typeface="Aptos" pitchFamily="34" charset="0"/>
+                <a:ea typeface="Aptos" pitchFamily="34" charset="-122"/>
+                <a:cs typeface="Aptos" pitchFamily="34" charset="-120"/>
+              </a:rPr>
+              <a:t>15</a:t>
+            </a:r>
+            <a:endParaRPr lang="en-US" sz="900" dirty="0"/>
+          </a:p>
+        </p:txBody>
+      </p:sp>
+      <p:sp>
+        <p:nvSpPr>
+          <p:cNvPr id="8" name="Shape 6"/>
           <p:cNvSpPr/>
           <p:nvPr/>
         </p:nvSpPr>
@@ -6090,7 +6307,7 @@
       </p:sp>
       <p:sp>
         <p:nvSpPr>
-          <p:cNvPr id="8" name="Text 6"/>
+          <p:cNvPr id="9" name="Text 7"/>
           <p:cNvSpPr/>
           <p:nvPr/>
         </p:nvSpPr>
@@ -6129,14 +6346,14 @@
       </p:sp>
       <p:sp>
         <p:nvSpPr>
-          <p:cNvPr id="9" name="Text 7"/>
+          <p:cNvPr id="10" name="Text 8"/>
           <p:cNvSpPr/>
           <p:nvPr/>
         </p:nvSpPr>
         <p:spPr>
           <a:xfrm>
             <a:off x="640080" y="621792"/>
-            <a:ext cx="10881360" cy="566928"/>
+            <a:ext cx="10881360" cy="713232"/>
           </a:xfrm>
           <a:prstGeom prst="rect">
             <a:avLst/>
@@ -6154,7 +6371,7 @@
               <a:buNone/>
             </a:pPr>
             <a:r>
-              <a:rPr lang="en-US" sz="2700" b="1" dirty="0">
+              <a:rPr lang="en-US" sz="3400" b="1" dirty="0">
                 <a:solidFill>
                   <a:srgbClr val="003A63"/>
                 </a:solidFill>
@@ -6164,20 +6381,20 @@
               </a:rPr>
               <a:t>Reflection Questions</a:t>
             </a:r>
-            <a:endParaRPr lang="en-US" sz="2700" dirty="0"/>
-          </a:p>
-        </p:txBody>
-      </p:sp>
-      <p:sp>
-        <p:nvSpPr>
-          <p:cNvPr id="10" name="Text 8"/>
-          <p:cNvSpPr/>
-          <p:nvPr/>
-        </p:nvSpPr>
-        <p:spPr>
-          <a:xfrm>
-            <a:off x="868680" y="1417320"/>
-            <a:ext cx="6675120" cy="4434840"/>
+            <a:endParaRPr lang="en-US" sz="3400" dirty="0"/>
+          </a:p>
+        </p:txBody>
+      </p:sp>
+      <p:sp>
+        <p:nvSpPr>
+          <p:cNvPr id="11" name="Text 9"/>
+          <p:cNvSpPr/>
+          <p:nvPr/>
+        </p:nvSpPr>
+        <p:spPr>
+          <a:xfrm>
+            <a:off x="868680" y="1508760"/>
+            <a:ext cx="6537960" cy="4160520"/>
           </a:xfrm>
           <a:prstGeom prst="rect">
             <a:avLst/>
@@ -6192,7 +6409,7 @@
           <a:lstStyle/>
           <a:p>
             <a:r>
-              <a:rPr lang="en-US" sz="1700" dirty="0">
+              <a:rPr lang="en-US" sz="2100" dirty="0">
                 <a:solidFill>
                   <a:srgbClr val="17364A"/>
                 </a:solidFill>
@@ -6202,11 +6419,11 @@
               </a:rPr>
               <a:t>Where does this topic appear in one current or proposed AI workflow in your agency?</a:t>
             </a:r>
-            <a:endParaRPr lang="en-US" sz="1700" dirty="0"/>
-          </a:p>
-          <a:p>
-            <a:r>
-              <a:rPr lang="en-US" sz="1700" dirty="0">
+            <a:endParaRPr lang="en-US" sz="2100" dirty="0"/>
+          </a:p>
+          <a:p>
+            <a:r>
+              <a:rPr lang="en-US" sz="2100" dirty="0">
                 <a:solidFill>
                   <a:srgbClr val="17364A"/>
                 </a:solidFill>
@@ -6216,11 +6433,11 @@
               </a:rPr>
               <a:t>What decisions, data sources, users, or partners would be affected if this area is poorly designed?</a:t>
             </a:r>
-            <a:endParaRPr lang="en-US" sz="1700" dirty="0"/>
-          </a:p>
-          <a:p>
-            <a:r>
-              <a:rPr lang="en-US" sz="1700" dirty="0">
+            <a:endParaRPr lang="en-US" sz="2100" dirty="0"/>
+          </a:p>
+          <a:p>
+            <a:r>
+              <a:rPr lang="en-US" sz="2100" dirty="0">
                 <a:solidFill>
                   <a:srgbClr val="17364A"/>
                 </a:solidFill>
@@ -6230,13 +6447,13 @@
               </a:rPr>
               <a:t>What evidence would governance reviewers need before approving the workflow?</a:t>
             </a:r>
-            <a:endParaRPr lang="en-US" sz="1700" dirty="0"/>
-          </a:p>
-        </p:txBody>
-      </p:sp>
-      <p:sp>
-        <p:nvSpPr>
-          <p:cNvPr id="11" name="Shape 9"/>
+            <a:endParaRPr lang="en-US" sz="2100" dirty="0"/>
+          </a:p>
+        </p:txBody>
+      </p:sp>
+      <p:sp>
+        <p:nvSpPr>
+          <p:cNvPr id="12" name="Shape 10"/>
           <p:cNvSpPr/>
           <p:nvPr/>
         </p:nvSpPr>
@@ -6263,14 +6480,14 @@
       </p:sp>
       <p:sp>
         <p:nvSpPr>
-          <p:cNvPr id="12" name="Text 10"/>
+          <p:cNvPr id="13" name="Text 11"/>
           <p:cNvSpPr/>
           <p:nvPr/>
         </p:nvSpPr>
         <p:spPr>
           <a:xfrm>
             <a:off x="8074152" y="1563624"/>
-            <a:ext cx="2825496" cy="201168"/>
+            <a:ext cx="2825496" cy="256032"/>
           </a:xfrm>
           <a:prstGeom prst="rect">
             <a:avLst/>
@@ -6286,7 +6503,7 @@
               <a:buNone/>
             </a:pPr>
             <a:r>
-              <a:rPr lang="en-US" sz="950" b="1" dirty="0">
+              <a:rPr lang="en-US" sz="1300" b="1" dirty="0">
                 <a:solidFill>
                   <a:srgbClr val="0068B7"/>
                 </a:solidFill>
@@ -6296,20 +6513,20 @@
               </a:rPr>
               <a:t>Key idea</a:t>
             </a:r>
-            <a:endParaRPr lang="en-US" sz="950" dirty="0"/>
-          </a:p>
-        </p:txBody>
-      </p:sp>
-      <p:sp>
-        <p:nvSpPr>
-          <p:cNvPr id="13" name="Text 11"/>
-          <p:cNvSpPr/>
-          <p:nvPr/>
-        </p:nvSpPr>
-        <p:spPr>
-          <a:xfrm>
-            <a:off x="8074152" y="1856232"/>
-            <a:ext cx="2825496" cy="1261872"/>
+            <a:endParaRPr lang="en-US" sz="1300" dirty="0"/>
+          </a:p>
+        </p:txBody>
+      </p:sp>
+      <p:sp>
+        <p:nvSpPr>
+          <p:cNvPr id="14" name="Text 12"/>
+          <p:cNvSpPr/>
+          <p:nvPr/>
+        </p:nvSpPr>
+        <p:spPr>
+          <a:xfrm>
+            <a:off x="8074152" y="1920240"/>
+            <a:ext cx="2825496" cy="1188720"/>
           </a:xfrm>
           <a:prstGeom prst="rect">
             <a:avLst/>
@@ -6327,7 +6544,7 @@
               <a:buNone/>
             </a:pPr>
             <a:r>
-              <a:rPr lang="en-US" sz="1250" dirty="0">
+              <a:rPr lang="en-US" sz="1550" dirty="0">
                 <a:solidFill>
                   <a:srgbClr val="17364A"/>
                 </a:solidFill>
@@ -6337,13 +6554,13 @@
               </a:rPr>
               <a:t>Where does this topic appear in one current or proposed AI workflow in your agency?</a:t>
             </a:r>
-            <a:endParaRPr lang="en-US" sz="1250" dirty="0"/>
-          </a:p>
-        </p:txBody>
-      </p:sp>
-      <p:sp>
-        <p:nvSpPr>
-          <p:cNvPr id="14" name="Shape 12"/>
+            <a:endParaRPr lang="en-US" sz="1550" dirty="0"/>
+          </a:p>
+        </p:txBody>
+      </p:sp>
+      <p:sp>
+        <p:nvSpPr>
+          <p:cNvPr id="15" name="Shape 13"/>
           <p:cNvSpPr/>
           <p:nvPr/>
         </p:nvSpPr>
@@ -6370,14 +6587,14 @@
       </p:sp>
       <p:sp>
         <p:nvSpPr>
-          <p:cNvPr id="15" name="Text 13"/>
+          <p:cNvPr id="16" name="Text 14"/>
           <p:cNvSpPr/>
           <p:nvPr/>
         </p:nvSpPr>
         <p:spPr>
           <a:xfrm>
             <a:off x="8074152" y="3666744"/>
-            <a:ext cx="2825496" cy="201168"/>
+            <a:ext cx="2825496" cy="256032"/>
           </a:xfrm>
           <a:prstGeom prst="rect">
             <a:avLst/>
@@ -6393,7 +6610,7 @@
               <a:buNone/>
             </a:pPr>
             <a:r>
-              <a:rPr lang="en-US" sz="950" b="1" dirty="0">
+              <a:rPr lang="en-US" sz="1300" b="1" dirty="0">
                 <a:solidFill>
                   <a:srgbClr val="0068B7"/>
                 </a:solidFill>
@@ -6403,20 +6620,20 @@
               </a:rPr>
               <a:t>Use this for</a:t>
             </a:r>
-            <a:endParaRPr lang="en-US" sz="950" dirty="0"/>
-          </a:p>
-        </p:txBody>
-      </p:sp>
-      <p:sp>
-        <p:nvSpPr>
-          <p:cNvPr id="16" name="Text 14"/>
-          <p:cNvSpPr/>
-          <p:nvPr/>
-        </p:nvSpPr>
-        <p:spPr>
-          <a:xfrm>
-            <a:off x="8074152" y="3959352"/>
-            <a:ext cx="2825496" cy="1170432"/>
+            <a:endParaRPr lang="en-US" sz="1300" dirty="0"/>
+          </a:p>
+        </p:txBody>
+      </p:sp>
+      <p:sp>
+        <p:nvSpPr>
+          <p:cNvPr id="17" name="Text 15"/>
+          <p:cNvSpPr/>
+          <p:nvPr/>
+        </p:nvSpPr>
+        <p:spPr>
+          <a:xfrm>
+            <a:off x="8074152" y="4023360"/>
+            <a:ext cx="2825496" cy="1097280"/>
           </a:xfrm>
           <a:prstGeom prst="rect">
             <a:avLst/>
@@ -6434,7 +6651,7 @@
               <a:buNone/>
             </a:pPr>
             <a:r>
-              <a:rPr lang="en-US" sz="1250" dirty="0">
+              <a:rPr lang="en-US" sz="1550" dirty="0">
                 <a:solidFill>
                   <a:srgbClr val="17364A"/>
                 </a:solidFill>
@@ -6444,7 +6661,7 @@
               </a:rPr>
               <a:t>Connect the concept to public health decisions, safeguards, documentation, or implementation work.</a:t>
             </a:r>
-            <a:endParaRPr lang="en-US" sz="1250" dirty="0"/>
+            <a:endParaRPr lang="en-US" sz="1550" dirty="0"/>
           </a:p>
         </p:txBody>
       </p:sp>
@@ -6641,7 +6858,7 @@
                 <a:ea typeface="Aptos" pitchFamily="34" charset="-122"/>
                 <a:cs typeface="Aptos" pitchFamily="34" charset="-120"/>
               </a:rPr>
-              <a:t>© Paula Soper</a:t>
+              <a:t>Â© Paula Soper</a:t>
             </a:r>
             <a:endParaRPr lang="en-US" sz="800" dirty="0"/>
           </a:p>
@@ -6655,8 +6872,47 @@
         </p:nvSpPr>
         <p:spPr>
           <a:xfrm>
+            <a:off x="11137392" y="6510528"/>
+            <a:ext cx="411480" cy="201168"/>
+          </a:xfrm>
+          <a:prstGeom prst="rect">
+            <a:avLst/>
+          </a:prstGeom>
+          <a:noFill/>
+          <a:ln/>
+        </p:spPr>
+        <p:txBody>
+          <a:bodyPr wrap="square" lIns="0" tIns="0" rIns="0" bIns="0" rtlCol="0" anchor="ctr"/>
+          <a:lstStyle/>
+          <a:p>
+            <a:pPr algn="r" indent="0" marL="0">
+              <a:buNone/>
+            </a:pPr>
+            <a:r>
+              <a:rPr lang="en-US" sz="900" dirty="0">
+                <a:solidFill>
+                  <a:srgbClr val="5F7181"/>
+                </a:solidFill>
+                <a:latin typeface="Aptos" pitchFamily="34" charset="0"/>
+                <a:ea typeface="Aptos" pitchFamily="34" charset="-122"/>
+                <a:cs typeface="Aptos" pitchFamily="34" charset="-120"/>
+              </a:rPr>
+              <a:t>16</a:t>
+            </a:r>
+            <a:endParaRPr lang="en-US" sz="900" dirty="0"/>
+          </a:p>
+        </p:txBody>
+      </p:sp>
+      <p:sp>
+        <p:nvSpPr>
+          <p:cNvPr id="8" name="Text 6"/>
+          <p:cNvSpPr/>
+          <p:nvPr/>
+        </p:nvSpPr>
+        <p:spPr>
+          <a:xfrm>
             <a:off x="640080" y="658368"/>
-            <a:ext cx="10881360" cy="566928"/>
+            <a:ext cx="10881360" cy="713232"/>
           </a:xfrm>
           <a:prstGeom prst="rect">
             <a:avLst/>
@@ -6674,7 +6930,7 @@
               <a:buNone/>
             </a:pPr>
             <a:r>
-              <a:rPr lang="en-US" sz="2700" b="1" dirty="0">
+              <a:rPr lang="en-US" sz="3400" b="1" dirty="0">
                 <a:solidFill>
                   <a:srgbClr val="003A63"/>
                 </a:solidFill>
@@ -6684,20 +6940,20 @@
               </a:rPr>
               <a:t>Reflection Questions Continued</a:t>
             </a:r>
-            <a:endParaRPr lang="en-US" sz="2700" dirty="0"/>
-          </a:p>
-        </p:txBody>
-      </p:sp>
-      <p:sp>
-        <p:nvSpPr>
-          <p:cNvPr id="8" name="Text 6"/>
-          <p:cNvSpPr/>
-          <p:nvPr/>
-        </p:nvSpPr>
-        <p:spPr>
-          <a:xfrm>
-            <a:off x="868680" y="1417320"/>
-            <a:ext cx="6675120" cy="4434840"/>
+            <a:endParaRPr lang="en-US" sz="3400" dirty="0"/>
+          </a:p>
+        </p:txBody>
+      </p:sp>
+      <p:sp>
+        <p:nvSpPr>
+          <p:cNvPr id="9" name="Text 7"/>
+          <p:cNvSpPr/>
+          <p:nvPr/>
+        </p:nvSpPr>
+        <p:spPr>
+          <a:xfrm>
+            <a:off x="868680" y="1508760"/>
+            <a:ext cx="6537960" cy="4160520"/>
           </a:xfrm>
           <a:prstGeom prst="rect">
             <a:avLst/>
@@ -6712,7 +6968,7 @@
           <a:lstStyle/>
           <a:p>
             <a:r>
-              <a:rPr lang="en-US" sz="1700" dirty="0">
+              <a:rPr lang="en-US" sz="2100" dirty="0">
                 <a:solidFill>
                   <a:srgbClr val="17364A"/>
                 </a:solidFill>
@@ -6722,11 +6978,11 @@
               </a:rPr>
               <a:t>Which safeguards should be required before pilot testing?</a:t>
             </a:r>
-            <a:endParaRPr lang="en-US" sz="1700" dirty="0"/>
-          </a:p>
-          <a:p>
-            <a:r>
-              <a:rPr lang="en-US" sz="1700" dirty="0">
+            <a:endParaRPr lang="en-US" sz="2100" dirty="0"/>
+          </a:p>
+          <a:p>
+            <a:r>
+              <a:rPr lang="en-US" sz="2100" dirty="0">
                 <a:solidFill>
                   <a:srgbClr val="17364A"/>
                 </a:solidFill>
@@ -6736,13 +6992,13 @@
               </a:rPr>
               <a:t>Who owns ongoing monitoring and review?</a:t>
             </a:r>
-            <a:endParaRPr lang="en-US" sz="1700" dirty="0"/>
-          </a:p>
-        </p:txBody>
-      </p:sp>
-      <p:sp>
-        <p:nvSpPr>
-          <p:cNvPr id="9" name="Shape 7"/>
+            <a:endParaRPr lang="en-US" sz="2100" dirty="0"/>
+          </a:p>
+        </p:txBody>
+      </p:sp>
+      <p:sp>
+        <p:nvSpPr>
+          <p:cNvPr id="10" name="Shape 8"/>
           <p:cNvSpPr/>
           <p:nvPr/>
         </p:nvSpPr>
@@ -6769,14 +7025,14 @@
       </p:sp>
       <p:sp>
         <p:nvSpPr>
-          <p:cNvPr id="10" name="Text 8"/>
+          <p:cNvPr id="11" name="Text 9"/>
           <p:cNvSpPr/>
           <p:nvPr/>
         </p:nvSpPr>
         <p:spPr>
           <a:xfrm>
             <a:off x="8074152" y="1563624"/>
-            <a:ext cx="2825496" cy="201168"/>
+            <a:ext cx="2825496" cy="256032"/>
           </a:xfrm>
           <a:prstGeom prst="rect">
             <a:avLst/>
@@ -6792,7 +7048,7 @@
               <a:buNone/>
             </a:pPr>
             <a:r>
-              <a:rPr lang="en-US" sz="950" b="1" dirty="0">
+              <a:rPr lang="en-US" sz="1300" b="1" dirty="0">
                 <a:solidFill>
                   <a:srgbClr val="0068B7"/>
                 </a:solidFill>
@@ -6802,20 +7058,20 @@
               </a:rPr>
               <a:t>Key idea</a:t>
             </a:r>
-            <a:endParaRPr lang="en-US" sz="950" dirty="0"/>
-          </a:p>
-        </p:txBody>
-      </p:sp>
-      <p:sp>
-        <p:nvSpPr>
-          <p:cNvPr id="11" name="Text 9"/>
-          <p:cNvSpPr/>
-          <p:nvPr/>
-        </p:nvSpPr>
-        <p:spPr>
-          <a:xfrm>
-            <a:off x="8074152" y="1856232"/>
-            <a:ext cx="2825496" cy="1261872"/>
+            <a:endParaRPr lang="en-US" sz="1300" dirty="0"/>
+          </a:p>
+        </p:txBody>
+      </p:sp>
+      <p:sp>
+        <p:nvSpPr>
+          <p:cNvPr id="12" name="Text 10"/>
+          <p:cNvSpPr/>
+          <p:nvPr/>
+        </p:nvSpPr>
+        <p:spPr>
+          <a:xfrm>
+            <a:off x="8074152" y="1920240"/>
+            <a:ext cx="2825496" cy="1188720"/>
           </a:xfrm>
           <a:prstGeom prst="rect">
             <a:avLst/>
@@ -6833,7 +7089,7 @@
               <a:buNone/>
             </a:pPr>
             <a:r>
-              <a:rPr lang="en-US" sz="1250" dirty="0">
+              <a:rPr lang="en-US" sz="1550" dirty="0">
                 <a:solidFill>
                   <a:srgbClr val="17364A"/>
                 </a:solidFill>
@@ -6843,13 +7099,13 @@
               </a:rPr>
               <a:t>Which safeguards should be required before pilot testing?</a:t>
             </a:r>
-            <a:endParaRPr lang="en-US" sz="1250" dirty="0"/>
-          </a:p>
-        </p:txBody>
-      </p:sp>
-      <p:sp>
-        <p:nvSpPr>
-          <p:cNvPr id="12" name="Shape 10"/>
+            <a:endParaRPr lang="en-US" sz="1550" dirty="0"/>
+          </a:p>
+        </p:txBody>
+      </p:sp>
+      <p:sp>
+        <p:nvSpPr>
+          <p:cNvPr id="13" name="Shape 11"/>
           <p:cNvSpPr/>
           <p:nvPr/>
         </p:nvSpPr>
@@ -6876,14 +7132,14 @@
       </p:sp>
       <p:sp>
         <p:nvSpPr>
-          <p:cNvPr id="13" name="Text 11"/>
+          <p:cNvPr id="14" name="Text 12"/>
           <p:cNvSpPr/>
           <p:nvPr/>
         </p:nvSpPr>
         <p:spPr>
           <a:xfrm>
             <a:off x="8074152" y="3666744"/>
-            <a:ext cx="2825496" cy="201168"/>
+            <a:ext cx="2825496" cy="256032"/>
           </a:xfrm>
           <a:prstGeom prst="rect">
             <a:avLst/>
@@ -6899,7 +7155,7 @@
               <a:buNone/>
             </a:pPr>
             <a:r>
-              <a:rPr lang="en-US" sz="950" b="1" dirty="0">
+              <a:rPr lang="en-US" sz="1300" b="1" dirty="0">
                 <a:solidFill>
                   <a:srgbClr val="0068B7"/>
                 </a:solidFill>
@@ -6909,20 +7165,20 @@
               </a:rPr>
               <a:t>Use this for</a:t>
             </a:r>
-            <a:endParaRPr lang="en-US" sz="950" dirty="0"/>
-          </a:p>
-        </p:txBody>
-      </p:sp>
-      <p:sp>
-        <p:nvSpPr>
-          <p:cNvPr id="14" name="Text 12"/>
-          <p:cNvSpPr/>
-          <p:nvPr/>
-        </p:nvSpPr>
-        <p:spPr>
-          <a:xfrm>
-            <a:off x="8074152" y="3959352"/>
-            <a:ext cx="2825496" cy="1170432"/>
+            <a:endParaRPr lang="en-US" sz="1300" dirty="0"/>
+          </a:p>
+        </p:txBody>
+      </p:sp>
+      <p:sp>
+        <p:nvSpPr>
+          <p:cNvPr id="15" name="Text 13"/>
+          <p:cNvSpPr/>
+          <p:nvPr/>
+        </p:nvSpPr>
+        <p:spPr>
+          <a:xfrm>
+            <a:off x="8074152" y="4023360"/>
+            <a:ext cx="2825496" cy="1097280"/>
           </a:xfrm>
           <a:prstGeom prst="rect">
             <a:avLst/>
@@ -6940,7 +7196,7 @@
               <a:buNone/>
             </a:pPr>
             <a:r>
-              <a:rPr lang="en-US" sz="1250" dirty="0">
+              <a:rPr lang="en-US" sz="1550" dirty="0">
                 <a:solidFill>
                   <a:srgbClr val="17364A"/>
                 </a:solidFill>
@@ -6950,7 +7206,7 @@
               </a:rPr>
               <a:t>Connect the concept to public health decisions, safeguards, documentation, or implementation work.</a:t>
             </a:r>
-            <a:endParaRPr lang="en-US" sz="1250" dirty="0"/>
+            <a:endParaRPr lang="en-US" sz="1550" dirty="0"/>
           </a:p>
         </p:txBody>
       </p:sp>
@@ -7147,7 +7403,7 @@
                 <a:ea typeface="Aptos" pitchFamily="34" charset="-122"/>
                 <a:cs typeface="Aptos" pitchFamily="34" charset="-120"/>
               </a:rPr>
-              <a:t>© Paula Soper</a:t>
+              <a:t>Â© Paula Soper</a:t>
             </a:r>
             <a:endParaRPr lang="en-US" sz="800" dirty="0"/>
           </a:p>
@@ -7155,7 +7411,46 @@
       </p:sp>
       <p:sp>
         <p:nvSpPr>
-          <p:cNvPr id="7" name="Shape 5"/>
+          <p:cNvPr id="7" name="Text 5"/>
+          <p:cNvSpPr/>
+          <p:nvPr/>
+        </p:nvSpPr>
+        <p:spPr>
+          <a:xfrm>
+            <a:off x="11137392" y="6510528"/>
+            <a:ext cx="411480" cy="201168"/>
+          </a:xfrm>
+          <a:prstGeom prst="rect">
+            <a:avLst/>
+          </a:prstGeom>
+          <a:noFill/>
+          <a:ln/>
+        </p:spPr>
+        <p:txBody>
+          <a:bodyPr wrap="square" lIns="0" tIns="0" rIns="0" bIns="0" rtlCol="0" anchor="ctr"/>
+          <a:lstStyle/>
+          <a:p>
+            <a:pPr algn="r" indent="0" marL="0">
+              <a:buNone/>
+            </a:pPr>
+            <a:r>
+              <a:rPr lang="en-US" sz="900" dirty="0">
+                <a:solidFill>
+                  <a:srgbClr val="5F7181"/>
+                </a:solidFill>
+                <a:latin typeface="Aptos" pitchFamily="34" charset="0"/>
+                <a:ea typeface="Aptos" pitchFamily="34" charset="-122"/>
+                <a:cs typeface="Aptos" pitchFamily="34" charset="-120"/>
+              </a:rPr>
+              <a:t>17</a:t>
+            </a:r>
+            <a:endParaRPr lang="en-US" sz="900" dirty="0"/>
+          </a:p>
+        </p:txBody>
+      </p:sp>
+      <p:sp>
+        <p:nvSpPr>
+          <p:cNvPr id="8" name="Shape 6"/>
           <p:cNvSpPr/>
           <p:nvPr/>
         </p:nvSpPr>
@@ -7180,7 +7475,7 @@
       </p:sp>
       <p:sp>
         <p:nvSpPr>
-          <p:cNvPr id="8" name="Text 6"/>
+          <p:cNvPr id="9" name="Text 7"/>
           <p:cNvSpPr/>
           <p:nvPr/>
         </p:nvSpPr>
@@ -7219,14 +7514,14 @@
       </p:sp>
       <p:sp>
         <p:nvSpPr>
-          <p:cNvPr id="9" name="Text 7"/>
+          <p:cNvPr id="10" name="Text 8"/>
           <p:cNvSpPr/>
           <p:nvPr/>
         </p:nvSpPr>
         <p:spPr>
           <a:xfrm>
             <a:off x="640080" y="621792"/>
-            <a:ext cx="10881360" cy="566928"/>
+            <a:ext cx="10881360" cy="713232"/>
           </a:xfrm>
           <a:prstGeom prst="rect">
             <a:avLst/>
@@ -7244,7 +7539,7 @@
               <a:buNone/>
             </a:pPr>
             <a:r>
-              <a:rPr lang="en-US" sz="2700" b="1" dirty="0">
+              <a:rPr lang="en-US" sz="3400" b="1" dirty="0">
                 <a:solidFill>
                   <a:srgbClr val="003A63"/>
                 </a:solidFill>
@@ -7254,20 +7549,20 @@
               </a:rPr>
               <a:t>Practical Exercise</a:t>
             </a:r>
-            <a:endParaRPr lang="en-US" sz="2700" dirty="0"/>
-          </a:p>
-        </p:txBody>
-      </p:sp>
-      <p:sp>
-        <p:nvSpPr>
-          <p:cNvPr id="10" name="Text 8"/>
-          <p:cNvSpPr/>
-          <p:nvPr/>
-        </p:nvSpPr>
-        <p:spPr>
-          <a:xfrm>
-            <a:off x="868680" y="1417320"/>
-            <a:ext cx="6675120" cy="4434840"/>
+            <a:endParaRPr lang="en-US" sz="3400" dirty="0"/>
+          </a:p>
+        </p:txBody>
+      </p:sp>
+      <p:sp>
+        <p:nvSpPr>
+          <p:cNvPr id="11" name="Text 9"/>
+          <p:cNvSpPr/>
+          <p:nvPr/>
+        </p:nvSpPr>
+        <p:spPr>
+          <a:xfrm>
+            <a:off x="868680" y="1508760"/>
+            <a:ext cx="6537960" cy="4160520"/>
           </a:xfrm>
           <a:prstGeom prst="rect">
             <a:avLst/>
@@ -7282,7 +7577,7 @@
           <a:lstStyle/>
           <a:p>
             <a:r>
-              <a:rPr lang="en-US" sz="1700" dirty="0">
+              <a:rPr lang="en-US" sz="2100" dirty="0">
                 <a:solidFill>
                   <a:srgbClr val="17364A"/>
                 </a:solidFill>
@@ -7292,11 +7587,11 @@
               </a:rPr>
               <a:t>Create a AI documentation packet for one real or realistic public health AI workflow.</a:t>
             </a:r>
-            <a:endParaRPr lang="en-US" sz="1700" dirty="0"/>
-          </a:p>
-          <a:p>
-            <a:r>
-              <a:rPr lang="en-US" sz="1700" dirty="0">
+            <a:endParaRPr lang="en-US" sz="2100" dirty="0"/>
+          </a:p>
+          <a:p>
+            <a:r>
+              <a:rPr lang="en-US" sz="2100" dirty="0">
                 <a:solidFill>
                   <a:srgbClr val="17364A"/>
                 </a:solidFill>
@@ -7304,13 +7599,13 @@
                 <a:ea typeface="Aptos" pitchFamily="34" charset="-122"/>
                 <a:cs typeface="Aptos" pitchFamily="34" charset="-120"/>
               </a:rPr>
-              <a:t>The artifact should describe the use case, affected users, data sources, system dependencies, risks, guardrails, review.</a:t>
-            </a:r>
-            <a:endParaRPr lang="en-US" sz="1700" dirty="0"/>
-          </a:p>
-          <a:p>
-            <a:r>
-              <a:rPr lang="en-US" sz="1700" dirty="0">
+              <a:t>The artifact should describe the use case, affected users, data sources, system dependencies, risks,.</a:t>
+            </a:r>
+            <a:endParaRPr lang="en-US" sz="2100" dirty="0"/>
+          </a:p>
+          <a:p>
+            <a:r>
+              <a:rPr lang="en-US" sz="2100" dirty="0">
                 <a:solidFill>
                   <a:srgbClr val="17364A"/>
                 </a:solidFill>
@@ -7318,29 +7613,15 @@
                 <a:ea typeface="Aptos" pitchFamily="34" charset="-122"/>
                 <a:cs typeface="Aptos" pitchFamily="34" charset="-120"/>
               </a:rPr>
-              <a:t>The exercise should produce a work product that could be used in a governance meeting, procurement review, implementation.</a:t>
-            </a:r>
-            <a:endParaRPr lang="en-US" sz="1700" dirty="0"/>
-          </a:p>
-          <a:p>
-            <a:r>
-              <a:rPr lang="en-US" sz="1700" dirty="0">
-                <a:solidFill>
-                  <a:srgbClr val="17364A"/>
-                </a:solidFill>
-                <a:latin typeface="Aptos" pitchFamily="34" charset="0"/>
-                <a:ea typeface="Aptos" pitchFamily="34" charset="-122"/>
-                <a:cs typeface="Aptos" pitchFamily="34" charset="-120"/>
-              </a:rPr>
-              <a:t>Learners should document assumptions and identify which staff or partners need to be consulted.</a:t>
-            </a:r>
-            <a:endParaRPr lang="en-US" sz="1700" dirty="0"/>
-          </a:p>
-        </p:txBody>
-      </p:sp>
-      <p:sp>
-        <p:nvSpPr>
-          <p:cNvPr id="11" name="Shape 9"/>
+              <a:t>The exercise should produce a work product that could be used in a governance meeting, procurement.</a:t>
+            </a:r>
+            <a:endParaRPr lang="en-US" sz="2100" dirty="0"/>
+          </a:p>
+        </p:txBody>
+      </p:sp>
+      <p:sp>
+        <p:nvSpPr>
+          <p:cNvPr id="12" name="Shape 10"/>
           <p:cNvSpPr/>
           <p:nvPr/>
         </p:nvSpPr>
@@ -7367,14 +7648,14 @@
       </p:sp>
       <p:sp>
         <p:nvSpPr>
-          <p:cNvPr id="12" name="Text 10"/>
+          <p:cNvPr id="13" name="Text 11"/>
           <p:cNvSpPr/>
           <p:nvPr/>
         </p:nvSpPr>
         <p:spPr>
           <a:xfrm>
             <a:off x="8074152" y="1563624"/>
-            <a:ext cx="2825496" cy="201168"/>
+            <a:ext cx="2825496" cy="256032"/>
           </a:xfrm>
           <a:prstGeom prst="rect">
             <a:avLst/>
@@ -7390,7 +7671,7 @@
               <a:buNone/>
             </a:pPr>
             <a:r>
-              <a:rPr lang="en-US" sz="950" b="1" dirty="0">
+              <a:rPr lang="en-US" sz="1300" b="1" dirty="0">
                 <a:solidFill>
                   <a:srgbClr val="0068B7"/>
                 </a:solidFill>
@@ -7400,20 +7681,20 @@
               </a:rPr>
               <a:t>Key idea</a:t>
             </a:r>
-            <a:endParaRPr lang="en-US" sz="950" dirty="0"/>
-          </a:p>
-        </p:txBody>
-      </p:sp>
-      <p:sp>
-        <p:nvSpPr>
-          <p:cNvPr id="13" name="Text 11"/>
-          <p:cNvSpPr/>
-          <p:nvPr/>
-        </p:nvSpPr>
-        <p:spPr>
-          <a:xfrm>
-            <a:off x="8074152" y="1856232"/>
-            <a:ext cx="2825496" cy="1261872"/>
+            <a:endParaRPr lang="en-US" sz="1300" dirty="0"/>
+          </a:p>
+        </p:txBody>
+      </p:sp>
+      <p:sp>
+        <p:nvSpPr>
+          <p:cNvPr id="14" name="Text 12"/>
+          <p:cNvSpPr/>
+          <p:nvPr/>
+        </p:nvSpPr>
+        <p:spPr>
+          <a:xfrm>
+            <a:off x="8074152" y="1920240"/>
+            <a:ext cx="2825496" cy="1188720"/>
           </a:xfrm>
           <a:prstGeom prst="rect">
             <a:avLst/>
@@ -7431,7 +7712,7 @@
               <a:buNone/>
             </a:pPr>
             <a:r>
-              <a:rPr lang="en-US" sz="1250" dirty="0">
+              <a:rPr lang="en-US" sz="1550" dirty="0">
                 <a:solidFill>
                   <a:srgbClr val="17364A"/>
                 </a:solidFill>
@@ -7441,13 +7722,13 @@
               </a:rPr>
               <a:t>Create a AI documentation packet for one real or realistic public health AI workflow.</a:t>
             </a:r>
-            <a:endParaRPr lang="en-US" sz="1250" dirty="0"/>
-          </a:p>
-        </p:txBody>
-      </p:sp>
-      <p:sp>
-        <p:nvSpPr>
-          <p:cNvPr id="14" name="Shape 12"/>
+            <a:endParaRPr lang="en-US" sz="1550" dirty="0"/>
+          </a:p>
+        </p:txBody>
+      </p:sp>
+      <p:sp>
+        <p:nvSpPr>
+          <p:cNvPr id="15" name="Shape 13"/>
           <p:cNvSpPr/>
           <p:nvPr/>
         </p:nvSpPr>
@@ -7474,14 +7755,14 @@
       </p:sp>
       <p:sp>
         <p:nvSpPr>
-          <p:cNvPr id="15" name="Text 13"/>
+          <p:cNvPr id="16" name="Text 14"/>
           <p:cNvSpPr/>
           <p:nvPr/>
         </p:nvSpPr>
         <p:spPr>
           <a:xfrm>
             <a:off x="8074152" y="3666744"/>
-            <a:ext cx="2825496" cy="201168"/>
+            <a:ext cx="2825496" cy="256032"/>
           </a:xfrm>
           <a:prstGeom prst="rect">
             <a:avLst/>
@@ -7497,7 +7778,7 @@
               <a:buNone/>
             </a:pPr>
             <a:r>
-              <a:rPr lang="en-US" sz="950" b="1" dirty="0">
+              <a:rPr lang="en-US" sz="1300" b="1" dirty="0">
                 <a:solidFill>
                   <a:srgbClr val="0068B7"/>
                 </a:solidFill>
@@ -7507,20 +7788,20 @@
               </a:rPr>
               <a:t>Use this for</a:t>
             </a:r>
-            <a:endParaRPr lang="en-US" sz="950" dirty="0"/>
-          </a:p>
-        </p:txBody>
-      </p:sp>
-      <p:sp>
-        <p:nvSpPr>
-          <p:cNvPr id="16" name="Text 14"/>
-          <p:cNvSpPr/>
-          <p:nvPr/>
-        </p:nvSpPr>
-        <p:spPr>
-          <a:xfrm>
-            <a:off x="8074152" y="3959352"/>
-            <a:ext cx="2825496" cy="1170432"/>
+            <a:endParaRPr lang="en-US" sz="1300" dirty="0"/>
+          </a:p>
+        </p:txBody>
+      </p:sp>
+      <p:sp>
+        <p:nvSpPr>
+          <p:cNvPr id="17" name="Text 15"/>
+          <p:cNvSpPr/>
+          <p:nvPr/>
+        </p:nvSpPr>
+        <p:spPr>
+          <a:xfrm>
+            <a:off x="8074152" y="4023360"/>
+            <a:ext cx="2825496" cy="1097280"/>
           </a:xfrm>
           <a:prstGeom prst="rect">
             <a:avLst/>
@@ -7538,7 +7819,7 @@
               <a:buNone/>
             </a:pPr>
             <a:r>
-              <a:rPr lang="en-US" sz="1250" dirty="0">
+              <a:rPr lang="en-US" sz="1550" dirty="0">
                 <a:solidFill>
                   <a:srgbClr val="17364A"/>
                 </a:solidFill>
@@ -7548,7 +7829,7 @@
               </a:rPr>
               <a:t>Connect the concept to public health decisions, safeguards, documentation, or implementation work.</a:t>
             </a:r>
-            <a:endParaRPr lang="en-US" sz="1250" dirty="0"/>
+            <a:endParaRPr lang="en-US" sz="1550" dirty="0"/>
           </a:p>
         </p:txBody>
       </p:sp>
@@ -7745,7 +8026,7 @@
                 <a:ea typeface="Aptos" pitchFamily="34" charset="-122"/>
                 <a:cs typeface="Aptos" pitchFamily="34" charset="-120"/>
               </a:rPr>
-              <a:t>© Paula Soper</a:t>
+              <a:t>Â© Paula Soper</a:t>
             </a:r>
             <a:endParaRPr lang="en-US" sz="800" dirty="0"/>
           </a:p>
@@ -7753,7 +8034,46 @@
       </p:sp>
       <p:sp>
         <p:nvSpPr>
-          <p:cNvPr id="7" name="Shape 5"/>
+          <p:cNvPr id="7" name="Text 5"/>
+          <p:cNvSpPr/>
+          <p:nvPr/>
+        </p:nvSpPr>
+        <p:spPr>
+          <a:xfrm>
+            <a:off x="11137392" y="6510528"/>
+            <a:ext cx="411480" cy="201168"/>
+          </a:xfrm>
+          <a:prstGeom prst="rect">
+            <a:avLst/>
+          </a:prstGeom>
+          <a:noFill/>
+          <a:ln/>
+        </p:spPr>
+        <p:txBody>
+          <a:bodyPr wrap="square" lIns="0" tIns="0" rIns="0" bIns="0" rtlCol="0" anchor="ctr"/>
+          <a:lstStyle/>
+          <a:p>
+            <a:pPr algn="r" indent="0" marL="0">
+              <a:buNone/>
+            </a:pPr>
+            <a:r>
+              <a:rPr lang="en-US" sz="900" dirty="0">
+                <a:solidFill>
+                  <a:srgbClr val="5F7181"/>
+                </a:solidFill>
+                <a:latin typeface="Aptos" pitchFamily="34" charset="0"/>
+                <a:ea typeface="Aptos" pitchFamily="34" charset="-122"/>
+                <a:cs typeface="Aptos" pitchFamily="34" charset="-120"/>
+              </a:rPr>
+              <a:t>18</a:t>
+            </a:r>
+            <a:endParaRPr lang="en-US" sz="900" dirty="0"/>
+          </a:p>
+        </p:txBody>
+      </p:sp>
+      <p:sp>
+        <p:nvSpPr>
+          <p:cNvPr id="8" name="Shape 6"/>
           <p:cNvSpPr/>
           <p:nvPr/>
         </p:nvSpPr>
@@ -7778,7 +8098,7 @@
       </p:sp>
       <p:sp>
         <p:nvSpPr>
-          <p:cNvPr id="8" name="Text 6"/>
+          <p:cNvPr id="9" name="Text 7"/>
           <p:cNvSpPr/>
           <p:nvPr/>
         </p:nvSpPr>
@@ -7817,14 +8137,14 @@
       </p:sp>
       <p:sp>
         <p:nvSpPr>
-          <p:cNvPr id="9" name="Text 7"/>
+          <p:cNvPr id="10" name="Text 8"/>
           <p:cNvSpPr/>
           <p:nvPr/>
         </p:nvSpPr>
         <p:spPr>
           <a:xfrm>
             <a:off x="640080" y="621792"/>
-            <a:ext cx="10881360" cy="566928"/>
+            <a:ext cx="10881360" cy="713232"/>
           </a:xfrm>
           <a:prstGeom prst="rect">
             <a:avLst/>
@@ -7842,7 +8162,7 @@
               <a:buNone/>
             </a:pPr>
             <a:r>
-              <a:rPr lang="en-US" sz="2700" b="1" dirty="0">
+              <a:rPr lang="en-US" sz="3400" b="1" dirty="0">
                 <a:solidFill>
                   <a:srgbClr val="003A63"/>
                 </a:solidFill>
@@ -7852,20 +8172,20 @@
               </a:rPr>
               <a:t>Expected Artifact or Evidence</a:t>
             </a:r>
-            <a:endParaRPr lang="en-US" sz="2700" dirty="0"/>
-          </a:p>
-        </p:txBody>
-      </p:sp>
-      <p:sp>
-        <p:nvSpPr>
-          <p:cNvPr id="10" name="Text 8"/>
-          <p:cNvSpPr/>
-          <p:nvPr/>
-        </p:nvSpPr>
-        <p:spPr>
-          <a:xfrm>
-            <a:off x="868680" y="1417320"/>
-            <a:ext cx="6675120" cy="4434840"/>
+            <a:endParaRPr lang="en-US" sz="3400" dirty="0"/>
+          </a:p>
+        </p:txBody>
+      </p:sp>
+      <p:sp>
+        <p:nvSpPr>
+          <p:cNvPr id="11" name="Text 9"/>
+          <p:cNvSpPr/>
+          <p:nvPr/>
+        </p:nvSpPr>
+        <p:spPr>
+          <a:xfrm>
+            <a:off x="868680" y="1508760"/>
+            <a:ext cx="6537960" cy="4160520"/>
           </a:xfrm>
           <a:prstGeom prst="rect">
             <a:avLst/>
@@ -7880,7 +8200,7 @@
           <a:lstStyle/>
           <a:p>
             <a:r>
-              <a:rPr lang="en-US" sz="1700" dirty="0">
+              <a:rPr lang="en-US" sz="2100" dirty="0">
                 <a:solidFill>
                   <a:srgbClr val="17364A"/>
                 </a:solidFill>
@@ -7890,11 +8210,11 @@
               </a:rPr>
               <a:t>The expected artifact is a completed AI documentation packet.</a:t>
             </a:r>
-            <a:endParaRPr lang="en-US" sz="1700" dirty="0"/>
-          </a:p>
-          <a:p>
-            <a:r>
-              <a:rPr lang="en-US" sz="1700" dirty="0">
+            <a:endParaRPr lang="en-US" sz="2100" dirty="0"/>
+          </a:p>
+          <a:p>
+            <a:r>
+              <a:rPr lang="en-US" sz="2100" dirty="0">
                 <a:solidFill>
                   <a:srgbClr val="17364A"/>
                 </a:solidFill>
@@ -7902,15 +8222,15 @@
                 <a:ea typeface="Aptos" pitchFamily="34" charset="-122"/>
                 <a:cs typeface="Aptos" pitchFamily="34" charset="-120"/>
               </a:rPr>
-              <a:t>It should be specific to a public health workflow and should include technical dependencies, governance questions, human.</a:t>
-            </a:r>
-            <a:endParaRPr lang="en-US" sz="1700" dirty="0"/>
-          </a:p>
-        </p:txBody>
-      </p:sp>
-      <p:sp>
-        <p:nvSpPr>
-          <p:cNvPr id="11" name="Shape 9"/>
+              <a:t>It should be specific to a public health workflow and should include technical dependencies, governance.</a:t>
+            </a:r>
+            <a:endParaRPr lang="en-US" sz="2100" dirty="0"/>
+          </a:p>
+        </p:txBody>
+      </p:sp>
+      <p:sp>
+        <p:nvSpPr>
+          <p:cNvPr id="12" name="Shape 10"/>
           <p:cNvSpPr/>
           <p:nvPr/>
         </p:nvSpPr>
@@ -7937,14 +8257,14 @@
       </p:sp>
       <p:sp>
         <p:nvSpPr>
-          <p:cNvPr id="12" name="Text 10"/>
+          <p:cNvPr id="13" name="Text 11"/>
           <p:cNvSpPr/>
           <p:nvPr/>
         </p:nvSpPr>
         <p:spPr>
           <a:xfrm>
             <a:off x="8074152" y="1563624"/>
-            <a:ext cx="2825496" cy="201168"/>
+            <a:ext cx="2825496" cy="256032"/>
           </a:xfrm>
           <a:prstGeom prst="rect">
             <a:avLst/>
@@ -7960,7 +8280,7 @@
               <a:buNone/>
             </a:pPr>
             <a:r>
-              <a:rPr lang="en-US" sz="950" b="1" dirty="0">
+              <a:rPr lang="en-US" sz="1300" b="1" dirty="0">
                 <a:solidFill>
                   <a:srgbClr val="0068B7"/>
                 </a:solidFill>
@@ -7970,20 +8290,20 @@
               </a:rPr>
               <a:t>Key idea</a:t>
             </a:r>
-            <a:endParaRPr lang="en-US" sz="950" dirty="0"/>
-          </a:p>
-        </p:txBody>
-      </p:sp>
-      <p:sp>
-        <p:nvSpPr>
-          <p:cNvPr id="13" name="Text 11"/>
-          <p:cNvSpPr/>
-          <p:nvPr/>
-        </p:nvSpPr>
-        <p:spPr>
-          <a:xfrm>
-            <a:off x="8074152" y="1856232"/>
-            <a:ext cx="2825496" cy="1261872"/>
+            <a:endParaRPr lang="en-US" sz="1300" dirty="0"/>
+          </a:p>
+        </p:txBody>
+      </p:sp>
+      <p:sp>
+        <p:nvSpPr>
+          <p:cNvPr id="14" name="Text 12"/>
+          <p:cNvSpPr/>
+          <p:nvPr/>
+        </p:nvSpPr>
+        <p:spPr>
+          <a:xfrm>
+            <a:off x="8074152" y="1920240"/>
+            <a:ext cx="2825496" cy="1188720"/>
           </a:xfrm>
           <a:prstGeom prst="rect">
             <a:avLst/>
@@ -8001,7 +8321,7 @@
               <a:buNone/>
             </a:pPr>
             <a:r>
-              <a:rPr lang="en-US" sz="1250" dirty="0">
+              <a:rPr lang="en-US" sz="1550" dirty="0">
                 <a:solidFill>
                   <a:srgbClr val="17364A"/>
                 </a:solidFill>
@@ -8011,13 +8331,13 @@
               </a:rPr>
               <a:t>The expected artifact is a completed AI documentation packet.</a:t>
             </a:r>
-            <a:endParaRPr lang="en-US" sz="1250" dirty="0"/>
-          </a:p>
-        </p:txBody>
-      </p:sp>
-      <p:sp>
-        <p:nvSpPr>
-          <p:cNvPr id="14" name="Shape 12"/>
+            <a:endParaRPr lang="en-US" sz="1550" dirty="0"/>
+          </a:p>
+        </p:txBody>
+      </p:sp>
+      <p:sp>
+        <p:nvSpPr>
+          <p:cNvPr id="15" name="Shape 13"/>
           <p:cNvSpPr/>
           <p:nvPr/>
         </p:nvSpPr>
@@ -8044,14 +8364,14 @@
       </p:sp>
       <p:sp>
         <p:nvSpPr>
-          <p:cNvPr id="15" name="Text 13"/>
+          <p:cNvPr id="16" name="Text 14"/>
           <p:cNvSpPr/>
           <p:nvPr/>
         </p:nvSpPr>
         <p:spPr>
           <a:xfrm>
             <a:off x="8074152" y="3666744"/>
-            <a:ext cx="2825496" cy="201168"/>
+            <a:ext cx="2825496" cy="256032"/>
           </a:xfrm>
           <a:prstGeom prst="rect">
             <a:avLst/>
@@ -8067,7 +8387,7 @@
               <a:buNone/>
             </a:pPr>
             <a:r>
-              <a:rPr lang="en-US" sz="950" b="1" dirty="0">
+              <a:rPr lang="en-US" sz="1300" b="1" dirty="0">
                 <a:solidFill>
                   <a:srgbClr val="0068B7"/>
                 </a:solidFill>
@@ -8077,20 +8397,20 @@
               </a:rPr>
               <a:t>Use this for</a:t>
             </a:r>
-            <a:endParaRPr lang="en-US" sz="950" dirty="0"/>
-          </a:p>
-        </p:txBody>
-      </p:sp>
-      <p:sp>
-        <p:nvSpPr>
-          <p:cNvPr id="16" name="Text 14"/>
-          <p:cNvSpPr/>
-          <p:nvPr/>
-        </p:nvSpPr>
-        <p:spPr>
-          <a:xfrm>
-            <a:off x="8074152" y="3959352"/>
-            <a:ext cx="2825496" cy="1170432"/>
+            <a:endParaRPr lang="en-US" sz="1300" dirty="0"/>
+          </a:p>
+        </p:txBody>
+      </p:sp>
+      <p:sp>
+        <p:nvSpPr>
+          <p:cNvPr id="17" name="Text 15"/>
+          <p:cNvSpPr/>
+          <p:nvPr/>
+        </p:nvSpPr>
+        <p:spPr>
+          <a:xfrm>
+            <a:off x="8074152" y="4023360"/>
+            <a:ext cx="2825496" cy="1097280"/>
           </a:xfrm>
           <a:prstGeom prst="rect">
             <a:avLst/>
@@ -8108,7 +8428,7 @@
               <a:buNone/>
             </a:pPr>
             <a:r>
-              <a:rPr lang="en-US" sz="1250" dirty="0">
+              <a:rPr lang="en-US" sz="1550" dirty="0">
                 <a:solidFill>
                   <a:srgbClr val="17364A"/>
                 </a:solidFill>
@@ -8118,7 +8438,7 @@
               </a:rPr>
               <a:t>Connect the concept to public health decisions, safeguards, documentation, or implementation work.</a:t>
             </a:r>
-            <a:endParaRPr lang="en-US" sz="1250" dirty="0"/>
+            <a:endParaRPr lang="en-US" sz="1550" dirty="0"/>
           </a:p>
         </p:txBody>
       </p:sp>
@@ -8315,7 +8635,7 @@
                 <a:ea typeface="Aptos" pitchFamily="34" charset="-122"/>
                 <a:cs typeface="Aptos" pitchFamily="34" charset="-120"/>
               </a:rPr>
-              <a:t>© Paula Soper</a:t>
+              <a:t>Â© Paula Soper</a:t>
             </a:r>
             <a:endParaRPr lang="en-US" sz="800" dirty="0"/>
           </a:p>
@@ -8323,7 +8643,46 @@
       </p:sp>
       <p:sp>
         <p:nvSpPr>
-          <p:cNvPr id="7" name="Shape 5"/>
+          <p:cNvPr id="7" name="Text 5"/>
+          <p:cNvSpPr/>
+          <p:nvPr/>
+        </p:nvSpPr>
+        <p:spPr>
+          <a:xfrm>
+            <a:off x="11137392" y="6510528"/>
+            <a:ext cx="411480" cy="201168"/>
+          </a:xfrm>
+          <a:prstGeom prst="rect">
+            <a:avLst/>
+          </a:prstGeom>
+          <a:noFill/>
+          <a:ln/>
+        </p:spPr>
+        <p:txBody>
+          <a:bodyPr wrap="square" lIns="0" tIns="0" rIns="0" bIns="0" rtlCol="0" anchor="ctr"/>
+          <a:lstStyle/>
+          <a:p>
+            <a:pPr algn="r" indent="0" marL="0">
+              <a:buNone/>
+            </a:pPr>
+            <a:r>
+              <a:rPr lang="en-US" sz="900" dirty="0">
+                <a:solidFill>
+                  <a:srgbClr val="5F7181"/>
+                </a:solidFill>
+                <a:latin typeface="Aptos" pitchFamily="34" charset="0"/>
+                <a:ea typeface="Aptos" pitchFamily="34" charset="-122"/>
+                <a:cs typeface="Aptos" pitchFamily="34" charset="-120"/>
+              </a:rPr>
+              <a:t>19</a:t>
+            </a:r>
+            <a:endParaRPr lang="en-US" sz="900" dirty="0"/>
+          </a:p>
+        </p:txBody>
+      </p:sp>
+      <p:sp>
+        <p:nvSpPr>
+          <p:cNvPr id="8" name="Shape 6"/>
           <p:cNvSpPr/>
           <p:nvPr/>
         </p:nvSpPr>
@@ -8348,7 +8707,7 @@
       </p:sp>
       <p:sp>
         <p:nvSpPr>
-          <p:cNvPr id="8" name="Text 6"/>
+          <p:cNvPr id="9" name="Text 7"/>
           <p:cNvSpPr/>
           <p:nvPr/>
         </p:nvSpPr>
@@ -8387,14 +8746,14 @@
       </p:sp>
       <p:sp>
         <p:nvSpPr>
-          <p:cNvPr id="9" name="Text 7"/>
+          <p:cNvPr id="10" name="Text 8"/>
           <p:cNvSpPr/>
           <p:nvPr/>
         </p:nvSpPr>
         <p:spPr>
           <a:xfrm>
             <a:off x="640080" y="621792"/>
-            <a:ext cx="10881360" cy="566928"/>
+            <a:ext cx="10881360" cy="713232"/>
           </a:xfrm>
           <a:prstGeom prst="rect">
             <a:avLst/>
@@ -8412,7 +8771,7 @@
               <a:buNone/>
             </a:pPr>
             <a:r>
-              <a:rPr lang="en-US" sz="2700" b="1" dirty="0">
+              <a:rPr lang="en-US" sz="3400" b="1" dirty="0">
                 <a:solidFill>
                   <a:srgbClr val="003A63"/>
                 </a:solidFill>
@@ -8422,20 +8781,20 @@
               </a:rPr>
               <a:t>Expected Assignment</a:t>
             </a:r>
-            <a:endParaRPr lang="en-US" sz="2700" dirty="0"/>
-          </a:p>
-        </p:txBody>
-      </p:sp>
-      <p:sp>
-        <p:nvSpPr>
-          <p:cNvPr id="10" name="Text 8"/>
-          <p:cNvSpPr/>
-          <p:nvPr/>
-        </p:nvSpPr>
-        <p:spPr>
-          <a:xfrm>
-            <a:off x="868680" y="1417320"/>
-            <a:ext cx="6675120" cy="4434840"/>
+            <a:endParaRPr lang="en-US" sz="3400" dirty="0"/>
+          </a:p>
+        </p:txBody>
+      </p:sp>
+      <p:sp>
+        <p:nvSpPr>
+          <p:cNvPr id="11" name="Text 9"/>
+          <p:cNvSpPr/>
+          <p:nvPr/>
+        </p:nvSpPr>
+        <p:spPr>
+          <a:xfrm>
+            <a:off x="868680" y="1508760"/>
+            <a:ext cx="6537960" cy="4160520"/>
           </a:xfrm>
           <a:prstGeom prst="rect">
             <a:avLst/>
@@ -8450,7 +8809,7 @@
           <a:lstStyle/>
           <a:p>
             <a:r>
-              <a:rPr lang="en-US" sz="1700" dirty="0">
+              <a:rPr lang="en-US" sz="2100" dirty="0">
                 <a:solidFill>
                   <a:srgbClr val="17364A"/>
                 </a:solidFill>
@@ -8458,15 +8817,15 @@
                 <a:ea typeface="Aptos" pitchFamily="34" charset="-122"/>
                 <a:cs typeface="Aptos" pitchFamily="34" charset="-120"/>
               </a:rPr>
-              <a:t>The expected artifact is a completed AI documentation packet. It should be specific to a public health workflow and should.</a:t>
-            </a:r>
-            <a:endParaRPr lang="en-US" sz="1700" dirty="0"/>
-          </a:p>
-        </p:txBody>
-      </p:sp>
-      <p:sp>
-        <p:nvSpPr>
-          <p:cNvPr id="11" name="Shape 9"/>
+              <a:t>The expected artifact is a completed AI documentation packet. It should be specific to a public health.</a:t>
+            </a:r>
+            <a:endParaRPr lang="en-US" sz="2100" dirty="0"/>
+          </a:p>
+        </p:txBody>
+      </p:sp>
+      <p:sp>
+        <p:nvSpPr>
+          <p:cNvPr id="12" name="Shape 10"/>
           <p:cNvSpPr/>
           <p:nvPr/>
         </p:nvSpPr>
@@ -8493,14 +8852,14 @@
       </p:sp>
       <p:sp>
         <p:nvSpPr>
-          <p:cNvPr id="12" name="Text 10"/>
+          <p:cNvPr id="13" name="Text 11"/>
           <p:cNvSpPr/>
           <p:nvPr/>
         </p:nvSpPr>
         <p:spPr>
           <a:xfrm>
             <a:off x="8074152" y="1563624"/>
-            <a:ext cx="2825496" cy="201168"/>
+            <a:ext cx="2825496" cy="256032"/>
           </a:xfrm>
           <a:prstGeom prst="rect">
             <a:avLst/>
@@ -8516,7 +8875,7 @@
               <a:buNone/>
             </a:pPr>
             <a:r>
-              <a:rPr lang="en-US" sz="950" b="1" dirty="0">
+              <a:rPr lang="en-US" sz="1300" b="1" dirty="0">
                 <a:solidFill>
                   <a:srgbClr val="0068B7"/>
                 </a:solidFill>
@@ -8526,20 +8885,20 @@
               </a:rPr>
               <a:t>Key idea</a:t>
             </a:r>
-            <a:endParaRPr lang="en-US" sz="950" dirty="0"/>
-          </a:p>
-        </p:txBody>
-      </p:sp>
-      <p:sp>
-        <p:nvSpPr>
-          <p:cNvPr id="13" name="Text 11"/>
-          <p:cNvSpPr/>
-          <p:nvPr/>
-        </p:nvSpPr>
-        <p:spPr>
-          <a:xfrm>
-            <a:off x="8074152" y="1856232"/>
-            <a:ext cx="2825496" cy="1261872"/>
+            <a:endParaRPr lang="en-US" sz="1300" dirty="0"/>
+          </a:p>
+        </p:txBody>
+      </p:sp>
+      <p:sp>
+        <p:nvSpPr>
+          <p:cNvPr id="14" name="Text 12"/>
+          <p:cNvSpPr/>
+          <p:nvPr/>
+        </p:nvSpPr>
+        <p:spPr>
+          <a:xfrm>
+            <a:off x="8074152" y="1920240"/>
+            <a:ext cx="2825496" cy="1188720"/>
           </a:xfrm>
           <a:prstGeom prst="rect">
             <a:avLst/>
@@ -8557,7 +8916,7 @@
               <a:buNone/>
             </a:pPr>
             <a:r>
-              <a:rPr lang="en-US" sz="1250" dirty="0">
+              <a:rPr lang="en-US" sz="1550" dirty="0">
                 <a:solidFill>
                   <a:srgbClr val="17364A"/>
                 </a:solidFill>
@@ -8565,15 +8924,15 @@
                 <a:ea typeface="Aptos" pitchFamily="34" charset="-122"/>
                 <a:cs typeface="Aptos" pitchFamily="34" charset="-120"/>
               </a:rPr>
-              <a:t>The expected artifact is a completed AI documentation packet. It should be specific to a public health workflow and should.</a:t>
-            </a:r>
-            <a:endParaRPr lang="en-US" sz="1250" dirty="0"/>
-          </a:p>
-        </p:txBody>
-      </p:sp>
-      <p:sp>
-        <p:nvSpPr>
-          <p:cNvPr id="14" name="Shape 12"/>
+              <a:t>The expected artifact is a completed AI documentation packet. It should be specific to a public health.</a:t>
+            </a:r>
+            <a:endParaRPr lang="en-US" sz="1550" dirty="0"/>
+          </a:p>
+        </p:txBody>
+      </p:sp>
+      <p:sp>
+        <p:nvSpPr>
+          <p:cNvPr id="15" name="Shape 13"/>
           <p:cNvSpPr/>
           <p:nvPr/>
         </p:nvSpPr>
@@ -8600,14 +8959,14 @@
       </p:sp>
       <p:sp>
         <p:nvSpPr>
-          <p:cNvPr id="15" name="Text 13"/>
+          <p:cNvPr id="16" name="Text 14"/>
           <p:cNvSpPr/>
           <p:nvPr/>
         </p:nvSpPr>
         <p:spPr>
           <a:xfrm>
             <a:off x="8074152" y="3666744"/>
-            <a:ext cx="2825496" cy="201168"/>
+            <a:ext cx="2825496" cy="256032"/>
           </a:xfrm>
           <a:prstGeom prst="rect">
             <a:avLst/>
@@ -8623,7 +8982,7 @@
               <a:buNone/>
             </a:pPr>
             <a:r>
-              <a:rPr lang="en-US" sz="950" b="1" dirty="0">
+              <a:rPr lang="en-US" sz="1300" b="1" dirty="0">
                 <a:solidFill>
                   <a:srgbClr val="0068B7"/>
                 </a:solidFill>
@@ -8633,20 +8992,20 @@
               </a:rPr>
               <a:t>Use this for</a:t>
             </a:r>
-            <a:endParaRPr lang="en-US" sz="950" dirty="0"/>
-          </a:p>
-        </p:txBody>
-      </p:sp>
-      <p:sp>
-        <p:nvSpPr>
-          <p:cNvPr id="16" name="Text 14"/>
-          <p:cNvSpPr/>
-          <p:nvPr/>
-        </p:nvSpPr>
-        <p:spPr>
-          <a:xfrm>
-            <a:off x="8074152" y="3959352"/>
-            <a:ext cx="2825496" cy="1170432"/>
+            <a:endParaRPr lang="en-US" sz="1300" dirty="0"/>
+          </a:p>
+        </p:txBody>
+      </p:sp>
+      <p:sp>
+        <p:nvSpPr>
+          <p:cNvPr id="17" name="Text 15"/>
+          <p:cNvSpPr/>
+          <p:nvPr/>
+        </p:nvSpPr>
+        <p:spPr>
+          <a:xfrm>
+            <a:off x="8074152" y="4023360"/>
+            <a:ext cx="2825496" cy="1097280"/>
           </a:xfrm>
           <a:prstGeom prst="rect">
             <a:avLst/>
@@ -8664,7 +9023,7 @@
               <a:buNone/>
             </a:pPr>
             <a:r>
-              <a:rPr lang="en-US" sz="1250" dirty="0">
+              <a:rPr lang="en-US" sz="1550" dirty="0">
                 <a:solidFill>
                   <a:srgbClr val="17364A"/>
                 </a:solidFill>
@@ -8674,7 +9033,7 @@
               </a:rPr>
               <a:t>Connect the concept to public health decisions, safeguards, documentation, or implementation work.</a:t>
             </a:r>
-            <a:endParaRPr lang="en-US" sz="1250" dirty="0"/>
+            <a:endParaRPr lang="en-US" sz="1550" dirty="0"/>
           </a:p>
         </p:txBody>
       </p:sp>
@@ -8871,7 +9230,7 @@
                 <a:ea typeface="Aptos" pitchFamily="34" charset="-122"/>
                 <a:cs typeface="Aptos" pitchFamily="34" charset="-120"/>
               </a:rPr>
-              <a:t>© Paula Soper</a:t>
+              <a:t>Â© Paula Soper</a:t>
             </a:r>
             <a:endParaRPr lang="en-US" sz="800" dirty="0"/>
           </a:p>
@@ -8885,8 +9244,47 @@
         </p:nvSpPr>
         <p:spPr>
           <a:xfrm>
+            <a:off x="11137392" y="6510528"/>
+            <a:ext cx="411480" cy="201168"/>
+          </a:xfrm>
+          <a:prstGeom prst="rect">
+            <a:avLst/>
+          </a:prstGeom>
+          <a:noFill/>
+          <a:ln/>
+        </p:spPr>
+        <p:txBody>
+          <a:bodyPr wrap="square" lIns="0" tIns="0" rIns="0" bIns="0" rtlCol="0" anchor="ctr"/>
+          <a:lstStyle/>
+          <a:p>
+            <a:pPr algn="r" indent="0" marL="0">
+              <a:buNone/>
+            </a:pPr>
+            <a:r>
+              <a:rPr lang="en-US" sz="900" dirty="0">
+                <a:solidFill>
+                  <a:srgbClr val="5F7181"/>
+                </a:solidFill>
+                <a:latin typeface="Aptos" pitchFamily="34" charset="0"/>
+                <a:ea typeface="Aptos" pitchFamily="34" charset="-122"/>
+                <a:cs typeface="Aptos" pitchFamily="34" charset="-120"/>
+              </a:rPr>
+              <a:t>2</a:t>
+            </a:r>
+            <a:endParaRPr lang="en-US" sz="900" dirty="0"/>
+          </a:p>
+        </p:txBody>
+      </p:sp>
+      <p:sp>
+        <p:nvSpPr>
+          <p:cNvPr id="8" name="Text 6"/>
+          <p:cNvSpPr/>
+          <p:nvPr/>
+        </p:nvSpPr>
+        <p:spPr>
+          <a:xfrm>
             <a:off x="640080" y="658368"/>
-            <a:ext cx="10881360" cy="566928"/>
+            <a:ext cx="10881360" cy="713232"/>
           </a:xfrm>
           <a:prstGeom prst="rect">
             <a:avLst/>
@@ -8904,7 +9302,7 @@
               <a:buNone/>
             </a:pPr>
             <a:r>
-              <a:rPr lang="en-US" sz="2700" b="1" dirty="0">
+              <a:rPr lang="en-US" sz="3400" b="1" dirty="0">
                 <a:solidFill>
                   <a:srgbClr val="003A63"/>
                 </a:solidFill>
@@ -8914,20 +9312,20 @@
               </a:rPr>
               <a:t>What this module helps you do</a:t>
             </a:r>
-            <a:endParaRPr lang="en-US" sz="2700" dirty="0"/>
-          </a:p>
-        </p:txBody>
-      </p:sp>
-      <p:sp>
-        <p:nvSpPr>
-          <p:cNvPr id="8" name="Text 6"/>
-          <p:cNvSpPr/>
-          <p:nvPr/>
-        </p:nvSpPr>
-        <p:spPr>
-          <a:xfrm>
-            <a:off x="868680" y="1417320"/>
-            <a:ext cx="6675120" cy="3291840"/>
+            <a:endParaRPr lang="en-US" sz="3400" dirty="0"/>
+          </a:p>
+        </p:txBody>
+      </p:sp>
+      <p:sp>
+        <p:nvSpPr>
+          <p:cNvPr id="9" name="Text 7"/>
+          <p:cNvSpPr/>
+          <p:nvPr/>
+        </p:nvSpPr>
+        <p:spPr>
+          <a:xfrm>
+            <a:off x="868680" y="1508760"/>
+            <a:ext cx="6446520" cy="2926080"/>
           </a:xfrm>
           <a:prstGeom prst="rect">
             <a:avLst/>
@@ -8942,7 +9340,7 @@
           <a:lstStyle/>
           <a:p>
             <a:r>
-              <a:rPr lang="en-US" sz="1700" dirty="0">
+              <a:rPr lang="en-US" sz="2100" dirty="0">
                 <a:solidFill>
                   <a:srgbClr val="17364A"/>
                 </a:solidFill>
@@ -8952,11 +9350,11 @@
               </a:rPr>
               <a:t>AI documentation makes systems understandable, reviewable, and accountable.</a:t>
             </a:r>
-            <a:endParaRPr lang="en-US" sz="1700" dirty="0"/>
-          </a:p>
-          <a:p>
-            <a:r>
-              <a:rPr lang="en-US" sz="1700" dirty="0">
+            <a:endParaRPr lang="en-US" sz="2100" dirty="0"/>
+          </a:p>
+          <a:p>
+            <a:r>
+              <a:rPr lang="en-US" sz="2100" dirty="0">
                 <a:solidFill>
                   <a:srgbClr val="17364A"/>
                 </a:solidFill>
@@ -8964,13 +9362,13 @@
                 <a:ea typeface="Aptos" pitchFamily="34" charset="-122"/>
                 <a:cs typeface="Aptos" pitchFamily="34" charset="-120"/>
               </a:rPr>
-              <a:t>Model cards and system cards are structured documentation tools that describe intended use, data, evaluation, limitations, risks, human oversight,.</a:t>
-            </a:r>
-            <a:endParaRPr lang="en-US" sz="1700" dirty="0"/>
-          </a:p>
-          <a:p>
-            <a:r>
-              <a:rPr lang="en-US" sz="1700" dirty="0">
+              <a:t>Model cards and system cards are structured documentation tools that describe intended use, data, evaluation,.</a:t>
+            </a:r>
+            <a:endParaRPr lang="en-US" sz="2100" dirty="0"/>
+          </a:p>
+          <a:p>
+            <a:r>
+              <a:rPr lang="en-US" sz="2100" dirty="0">
                 <a:solidFill>
                   <a:srgbClr val="17364A"/>
                 </a:solidFill>
@@ -8978,15 +9376,15 @@
                 <a:ea typeface="Aptos" pitchFamily="34" charset="-122"/>
                 <a:cs typeface="Aptos" pitchFamily="34" charset="-120"/>
               </a:rPr>
-              <a:t>This module helps public health staff create documentation that supports governance review, vendor oversight, public accountability, and incident.</a:t>
-            </a:r>
-            <a:endParaRPr lang="en-US" sz="1700" dirty="0"/>
-          </a:p>
-        </p:txBody>
-      </p:sp>
-      <p:sp>
-        <p:nvSpPr>
-          <p:cNvPr id="9" name="Shape 7"/>
+              <a:t>This module helps public health staff create documentation that supports governance review, vendor oversight,.</a:t>
+            </a:r>
+            <a:endParaRPr lang="en-US" sz="2100" dirty="0"/>
+          </a:p>
+        </p:txBody>
+      </p:sp>
+      <p:sp>
+        <p:nvSpPr>
+          <p:cNvPr id="10" name="Shape 8"/>
           <p:cNvSpPr/>
           <p:nvPr/>
         </p:nvSpPr>
@@ -9013,14 +9411,14 @@
       </p:sp>
       <p:sp>
         <p:nvSpPr>
-          <p:cNvPr id="10" name="Text 8"/>
+          <p:cNvPr id="11" name="Text 9"/>
           <p:cNvSpPr/>
           <p:nvPr/>
         </p:nvSpPr>
         <p:spPr>
           <a:xfrm>
             <a:off x="8074152" y="1563624"/>
-            <a:ext cx="2825496" cy="201168"/>
+            <a:ext cx="2825496" cy="256032"/>
           </a:xfrm>
           <a:prstGeom prst="rect">
             <a:avLst/>
@@ -9036,7 +9434,7 @@
               <a:buNone/>
             </a:pPr>
             <a:r>
-              <a:rPr lang="en-US" sz="950" b="1" dirty="0">
+              <a:rPr lang="en-US" sz="1300" b="1" dirty="0">
                 <a:solidFill>
                   <a:srgbClr val="0068B7"/>
                 </a:solidFill>
@@ -9046,20 +9444,20 @@
               </a:rPr>
               <a:t>Module details</a:t>
             </a:r>
-            <a:endParaRPr lang="en-US" sz="950" dirty="0"/>
-          </a:p>
-        </p:txBody>
-      </p:sp>
-      <p:sp>
-        <p:nvSpPr>
-          <p:cNvPr id="11" name="Text 9"/>
-          <p:cNvSpPr/>
-          <p:nvPr/>
-        </p:nvSpPr>
-        <p:spPr>
-          <a:xfrm>
-            <a:off x="8074152" y="1856232"/>
-            <a:ext cx="2825496" cy="1353312"/>
+            <a:endParaRPr lang="en-US" sz="1300" dirty="0"/>
+          </a:p>
+        </p:txBody>
+      </p:sp>
+      <p:sp>
+        <p:nvSpPr>
+          <p:cNvPr id="12" name="Text 10"/>
+          <p:cNvSpPr/>
+          <p:nvPr/>
+        </p:nvSpPr>
+        <p:spPr>
+          <a:xfrm>
+            <a:off x="8074152" y="1920240"/>
+            <a:ext cx="2825496" cy="1280160"/>
           </a:xfrm>
           <a:prstGeom prst="rect">
             <a:avLst/>
@@ -9077,7 +9475,7 @@
               <a:buNone/>
             </a:pPr>
             <a:r>
-              <a:rPr lang="en-US" sz="1250" dirty="0">
+              <a:rPr lang="en-US" sz="1550" dirty="0">
                 <a:solidFill>
                   <a:srgbClr val="17364A"/>
                 </a:solidFill>
@@ -9087,14 +9485,14 @@
               </a:rPr>
               <a:t>Level: intermediate/practitioner</a:t>
             </a:r>
-            <a:endParaRPr lang="en-US" sz="1250" dirty="0"/>
+            <a:endParaRPr lang="en-US" sz="1550" dirty="0"/>
           </a:p>
           <a:p>
             <a:pPr indent="0" marL="0">
               <a:buNone/>
             </a:pPr>
             <a:r>
-              <a:rPr lang="en-US" sz="1250" dirty="0">
+              <a:rPr lang="en-US" sz="1550" dirty="0">
                 <a:solidFill>
                   <a:srgbClr val="17364A"/>
                 </a:solidFill>
@@ -9104,14 +9502,14 @@
               </a:rPr>
               <a:t>Primary track: Governance and Security Track</a:t>
             </a:r>
-            <a:endParaRPr lang="en-US" sz="1250" dirty="0"/>
+            <a:endParaRPr lang="en-US" sz="1550" dirty="0"/>
           </a:p>
           <a:p>
             <a:pPr indent="0" marL="0">
               <a:buNone/>
             </a:pPr>
             <a:r>
-              <a:rPr lang="en-US" sz="1250" dirty="0">
+              <a:rPr lang="en-US" sz="1550" dirty="0">
                 <a:solidFill>
                   <a:srgbClr val="17364A"/>
                 </a:solidFill>
@@ -9121,32 +9519,32 @@
               </a:rPr>
               <a:t>Appears in tracks: operations-data-quality</a:t>
             </a:r>
-            <a:endParaRPr lang="en-US" sz="1250" dirty="0"/>
-          </a:p>
-        </p:txBody>
-      </p:sp>
-      <p:sp>
-        <p:nvSpPr>
-          <p:cNvPr id="12" name="Shape 10"/>
-          <p:cNvSpPr/>
-          <p:nvPr/>
-        </p:nvSpPr>
-        <p:spPr>
-          <a:xfrm>
-            <a:off x="7909560" y="3611880"/>
-            <a:ext cx="3154680" cy="1783080"/>
+            <a:endParaRPr lang="en-US" sz="1550" dirty="0"/>
+          </a:p>
+        </p:txBody>
+      </p:sp>
+      <p:sp>
+        <p:nvSpPr>
+          <p:cNvPr id="13" name="Shape 11"/>
+          <p:cNvSpPr/>
+          <p:nvPr/>
+        </p:nvSpPr>
+        <p:spPr>
+          <a:xfrm>
+            <a:off x="7635240" y="3730752"/>
+            <a:ext cx="1033272" cy="749808"/>
           </a:xfrm>
           <a:prstGeom prst="roundRect">
             <a:avLst>
-              <a:gd name="adj" fmla="val 6154"/>
+              <a:gd name="adj" fmla="val 14634"/>
             </a:avLst>
           </a:prstGeom>
           <a:solidFill>
-            <a:srgbClr val="EEF8ED"/>
+            <a:srgbClr val="0068B7"/>
           </a:solidFill>
           <a:ln w="12700">
             <a:solidFill>
-              <a:srgbClr val="B9D7E6"/>
+              <a:srgbClr val="0068B7"/>
             </a:solidFill>
             <a:prstDash val="solid"/>
           </a:ln>
@@ -9154,81 +9552,256 @@
       </p:sp>
       <p:sp>
         <p:nvSpPr>
-          <p:cNvPr id="13" name="Text 11"/>
-          <p:cNvSpPr/>
-          <p:nvPr/>
-        </p:nvSpPr>
-        <p:spPr>
-          <a:xfrm>
-            <a:off x="8074152" y="3758184"/>
-            <a:ext cx="2825496" cy="201168"/>
-          </a:xfrm>
-          <a:prstGeom prst="rect">
-            <a:avLst/>
-          </a:prstGeom>
-          <a:noFill/>
-          <a:ln/>
-        </p:spPr>
-        <p:txBody>
-          <a:bodyPr wrap="square" lIns="0" tIns="0" rIns="0" bIns="0" rtlCol="0" anchor="ctr"/>
-          <a:lstStyle/>
-          <a:p>
-            <a:pPr indent="0" marL="0">
-              <a:buNone/>
-            </a:pPr>
-            <a:r>
-              <a:rPr lang="en-US" sz="950" b="1" dirty="0">
-                <a:solidFill>
-                  <a:srgbClr val="0068B7"/>
-                </a:solidFill>
-                <a:latin typeface="Aptos" pitchFamily="34" charset="0"/>
-                <a:ea typeface="Aptos" pitchFamily="34" charset="-122"/>
-                <a:cs typeface="Aptos" pitchFamily="34" charset="-120"/>
-              </a:rPr>
-              <a:t>Learning approach</a:t>
-            </a:r>
-            <a:endParaRPr lang="en-US" sz="950" dirty="0"/>
-          </a:p>
-        </p:txBody>
-      </p:sp>
-      <p:sp>
-        <p:nvSpPr>
           <p:cNvPr id="14" name="Text 12"/>
           <p:cNvSpPr/>
           <p:nvPr/>
         </p:nvSpPr>
         <p:spPr>
           <a:xfrm>
-            <a:off x="8074152" y="4050792"/>
-            <a:ext cx="2825496" cy="1216152"/>
-          </a:xfrm>
-          <a:prstGeom prst="rect">
-            <a:avLst/>
-          </a:prstGeom>
-          <a:noFill/>
-          <a:ln/>
-        </p:spPr>
-        <p:txBody>
-          <a:bodyPr wrap="square" lIns="0" tIns="0" rIns="0" bIns="0" rtlCol="0" anchor="t">
+            <a:off x="7708392" y="3922776"/>
+            <a:ext cx="886968" cy="310896"/>
+          </a:xfrm>
+          <a:prstGeom prst="rect">
+            <a:avLst/>
+          </a:prstGeom>
+          <a:noFill/>
+          <a:ln/>
+        </p:spPr>
+        <p:txBody>
+          <a:bodyPr wrap="square" lIns="0" tIns="0" rIns="0" bIns="0" rtlCol="0" anchor="ctr">
             <a:normAutofit/>
           </a:bodyPr>
           <a:lstStyle/>
           <a:p>
-            <a:pPr indent="0" marL="0">
-              <a:buNone/>
-            </a:pPr>
-            <a:r>
-              <a:rPr lang="en-US" sz="1250" dirty="0">
-                <a:solidFill>
-                  <a:srgbClr val="17364A"/>
-                </a:solidFill>
-                <a:latin typeface="Aptos" pitchFamily="34" charset="0"/>
-                <a:ea typeface="Aptos" pitchFamily="34" charset="-122"/>
-                <a:cs typeface="Aptos" pitchFamily="34" charset="-120"/>
-              </a:rPr>
-              <a:t>Review the core ideas, complete the practical exercise, check your understanding, and use the related plays and tools to apply the lesson.</a:t>
-            </a:r>
-            <a:endParaRPr lang="en-US" sz="1250" dirty="0"/>
+            <a:pPr algn="ctr" indent="0" marL="0">
+              <a:buNone/>
+            </a:pPr>
+            <a:r>
+              <a:rPr lang="en-US" sz="1500" b="1" dirty="0">
+                <a:solidFill>
+                  <a:srgbClr val="FFFFFF"/>
+                </a:solidFill>
+                <a:latin typeface="Aptos" pitchFamily="34" charset="0"/>
+                <a:ea typeface="Aptos" pitchFamily="34" charset="-122"/>
+                <a:cs typeface="Aptos" pitchFamily="34" charset="-120"/>
+              </a:rPr>
+              <a:t>Learn</a:t>
+            </a:r>
+            <a:endParaRPr lang="en-US" sz="1500" dirty="0"/>
+          </a:p>
+        </p:txBody>
+      </p:sp>
+      <p:sp>
+        <p:nvSpPr>
+          <p:cNvPr id="15" name="Text 13"/>
+          <p:cNvSpPr/>
+          <p:nvPr/>
+        </p:nvSpPr>
+        <p:spPr>
+          <a:xfrm>
+            <a:off x="8695944" y="3941064"/>
+            <a:ext cx="201168" cy="256032"/>
+          </a:xfrm>
+          <a:prstGeom prst="rect">
+            <a:avLst/>
+          </a:prstGeom>
+          <a:noFill/>
+          <a:ln/>
+        </p:spPr>
+        <p:txBody>
+          <a:bodyPr wrap="square" lIns="0" tIns="0" rIns="0" bIns="0" rtlCol="0" anchor="ctr"/>
+          <a:lstStyle/>
+          <a:p>
+            <a:pPr algn="ctr" indent="0" marL="0">
+              <a:buNone/>
+            </a:pPr>
+            <a:r>
+              <a:rPr lang="en-US" sz="1800" b="1" dirty="0">
+                <a:solidFill>
+                  <a:srgbClr val="0068B7"/>
+                </a:solidFill>
+                <a:latin typeface="Aptos" pitchFamily="34" charset="0"/>
+                <a:ea typeface="Aptos" pitchFamily="34" charset="-122"/>
+                <a:cs typeface="Aptos" pitchFamily="34" charset="-120"/>
+              </a:rPr>
+              <a:t>â†’</a:t>
+            </a:r>
+            <a:endParaRPr lang="en-US" sz="1800" dirty="0"/>
+          </a:p>
+        </p:txBody>
+      </p:sp>
+      <p:sp>
+        <p:nvSpPr>
+          <p:cNvPr id="16" name="Shape 14"/>
+          <p:cNvSpPr/>
+          <p:nvPr/>
+        </p:nvSpPr>
+        <p:spPr>
+          <a:xfrm>
+            <a:off x="8924544" y="3730752"/>
+            <a:ext cx="1033272" cy="749808"/>
+          </a:xfrm>
+          <a:prstGeom prst="roundRect">
+            <a:avLst>
+              <a:gd name="adj" fmla="val 14634"/>
+            </a:avLst>
+          </a:prstGeom>
+          <a:solidFill>
+            <a:srgbClr val="2F8A28"/>
+          </a:solidFill>
+          <a:ln w="12700">
+            <a:solidFill>
+              <a:srgbClr val="2F8A28"/>
+            </a:solidFill>
+            <a:prstDash val="solid"/>
+          </a:ln>
+        </p:spPr>
+      </p:sp>
+      <p:sp>
+        <p:nvSpPr>
+          <p:cNvPr id="17" name="Text 15"/>
+          <p:cNvSpPr/>
+          <p:nvPr/>
+        </p:nvSpPr>
+        <p:spPr>
+          <a:xfrm>
+            <a:off x="8997696" y="3922776"/>
+            <a:ext cx="886968" cy="310896"/>
+          </a:xfrm>
+          <a:prstGeom prst="rect">
+            <a:avLst/>
+          </a:prstGeom>
+          <a:noFill/>
+          <a:ln/>
+        </p:spPr>
+        <p:txBody>
+          <a:bodyPr wrap="square" lIns="0" tIns="0" rIns="0" bIns="0" rtlCol="0" anchor="ctr">
+            <a:normAutofit/>
+          </a:bodyPr>
+          <a:lstStyle/>
+          <a:p>
+            <a:pPr algn="ctr" indent="0" marL="0">
+              <a:buNone/>
+            </a:pPr>
+            <a:r>
+              <a:rPr lang="en-US" sz="1500" b="1" dirty="0">
+                <a:solidFill>
+                  <a:srgbClr val="FFFFFF"/>
+                </a:solidFill>
+                <a:latin typeface="Aptos" pitchFamily="34" charset="0"/>
+                <a:ea typeface="Aptos" pitchFamily="34" charset="-122"/>
+                <a:cs typeface="Aptos" pitchFamily="34" charset="-120"/>
+              </a:rPr>
+              <a:t>Apply</a:t>
+            </a:r>
+            <a:endParaRPr lang="en-US" sz="1500" dirty="0"/>
+          </a:p>
+        </p:txBody>
+      </p:sp>
+      <p:sp>
+        <p:nvSpPr>
+          <p:cNvPr id="18" name="Text 16"/>
+          <p:cNvSpPr/>
+          <p:nvPr/>
+        </p:nvSpPr>
+        <p:spPr>
+          <a:xfrm>
+            <a:off x="9985248" y="3941064"/>
+            <a:ext cx="201168" cy="256032"/>
+          </a:xfrm>
+          <a:prstGeom prst="rect">
+            <a:avLst/>
+          </a:prstGeom>
+          <a:noFill/>
+          <a:ln/>
+        </p:spPr>
+        <p:txBody>
+          <a:bodyPr wrap="square" lIns="0" tIns="0" rIns="0" bIns="0" rtlCol="0" anchor="ctr"/>
+          <a:lstStyle/>
+          <a:p>
+            <a:pPr algn="ctr" indent="0" marL="0">
+              <a:buNone/>
+            </a:pPr>
+            <a:r>
+              <a:rPr lang="en-US" sz="1800" b="1" dirty="0">
+                <a:solidFill>
+                  <a:srgbClr val="0068B7"/>
+                </a:solidFill>
+                <a:latin typeface="Aptos" pitchFamily="34" charset="0"/>
+                <a:ea typeface="Aptos" pitchFamily="34" charset="-122"/>
+                <a:cs typeface="Aptos" pitchFamily="34" charset="-120"/>
+              </a:rPr>
+              <a:t>â†’</a:t>
+            </a:r>
+            <a:endParaRPr lang="en-US" sz="1800" dirty="0"/>
+          </a:p>
+        </p:txBody>
+      </p:sp>
+      <p:sp>
+        <p:nvSpPr>
+          <p:cNvPr id="19" name="Shape 17"/>
+          <p:cNvSpPr/>
+          <p:nvPr/>
+        </p:nvSpPr>
+        <p:spPr>
+          <a:xfrm>
+            <a:off x="10213848" y="3730752"/>
+            <a:ext cx="1033272" cy="749808"/>
+          </a:xfrm>
+          <a:prstGeom prst="roundRect">
+            <a:avLst>
+              <a:gd name="adj" fmla="val 14634"/>
+            </a:avLst>
+          </a:prstGeom>
+          <a:solidFill>
+            <a:srgbClr val="6A4CA3"/>
+          </a:solidFill>
+          <a:ln w="12700">
+            <a:solidFill>
+              <a:srgbClr val="6A4CA3"/>
+            </a:solidFill>
+            <a:prstDash val="solid"/>
+          </a:ln>
+        </p:spPr>
+      </p:sp>
+      <p:sp>
+        <p:nvSpPr>
+          <p:cNvPr id="20" name="Text 18"/>
+          <p:cNvSpPr/>
+          <p:nvPr/>
+        </p:nvSpPr>
+        <p:spPr>
+          <a:xfrm>
+            <a:off x="10287000" y="3922776"/>
+            <a:ext cx="886968" cy="310896"/>
+          </a:xfrm>
+          <a:prstGeom prst="rect">
+            <a:avLst/>
+          </a:prstGeom>
+          <a:noFill/>
+          <a:ln/>
+        </p:spPr>
+        <p:txBody>
+          <a:bodyPr wrap="square" lIns="0" tIns="0" rIns="0" bIns="0" rtlCol="0" anchor="ctr">
+            <a:normAutofit/>
+          </a:bodyPr>
+          <a:lstStyle/>
+          <a:p>
+            <a:pPr algn="ctr" indent="0" marL="0">
+              <a:buNone/>
+            </a:pPr>
+            <a:r>
+              <a:rPr lang="en-US" sz="1500" b="1" dirty="0">
+                <a:solidFill>
+                  <a:srgbClr val="FFFFFF"/>
+                </a:solidFill>
+                <a:latin typeface="Aptos" pitchFamily="34" charset="0"/>
+                <a:ea typeface="Aptos" pitchFamily="34" charset="-122"/>
+                <a:cs typeface="Aptos" pitchFamily="34" charset="-120"/>
+              </a:rPr>
+              <a:t>Document</a:t>
+            </a:r>
+            <a:endParaRPr lang="en-US" sz="1500" dirty="0"/>
           </a:p>
         </p:txBody>
       </p:sp>
@@ -9425,7 +9998,7 @@
                 <a:ea typeface="Aptos" pitchFamily="34" charset="-122"/>
                 <a:cs typeface="Aptos" pitchFamily="34" charset="-120"/>
               </a:rPr>
-              <a:t>© Paula Soper</a:t>
+              <a:t>Â© Paula Soper</a:t>
             </a:r>
             <a:endParaRPr lang="en-US" sz="800" dirty="0"/>
           </a:p>
@@ -9433,7 +10006,46 @@
       </p:sp>
       <p:sp>
         <p:nvSpPr>
-          <p:cNvPr id="7" name="Shape 5"/>
+          <p:cNvPr id="7" name="Text 5"/>
+          <p:cNvSpPr/>
+          <p:nvPr/>
+        </p:nvSpPr>
+        <p:spPr>
+          <a:xfrm>
+            <a:off x="11137392" y="6510528"/>
+            <a:ext cx="411480" cy="201168"/>
+          </a:xfrm>
+          <a:prstGeom prst="rect">
+            <a:avLst/>
+          </a:prstGeom>
+          <a:noFill/>
+          <a:ln/>
+        </p:spPr>
+        <p:txBody>
+          <a:bodyPr wrap="square" lIns="0" tIns="0" rIns="0" bIns="0" rtlCol="0" anchor="ctr"/>
+          <a:lstStyle/>
+          <a:p>
+            <a:pPr algn="r" indent="0" marL="0">
+              <a:buNone/>
+            </a:pPr>
+            <a:r>
+              <a:rPr lang="en-US" sz="900" dirty="0">
+                <a:solidFill>
+                  <a:srgbClr val="5F7181"/>
+                </a:solidFill>
+                <a:latin typeface="Aptos" pitchFamily="34" charset="0"/>
+                <a:ea typeface="Aptos" pitchFamily="34" charset="-122"/>
+                <a:cs typeface="Aptos" pitchFamily="34" charset="-120"/>
+              </a:rPr>
+              <a:t>20</a:t>
+            </a:r>
+            <a:endParaRPr lang="en-US" sz="900" dirty="0"/>
+          </a:p>
+        </p:txBody>
+      </p:sp>
+      <p:sp>
+        <p:nvSpPr>
+          <p:cNvPr id="8" name="Shape 6"/>
           <p:cNvSpPr/>
           <p:nvPr/>
         </p:nvSpPr>
@@ -9458,7 +10070,7 @@
       </p:sp>
       <p:sp>
         <p:nvSpPr>
-          <p:cNvPr id="8" name="Text 6"/>
+          <p:cNvPr id="9" name="Text 7"/>
           <p:cNvSpPr/>
           <p:nvPr/>
         </p:nvSpPr>
@@ -9497,14 +10109,14 @@
       </p:sp>
       <p:sp>
         <p:nvSpPr>
-          <p:cNvPr id="9" name="Text 7"/>
+          <p:cNvPr id="10" name="Text 8"/>
           <p:cNvSpPr/>
           <p:nvPr/>
         </p:nvSpPr>
         <p:spPr>
           <a:xfrm>
             <a:off x="640080" y="621792"/>
-            <a:ext cx="10881360" cy="566928"/>
+            <a:ext cx="10881360" cy="713232"/>
           </a:xfrm>
           <a:prstGeom prst="rect">
             <a:avLst/>
@@ -9522,7 +10134,7 @@
               <a:buNone/>
             </a:pPr>
             <a:r>
-              <a:rPr lang="en-US" sz="2700" b="1" dirty="0">
+              <a:rPr lang="en-US" sz="3400" b="1" dirty="0">
                 <a:solidFill>
                   <a:srgbClr val="003A63"/>
                 </a:solidFill>
@@ -9532,20 +10144,20 @@
               </a:rPr>
               <a:t>Knowledge Check</a:t>
             </a:r>
-            <a:endParaRPr lang="en-US" sz="2700" dirty="0"/>
-          </a:p>
-        </p:txBody>
-      </p:sp>
-      <p:sp>
-        <p:nvSpPr>
-          <p:cNvPr id="10" name="Text 8"/>
-          <p:cNvSpPr/>
-          <p:nvPr/>
-        </p:nvSpPr>
-        <p:spPr>
-          <a:xfrm>
-            <a:off x="868680" y="1417320"/>
-            <a:ext cx="6675120" cy="4434840"/>
+            <a:endParaRPr lang="en-US" sz="3400" dirty="0"/>
+          </a:p>
+        </p:txBody>
+      </p:sp>
+      <p:sp>
+        <p:nvSpPr>
+          <p:cNvPr id="11" name="Text 9"/>
+          <p:cNvSpPr/>
+          <p:nvPr/>
+        </p:nvSpPr>
+        <p:spPr>
+          <a:xfrm>
+            <a:off x="868680" y="1508760"/>
+            <a:ext cx="6537960" cy="4160520"/>
           </a:xfrm>
           <a:prstGeom prst="rect">
             <a:avLst/>
@@ -9560,7 +10172,7 @@
           <a:lstStyle/>
           <a:p>
             <a:r>
-              <a:rPr lang="en-US" sz="1700" dirty="0">
+              <a:rPr lang="en-US" sz="2100" dirty="0">
                 <a:solidFill>
                   <a:srgbClr val="17364A"/>
                 </a:solidFill>
@@ -9570,11 +10182,11 @@
               </a:rPr>
               <a:t>1. What is the best reason to address ai documentation, model cards, and system cards before deployment?</a:t>
             </a:r>
-            <a:endParaRPr lang="en-US" sz="1700" dirty="0"/>
-          </a:p>
-          <a:p>
-            <a:r>
-              <a:rPr lang="en-US" sz="1700" dirty="0">
+            <a:endParaRPr lang="en-US" sz="2100" dirty="0"/>
+          </a:p>
+          <a:p>
+            <a:r>
+              <a:rPr lang="en-US" sz="2100" dirty="0">
                 <a:solidFill>
                   <a:srgbClr val="17364A"/>
                 </a:solidFill>
@@ -9584,11 +10196,11 @@
               </a:rPr>
               <a:t>2. Which practice best supports responsible implementation?</a:t>
             </a:r>
-            <a:endParaRPr lang="en-US" sz="1700" dirty="0"/>
-          </a:p>
-          <a:p>
-            <a:r>
-              <a:rPr lang="en-US" sz="1700" dirty="0">
+            <a:endParaRPr lang="en-US" sz="2100" dirty="0"/>
+          </a:p>
+          <a:p>
+            <a:r>
+              <a:rPr lang="en-US" sz="2100" dirty="0">
                 <a:solidFill>
                   <a:srgbClr val="17364A"/>
                 </a:solidFill>
@@ -9598,27 +10210,13 @@
               </a:rPr>
               <a:t>3. Which statement best describes a common failure mode?</a:t>
             </a:r>
-            <a:endParaRPr lang="en-US" sz="1700" dirty="0"/>
-          </a:p>
-          <a:p>
-            <a:r>
-              <a:rPr lang="en-US" sz="1700" dirty="0">
-                <a:solidFill>
-                  <a:srgbClr val="17364A"/>
-                </a:solidFill>
-                <a:latin typeface="Aptos" pitchFamily="34" charset="0"/>
-                <a:ea typeface="Aptos" pitchFamily="34" charset="-122"/>
-                <a:cs typeface="Aptos" pitchFamily="34" charset="-120"/>
-              </a:rPr>
-              <a:t>4. What should be included in the practical artifact for this module?</a:t>
-            </a:r>
-            <a:endParaRPr lang="en-US" sz="1700" dirty="0"/>
-          </a:p>
-        </p:txBody>
-      </p:sp>
-      <p:sp>
-        <p:nvSpPr>
-          <p:cNvPr id="11" name="Shape 9"/>
+            <a:endParaRPr lang="en-US" sz="2100" dirty="0"/>
+          </a:p>
+        </p:txBody>
+      </p:sp>
+      <p:sp>
+        <p:nvSpPr>
+          <p:cNvPr id="12" name="Shape 10"/>
           <p:cNvSpPr/>
           <p:nvPr/>
         </p:nvSpPr>
@@ -9645,14 +10243,14 @@
       </p:sp>
       <p:sp>
         <p:nvSpPr>
-          <p:cNvPr id="12" name="Text 10"/>
+          <p:cNvPr id="13" name="Text 11"/>
           <p:cNvSpPr/>
           <p:nvPr/>
         </p:nvSpPr>
         <p:spPr>
           <a:xfrm>
             <a:off x="8074152" y="1563624"/>
-            <a:ext cx="2825496" cy="201168"/>
+            <a:ext cx="2825496" cy="256032"/>
           </a:xfrm>
           <a:prstGeom prst="rect">
             <a:avLst/>
@@ -9668,7 +10266,7 @@
               <a:buNone/>
             </a:pPr>
             <a:r>
-              <a:rPr lang="en-US" sz="950" b="1" dirty="0">
+              <a:rPr lang="en-US" sz="1300" b="1" dirty="0">
                 <a:solidFill>
                   <a:srgbClr val="0068B7"/>
                 </a:solidFill>
@@ -9678,20 +10276,20 @@
               </a:rPr>
               <a:t>Key idea</a:t>
             </a:r>
-            <a:endParaRPr lang="en-US" sz="950" dirty="0"/>
-          </a:p>
-        </p:txBody>
-      </p:sp>
-      <p:sp>
-        <p:nvSpPr>
-          <p:cNvPr id="13" name="Text 11"/>
-          <p:cNvSpPr/>
-          <p:nvPr/>
-        </p:nvSpPr>
-        <p:spPr>
-          <a:xfrm>
-            <a:off x="8074152" y="1856232"/>
-            <a:ext cx="2825496" cy="1261872"/>
+            <a:endParaRPr lang="en-US" sz="1300" dirty="0"/>
+          </a:p>
+        </p:txBody>
+      </p:sp>
+      <p:sp>
+        <p:nvSpPr>
+          <p:cNvPr id="14" name="Text 12"/>
+          <p:cNvSpPr/>
+          <p:nvPr/>
+        </p:nvSpPr>
+        <p:spPr>
+          <a:xfrm>
+            <a:off x="8074152" y="1920240"/>
+            <a:ext cx="2825496" cy="1188720"/>
           </a:xfrm>
           <a:prstGeom prst="rect">
             <a:avLst/>
@@ -9709,7 +10307,7 @@
               <a:buNone/>
             </a:pPr>
             <a:r>
-              <a:rPr lang="en-US" sz="1250" dirty="0">
+              <a:rPr lang="en-US" sz="1550" dirty="0">
                 <a:solidFill>
                   <a:srgbClr val="17364A"/>
                 </a:solidFill>
@@ -9719,13 +10317,13 @@
               </a:rPr>
               <a:t>1. What is the best reason to address ai documentation, model cards, and system cards before deployment?</a:t>
             </a:r>
-            <a:endParaRPr lang="en-US" sz="1250" dirty="0"/>
-          </a:p>
-        </p:txBody>
-      </p:sp>
-      <p:sp>
-        <p:nvSpPr>
-          <p:cNvPr id="14" name="Shape 12"/>
+            <a:endParaRPr lang="en-US" sz="1550" dirty="0"/>
+          </a:p>
+        </p:txBody>
+      </p:sp>
+      <p:sp>
+        <p:nvSpPr>
+          <p:cNvPr id="15" name="Shape 13"/>
           <p:cNvSpPr/>
           <p:nvPr/>
         </p:nvSpPr>
@@ -9752,14 +10350,14 @@
       </p:sp>
       <p:sp>
         <p:nvSpPr>
-          <p:cNvPr id="15" name="Text 13"/>
+          <p:cNvPr id="16" name="Text 14"/>
           <p:cNvSpPr/>
           <p:nvPr/>
         </p:nvSpPr>
         <p:spPr>
           <a:xfrm>
             <a:off x="8074152" y="3666744"/>
-            <a:ext cx="2825496" cy="201168"/>
+            <a:ext cx="2825496" cy="256032"/>
           </a:xfrm>
           <a:prstGeom prst="rect">
             <a:avLst/>
@@ -9775,7 +10373,7 @@
               <a:buNone/>
             </a:pPr>
             <a:r>
-              <a:rPr lang="en-US" sz="950" b="1" dirty="0">
+              <a:rPr lang="en-US" sz="1300" b="1" dirty="0">
                 <a:solidFill>
                   <a:srgbClr val="0068B7"/>
                 </a:solidFill>
@@ -9785,20 +10383,20 @@
               </a:rPr>
               <a:t>Use this for</a:t>
             </a:r>
-            <a:endParaRPr lang="en-US" sz="950" dirty="0"/>
-          </a:p>
-        </p:txBody>
-      </p:sp>
-      <p:sp>
-        <p:nvSpPr>
-          <p:cNvPr id="16" name="Text 14"/>
-          <p:cNvSpPr/>
-          <p:nvPr/>
-        </p:nvSpPr>
-        <p:spPr>
-          <a:xfrm>
-            <a:off x="8074152" y="3959352"/>
-            <a:ext cx="2825496" cy="1170432"/>
+            <a:endParaRPr lang="en-US" sz="1300" dirty="0"/>
+          </a:p>
+        </p:txBody>
+      </p:sp>
+      <p:sp>
+        <p:nvSpPr>
+          <p:cNvPr id="17" name="Text 15"/>
+          <p:cNvSpPr/>
+          <p:nvPr/>
+        </p:nvSpPr>
+        <p:spPr>
+          <a:xfrm>
+            <a:off x="8074152" y="4023360"/>
+            <a:ext cx="2825496" cy="1097280"/>
           </a:xfrm>
           <a:prstGeom prst="rect">
             <a:avLst/>
@@ -9816,7 +10414,7 @@
               <a:buNone/>
             </a:pPr>
             <a:r>
-              <a:rPr lang="en-US" sz="1250" dirty="0">
+              <a:rPr lang="en-US" sz="1550" dirty="0">
                 <a:solidFill>
                   <a:srgbClr val="17364A"/>
                 </a:solidFill>
@@ -9826,7 +10424,7 @@
               </a:rPr>
               <a:t>Connect the concept to public health decisions, safeguards, documentation, or implementation work.</a:t>
             </a:r>
-            <a:endParaRPr lang="en-US" sz="1250" dirty="0"/>
+            <a:endParaRPr lang="en-US" sz="1550" dirty="0"/>
           </a:p>
         </p:txBody>
       </p:sp>
@@ -10023,7 +10621,7 @@
                 <a:ea typeface="Aptos" pitchFamily="34" charset="-122"/>
                 <a:cs typeface="Aptos" pitchFamily="34" charset="-120"/>
               </a:rPr>
-              <a:t>© Paula Soper</a:t>
+              <a:t>Â© Paula Soper</a:t>
             </a:r>
             <a:endParaRPr lang="en-US" sz="800" dirty="0"/>
           </a:p>
@@ -10031,7 +10629,46 @@
       </p:sp>
       <p:sp>
         <p:nvSpPr>
-          <p:cNvPr id="7" name="Shape 5"/>
+          <p:cNvPr id="7" name="Text 5"/>
+          <p:cNvSpPr/>
+          <p:nvPr/>
+        </p:nvSpPr>
+        <p:spPr>
+          <a:xfrm>
+            <a:off x="11137392" y="6510528"/>
+            <a:ext cx="411480" cy="201168"/>
+          </a:xfrm>
+          <a:prstGeom prst="rect">
+            <a:avLst/>
+          </a:prstGeom>
+          <a:noFill/>
+          <a:ln/>
+        </p:spPr>
+        <p:txBody>
+          <a:bodyPr wrap="square" lIns="0" tIns="0" rIns="0" bIns="0" rtlCol="0" anchor="ctr"/>
+          <a:lstStyle/>
+          <a:p>
+            <a:pPr algn="r" indent="0" marL="0">
+              <a:buNone/>
+            </a:pPr>
+            <a:r>
+              <a:rPr lang="en-US" sz="900" dirty="0">
+                <a:solidFill>
+                  <a:srgbClr val="5F7181"/>
+                </a:solidFill>
+                <a:latin typeface="Aptos" pitchFamily="34" charset="0"/>
+                <a:ea typeface="Aptos" pitchFamily="34" charset="-122"/>
+                <a:cs typeface="Aptos" pitchFamily="34" charset="-120"/>
+              </a:rPr>
+              <a:t>21</a:t>
+            </a:r>
+            <a:endParaRPr lang="en-US" sz="900" dirty="0"/>
+          </a:p>
+        </p:txBody>
+      </p:sp>
+      <p:sp>
+        <p:nvSpPr>
+          <p:cNvPr id="8" name="Shape 6"/>
           <p:cNvSpPr/>
           <p:nvPr/>
         </p:nvSpPr>
@@ -10056,7 +10693,7 @@
       </p:sp>
       <p:sp>
         <p:nvSpPr>
-          <p:cNvPr id="8" name="Text 6"/>
+          <p:cNvPr id="9" name="Text 7"/>
           <p:cNvSpPr/>
           <p:nvPr/>
         </p:nvSpPr>
@@ -10095,14 +10732,14 @@
       </p:sp>
       <p:sp>
         <p:nvSpPr>
-          <p:cNvPr id="9" name="Text 7"/>
+          <p:cNvPr id="10" name="Text 8"/>
           <p:cNvSpPr/>
           <p:nvPr/>
         </p:nvSpPr>
         <p:spPr>
           <a:xfrm>
             <a:off x="640080" y="621792"/>
-            <a:ext cx="10881360" cy="566928"/>
+            <a:ext cx="10881360" cy="713232"/>
           </a:xfrm>
           <a:prstGeom prst="rect">
             <a:avLst/>
@@ -10120,7 +10757,7 @@
               <a:buNone/>
             </a:pPr>
             <a:r>
-              <a:rPr lang="en-US" sz="2700" b="1" dirty="0">
+              <a:rPr lang="en-US" sz="3400" b="1" dirty="0">
                 <a:solidFill>
                   <a:srgbClr val="003A63"/>
                 </a:solidFill>
@@ -10130,20 +10767,20 @@
               </a:rPr>
               <a:t>References and Resources</a:t>
             </a:r>
-            <a:endParaRPr lang="en-US" sz="2700" dirty="0"/>
-          </a:p>
-        </p:txBody>
-      </p:sp>
-      <p:sp>
-        <p:nvSpPr>
-          <p:cNvPr id="10" name="Text 8"/>
-          <p:cNvSpPr/>
-          <p:nvPr/>
-        </p:nvSpPr>
-        <p:spPr>
-          <a:xfrm>
-            <a:off x="868680" y="1417320"/>
-            <a:ext cx="6675120" cy="4434840"/>
+            <a:endParaRPr lang="en-US" sz="3400" dirty="0"/>
+          </a:p>
+        </p:txBody>
+      </p:sp>
+      <p:sp>
+        <p:nvSpPr>
+          <p:cNvPr id="11" name="Text 9"/>
+          <p:cNvSpPr/>
+          <p:nvPr/>
+        </p:nvSpPr>
+        <p:spPr>
+          <a:xfrm>
+            <a:off x="868680" y="1508760"/>
+            <a:ext cx="6537960" cy="4160520"/>
           </a:xfrm>
           <a:prstGeom prst="rect">
             <a:avLst/>
@@ -10158,7 +10795,7 @@
           <a:lstStyle/>
           <a:p>
             <a:r>
-              <a:rPr lang="en-US" sz="1700" dirty="0">
+              <a:rPr lang="en-US" sz="2100" dirty="0">
                 <a:solidFill>
                   <a:srgbClr val="17364A"/>
                 </a:solidFill>
@@ -10168,11 +10805,11 @@
               </a:rPr>
               <a:t>NIST AI Risk Management Framework: https://www.nist.gov/itl/ai-risk-management-framework</a:t>
             </a:r>
-            <a:endParaRPr lang="en-US" sz="1700" dirty="0"/>
-          </a:p>
-          <a:p>
-            <a:r>
-              <a:rPr lang="en-US" sz="1700" dirty="0">
+            <a:endParaRPr lang="en-US" sz="2100" dirty="0"/>
+          </a:p>
+          <a:p>
+            <a:r>
+              <a:rPr lang="en-US" sz="2100" dirty="0">
                 <a:solidFill>
                   <a:srgbClr val="17364A"/>
                 </a:solidFill>
@@ -10182,11 +10819,11 @@
               </a:rPr>
               <a:t>NIST Generative AI Profile:.</a:t>
             </a:r>
-            <a:endParaRPr lang="en-US" sz="1700" dirty="0"/>
-          </a:p>
-          <a:p>
-            <a:r>
-              <a:rPr lang="en-US" sz="1700" dirty="0">
+            <a:endParaRPr lang="en-US" sz="2100" dirty="0"/>
+          </a:p>
+          <a:p>
+            <a:r>
+              <a:rPr lang="en-US" sz="2100" dirty="0">
                 <a:solidFill>
                   <a:srgbClr val="17364A"/>
                 </a:solidFill>
@@ -10196,27 +10833,13 @@
               </a:rPr>
               <a:t>CDC Public Health Data Strategy and Data Modernization resources:.</a:t>
             </a:r>
-            <a:endParaRPr lang="en-US" sz="1700" dirty="0"/>
-          </a:p>
-          <a:p>
-            <a:r>
-              <a:rPr lang="en-US" sz="1700" dirty="0">
-                <a:solidFill>
-                  <a:srgbClr val="17364A"/>
-                </a:solidFill>
-                <a:latin typeface="Aptos" pitchFamily="34" charset="0"/>
-                <a:ea typeface="Aptos" pitchFamily="34" charset="-122"/>
-                <a:cs typeface="Aptos" pitchFamily="34" charset="-120"/>
-              </a:rPr>
-              <a:t>OWASP Top 10 for LLM Applications, when security or AI integrations are relevant</a:t>
-            </a:r>
-            <a:endParaRPr lang="en-US" sz="1700" dirty="0"/>
-          </a:p>
-        </p:txBody>
-      </p:sp>
-      <p:sp>
-        <p:nvSpPr>
-          <p:cNvPr id="11" name="Shape 9"/>
+            <a:endParaRPr lang="en-US" sz="2100" dirty="0"/>
+          </a:p>
+        </p:txBody>
+      </p:sp>
+      <p:sp>
+        <p:nvSpPr>
+          <p:cNvPr id="12" name="Shape 10"/>
           <p:cNvSpPr/>
           <p:nvPr/>
         </p:nvSpPr>
@@ -10243,14 +10866,14 @@
       </p:sp>
       <p:sp>
         <p:nvSpPr>
-          <p:cNvPr id="12" name="Text 10"/>
+          <p:cNvPr id="13" name="Text 11"/>
           <p:cNvSpPr/>
           <p:nvPr/>
         </p:nvSpPr>
         <p:spPr>
           <a:xfrm>
             <a:off x="8074152" y="1563624"/>
-            <a:ext cx="2825496" cy="201168"/>
+            <a:ext cx="2825496" cy="256032"/>
           </a:xfrm>
           <a:prstGeom prst="rect">
             <a:avLst/>
@@ -10266,7 +10889,7 @@
               <a:buNone/>
             </a:pPr>
             <a:r>
-              <a:rPr lang="en-US" sz="950" b="1" dirty="0">
+              <a:rPr lang="en-US" sz="1300" b="1" dirty="0">
                 <a:solidFill>
                   <a:srgbClr val="0068B7"/>
                 </a:solidFill>
@@ -10276,20 +10899,20 @@
               </a:rPr>
               <a:t>Key idea</a:t>
             </a:r>
-            <a:endParaRPr lang="en-US" sz="950" dirty="0"/>
-          </a:p>
-        </p:txBody>
-      </p:sp>
-      <p:sp>
-        <p:nvSpPr>
-          <p:cNvPr id="13" name="Text 11"/>
-          <p:cNvSpPr/>
-          <p:nvPr/>
-        </p:nvSpPr>
-        <p:spPr>
-          <a:xfrm>
-            <a:off x="8074152" y="1856232"/>
-            <a:ext cx="2825496" cy="1261872"/>
+            <a:endParaRPr lang="en-US" sz="1300" dirty="0"/>
+          </a:p>
+        </p:txBody>
+      </p:sp>
+      <p:sp>
+        <p:nvSpPr>
+          <p:cNvPr id="14" name="Text 12"/>
+          <p:cNvSpPr/>
+          <p:nvPr/>
+        </p:nvSpPr>
+        <p:spPr>
+          <a:xfrm>
+            <a:off x="8074152" y="1920240"/>
+            <a:ext cx="2825496" cy="1188720"/>
           </a:xfrm>
           <a:prstGeom prst="rect">
             <a:avLst/>
@@ -10307,7 +10930,7 @@
               <a:buNone/>
             </a:pPr>
             <a:r>
-              <a:rPr lang="en-US" sz="1250" dirty="0">
+              <a:rPr lang="en-US" sz="1550" dirty="0">
                 <a:solidFill>
                   <a:srgbClr val="17364A"/>
                 </a:solidFill>
@@ -10317,13 +10940,13 @@
               </a:rPr>
               <a:t>NIST AI Risk Management Framework: https://www.nist.gov/itl/ai-risk-management-framework</a:t>
             </a:r>
-            <a:endParaRPr lang="en-US" sz="1250" dirty="0"/>
-          </a:p>
-        </p:txBody>
-      </p:sp>
-      <p:sp>
-        <p:nvSpPr>
-          <p:cNvPr id="14" name="Shape 12"/>
+            <a:endParaRPr lang="en-US" sz="1550" dirty="0"/>
+          </a:p>
+        </p:txBody>
+      </p:sp>
+      <p:sp>
+        <p:nvSpPr>
+          <p:cNvPr id="15" name="Shape 13"/>
           <p:cNvSpPr/>
           <p:nvPr/>
         </p:nvSpPr>
@@ -10350,14 +10973,14 @@
       </p:sp>
       <p:sp>
         <p:nvSpPr>
-          <p:cNvPr id="15" name="Text 13"/>
+          <p:cNvPr id="16" name="Text 14"/>
           <p:cNvSpPr/>
           <p:nvPr/>
         </p:nvSpPr>
         <p:spPr>
           <a:xfrm>
             <a:off x="8074152" y="3666744"/>
-            <a:ext cx="2825496" cy="201168"/>
+            <a:ext cx="2825496" cy="256032"/>
           </a:xfrm>
           <a:prstGeom prst="rect">
             <a:avLst/>
@@ -10373,7 +10996,7 @@
               <a:buNone/>
             </a:pPr>
             <a:r>
-              <a:rPr lang="en-US" sz="950" b="1" dirty="0">
+              <a:rPr lang="en-US" sz="1300" b="1" dirty="0">
                 <a:solidFill>
                   <a:srgbClr val="0068B7"/>
                 </a:solidFill>
@@ -10383,20 +11006,20 @@
               </a:rPr>
               <a:t>Use this for</a:t>
             </a:r>
-            <a:endParaRPr lang="en-US" sz="950" dirty="0"/>
-          </a:p>
-        </p:txBody>
-      </p:sp>
-      <p:sp>
-        <p:nvSpPr>
-          <p:cNvPr id="16" name="Text 14"/>
-          <p:cNvSpPr/>
-          <p:nvPr/>
-        </p:nvSpPr>
-        <p:spPr>
-          <a:xfrm>
-            <a:off x="8074152" y="3959352"/>
-            <a:ext cx="2825496" cy="1170432"/>
+            <a:endParaRPr lang="en-US" sz="1300" dirty="0"/>
+          </a:p>
+        </p:txBody>
+      </p:sp>
+      <p:sp>
+        <p:nvSpPr>
+          <p:cNvPr id="17" name="Text 15"/>
+          <p:cNvSpPr/>
+          <p:nvPr/>
+        </p:nvSpPr>
+        <p:spPr>
+          <a:xfrm>
+            <a:off x="8074152" y="4023360"/>
+            <a:ext cx="2825496" cy="1097280"/>
           </a:xfrm>
           <a:prstGeom prst="rect">
             <a:avLst/>
@@ -10414,7 +11037,7 @@
               <a:buNone/>
             </a:pPr>
             <a:r>
-              <a:rPr lang="en-US" sz="1250" dirty="0">
+              <a:rPr lang="en-US" sz="1550" dirty="0">
                 <a:solidFill>
                   <a:srgbClr val="17364A"/>
                 </a:solidFill>
@@ -10424,7 +11047,7 @@
               </a:rPr>
               <a:t>Connect the concept to public health decisions, safeguards, documentation, or implementation work.</a:t>
             </a:r>
-            <a:endParaRPr lang="en-US" sz="1250" dirty="0"/>
+            <a:endParaRPr lang="en-US" sz="1550" dirty="0"/>
           </a:p>
         </p:txBody>
       </p:sp>
@@ -10621,7 +11244,7 @@
                 <a:ea typeface="Aptos" pitchFamily="34" charset="-122"/>
                 <a:cs typeface="Aptos" pitchFamily="34" charset="-120"/>
               </a:rPr>
-              <a:t>© Paula Soper</a:t>
+              <a:t>Â© Paula Soper</a:t>
             </a:r>
             <a:endParaRPr lang="en-US" sz="800" dirty="0"/>
           </a:p>
@@ -10635,8 +11258,47 @@
         </p:nvSpPr>
         <p:spPr>
           <a:xfrm>
+            <a:off x="11137392" y="6510528"/>
+            <a:ext cx="411480" cy="201168"/>
+          </a:xfrm>
+          <a:prstGeom prst="rect">
+            <a:avLst/>
+          </a:prstGeom>
+          <a:noFill/>
+          <a:ln/>
+        </p:spPr>
+        <p:txBody>
+          <a:bodyPr wrap="square" lIns="0" tIns="0" rIns="0" bIns="0" rtlCol="0" anchor="ctr"/>
+          <a:lstStyle/>
+          <a:p>
+            <a:pPr algn="r" indent="0" marL="0">
+              <a:buNone/>
+            </a:pPr>
+            <a:r>
+              <a:rPr lang="en-US" sz="900" dirty="0">
+                <a:solidFill>
+                  <a:srgbClr val="5F7181"/>
+                </a:solidFill>
+                <a:latin typeface="Aptos" pitchFamily="34" charset="0"/>
+                <a:ea typeface="Aptos" pitchFamily="34" charset="-122"/>
+                <a:cs typeface="Aptos" pitchFamily="34" charset="-120"/>
+              </a:rPr>
+              <a:t>3</a:t>
+            </a:r>
+            <a:endParaRPr lang="en-US" sz="900" dirty="0"/>
+          </a:p>
+        </p:txBody>
+      </p:sp>
+      <p:sp>
+        <p:nvSpPr>
+          <p:cNvPr id="8" name="Text 6"/>
+          <p:cNvSpPr/>
+          <p:nvPr/>
+        </p:nvSpPr>
+        <p:spPr>
+          <a:xfrm>
             <a:off x="640080" y="658368"/>
-            <a:ext cx="10881360" cy="566928"/>
+            <a:ext cx="10881360" cy="713232"/>
           </a:xfrm>
           <a:prstGeom prst="rect">
             <a:avLst/>
@@ -10654,7 +11316,7 @@
               <a:buNone/>
             </a:pPr>
             <a:r>
-              <a:rPr lang="en-US" sz="2700" b="1" dirty="0">
+              <a:rPr lang="en-US" sz="3400" b="1" dirty="0">
                 <a:solidFill>
                   <a:srgbClr val="003A63"/>
                 </a:solidFill>
@@ -10664,20 +11326,20 @@
               </a:rPr>
               <a:t>How this module connects to the playbook</a:t>
             </a:r>
-            <a:endParaRPr lang="en-US" sz="2700" dirty="0"/>
-          </a:p>
-        </p:txBody>
-      </p:sp>
-      <p:sp>
-        <p:nvSpPr>
-          <p:cNvPr id="8" name="Text 6"/>
-          <p:cNvSpPr/>
-          <p:nvPr/>
-        </p:nvSpPr>
-        <p:spPr>
-          <a:xfrm>
-            <a:off x="868680" y="1417320"/>
-            <a:ext cx="6903720" cy="4480560"/>
+            <a:endParaRPr lang="en-US" sz="3400" dirty="0"/>
+          </a:p>
+        </p:txBody>
+      </p:sp>
+      <p:sp>
+        <p:nvSpPr>
+          <p:cNvPr id="9" name="Text 7"/>
+          <p:cNvSpPr/>
+          <p:nvPr/>
+        </p:nvSpPr>
+        <p:spPr>
+          <a:xfrm>
+            <a:off x="868680" y="1508760"/>
+            <a:ext cx="6812280" cy="3977640"/>
           </a:xfrm>
           <a:prstGeom prst="rect">
             <a:avLst/>
@@ -10692,7 +11354,7 @@
           <a:lstStyle/>
           <a:p>
             <a:r>
-              <a:rPr lang="en-US" sz="1540" dirty="0">
+              <a:rPr lang="en-US" sz="1900" dirty="0">
                 <a:solidFill>
                   <a:srgbClr val="17364A"/>
                 </a:solidFill>
@@ -10700,13 +11362,13 @@
                 <a:ea typeface="Aptos" pitchFamily="34" charset="-122"/>
                 <a:cs typeface="Aptos" pitchFamily="34" charset="-120"/>
               </a:rPr>
-              <a:t>Play 11: Build and Deploy AI Solutions - This lesson informs Play 11 by helping learners connect the lesson topic to build and deploy.</a:t>
-            </a:r>
-            <a:endParaRPr lang="en-US" sz="1540" dirty="0"/>
-          </a:p>
-          <a:p>
-            <a:r>
-              <a:rPr lang="en-US" sz="1540" dirty="0">
+              <a:t>Play 11: Build and Deploy AI Solutions - This lesson informs Play 11 by helping learners connect the lesson.</a:t>
+            </a:r>
+            <a:endParaRPr lang="en-US" sz="1900" dirty="0"/>
+          </a:p>
+          <a:p>
+            <a:r>
+              <a:rPr lang="en-US" sz="1900" dirty="0">
                 <a:solidFill>
                   <a:srgbClr val="17364A"/>
                 </a:solidFill>
@@ -10714,13 +11376,13 @@
                 <a:ea typeface="Aptos" pitchFamily="34" charset="-122"/>
                 <a:cs typeface="Aptos" pitchFamily="34" charset="-120"/>
               </a:rPr>
-              <a:t>Play 2: Readiness Assessment - This lesson informs Play 2 by helping learners connect the lesson topic to readiness assessment work.</a:t>
-            </a:r>
-            <a:endParaRPr lang="en-US" sz="1540" dirty="0"/>
-          </a:p>
-          <a:p>
-            <a:r>
-              <a:rPr lang="en-US" sz="1540" dirty="0">
+              <a:t>Play 2: Readiness Assessment - This lesson informs Play 2 by helping learners connect the lesson topic to.</a:t>
+            </a:r>
+            <a:endParaRPr lang="en-US" sz="1900" dirty="0"/>
+          </a:p>
+          <a:p>
+            <a:r>
+              <a:rPr lang="en-US" sz="1900" dirty="0">
                 <a:solidFill>
                   <a:srgbClr val="17364A"/>
                 </a:solidFill>
@@ -10728,13 +11390,13 @@
                 <a:ea typeface="Aptos" pitchFamily="34" charset="-122"/>
                 <a:cs typeface="Aptos" pitchFamily="34" charset="-120"/>
               </a:rPr>
-              <a:t>Play 3: Establish AI Governance - This lesson informs Play 3 by helping learners connect the lesson topic to establish ai governance.</a:t>
-            </a:r>
-            <a:endParaRPr lang="en-US" sz="1540" dirty="0"/>
-          </a:p>
-          <a:p>
-            <a:r>
-              <a:rPr lang="en-US" sz="1540" dirty="0">
+              <a:t>Play 3: Establish AI Governance - This lesson informs Play 3 by helping learners connect the lesson topic to.</a:t>
+            </a:r>
+            <a:endParaRPr lang="en-US" sz="1900" dirty="0"/>
+          </a:p>
+          <a:p>
+            <a:r>
+              <a:rPr lang="en-US" sz="1900" dirty="0">
                 <a:solidFill>
                   <a:srgbClr val="17364A"/>
                 </a:solidFill>
@@ -10742,15 +11404,15 @@
                 <a:ea typeface="Aptos" pitchFamily="34" charset="-122"/>
                 <a:cs typeface="Aptos" pitchFamily="34" charset="-120"/>
               </a:rPr>
-              <a:t>Play 1: Vision &amp; Guardrails - This lesson informs Play 1 by helping learners connect the lesson topic to vision &amp; guardrails work in.</a:t>
-            </a:r>
-            <a:endParaRPr lang="en-US" sz="1540" dirty="0"/>
-          </a:p>
-        </p:txBody>
-      </p:sp>
-      <p:sp>
-        <p:nvSpPr>
-          <p:cNvPr id="9" name="Shape 7"/>
+              <a:t>Play 1: Vision &amp; Guardrails - This lesson informs Play 1 by helping learners connect the lesson topic to.</a:t>
+            </a:r>
+            <a:endParaRPr lang="en-US" sz="1900" dirty="0"/>
+          </a:p>
+        </p:txBody>
+      </p:sp>
+      <p:sp>
+        <p:nvSpPr>
+          <p:cNvPr id="10" name="Shape 8"/>
           <p:cNvSpPr/>
           <p:nvPr/>
         </p:nvSpPr>
@@ -10777,14 +11439,14 @@
       </p:sp>
       <p:sp>
         <p:nvSpPr>
-          <p:cNvPr id="10" name="Text 8"/>
+          <p:cNvPr id="11" name="Text 9"/>
           <p:cNvSpPr/>
           <p:nvPr/>
         </p:nvSpPr>
         <p:spPr>
           <a:xfrm>
             <a:off x="8211312" y="1563624"/>
-            <a:ext cx="2734056" cy="201168"/>
+            <a:ext cx="2734056" cy="256032"/>
           </a:xfrm>
           <a:prstGeom prst="rect">
             <a:avLst/>
@@ -10800,7 +11462,7 @@
               <a:buNone/>
             </a:pPr>
             <a:r>
-              <a:rPr lang="en-US" sz="950" b="1" dirty="0">
+              <a:rPr lang="en-US" sz="1300" b="1" dirty="0">
                 <a:solidFill>
                   <a:srgbClr val="0068B7"/>
                 </a:solidFill>
@@ -10810,20 +11472,20 @@
               </a:rPr>
               <a:t>Apply the lesson</a:t>
             </a:r>
-            <a:endParaRPr lang="en-US" sz="950" dirty="0"/>
-          </a:p>
-        </p:txBody>
-      </p:sp>
-      <p:sp>
-        <p:nvSpPr>
-          <p:cNvPr id="11" name="Text 9"/>
-          <p:cNvSpPr/>
-          <p:nvPr/>
-        </p:nvSpPr>
-        <p:spPr>
-          <a:xfrm>
-            <a:off x="8211312" y="1856232"/>
-            <a:ext cx="2734056" cy="1536192"/>
+            <a:endParaRPr lang="en-US" sz="1300" dirty="0"/>
+          </a:p>
+        </p:txBody>
+      </p:sp>
+      <p:sp>
+        <p:nvSpPr>
+          <p:cNvPr id="12" name="Text 10"/>
+          <p:cNvSpPr/>
+          <p:nvPr/>
+        </p:nvSpPr>
+        <p:spPr>
+          <a:xfrm>
+            <a:off x="8211312" y="1920240"/>
+            <a:ext cx="2734056" cy="1463040"/>
           </a:xfrm>
           <a:prstGeom prst="rect">
             <a:avLst/>
@@ -10841,7 +11503,7 @@
               <a:buNone/>
             </a:pPr>
             <a:r>
-              <a:rPr lang="en-US" sz="1250" dirty="0">
+              <a:rPr lang="en-US" sz="1550" dirty="0">
                 <a:solidFill>
                   <a:srgbClr val="17364A"/>
                 </a:solidFill>
@@ -10851,32 +11513,32 @@
               </a:rPr>
               <a:t>Use the related plays to identify decisions, participants, timing, approvals, and documentation needed for responsible implementation.</a:t>
             </a:r>
-            <a:endParaRPr lang="en-US" sz="1250" dirty="0"/>
-          </a:p>
-        </p:txBody>
-      </p:sp>
-      <p:sp>
-        <p:nvSpPr>
-          <p:cNvPr id="12" name="Shape 10"/>
-          <p:cNvSpPr/>
-          <p:nvPr/>
-        </p:nvSpPr>
-        <p:spPr>
-          <a:xfrm>
-            <a:off x="8046720" y="3794760"/>
-            <a:ext cx="3063240" cy="1508760"/>
+            <a:endParaRPr lang="en-US" sz="1550" dirty="0"/>
+          </a:p>
+        </p:txBody>
+      </p:sp>
+      <p:sp>
+        <p:nvSpPr>
+          <p:cNvPr id="13" name="Shape 11"/>
+          <p:cNvSpPr/>
+          <p:nvPr/>
+        </p:nvSpPr>
+        <p:spPr>
+          <a:xfrm>
+            <a:off x="7818120" y="3977640"/>
+            <a:ext cx="972312" cy="749808"/>
           </a:xfrm>
           <a:prstGeom prst="roundRect">
             <a:avLst>
-              <a:gd name="adj" fmla="val 7273"/>
+              <a:gd name="adj" fmla="val 14634"/>
             </a:avLst>
           </a:prstGeom>
           <a:solidFill>
-            <a:srgbClr val="FFF4D9"/>
+            <a:srgbClr val="0068B7"/>
           </a:solidFill>
           <a:ln w="12700">
             <a:solidFill>
-              <a:srgbClr val="B9D7E6"/>
+              <a:srgbClr val="0068B7"/>
             </a:solidFill>
             <a:prstDash val="solid"/>
           </a:ln>
@@ -10884,81 +11546,256 @@
       </p:sp>
       <p:sp>
         <p:nvSpPr>
-          <p:cNvPr id="13" name="Text 11"/>
-          <p:cNvSpPr/>
-          <p:nvPr/>
-        </p:nvSpPr>
-        <p:spPr>
-          <a:xfrm>
-            <a:off x="8211312" y="3941064"/>
-            <a:ext cx="2734056" cy="201168"/>
-          </a:xfrm>
-          <a:prstGeom prst="rect">
-            <a:avLst/>
-          </a:prstGeom>
-          <a:noFill/>
-          <a:ln/>
-        </p:spPr>
-        <p:txBody>
-          <a:bodyPr wrap="square" lIns="0" tIns="0" rIns="0" bIns="0" rtlCol="0" anchor="ctr"/>
-          <a:lstStyle/>
-          <a:p>
-            <a:pPr indent="0" marL="0">
-              <a:buNone/>
-            </a:pPr>
-            <a:r>
-              <a:rPr lang="en-US" sz="950" b="1" dirty="0">
-                <a:solidFill>
-                  <a:srgbClr val="0068B7"/>
-                </a:solidFill>
-                <a:latin typeface="Aptos" pitchFamily="34" charset="0"/>
-                <a:ea typeface="Aptos" pitchFamily="34" charset="-122"/>
-                <a:cs typeface="Aptos" pitchFamily="34" charset="-120"/>
-              </a:rPr>
-              <a:t>Keep in mind</a:t>
-            </a:r>
-            <a:endParaRPr lang="en-US" sz="950" dirty="0"/>
-          </a:p>
-        </p:txBody>
-      </p:sp>
-      <p:sp>
-        <p:nvSpPr>
           <p:cNvPr id="14" name="Text 12"/>
           <p:cNvSpPr/>
           <p:nvPr/>
         </p:nvSpPr>
         <p:spPr>
           <a:xfrm>
-            <a:off x="8211312" y="4233672"/>
-            <a:ext cx="2734056" cy="941832"/>
-          </a:xfrm>
-          <a:prstGeom prst="rect">
-            <a:avLst/>
-          </a:prstGeom>
-          <a:noFill/>
-          <a:ln/>
-        </p:spPr>
-        <p:txBody>
-          <a:bodyPr wrap="square" lIns="0" tIns="0" rIns="0" bIns="0" rtlCol="0" anchor="t">
+            <a:off x="7891272" y="4169664"/>
+            <a:ext cx="826008" cy="310896"/>
+          </a:xfrm>
+          <a:prstGeom prst="rect">
+            <a:avLst/>
+          </a:prstGeom>
+          <a:noFill/>
+          <a:ln/>
+        </p:spPr>
+        <p:txBody>
+          <a:bodyPr wrap="square" lIns="0" tIns="0" rIns="0" bIns="0" rtlCol="0" anchor="ctr">
             <a:normAutofit/>
           </a:bodyPr>
           <a:lstStyle/>
           <a:p>
-            <a:pPr indent="0" marL="0">
-              <a:buNone/>
-            </a:pPr>
-            <a:r>
-              <a:rPr lang="en-US" sz="1250" dirty="0">
-                <a:solidFill>
-                  <a:srgbClr val="17364A"/>
-                </a:solidFill>
-                <a:latin typeface="Aptos" pitchFamily="34" charset="0"/>
-                <a:ea typeface="Aptos" pitchFamily="34" charset="-122"/>
-                <a:cs typeface="Aptos" pitchFamily="34" charset="-120"/>
-              </a:rPr>
-              <a:t>The playbook connection helps turn training into agency work, not just individual knowledge.</a:t>
-            </a:r>
-            <a:endParaRPr lang="en-US" sz="1250" dirty="0"/>
+            <a:pPr algn="ctr" indent="0" marL="0">
+              <a:buNone/>
+            </a:pPr>
+            <a:r>
+              <a:rPr lang="en-US" sz="1500" b="1" dirty="0">
+                <a:solidFill>
+                  <a:srgbClr val="FFFFFF"/>
+                </a:solidFill>
+                <a:latin typeface="Aptos" pitchFamily="34" charset="0"/>
+                <a:ea typeface="Aptos" pitchFamily="34" charset="-122"/>
+                <a:cs typeface="Aptos" pitchFamily="34" charset="-120"/>
+              </a:rPr>
+              <a:t>Lesson</a:t>
+            </a:r>
+            <a:endParaRPr lang="en-US" sz="1500" dirty="0"/>
+          </a:p>
+        </p:txBody>
+      </p:sp>
+      <p:sp>
+        <p:nvSpPr>
+          <p:cNvPr id="15" name="Text 13"/>
+          <p:cNvSpPr/>
+          <p:nvPr/>
+        </p:nvSpPr>
+        <p:spPr>
+          <a:xfrm>
+            <a:off x="8817864" y="4187952"/>
+            <a:ext cx="201168" cy="256032"/>
+          </a:xfrm>
+          <a:prstGeom prst="rect">
+            <a:avLst/>
+          </a:prstGeom>
+          <a:noFill/>
+          <a:ln/>
+        </p:spPr>
+        <p:txBody>
+          <a:bodyPr wrap="square" lIns="0" tIns="0" rIns="0" bIns="0" rtlCol="0" anchor="ctr"/>
+          <a:lstStyle/>
+          <a:p>
+            <a:pPr algn="ctr" indent="0" marL="0">
+              <a:buNone/>
+            </a:pPr>
+            <a:r>
+              <a:rPr lang="en-US" sz="1800" b="1" dirty="0">
+                <a:solidFill>
+                  <a:srgbClr val="0068B7"/>
+                </a:solidFill>
+                <a:latin typeface="Aptos" pitchFamily="34" charset="0"/>
+                <a:ea typeface="Aptos" pitchFamily="34" charset="-122"/>
+                <a:cs typeface="Aptos" pitchFamily="34" charset="-120"/>
+              </a:rPr>
+              <a:t>â†’</a:t>
+            </a:r>
+            <a:endParaRPr lang="en-US" sz="1800" dirty="0"/>
+          </a:p>
+        </p:txBody>
+      </p:sp>
+      <p:sp>
+        <p:nvSpPr>
+          <p:cNvPr id="16" name="Shape 14"/>
+          <p:cNvSpPr/>
+          <p:nvPr/>
+        </p:nvSpPr>
+        <p:spPr>
+          <a:xfrm>
+            <a:off x="9046464" y="3977640"/>
+            <a:ext cx="972312" cy="749808"/>
+          </a:xfrm>
+          <a:prstGeom prst="roundRect">
+            <a:avLst>
+              <a:gd name="adj" fmla="val 14634"/>
+            </a:avLst>
+          </a:prstGeom>
+          <a:solidFill>
+            <a:srgbClr val="2F8A28"/>
+          </a:solidFill>
+          <a:ln w="12700">
+            <a:solidFill>
+              <a:srgbClr val="2F8A28"/>
+            </a:solidFill>
+            <a:prstDash val="solid"/>
+          </a:ln>
+        </p:spPr>
+      </p:sp>
+      <p:sp>
+        <p:nvSpPr>
+          <p:cNvPr id="17" name="Text 15"/>
+          <p:cNvSpPr/>
+          <p:nvPr/>
+        </p:nvSpPr>
+        <p:spPr>
+          <a:xfrm>
+            <a:off x="9119616" y="4169664"/>
+            <a:ext cx="826008" cy="310896"/>
+          </a:xfrm>
+          <a:prstGeom prst="rect">
+            <a:avLst/>
+          </a:prstGeom>
+          <a:noFill/>
+          <a:ln/>
+        </p:spPr>
+        <p:txBody>
+          <a:bodyPr wrap="square" lIns="0" tIns="0" rIns="0" bIns="0" rtlCol="0" anchor="ctr">
+            <a:normAutofit/>
+          </a:bodyPr>
+          <a:lstStyle/>
+          <a:p>
+            <a:pPr algn="ctr" indent="0" marL="0">
+              <a:buNone/>
+            </a:pPr>
+            <a:r>
+              <a:rPr lang="en-US" sz="1500" b="1" dirty="0">
+                <a:solidFill>
+                  <a:srgbClr val="FFFFFF"/>
+                </a:solidFill>
+                <a:latin typeface="Aptos" pitchFamily="34" charset="0"/>
+                <a:ea typeface="Aptos" pitchFamily="34" charset="-122"/>
+                <a:cs typeface="Aptos" pitchFamily="34" charset="-120"/>
+              </a:rPr>
+              <a:t>Plays</a:t>
+            </a:r>
+            <a:endParaRPr lang="en-US" sz="1500" dirty="0"/>
+          </a:p>
+        </p:txBody>
+      </p:sp>
+      <p:sp>
+        <p:nvSpPr>
+          <p:cNvPr id="18" name="Text 16"/>
+          <p:cNvSpPr/>
+          <p:nvPr/>
+        </p:nvSpPr>
+        <p:spPr>
+          <a:xfrm>
+            <a:off x="10046208" y="4187952"/>
+            <a:ext cx="201168" cy="256032"/>
+          </a:xfrm>
+          <a:prstGeom prst="rect">
+            <a:avLst/>
+          </a:prstGeom>
+          <a:noFill/>
+          <a:ln/>
+        </p:spPr>
+        <p:txBody>
+          <a:bodyPr wrap="square" lIns="0" tIns="0" rIns="0" bIns="0" rtlCol="0" anchor="ctr"/>
+          <a:lstStyle/>
+          <a:p>
+            <a:pPr algn="ctr" indent="0" marL="0">
+              <a:buNone/>
+            </a:pPr>
+            <a:r>
+              <a:rPr lang="en-US" sz="1800" b="1" dirty="0">
+                <a:solidFill>
+                  <a:srgbClr val="0068B7"/>
+                </a:solidFill>
+                <a:latin typeface="Aptos" pitchFamily="34" charset="0"/>
+                <a:ea typeface="Aptos" pitchFamily="34" charset="-122"/>
+                <a:cs typeface="Aptos" pitchFamily="34" charset="-120"/>
+              </a:rPr>
+              <a:t>â†’</a:t>
+            </a:r>
+            <a:endParaRPr lang="en-US" sz="1800" dirty="0"/>
+          </a:p>
+        </p:txBody>
+      </p:sp>
+      <p:sp>
+        <p:nvSpPr>
+          <p:cNvPr id="19" name="Shape 17"/>
+          <p:cNvSpPr/>
+          <p:nvPr/>
+        </p:nvSpPr>
+        <p:spPr>
+          <a:xfrm>
+            <a:off x="10274808" y="3977640"/>
+            <a:ext cx="972312" cy="749808"/>
+          </a:xfrm>
+          <a:prstGeom prst="roundRect">
+            <a:avLst>
+              <a:gd name="adj" fmla="val 14634"/>
+            </a:avLst>
+          </a:prstGeom>
+          <a:solidFill>
+            <a:srgbClr val="6A4CA3"/>
+          </a:solidFill>
+          <a:ln w="12700">
+            <a:solidFill>
+              <a:srgbClr val="6A4CA3"/>
+            </a:solidFill>
+            <a:prstDash val="solid"/>
+          </a:ln>
+        </p:spPr>
+      </p:sp>
+      <p:sp>
+        <p:nvSpPr>
+          <p:cNvPr id="20" name="Text 18"/>
+          <p:cNvSpPr/>
+          <p:nvPr/>
+        </p:nvSpPr>
+        <p:spPr>
+          <a:xfrm>
+            <a:off x="10347960" y="4169664"/>
+            <a:ext cx="826008" cy="310896"/>
+          </a:xfrm>
+          <a:prstGeom prst="rect">
+            <a:avLst/>
+          </a:prstGeom>
+          <a:noFill/>
+          <a:ln/>
+        </p:spPr>
+        <p:txBody>
+          <a:bodyPr wrap="square" lIns="0" tIns="0" rIns="0" bIns="0" rtlCol="0" anchor="ctr">
+            <a:normAutofit/>
+          </a:bodyPr>
+          <a:lstStyle/>
+          <a:p>
+            <a:pPr algn="ctr" indent="0" marL="0">
+              <a:buNone/>
+            </a:pPr>
+            <a:r>
+              <a:rPr lang="en-US" sz="1500" b="1" dirty="0">
+                <a:solidFill>
+                  <a:srgbClr val="FFFFFF"/>
+                </a:solidFill>
+                <a:latin typeface="Aptos" pitchFamily="34" charset="0"/>
+                <a:ea typeface="Aptos" pitchFamily="34" charset="-122"/>
+                <a:cs typeface="Aptos" pitchFamily="34" charset="-120"/>
+              </a:rPr>
+              <a:t>Action</a:t>
+            </a:r>
+            <a:endParaRPr lang="en-US" sz="1500" dirty="0"/>
           </a:p>
         </p:txBody>
       </p:sp>
@@ -11155,7 +11992,7 @@
                 <a:ea typeface="Aptos" pitchFamily="34" charset="-122"/>
                 <a:cs typeface="Aptos" pitchFamily="34" charset="-120"/>
               </a:rPr>
-              <a:t>© Paula Soper</a:t>
+              <a:t>Â© Paula Soper</a:t>
             </a:r>
             <a:endParaRPr lang="en-US" sz="800" dirty="0"/>
           </a:p>
@@ -11169,8 +12006,47 @@
         </p:nvSpPr>
         <p:spPr>
           <a:xfrm>
+            <a:off x="11137392" y="6510528"/>
+            <a:ext cx="411480" cy="201168"/>
+          </a:xfrm>
+          <a:prstGeom prst="rect">
+            <a:avLst/>
+          </a:prstGeom>
+          <a:noFill/>
+          <a:ln/>
+        </p:spPr>
+        <p:txBody>
+          <a:bodyPr wrap="square" lIns="0" tIns="0" rIns="0" bIns="0" rtlCol="0" anchor="ctr"/>
+          <a:lstStyle/>
+          <a:p>
+            <a:pPr algn="r" indent="0" marL="0">
+              <a:buNone/>
+            </a:pPr>
+            <a:r>
+              <a:rPr lang="en-US" sz="900" dirty="0">
+                <a:solidFill>
+                  <a:srgbClr val="5F7181"/>
+                </a:solidFill>
+                <a:latin typeface="Aptos" pitchFamily="34" charset="0"/>
+                <a:ea typeface="Aptos" pitchFamily="34" charset="-122"/>
+                <a:cs typeface="Aptos" pitchFamily="34" charset="-120"/>
+              </a:rPr>
+              <a:t>4</a:t>
+            </a:r>
+            <a:endParaRPr lang="en-US" sz="900" dirty="0"/>
+          </a:p>
+        </p:txBody>
+      </p:sp>
+      <p:sp>
+        <p:nvSpPr>
+          <p:cNvPr id="8" name="Text 6"/>
+          <p:cNvSpPr/>
+          <p:nvPr/>
+        </p:nvSpPr>
+        <p:spPr>
+          <a:xfrm>
             <a:off x="640080" y="658368"/>
-            <a:ext cx="10881360" cy="566928"/>
+            <a:ext cx="10881360" cy="713232"/>
           </a:xfrm>
           <a:prstGeom prst="rect">
             <a:avLst/>
@@ -11188,7 +12064,7 @@
               <a:buNone/>
             </a:pPr>
             <a:r>
-              <a:rPr lang="en-US" sz="2700" b="1" dirty="0">
+              <a:rPr lang="en-US" sz="3400" b="1" dirty="0">
                 <a:solidFill>
                   <a:srgbClr val="003A63"/>
                 </a:solidFill>
@@ -11198,20 +12074,20 @@
               </a:rPr>
               <a:t>Related toolkit resources</a:t>
             </a:r>
-            <a:endParaRPr lang="en-US" sz="2700" dirty="0"/>
-          </a:p>
-        </p:txBody>
-      </p:sp>
-      <p:sp>
-        <p:nvSpPr>
-          <p:cNvPr id="8" name="Text 6"/>
-          <p:cNvSpPr/>
-          <p:nvPr/>
-        </p:nvSpPr>
-        <p:spPr>
-          <a:xfrm>
-            <a:off x="868680" y="1417320"/>
-            <a:ext cx="6903720" cy="4480560"/>
+            <a:endParaRPr lang="en-US" sz="3400" dirty="0"/>
+          </a:p>
+        </p:txBody>
+      </p:sp>
+      <p:sp>
+        <p:nvSpPr>
+          <p:cNvPr id="9" name="Text 7"/>
+          <p:cNvSpPr/>
+          <p:nvPr/>
+        </p:nvSpPr>
+        <p:spPr>
+          <a:xfrm>
+            <a:off x="868680" y="1508760"/>
+            <a:ext cx="6812280" cy="3977640"/>
           </a:xfrm>
           <a:prstGeom prst="rect">
             <a:avLst/>
@@ -11226,7 +12102,7 @@
           <a:lstStyle/>
           <a:p>
             <a:r>
-              <a:rPr lang="en-US" sz="1460" dirty="0">
+              <a:rPr lang="en-US" sz="1850" dirty="0">
                 <a:solidFill>
                   <a:srgbClr val="17364A"/>
                 </a:solidFill>
@@ -11234,13 +12110,13 @@
                 <a:ea typeface="Aptos" pitchFamily="34" charset="-122"/>
                 <a:cs typeface="Aptos" pitchFamily="34" charset="-120"/>
               </a:rPr>
-              <a:t>Tool 4: AI Policy Landscape Scan (Worksheet) - Use AI Policy Landscape Scan to translate this lesson into a documented public health.</a:t>
-            </a:r>
-            <a:endParaRPr lang="en-US" sz="1460" dirty="0"/>
-          </a:p>
-          <a:p>
-            <a:r>
-              <a:rPr lang="en-US" sz="1460" dirty="0">
+              <a:t>Tool 4: AI Policy Landscape Scan (Worksheet) - Use AI Policy Landscape Scan to translate this lesson into a.</a:t>
+            </a:r>
+            <a:endParaRPr lang="en-US" sz="1850" dirty="0"/>
+          </a:p>
+          <a:p>
+            <a:r>
+              <a:rPr lang="en-US" sz="1850" dirty="0">
                 <a:solidFill>
                   <a:srgbClr val="17364A"/>
                 </a:solidFill>
@@ -11248,13 +12124,13 @@
                 <a:ea typeface="Aptos" pitchFamily="34" charset="-122"/>
                 <a:cs typeface="Aptos" pitchFamily="34" charset="-120"/>
               </a:rPr>
-              <a:t>Tool 5: AI Environmental and Resource Impact Review (Checklist) - Use this tool to complete or strengthen the practical exercise for.</a:t>
-            </a:r>
-            <a:endParaRPr lang="en-US" sz="1460" dirty="0"/>
-          </a:p>
-          <a:p>
-            <a:r>
-              <a:rPr lang="en-US" sz="1460" dirty="0">
+              <a:t>Tool 5: AI Environmental and Resource Impact Review (Checklist) - Use this tool to complete or strengthen.</a:t>
+            </a:r>
+            <a:endParaRPr lang="en-US" sz="1850" dirty="0"/>
+          </a:p>
+          <a:p>
+            <a:r>
+              <a:rPr lang="en-US" sz="1850" dirty="0">
                 <a:solidFill>
                   <a:srgbClr val="17364A"/>
                 </a:solidFill>
@@ -11262,13 +12138,13 @@
                 <a:ea typeface="Aptos" pitchFamily="34" charset="-122"/>
                 <a:cs typeface="Aptos" pitchFamily="34" charset="-120"/>
               </a:rPr>
-              <a:t>Tool 6: Human-Centered AI Decision Rule Checklist (Checklist) - Use this tool to complete or strengthen the practical exercise for.</a:t>
-            </a:r>
-            <a:endParaRPr lang="en-US" sz="1460" dirty="0"/>
-          </a:p>
-          <a:p>
-            <a:r>
-              <a:rPr lang="en-US" sz="1460" dirty="0">
+              <a:t>Tool 6: Human-Centered AI Decision Rule Checklist (Checklist) - Use this tool to complete or strengthen the.</a:t>
+            </a:r>
+            <a:endParaRPr lang="en-US" sz="1850" dirty="0"/>
+          </a:p>
+          <a:p>
+            <a:r>
+              <a:rPr lang="en-US" sz="1850" dirty="0">
                 <a:solidFill>
                   <a:srgbClr val="17364A"/>
                 </a:solidFill>
@@ -11276,29 +12152,15 @@
                 <a:ea typeface="Aptos" pitchFamily="34" charset="-122"/>
                 <a:cs typeface="Aptos" pitchFamily="34" charset="-120"/>
               </a:rPr>
-              <a:t>Tool 8: AI Project Charter (Planning) - Use AI Project Charter to translate this lesson into a documented public health AI planning,.</a:t>
-            </a:r>
-            <a:endParaRPr lang="en-US" sz="1460" dirty="0"/>
-          </a:p>
-          <a:p>
-            <a:r>
-              <a:rPr lang="en-US" sz="1460" dirty="0">
-                <a:solidFill>
-                  <a:srgbClr val="17364A"/>
-                </a:solidFill>
-                <a:latin typeface="Aptos" pitchFamily="34" charset="0"/>
-                <a:ea typeface="Aptos" pitchFamily="34" charset="-122"/>
-                <a:cs typeface="Aptos" pitchFamily="34" charset="-120"/>
-              </a:rPr>
-              <a:t>Tool 9: Data Quality Assessment Checklist (Checklist) - Use this tool to complete or strengthen the practical exercise for the module.</a:t>
-            </a:r>
-            <a:endParaRPr lang="en-US" sz="1460" dirty="0"/>
-          </a:p>
-        </p:txBody>
-      </p:sp>
-      <p:sp>
-        <p:nvSpPr>
-          <p:cNvPr id="9" name="Shape 7"/>
+              <a:t>Tool 8: AI Project Charter (Planning) - Use AI Project Charter to translate this lesson into a documented.</a:t>
+            </a:r>
+            <a:endParaRPr lang="en-US" sz="1850" dirty="0"/>
+          </a:p>
+        </p:txBody>
+      </p:sp>
+      <p:sp>
+        <p:nvSpPr>
+          <p:cNvPr id="10" name="Shape 8"/>
           <p:cNvSpPr/>
           <p:nvPr/>
         </p:nvSpPr>
@@ -11325,14 +12187,14 @@
       </p:sp>
       <p:sp>
         <p:nvSpPr>
-          <p:cNvPr id="10" name="Text 8"/>
+          <p:cNvPr id="11" name="Text 9"/>
           <p:cNvSpPr/>
           <p:nvPr/>
         </p:nvSpPr>
         <p:spPr>
           <a:xfrm>
             <a:off x="8211312" y="1563624"/>
-            <a:ext cx="2734056" cy="201168"/>
+            <a:ext cx="2734056" cy="256032"/>
           </a:xfrm>
           <a:prstGeom prst="rect">
             <a:avLst/>
@@ -11348,7 +12210,7 @@
               <a:buNone/>
             </a:pPr>
             <a:r>
-              <a:rPr lang="en-US" sz="950" b="1" dirty="0">
+              <a:rPr lang="en-US" sz="1300" b="1" dirty="0">
                 <a:solidFill>
                   <a:srgbClr val="0068B7"/>
                 </a:solidFill>
@@ -11358,20 +12220,20 @@
               </a:rPr>
               <a:t>Use the tools</a:t>
             </a:r>
-            <a:endParaRPr lang="en-US" sz="950" dirty="0"/>
-          </a:p>
-        </p:txBody>
-      </p:sp>
-      <p:sp>
-        <p:nvSpPr>
-          <p:cNvPr id="11" name="Text 9"/>
-          <p:cNvSpPr/>
-          <p:nvPr/>
-        </p:nvSpPr>
-        <p:spPr>
-          <a:xfrm>
-            <a:off x="8211312" y="1856232"/>
-            <a:ext cx="2734056" cy="1536192"/>
+            <a:endParaRPr lang="en-US" sz="1300" dirty="0"/>
+          </a:p>
+        </p:txBody>
+      </p:sp>
+      <p:sp>
+        <p:nvSpPr>
+          <p:cNvPr id="12" name="Text 10"/>
+          <p:cNvSpPr/>
+          <p:nvPr/>
+        </p:nvSpPr>
+        <p:spPr>
+          <a:xfrm>
+            <a:off x="8211312" y="1920240"/>
+            <a:ext cx="2734056" cy="1463040"/>
           </a:xfrm>
           <a:prstGeom prst="rect">
             <a:avLst/>
@@ -11389,7 +12251,7 @@
               <a:buNone/>
             </a:pPr>
             <a:r>
-              <a:rPr lang="en-US" sz="1250" dirty="0">
+              <a:rPr lang="en-US" sz="1550" dirty="0">
                 <a:solidFill>
                   <a:srgbClr val="17364A"/>
                 </a:solidFill>
@@ -11399,32 +12261,32 @@
               </a:rPr>
               <a:t>Use linked tools when your department needs a structured worksheet, template, checklist, review process, or documentation artifact.</a:t>
             </a:r>
-            <a:endParaRPr lang="en-US" sz="1250" dirty="0"/>
-          </a:p>
-        </p:txBody>
-      </p:sp>
-      <p:sp>
-        <p:nvSpPr>
-          <p:cNvPr id="12" name="Shape 10"/>
-          <p:cNvSpPr/>
-          <p:nvPr/>
-        </p:nvSpPr>
-        <p:spPr>
-          <a:xfrm>
-            <a:off x="8046720" y="3794760"/>
-            <a:ext cx="3063240" cy="1508760"/>
+            <a:endParaRPr lang="en-US" sz="1550" dirty="0"/>
+          </a:p>
+        </p:txBody>
+      </p:sp>
+      <p:sp>
+        <p:nvSpPr>
+          <p:cNvPr id="13" name="Shape 11"/>
+          <p:cNvSpPr/>
+          <p:nvPr/>
+        </p:nvSpPr>
+        <p:spPr>
+          <a:xfrm>
+            <a:off x="7818120" y="3977640"/>
+            <a:ext cx="972312" cy="749808"/>
           </a:xfrm>
           <a:prstGeom prst="roundRect">
             <a:avLst>
-              <a:gd name="adj" fmla="val 7273"/>
+              <a:gd name="adj" fmla="val 14634"/>
             </a:avLst>
           </a:prstGeom>
           <a:solidFill>
-            <a:srgbClr val="EEF8ED"/>
+            <a:srgbClr val="0068B7"/>
           </a:solidFill>
           <a:ln w="12700">
             <a:solidFill>
-              <a:srgbClr val="B9D7E6"/>
+              <a:srgbClr val="0068B7"/>
             </a:solidFill>
             <a:prstDash val="solid"/>
           </a:ln>
@@ -11432,81 +12294,256 @@
       </p:sp>
       <p:sp>
         <p:nvSpPr>
-          <p:cNvPr id="13" name="Text 11"/>
-          <p:cNvSpPr/>
-          <p:nvPr/>
-        </p:nvSpPr>
-        <p:spPr>
-          <a:xfrm>
-            <a:off x="8211312" y="3941064"/>
-            <a:ext cx="2734056" cy="201168"/>
-          </a:xfrm>
-          <a:prstGeom prst="rect">
-            <a:avLst/>
-          </a:prstGeom>
-          <a:noFill/>
-          <a:ln/>
-        </p:spPr>
-        <p:txBody>
-          <a:bodyPr wrap="square" lIns="0" tIns="0" rIns="0" bIns="0" rtlCol="0" anchor="ctr"/>
-          <a:lstStyle/>
-          <a:p>
-            <a:pPr indent="0" marL="0">
-              <a:buNone/>
-            </a:pPr>
-            <a:r>
-              <a:rPr lang="en-US" sz="950" b="1" dirty="0">
-                <a:solidFill>
-                  <a:srgbClr val="0068B7"/>
-                </a:solidFill>
-                <a:latin typeface="Aptos" pitchFamily="34" charset="0"/>
-                <a:ea typeface="Aptos" pitchFamily="34" charset="-122"/>
-                <a:cs typeface="Aptos" pitchFamily="34" charset="-120"/>
-              </a:rPr>
-              <a:t>Avoid duplication</a:t>
-            </a:r>
-            <a:endParaRPr lang="en-US" sz="950" dirty="0"/>
-          </a:p>
-        </p:txBody>
-      </p:sp>
-      <p:sp>
-        <p:nvSpPr>
           <p:cNvPr id="14" name="Text 12"/>
           <p:cNvSpPr/>
           <p:nvPr/>
         </p:nvSpPr>
         <p:spPr>
           <a:xfrm>
-            <a:off x="8211312" y="4233672"/>
-            <a:ext cx="2734056" cy="941832"/>
-          </a:xfrm>
-          <a:prstGeom prst="rect">
-            <a:avLst/>
-          </a:prstGeom>
-          <a:noFill/>
-          <a:ln/>
-        </p:spPr>
-        <p:txBody>
-          <a:bodyPr wrap="square" lIns="0" tIns="0" rIns="0" bIns="0" rtlCol="0" anchor="t">
+            <a:off x="7891272" y="4169664"/>
+            <a:ext cx="826008" cy="310896"/>
+          </a:xfrm>
+          <a:prstGeom prst="rect">
+            <a:avLst/>
+          </a:prstGeom>
+          <a:noFill/>
+          <a:ln/>
+        </p:spPr>
+        <p:txBody>
+          <a:bodyPr wrap="square" lIns="0" tIns="0" rIns="0" bIns="0" rtlCol="0" anchor="ctr">
             <a:normAutofit/>
           </a:bodyPr>
           <a:lstStyle/>
           <a:p>
-            <a:pPr indent="0" marL="0">
-              <a:buNone/>
-            </a:pPr>
-            <a:r>
-              <a:rPr lang="en-US" sz="1250" dirty="0">
-                <a:solidFill>
-                  <a:srgbClr val="17364A"/>
-                </a:solidFill>
-                <a:latin typeface="Aptos" pitchFamily="34" charset="0"/>
-                <a:ea typeface="Aptos" pitchFamily="34" charset="-122"/>
-                <a:cs typeface="Aptos" pitchFamily="34" charset="-120"/>
-              </a:rPr>
-              <a:t>If your department already has a strong equivalent tool, adapt or use the existing process instead of recreating it.</a:t>
-            </a:r>
-            <a:endParaRPr lang="en-US" sz="1250" dirty="0"/>
+            <a:pPr algn="ctr" indent="0" marL="0">
+              <a:buNone/>
+            </a:pPr>
+            <a:r>
+              <a:rPr lang="en-US" sz="1500" b="1" dirty="0">
+                <a:solidFill>
+                  <a:srgbClr val="FFFFFF"/>
+                </a:solidFill>
+                <a:latin typeface="Aptos" pitchFamily="34" charset="0"/>
+                <a:ea typeface="Aptos" pitchFamily="34" charset="-122"/>
+                <a:cs typeface="Aptos" pitchFamily="34" charset="-120"/>
+              </a:rPr>
+              <a:t>Concept</a:t>
+            </a:r>
+            <a:endParaRPr lang="en-US" sz="1500" dirty="0"/>
+          </a:p>
+        </p:txBody>
+      </p:sp>
+      <p:sp>
+        <p:nvSpPr>
+          <p:cNvPr id="15" name="Text 13"/>
+          <p:cNvSpPr/>
+          <p:nvPr/>
+        </p:nvSpPr>
+        <p:spPr>
+          <a:xfrm>
+            <a:off x="8817864" y="4187952"/>
+            <a:ext cx="201168" cy="256032"/>
+          </a:xfrm>
+          <a:prstGeom prst="rect">
+            <a:avLst/>
+          </a:prstGeom>
+          <a:noFill/>
+          <a:ln/>
+        </p:spPr>
+        <p:txBody>
+          <a:bodyPr wrap="square" lIns="0" tIns="0" rIns="0" bIns="0" rtlCol="0" anchor="ctr"/>
+          <a:lstStyle/>
+          <a:p>
+            <a:pPr algn="ctr" indent="0" marL="0">
+              <a:buNone/>
+            </a:pPr>
+            <a:r>
+              <a:rPr lang="en-US" sz="1800" b="1" dirty="0">
+                <a:solidFill>
+                  <a:srgbClr val="0068B7"/>
+                </a:solidFill>
+                <a:latin typeface="Aptos" pitchFamily="34" charset="0"/>
+                <a:ea typeface="Aptos" pitchFamily="34" charset="-122"/>
+                <a:cs typeface="Aptos" pitchFamily="34" charset="-120"/>
+              </a:rPr>
+              <a:t>â†’</a:t>
+            </a:r>
+            <a:endParaRPr lang="en-US" sz="1800" dirty="0"/>
+          </a:p>
+        </p:txBody>
+      </p:sp>
+      <p:sp>
+        <p:nvSpPr>
+          <p:cNvPr id="16" name="Shape 14"/>
+          <p:cNvSpPr/>
+          <p:nvPr/>
+        </p:nvSpPr>
+        <p:spPr>
+          <a:xfrm>
+            <a:off x="9046464" y="3977640"/>
+            <a:ext cx="972312" cy="749808"/>
+          </a:xfrm>
+          <a:prstGeom prst="roundRect">
+            <a:avLst>
+              <a:gd name="adj" fmla="val 14634"/>
+            </a:avLst>
+          </a:prstGeom>
+          <a:solidFill>
+            <a:srgbClr val="2F8A28"/>
+          </a:solidFill>
+          <a:ln w="12700">
+            <a:solidFill>
+              <a:srgbClr val="2F8A28"/>
+            </a:solidFill>
+            <a:prstDash val="solid"/>
+          </a:ln>
+        </p:spPr>
+      </p:sp>
+      <p:sp>
+        <p:nvSpPr>
+          <p:cNvPr id="17" name="Text 15"/>
+          <p:cNvSpPr/>
+          <p:nvPr/>
+        </p:nvSpPr>
+        <p:spPr>
+          <a:xfrm>
+            <a:off x="9119616" y="4169664"/>
+            <a:ext cx="826008" cy="310896"/>
+          </a:xfrm>
+          <a:prstGeom prst="rect">
+            <a:avLst/>
+          </a:prstGeom>
+          <a:noFill/>
+          <a:ln/>
+        </p:spPr>
+        <p:txBody>
+          <a:bodyPr wrap="square" lIns="0" tIns="0" rIns="0" bIns="0" rtlCol="0" anchor="ctr">
+            <a:normAutofit/>
+          </a:bodyPr>
+          <a:lstStyle/>
+          <a:p>
+            <a:pPr algn="ctr" indent="0" marL="0">
+              <a:buNone/>
+            </a:pPr>
+            <a:r>
+              <a:rPr lang="en-US" sz="1500" b="1" dirty="0">
+                <a:solidFill>
+                  <a:srgbClr val="FFFFFF"/>
+                </a:solidFill>
+                <a:latin typeface="Aptos" pitchFamily="34" charset="0"/>
+                <a:ea typeface="Aptos" pitchFamily="34" charset="-122"/>
+                <a:cs typeface="Aptos" pitchFamily="34" charset="-120"/>
+              </a:rPr>
+              <a:t>Tool</a:t>
+            </a:r>
+            <a:endParaRPr lang="en-US" sz="1500" dirty="0"/>
+          </a:p>
+        </p:txBody>
+      </p:sp>
+      <p:sp>
+        <p:nvSpPr>
+          <p:cNvPr id="18" name="Text 16"/>
+          <p:cNvSpPr/>
+          <p:nvPr/>
+        </p:nvSpPr>
+        <p:spPr>
+          <a:xfrm>
+            <a:off x="10046208" y="4187952"/>
+            <a:ext cx="201168" cy="256032"/>
+          </a:xfrm>
+          <a:prstGeom prst="rect">
+            <a:avLst/>
+          </a:prstGeom>
+          <a:noFill/>
+          <a:ln/>
+        </p:spPr>
+        <p:txBody>
+          <a:bodyPr wrap="square" lIns="0" tIns="0" rIns="0" bIns="0" rtlCol="0" anchor="ctr"/>
+          <a:lstStyle/>
+          <a:p>
+            <a:pPr algn="ctr" indent="0" marL="0">
+              <a:buNone/>
+            </a:pPr>
+            <a:r>
+              <a:rPr lang="en-US" sz="1800" b="1" dirty="0">
+                <a:solidFill>
+                  <a:srgbClr val="0068B7"/>
+                </a:solidFill>
+                <a:latin typeface="Aptos" pitchFamily="34" charset="0"/>
+                <a:ea typeface="Aptos" pitchFamily="34" charset="-122"/>
+                <a:cs typeface="Aptos" pitchFamily="34" charset="-120"/>
+              </a:rPr>
+              <a:t>â†’</a:t>
+            </a:r>
+            <a:endParaRPr lang="en-US" sz="1800" dirty="0"/>
+          </a:p>
+        </p:txBody>
+      </p:sp>
+      <p:sp>
+        <p:nvSpPr>
+          <p:cNvPr id="19" name="Shape 17"/>
+          <p:cNvSpPr/>
+          <p:nvPr/>
+        </p:nvSpPr>
+        <p:spPr>
+          <a:xfrm>
+            <a:off x="10274808" y="3977640"/>
+            <a:ext cx="972312" cy="749808"/>
+          </a:xfrm>
+          <a:prstGeom prst="roundRect">
+            <a:avLst>
+              <a:gd name="adj" fmla="val 14634"/>
+            </a:avLst>
+          </a:prstGeom>
+          <a:solidFill>
+            <a:srgbClr val="D69A2D"/>
+          </a:solidFill>
+          <a:ln w="12700">
+            <a:solidFill>
+              <a:srgbClr val="D69A2D"/>
+            </a:solidFill>
+            <a:prstDash val="solid"/>
+          </a:ln>
+        </p:spPr>
+      </p:sp>
+      <p:sp>
+        <p:nvSpPr>
+          <p:cNvPr id="20" name="Text 18"/>
+          <p:cNvSpPr/>
+          <p:nvPr/>
+        </p:nvSpPr>
+        <p:spPr>
+          <a:xfrm>
+            <a:off x="10347960" y="4169664"/>
+            <a:ext cx="826008" cy="310896"/>
+          </a:xfrm>
+          <a:prstGeom prst="rect">
+            <a:avLst/>
+          </a:prstGeom>
+          <a:noFill/>
+          <a:ln/>
+        </p:spPr>
+        <p:txBody>
+          <a:bodyPr wrap="square" lIns="0" tIns="0" rIns="0" bIns="0" rtlCol="0" anchor="ctr">
+            <a:normAutofit/>
+          </a:bodyPr>
+          <a:lstStyle/>
+          <a:p>
+            <a:pPr algn="ctr" indent="0" marL="0">
+              <a:buNone/>
+            </a:pPr>
+            <a:r>
+              <a:rPr lang="en-US" sz="1500" b="1" dirty="0">
+                <a:solidFill>
+                  <a:srgbClr val="FFFFFF"/>
+                </a:solidFill>
+                <a:latin typeface="Aptos" pitchFamily="34" charset="0"/>
+                <a:ea typeface="Aptos" pitchFamily="34" charset="-122"/>
+                <a:cs typeface="Aptos" pitchFamily="34" charset="-120"/>
+              </a:rPr>
+              <a:t>Artifact</a:t>
+            </a:r>
+            <a:endParaRPr lang="en-US" sz="1500" dirty="0"/>
           </a:p>
         </p:txBody>
       </p:sp>
@@ -11703,7 +12740,7 @@
                 <a:ea typeface="Aptos" pitchFamily="34" charset="-122"/>
                 <a:cs typeface="Aptos" pitchFamily="34" charset="-120"/>
               </a:rPr>
-              <a:t>© Paula Soper</a:t>
+              <a:t>Â© Paula Soper</a:t>
             </a:r>
             <a:endParaRPr lang="en-US" sz="800" dirty="0"/>
           </a:p>
@@ -11711,7 +12748,46 @@
       </p:sp>
       <p:sp>
         <p:nvSpPr>
-          <p:cNvPr id="7" name="Shape 5"/>
+          <p:cNvPr id="7" name="Text 5"/>
+          <p:cNvSpPr/>
+          <p:nvPr/>
+        </p:nvSpPr>
+        <p:spPr>
+          <a:xfrm>
+            <a:off x="11137392" y="6510528"/>
+            <a:ext cx="411480" cy="201168"/>
+          </a:xfrm>
+          <a:prstGeom prst="rect">
+            <a:avLst/>
+          </a:prstGeom>
+          <a:noFill/>
+          <a:ln/>
+        </p:spPr>
+        <p:txBody>
+          <a:bodyPr wrap="square" lIns="0" tIns="0" rIns="0" bIns="0" rtlCol="0" anchor="ctr"/>
+          <a:lstStyle/>
+          <a:p>
+            <a:pPr algn="r" indent="0" marL="0">
+              <a:buNone/>
+            </a:pPr>
+            <a:r>
+              <a:rPr lang="en-US" sz="900" dirty="0">
+                <a:solidFill>
+                  <a:srgbClr val="5F7181"/>
+                </a:solidFill>
+                <a:latin typeface="Aptos" pitchFamily="34" charset="0"/>
+                <a:ea typeface="Aptos" pitchFamily="34" charset="-122"/>
+                <a:cs typeface="Aptos" pitchFamily="34" charset="-120"/>
+              </a:rPr>
+              <a:t>5</a:t>
+            </a:r>
+            <a:endParaRPr lang="en-US" sz="900" dirty="0"/>
+          </a:p>
+        </p:txBody>
+      </p:sp>
+      <p:sp>
+        <p:nvSpPr>
+          <p:cNvPr id="8" name="Shape 6"/>
           <p:cNvSpPr/>
           <p:nvPr/>
         </p:nvSpPr>
@@ -11736,7 +12812,7 @@
       </p:sp>
       <p:sp>
         <p:nvSpPr>
-          <p:cNvPr id="8" name="Text 6"/>
+          <p:cNvPr id="9" name="Text 7"/>
           <p:cNvSpPr/>
           <p:nvPr/>
         </p:nvSpPr>
@@ -11775,14 +12851,14 @@
       </p:sp>
       <p:sp>
         <p:nvSpPr>
-          <p:cNvPr id="9" name="Text 7"/>
+          <p:cNvPr id="10" name="Text 8"/>
           <p:cNvSpPr/>
           <p:nvPr/>
         </p:nvSpPr>
         <p:spPr>
           <a:xfrm>
             <a:off x="640080" y="621792"/>
-            <a:ext cx="10881360" cy="566928"/>
+            <a:ext cx="10881360" cy="713232"/>
           </a:xfrm>
           <a:prstGeom prst="rect">
             <a:avLst/>
@@ -11800,7 +12876,7 @@
               <a:buNone/>
             </a:pPr>
             <a:r>
-              <a:rPr lang="en-US" sz="2700" b="1" dirty="0">
+              <a:rPr lang="en-US" sz="3400" b="1" dirty="0">
                 <a:solidFill>
                   <a:srgbClr val="003A63"/>
                 </a:solidFill>
@@ -11810,20 +12886,20 @@
               </a:rPr>
               <a:t>Learning Objectives</a:t>
             </a:r>
-            <a:endParaRPr lang="en-US" sz="2700" dirty="0"/>
-          </a:p>
-        </p:txBody>
-      </p:sp>
-      <p:sp>
-        <p:nvSpPr>
-          <p:cNvPr id="10" name="Text 8"/>
-          <p:cNvSpPr/>
-          <p:nvPr/>
-        </p:nvSpPr>
-        <p:spPr>
-          <a:xfrm>
-            <a:off x="868680" y="1417320"/>
-            <a:ext cx="6675120" cy="4434840"/>
+            <a:endParaRPr lang="en-US" sz="3400" dirty="0"/>
+          </a:p>
+        </p:txBody>
+      </p:sp>
+      <p:sp>
+        <p:nvSpPr>
+          <p:cNvPr id="11" name="Text 9"/>
+          <p:cNvSpPr/>
+          <p:nvPr/>
+        </p:nvSpPr>
+        <p:spPr>
+          <a:xfrm>
+            <a:off x="868680" y="1508760"/>
+            <a:ext cx="6537960" cy="4160520"/>
           </a:xfrm>
           <a:prstGeom prst="rect">
             <a:avLst/>
@@ -11838,7 +12914,7 @@
           <a:lstStyle/>
           <a:p>
             <a:r>
-              <a:rPr lang="en-US" sz="1700" dirty="0">
+              <a:rPr lang="en-US" sz="2100" dirty="0">
                 <a:solidFill>
                   <a:srgbClr val="17364A"/>
                 </a:solidFill>
@@ -11848,11 +12924,11 @@
               </a:rPr>
               <a:t>Explain the purpose of ai documentation, model cards, and system cards in public health AI work.</a:t>
             </a:r>
-            <a:endParaRPr lang="en-US" sz="1700" dirty="0"/>
-          </a:p>
-          <a:p>
-            <a:r>
-              <a:rPr lang="en-US" sz="1700" dirty="0">
+            <a:endParaRPr lang="en-US" sz="2100" dirty="0"/>
+          </a:p>
+          <a:p>
+            <a:r>
+              <a:rPr lang="en-US" sz="2100" dirty="0">
                 <a:solidFill>
                   <a:srgbClr val="17364A"/>
                 </a:solidFill>
@@ -11860,13 +12936,13 @@
                 <a:ea typeface="Aptos" pitchFamily="34" charset="-122"/>
                 <a:cs typeface="Aptos" pitchFamily="34" charset="-120"/>
               </a:rPr>
-              <a:t>Identify the technical, operational, privacy, security, equity, and governance issues associated with the topic.</a:t>
-            </a:r>
-            <a:endParaRPr lang="en-US" sz="1700" dirty="0"/>
-          </a:p>
-          <a:p>
-            <a:r>
-              <a:rPr lang="en-US" sz="1700" dirty="0">
+              <a:t>Identify the technical, operational, privacy, security, equity, and governance issues associated with.</a:t>
+            </a:r>
+            <a:endParaRPr lang="en-US" sz="2100" dirty="0"/>
+          </a:p>
+          <a:p>
+            <a:r>
+              <a:rPr lang="en-US" sz="2100" dirty="0">
                 <a:solidFill>
                   <a:srgbClr val="17364A"/>
                 </a:solidFill>
@@ -11876,27 +12952,13 @@
               </a:rPr>
               <a:t>Apply the topic to a real or realistic public health workflow, system, or implementation scenario.</a:t>
             </a:r>
-            <a:endParaRPr lang="en-US" sz="1700" dirty="0"/>
-          </a:p>
-          <a:p>
-            <a:r>
-              <a:rPr lang="en-US" sz="1700" dirty="0">
-                <a:solidFill>
-                  <a:srgbClr val="17364A"/>
-                </a:solidFill>
-                <a:latin typeface="Aptos" pitchFamily="34" charset="0"/>
-                <a:ea typeface="Aptos" pitchFamily="34" charset="-122"/>
-                <a:cs typeface="Aptos" pitchFamily="34" charset="-120"/>
-              </a:rPr>
-              <a:t>Recognize common failure modes that can affect safety, accuracy, trust, workflow fit, or sustainability.</a:t>
-            </a:r>
-            <a:endParaRPr lang="en-US" sz="1700" dirty="0"/>
-          </a:p>
-        </p:txBody>
-      </p:sp>
-      <p:sp>
-        <p:nvSpPr>
-          <p:cNvPr id="11" name="Shape 9"/>
+            <a:endParaRPr lang="en-US" sz="2100" dirty="0"/>
+          </a:p>
+        </p:txBody>
+      </p:sp>
+      <p:sp>
+        <p:nvSpPr>
+          <p:cNvPr id="12" name="Shape 10"/>
           <p:cNvSpPr/>
           <p:nvPr/>
         </p:nvSpPr>
@@ -11923,14 +12985,14 @@
       </p:sp>
       <p:sp>
         <p:nvSpPr>
-          <p:cNvPr id="12" name="Text 10"/>
+          <p:cNvPr id="13" name="Text 11"/>
           <p:cNvSpPr/>
           <p:nvPr/>
         </p:nvSpPr>
         <p:spPr>
           <a:xfrm>
             <a:off x="8074152" y="1563624"/>
-            <a:ext cx="2825496" cy="201168"/>
+            <a:ext cx="2825496" cy="256032"/>
           </a:xfrm>
           <a:prstGeom prst="rect">
             <a:avLst/>
@@ -11946,7 +13008,7 @@
               <a:buNone/>
             </a:pPr>
             <a:r>
-              <a:rPr lang="en-US" sz="950" b="1" dirty="0">
+              <a:rPr lang="en-US" sz="1300" b="1" dirty="0">
                 <a:solidFill>
                   <a:srgbClr val="0068B7"/>
                 </a:solidFill>
@@ -11956,20 +13018,20 @@
               </a:rPr>
               <a:t>Key idea</a:t>
             </a:r>
-            <a:endParaRPr lang="en-US" sz="950" dirty="0"/>
-          </a:p>
-        </p:txBody>
-      </p:sp>
-      <p:sp>
-        <p:nvSpPr>
-          <p:cNvPr id="13" name="Text 11"/>
-          <p:cNvSpPr/>
-          <p:nvPr/>
-        </p:nvSpPr>
-        <p:spPr>
-          <a:xfrm>
-            <a:off x="8074152" y="1856232"/>
-            <a:ext cx="2825496" cy="1261872"/>
+            <a:endParaRPr lang="en-US" sz="1300" dirty="0"/>
+          </a:p>
+        </p:txBody>
+      </p:sp>
+      <p:sp>
+        <p:nvSpPr>
+          <p:cNvPr id="14" name="Text 12"/>
+          <p:cNvSpPr/>
+          <p:nvPr/>
+        </p:nvSpPr>
+        <p:spPr>
+          <a:xfrm>
+            <a:off x="8074152" y="1920240"/>
+            <a:ext cx="2825496" cy="1188720"/>
           </a:xfrm>
           <a:prstGeom prst="rect">
             <a:avLst/>
@@ -11987,7 +13049,7 @@
               <a:buNone/>
             </a:pPr>
             <a:r>
-              <a:rPr lang="en-US" sz="1250" dirty="0">
+              <a:rPr lang="en-US" sz="1550" dirty="0">
                 <a:solidFill>
                   <a:srgbClr val="17364A"/>
                 </a:solidFill>
@@ -11997,13 +13059,13 @@
               </a:rPr>
               <a:t>Explain the purpose of ai documentation, model cards, and system cards in public health AI work.</a:t>
             </a:r>
-            <a:endParaRPr lang="en-US" sz="1250" dirty="0"/>
-          </a:p>
-        </p:txBody>
-      </p:sp>
-      <p:sp>
-        <p:nvSpPr>
-          <p:cNvPr id="14" name="Shape 12"/>
+            <a:endParaRPr lang="en-US" sz="1550" dirty="0"/>
+          </a:p>
+        </p:txBody>
+      </p:sp>
+      <p:sp>
+        <p:nvSpPr>
+          <p:cNvPr id="15" name="Shape 13"/>
           <p:cNvSpPr/>
           <p:nvPr/>
         </p:nvSpPr>
@@ -12030,14 +13092,14 @@
       </p:sp>
       <p:sp>
         <p:nvSpPr>
-          <p:cNvPr id="15" name="Text 13"/>
+          <p:cNvPr id="16" name="Text 14"/>
           <p:cNvSpPr/>
           <p:nvPr/>
         </p:nvSpPr>
         <p:spPr>
           <a:xfrm>
             <a:off x="8074152" y="3666744"/>
-            <a:ext cx="2825496" cy="201168"/>
+            <a:ext cx="2825496" cy="256032"/>
           </a:xfrm>
           <a:prstGeom prst="rect">
             <a:avLst/>
@@ -12053,7 +13115,7 @@
               <a:buNone/>
             </a:pPr>
             <a:r>
-              <a:rPr lang="en-US" sz="950" b="1" dirty="0">
+              <a:rPr lang="en-US" sz="1300" b="1" dirty="0">
                 <a:solidFill>
                   <a:srgbClr val="0068B7"/>
                 </a:solidFill>
@@ -12063,20 +13125,20 @@
               </a:rPr>
               <a:t>Use this for</a:t>
             </a:r>
-            <a:endParaRPr lang="en-US" sz="950" dirty="0"/>
-          </a:p>
-        </p:txBody>
-      </p:sp>
-      <p:sp>
-        <p:nvSpPr>
-          <p:cNvPr id="16" name="Text 14"/>
-          <p:cNvSpPr/>
-          <p:nvPr/>
-        </p:nvSpPr>
-        <p:spPr>
-          <a:xfrm>
-            <a:off x="8074152" y="3959352"/>
-            <a:ext cx="2825496" cy="1170432"/>
+            <a:endParaRPr lang="en-US" sz="1300" dirty="0"/>
+          </a:p>
+        </p:txBody>
+      </p:sp>
+      <p:sp>
+        <p:nvSpPr>
+          <p:cNvPr id="17" name="Text 15"/>
+          <p:cNvSpPr/>
+          <p:nvPr/>
+        </p:nvSpPr>
+        <p:spPr>
+          <a:xfrm>
+            <a:off x="8074152" y="4023360"/>
+            <a:ext cx="2825496" cy="1097280"/>
           </a:xfrm>
           <a:prstGeom prst="rect">
             <a:avLst/>
@@ -12094,7 +13156,7 @@
               <a:buNone/>
             </a:pPr>
             <a:r>
-              <a:rPr lang="en-US" sz="1250" dirty="0">
+              <a:rPr lang="en-US" sz="1550" dirty="0">
                 <a:solidFill>
                   <a:srgbClr val="17364A"/>
                 </a:solidFill>
@@ -12104,7 +13166,7 @@
               </a:rPr>
               <a:t>Connect the concept to public health decisions, safeguards, documentation, or implementation work.</a:t>
             </a:r>
-            <a:endParaRPr lang="en-US" sz="1250" dirty="0"/>
+            <a:endParaRPr lang="en-US" sz="1550" dirty="0"/>
           </a:p>
         </p:txBody>
       </p:sp>
@@ -12301,7 +13363,7 @@
                 <a:ea typeface="Aptos" pitchFamily="34" charset="-122"/>
                 <a:cs typeface="Aptos" pitchFamily="34" charset="-120"/>
               </a:rPr>
-              <a:t>© Paula Soper</a:t>
+              <a:t>Â© Paula Soper</a:t>
             </a:r>
             <a:endParaRPr lang="en-US" sz="800" dirty="0"/>
           </a:p>
@@ -12315,8 +13377,47 @@
         </p:nvSpPr>
         <p:spPr>
           <a:xfrm>
+            <a:off x="11137392" y="6510528"/>
+            <a:ext cx="411480" cy="201168"/>
+          </a:xfrm>
+          <a:prstGeom prst="rect">
+            <a:avLst/>
+          </a:prstGeom>
+          <a:noFill/>
+          <a:ln/>
+        </p:spPr>
+        <p:txBody>
+          <a:bodyPr wrap="square" lIns="0" tIns="0" rIns="0" bIns="0" rtlCol="0" anchor="ctr"/>
+          <a:lstStyle/>
+          <a:p>
+            <a:pPr algn="r" indent="0" marL="0">
+              <a:buNone/>
+            </a:pPr>
+            <a:r>
+              <a:rPr lang="en-US" sz="900" dirty="0">
+                <a:solidFill>
+                  <a:srgbClr val="5F7181"/>
+                </a:solidFill>
+                <a:latin typeface="Aptos" pitchFamily="34" charset="0"/>
+                <a:ea typeface="Aptos" pitchFamily="34" charset="-122"/>
+                <a:cs typeface="Aptos" pitchFamily="34" charset="-120"/>
+              </a:rPr>
+              <a:t>6</a:t>
+            </a:r>
+            <a:endParaRPr lang="en-US" sz="900" dirty="0"/>
+          </a:p>
+        </p:txBody>
+      </p:sp>
+      <p:sp>
+        <p:nvSpPr>
+          <p:cNvPr id="8" name="Text 6"/>
+          <p:cNvSpPr/>
+          <p:nvPr/>
+        </p:nvSpPr>
+        <p:spPr>
+          <a:xfrm>
             <a:off x="640080" y="658368"/>
-            <a:ext cx="10881360" cy="566928"/>
+            <a:ext cx="10881360" cy="713232"/>
           </a:xfrm>
           <a:prstGeom prst="rect">
             <a:avLst/>
@@ -12334,7 +13435,7 @@
               <a:buNone/>
             </a:pPr>
             <a:r>
-              <a:rPr lang="en-US" sz="2700" b="1" dirty="0">
+              <a:rPr lang="en-US" sz="3400" b="1" dirty="0">
                 <a:solidFill>
                   <a:srgbClr val="003A63"/>
                 </a:solidFill>
@@ -12344,20 +13445,20 @@
               </a:rPr>
               <a:t>Learning Objectives Continued</a:t>
             </a:r>
-            <a:endParaRPr lang="en-US" sz="2700" dirty="0"/>
-          </a:p>
-        </p:txBody>
-      </p:sp>
-      <p:sp>
-        <p:nvSpPr>
-          <p:cNvPr id="8" name="Text 6"/>
-          <p:cNvSpPr/>
-          <p:nvPr/>
-        </p:nvSpPr>
-        <p:spPr>
-          <a:xfrm>
-            <a:off x="868680" y="1417320"/>
-            <a:ext cx="6675120" cy="4434840"/>
+            <a:endParaRPr lang="en-US" sz="3400" dirty="0"/>
+          </a:p>
+        </p:txBody>
+      </p:sp>
+      <p:sp>
+        <p:nvSpPr>
+          <p:cNvPr id="9" name="Text 7"/>
+          <p:cNvSpPr/>
+          <p:nvPr/>
+        </p:nvSpPr>
+        <p:spPr>
+          <a:xfrm>
+            <a:off x="868680" y="1508760"/>
+            <a:ext cx="6537960" cy="4160520"/>
           </a:xfrm>
           <a:prstGeom prst="rect">
             <a:avLst/>
@@ -12372,7 +13473,7 @@
           <a:lstStyle/>
           <a:p>
             <a:r>
-              <a:rPr lang="en-US" sz="1700" dirty="0">
+              <a:rPr lang="en-US" sz="2100" dirty="0">
                 <a:solidFill>
                   <a:srgbClr val="17364A"/>
                 </a:solidFill>
@@ -12380,15 +13481,15 @@
                 <a:ea typeface="Aptos" pitchFamily="34" charset="-122"/>
                 <a:cs typeface="Aptos" pitchFamily="34" charset="-120"/>
               </a:rPr>
-              <a:t>Produce a AI documentation packet that can support readiness assessment, governance review, procurement, implementation, or.</a:t>
-            </a:r>
-            <a:endParaRPr lang="en-US" sz="1700" dirty="0"/>
-          </a:p>
-        </p:txBody>
-      </p:sp>
-      <p:sp>
-        <p:nvSpPr>
-          <p:cNvPr id="9" name="Shape 7"/>
+              <a:t>Produce a AI documentation packet that can support readiness assessment, governance review,.</a:t>
+            </a:r>
+            <a:endParaRPr lang="en-US" sz="2100" dirty="0"/>
+          </a:p>
+        </p:txBody>
+      </p:sp>
+      <p:sp>
+        <p:nvSpPr>
+          <p:cNvPr id="10" name="Shape 8"/>
           <p:cNvSpPr/>
           <p:nvPr/>
         </p:nvSpPr>
@@ -12415,14 +13516,14 @@
       </p:sp>
       <p:sp>
         <p:nvSpPr>
-          <p:cNvPr id="10" name="Text 8"/>
+          <p:cNvPr id="11" name="Text 9"/>
           <p:cNvSpPr/>
           <p:nvPr/>
         </p:nvSpPr>
         <p:spPr>
           <a:xfrm>
             <a:off x="8074152" y="1563624"/>
-            <a:ext cx="2825496" cy="201168"/>
+            <a:ext cx="2825496" cy="256032"/>
           </a:xfrm>
           <a:prstGeom prst="rect">
             <a:avLst/>
@@ -12438,7 +13539,7 @@
               <a:buNone/>
             </a:pPr>
             <a:r>
-              <a:rPr lang="en-US" sz="950" b="1" dirty="0">
+              <a:rPr lang="en-US" sz="1300" b="1" dirty="0">
                 <a:solidFill>
                   <a:srgbClr val="0068B7"/>
                 </a:solidFill>
@@ -12448,20 +13549,20 @@
               </a:rPr>
               <a:t>Key idea</a:t>
             </a:r>
-            <a:endParaRPr lang="en-US" sz="950" dirty="0"/>
-          </a:p>
-        </p:txBody>
-      </p:sp>
-      <p:sp>
-        <p:nvSpPr>
-          <p:cNvPr id="11" name="Text 9"/>
-          <p:cNvSpPr/>
-          <p:nvPr/>
-        </p:nvSpPr>
-        <p:spPr>
-          <a:xfrm>
-            <a:off x="8074152" y="1856232"/>
-            <a:ext cx="2825496" cy="1261872"/>
+            <a:endParaRPr lang="en-US" sz="1300" dirty="0"/>
+          </a:p>
+        </p:txBody>
+      </p:sp>
+      <p:sp>
+        <p:nvSpPr>
+          <p:cNvPr id="12" name="Text 10"/>
+          <p:cNvSpPr/>
+          <p:nvPr/>
+        </p:nvSpPr>
+        <p:spPr>
+          <a:xfrm>
+            <a:off x="8074152" y="1920240"/>
+            <a:ext cx="2825496" cy="1188720"/>
           </a:xfrm>
           <a:prstGeom prst="rect">
             <a:avLst/>
@@ -12479,7 +13580,7 @@
               <a:buNone/>
             </a:pPr>
             <a:r>
-              <a:rPr lang="en-US" sz="1250" dirty="0">
+              <a:rPr lang="en-US" sz="1550" dirty="0">
                 <a:solidFill>
                   <a:srgbClr val="17364A"/>
                 </a:solidFill>
@@ -12487,15 +13588,15 @@
                 <a:ea typeface="Aptos" pitchFamily="34" charset="-122"/>
                 <a:cs typeface="Aptos" pitchFamily="34" charset="-120"/>
               </a:rPr>
-              <a:t>Produce a AI documentation packet that can support readiness assessment, governance review, procurement, implementation, or.</a:t>
-            </a:r>
-            <a:endParaRPr lang="en-US" sz="1250" dirty="0"/>
-          </a:p>
-        </p:txBody>
-      </p:sp>
-      <p:sp>
-        <p:nvSpPr>
-          <p:cNvPr id="12" name="Shape 10"/>
+              <a:t>Produce a AI documentation packet that can support readiness assessment, governance review,.</a:t>
+            </a:r>
+            <a:endParaRPr lang="en-US" sz="1550" dirty="0"/>
+          </a:p>
+        </p:txBody>
+      </p:sp>
+      <p:sp>
+        <p:nvSpPr>
+          <p:cNvPr id="13" name="Shape 11"/>
           <p:cNvSpPr/>
           <p:nvPr/>
         </p:nvSpPr>
@@ -12522,14 +13623,14 @@
       </p:sp>
       <p:sp>
         <p:nvSpPr>
-          <p:cNvPr id="13" name="Text 11"/>
+          <p:cNvPr id="14" name="Text 12"/>
           <p:cNvSpPr/>
           <p:nvPr/>
         </p:nvSpPr>
         <p:spPr>
           <a:xfrm>
             <a:off x="8074152" y="3666744"/>
-            <a:ext cx="2825496" cy="201168"/>
+            <a:ext cx="2825496" cy="256032"/>
           </a:xfrm>
           <a:prstGeom prst="rect">
             <a:avLst/>
@@ -12545,7 +13646,7 @@
               <a:buNone/>
             </a:pPr>
             <a:r>
-              <a:rPr lang="en-US" sz="950" b="1" dirty="0">
+              <a:rPr lang="en-US" sz="1300" b="1" dirty="0">
                 <a:solidFill>
                   <a:srgbClr val="0068B7"/>
                 </a:solidFill>
@@ -12555,20 +13656,20 @@
               </a:rPr>
               <a:t>Use this for</a:t>
             </a:r>
-            <a:endParaRPr lang="en-US" sz="950" dirty="0"/>
-          </a:p>
-        </p:txBody>
-      </p:sp>
-      <p:sp>
-        <p:nvSpPr>
-          <p:cNvPr id="14" name="Text 12"/>
-          <p:cNvSpPr/>
-          <p:nvPr/>
-        </p:nvSpPr>
-        <p:spPr>
-          <a:xfrm>
-            <a:off x="8074152" y="3959352"/>
-            <a:ext cx="2825496" cy="1170432"/>
+            <a:endParaRPr lang="en-US" sz="1300" dirty="0"/>
+          </a:p>
+        </p:txBody>
+      </p:sp>
+      <p:sp>
+        <p:nvSpPr>
+          <p:cNvPr id="15" name="Text 13"/>
+          <p:cNvSpPr/>
+          <p:nvPr/>
+        </p:nvSpPr>
+        <p:spPr>
+          <a:xfrm>
+            <a:off x="8074152" y="4023360"/>
+            <a:ext cx="2825496" cy="1097280"/>
           </a:xfrm>
           <a:prstGeom prst="rect">
             <a:avLst/>
@@ -12586,7 +13687,7 @@
               <a:buNone/>
             </a:pPr>
             <a:r>
-              <a:rPr lang="en-US" sz="1250" dirty="0">
+              <a:rPr lang="en-US" sz="1550" dirty="0">
                 <a:solidFill>
                   <a:srgbClr val="17364A"/>
                 </a:solidFill>
@@ -12596,7 +13697,7 @@
               </a:rPr>
               <a:t>Connect the concept to public health decisions, safeguards, documentation, or implementation work.</a:t>
             </a:r>
-            <a:endParaRPr lang="en-US" sz="1250" dirty="0"/>
+            <a:endParaRPr lang="en-US" sz="1550" dirty="0"/>
           </a:p>
         </p:txBody>
       </p:sp>
@@ -12793,7 +13894,7 @@
                 <a:ea typeface="Aptos" pitchFamily="34" charset="-122"/>
                 <a:cs typeface="Aptos" pitchFamily="34" charset="-120"/>
               </a:rPr>
-              <a:t>© Paula Soper</a:t>
+              <a:t>Â© Paula Soper</a:t>
             </a:r>
             <a:endParaRPr lang="en-US" sz="800" dirty="0"/>
           </a:p>
@@ -12801,7 +13902,46 @@
       </p:sp>
       <p:sp>
         <p:nvSpPr>
-          <p:cNvPr id="7" name="Shape 5"/>
+          <p:cNvPr id="7" name="Text 5"/>
+          <p:cNvSpPr/>
+          <p:nvPr/>
+        </p:nvSpPr>
+        <p:spPr>
+          <a:xfrm>
+            <a:off x="11137392" y="6510528"/>
+            <a:ext cx="411480" cy="201168"/>
+          </a:xfrm>
+          <a:prstGeom prst="rect">
+            <a:avLst/>
+          </a:prstGeom>
+          <a:noFill/>
+          <a:ln/>
+        </p:spPr>
+        <p:txBody>
+          <a:bodyPr wrap="square" lIns="0" tIns="0" rIns="0" bIns="0" rtlCol="0" anchor="ctr"/>
+          <a:lstStyle/>
+          <a:p>
+            <a:pPr algn="r" indent="0" marL="0">
+              <a:buNone/>
+            </a:pPr>
+            <a:r>
+              <a:rPr lang="en-US" sz="900" dirty="0">
+                <a:solidFill>
+                  <a:srgbClr val="5F7181"/>
+                </a:solidFill>
+                <a:latin typeface="Aptos" pitchFamily="34" charset="0"/>
+                <a:ea typeface="Aptos" pitchFamily="34" charset="-122"/>
+                <a:cs typeface="Aptos" pitchFamily="34" charset="-120"/>
+              </a:rPr>
+              <a:t>7</a:t>
+            </a:r>
+            <a:endParaRPr lang="en-US" sz="900" dirty="0"/>
+          </a:p>
+        </p:txBody>
+      </p:sp>
+      <p:sp>
+        <p:nvSpPr>
+          <p:cNvPr id="8" name="Shape 6"/>
           <p:cNvSpPr/>
           <p:nvPr/>
         </p:nvSpPr>
@@ -12826,7 +13966,7 @@
       </p:sp>
       <p:sp>
         <p:nvSpPr>
-          <p:cNvPr id="8" name="Text 6"/>
+          <p:cNvPr id="9" name="Text 7"/>
           <p:cNvSpPr/>
           <p:nvPr/>
         </p:nvSpPr>
@@ -12865,14 +14005,14 @@
       </p:sp>
       <p:sp>
         <p:nvSpPr>
-          <p:cNvPr id="9" name="Text 7"/>
+          <p:cNvPr id="10" name="Text 8"/>
           <p:cNvSpPr/>
           <p:nvPr/>
         </p:nvSpPr>
         <p:spPr>
           <a:xfrm>
             <a:off x="640080" y="621792"/>
-            <a:ext cx="10881360" cy="566928"/>
+            <a:ext cx="10881360" cy="713232"/>
           </a:xfrm>
           <a:prstGeom prst="rect">
             <a:avLst/>
@@ -12890,7 +14030,7 @@
               <a:buNone/>
             </a:pPr>
             <a:r>
-              <a:rPr lang="en-US" sz="2700" b="1" dirty="0">
+              <a:rPr lang="en-US" sz="3400" b="1" dirty="0">
                 <a:solidFill>
                   <a:srgbClr val="003A63"/>
                 </a:solidFill>
@@ -12900,20 +14040,20 @@
               </a:rPr>
               <a:t>Module Overview</a:t>
             </a:r>
-            <a:endParaRPr lang="en-US" sz="2700" dirty="0"/>
-          </a:p>
-        </p:txBody>
-      </p:sp>
-      <p:sp>
-        <p:nvSpPr>
-          <p:cNvPr id="10" name="Text 8"/>
-          <p:cNvSpPr/>
-          <p:nvPr/>
-        </p:nvSpPr>
-        <p:spPr>
-          <a:xfrm>
-            <a:off x="868680" y="1417320"/>
-            <a:ext cx="6675120" cy="4434840"/>
+            <a:endParaRPr lang="en-US" sz="3400" dirty="0"/>
+          </a:p>
+        </p:txBody>
+      </p:sp>
+      <p:sp>
+        <p:nvSpPr>
+          <p:cNvPr id="11" name="Text 9"/>
+          <p:cNvSpPr/>
+          <p:nvPr/>
+        </p:nvSpPr>
+        <p:spPr>
+          <a:xfrm>
+            <a:off x="868680" y="1508760"/>
+            <a:ext cx="6537960" cy="4160520"/>
           </a:xfrm>
           <a:prstGeom prst="rect">
             <a:avLst/>
@@ -12928,7 +14068,7 @@
           <a:lstStyle/>
           <a:p>
             <a:r>
-              <a:rPr lang="en-US" sz="1700" dirty="0">
+              <a:rPr lang="en-US" sz="2100" dirty="0">
                 <a:solidFill>
                   <a:srgbClr val="17364A"/>
                 </a:solidFill>
@@ -12938,11 +14078,11 @@
               </a:rPr>
               <a:t>AI documentation makes systems understandable, reviewable, and accountable.</a:t>
             </a:r>
-            <a:endParaRPr lang="en-US" sz="1700" dirty="0"/>
-          </a:p>
-          <a:p>
-            <a:r>
-              <a:rPr lang="en-US" sz="1700" dirty="0">
+            <a:endParaRPr lang="en-US" sz="2100" dirty="0"/>
+          </a:p>
+          <a:p>
+            <a:r>
+              <a:rPr lang="en-US" sz="2100" dirty="0">
                 <a:solidFill>
                   <a:srgbClr val="17364A"/>
                 </a:solidFill>
@@ -12950,13 +14090,13 @@
                 <a:ea typeface="Aptos" pitchFamily="34" charset="-122"/>
                 <a:cs typeface="Aptos" pitchFamily="34" charset="-120"/>
               </a:rPr>
-              <a:t>Model cards and system cards are structured documentation tools that describe intended use, data, evaluation, limitations,.</a:t>
-            </a:r>
-            <a:endParaRPr lang="en-US" sz="1700" dirty="0"/>
-          </a:p>
-          <a:p>
-            <a:r>
-              <a:rPr lang="en-US" sz="1700" dirty="0">
+              <a:t>Model cards and system cards are structured documentation tools that describe intended use, data,.</a:t>
+            </a:r>
+            <a:endParaRPr lang="en-US" sz="2100" dirty="0"/>
+          </a:p>
+          <a:p>
+            <a:r>
+              <a:rPr lang="en-US" sz="2100" dirty="0">
                 <a:solidFill>
                   <a:srgbClr val="17364A"/>
                 </a:solidFill>
@@ -12964,15 +14104,15 @@
                 <a:ea typeface="Aptos" pitchFamily="34" charset="-122"/>
                 <a:cs typeface="Aptos" pitchFamily="34" charset="-120"/>
               </a:rPr>
-              <a:t>This module helps public health staff create documentation that supports governance review, vendor oversight, public.</a:t>
-            </a:r>
-            <a:endParaRPr lang="en-US" sz="1700" dirty="0"/>
-          </a:p>
-        </p:txBody>
-      </p:sp>
-      <p:sp>
-        <p:nvSpPr>
-          <p:cNvPr id="11" name="Shape 9"/>
+              <a:t>This module helps public health staff create documentation that supports governance review, vendor.</a:t>
+            </a:r>
+            <a:endParaRPr lang="en-US" sz="2100" dirty="0"/>
+          </a:p>
+        </p:txBody>
+      </p:sp>
+      <p:sp>
+        <p:nvSpPr>
+          <p:cNvPr id="12" name="Shape 10"/>
           <p:cNvSpPr/>
           <p:nvPr/>
         </p:nvSpPr>
@@ -12999,14 +14139,14 @@
       </p:sp>
       <p:sp>
         <p:nvSpPr>
-          <p:cNvPr id="12" name="Text 10"/>
+          <p:cNvPr id="13" name="Text 11"/>
           <p:cNvSpPr/>
           <p:nvPr/>
         </p:nvSpPr>
         <p:spPr>
           <a:xfrm>
             <a:off x="8074152" y="1563624"/>
-            <a:ext cx="2825496" cy="201168"/>
+            <a:ext cx="2825496" cy="256032"/>
           </a:xfrm>
           <a:prstGeom prst="rect">
             <a:avLst/>
@@ -13022,7 +14162,7 @@
               <a:buNone/>
             </a:pPr>
             <a:r>
-              <a:rPr lang="en-US" sz="950" b="1" dirty="0">
+              <a:rPr lang="en-US" sz="1300" b="1" dirty="0">
                 <a:solidFill>
                   <a:srgbClr val="0068B7"/>
                 </a:solidFill>
@@ -13032,20 +14172,20 @@
               </a:rPr>
               <a:t>Key idea</a:t>
             </a:r>
-            <a:endParaRPr lang="en-US" sz="950" dirty="0"/>
-          </a:p>
-        </p:txBody>
-      </p:sp>
-      <p:sp>
-        <p:nvSpPr>
-          <p:cNvPr id="13" name="Text 11"/>
-          <p:cNvSpPr/>
-          <p:nvPr/>
-        </p:nvSpPr>
-        <p:spPr>
-          <a:xfrm>
-            <a:off x="8074152" y="1856232"/>
-            <a:ext cx="2825496" cy="1261872"/>
+            <a:endParaRPr lang="en-US" sz="1300" dirty="0"/>
+          </a:p>
+        </p:txBody>
+      </p:sp>
+      <p:sp>
+        <p:nvSpPr>
+          <p:cNvPr id="14" name="Text 12"/>
+          <p:cNvSpPr/>
+          <p:nvPr/>
+        </p:nvSpPr>
+        <p:spPr>
+          <a:xfrm>
+            <a:off x="8074152" y="1920240"/>
+            <a:ext cx="2825496" cy="1188720"/>
           </a:xfrm>
           <a:prstGeom prst="rect">
             <a:avLst/>
@@ -13063,7 +14203,7 @@
               <a:buNone/>
             </a:pPr>
             <a:r>
-              <a:rPr lang="en-US" sz="1250" dirty="0">
+              <a:rPr lang="en-US" sz="1550" dirty="0">
                 <a:solidFill>
                   <a:srgbClr val="17364A"/>
                 </a:solidFill>
@@ -13073,13 +14213,13 @@
               </a:rPr>
               <a:t>AI documentation makes systems understandable, reviewable, and accountable.</a:t>
             </a:r>
-            <a:endParaRPr lang="en-US" sz="1250" dirty="0"/>
-          </a:p>
-        </p:txBody>
-      </p:sp>
-      <p:sp>
-        <p:nvSpPr>
-          <p:cNvPr id="14" name="Shape 12"/>
+            <a:endParaRPr lang="en-US" sz="1550" dirty="0"/>
+          </a:p>
+        </p:txBody>
+      </p:sp>
+      <p:sp>
+        <p:nvSpPr>
+          <p:cNvPr id="15" name="Shape 13"/>
           <p:cNvSpPr/>
           <p:nvPr/>
         </p:nvSpPr>
@@ -13106,14 +14246,14 @@
       </p:sp>
       <p:sp>
         <p:nvSpPr>
-          <p:cNvPr id="15" name="Text 13"/>
+          <p:cNvPr id="16" name="Text 14"/>
           <p:cNvSpPr/>
           <p:nvPr/>
         </p:nvSpPr>
         <p:spPr>
           <a:xfrm>
             <a:off x="8074152" y="3666744"/>
-            <a:ext cx="2825496" cy="201168"/>
+            <a:ext cx="2825496" cy="256032"/>
           </a:xfrm>
           <a:prstGeom prst="rect">
             <a:avLst/>
@@ -13129,7 +14269,7 @@
               <a:buNone/>
             </a:pPr>
             <a:r>
-              <a:rPr lang="en-US" sz="950" b="1" dirty="0">
+              <a:rPr lang="en-US" sz="1300" b="1" dirty="0">
                 <a:solidFill>
                   <a:srgbClr val="0068B7"/>
                 </a:solidFill>
@@ -13139,20 +14279,20 @@
               </a:rPr>
               <a:t>Use this for</a:t>
             </a:r>
-            <a:endParaRPr lang="en-US" sz="950" dirty="0"/>
-          </a:p>
-        </p:txBody>
-      </p:sp>
-      <p:sp>
-        <p:nvSpPr>
-          <p:cNvPr id="16" name="Text 14"/>
-          <p:cNvSpPr/>
-          <p:nvPr/>
-        </p:nvSpPr>
-        <p:spPr>
-          <a:xfrm>
-            <a:off x="8074152" y="3959352"/>
-            <a:ext cx="2825496" cy="1170432"/>
+            <a:endParaRPr lang="en-US" sz="1300" dirty="0"/>
+          </a:p>
+        </p:txBody>
+      </p:sp>
+      <p:sp>
+        <p:nvSpPr>
+          <p:cNvPr id="17" name="Text 15"/>
+          <p:cNvSpPr/>
+          <p:nvPr/>
+        </p:nvSpPr>
+        <p:spPr>
+          <a:xfrm>
+            <a:off x="8074152" y="4023360"/>
+            <a:ext cx="2825496" cy="1097280"/>
           </a:xfrm>
           <a:prstGeom prst="rect">
             <a:avLst/>
@@ -13170,7 +14310,7 @@
               <a:buNone/>
             </a:pPr>
             <a:r>
-              <a:rPr lang="en-US" sz="1250" dirty="0">
+              <a:rPr lang="en-US" sz="1550" dirty="0">
                 <a:solidFill>
                   <a:srgbClr val="17364A"/>
                 </a:solidFill>
@@ -13180,7 +14320,7 @@
               </a:rPr>
               <a:t>Connect the concept to public health decisions, safeguards, documentation, or implementation work.</a:t>
             </a:r>
-            <a:endParaRPr lang="en-US" sz="1250" dirty="0"/>
+            <a:endParaRPr lang="en-US" sz="1550" dirty="0"/>
           </a:p>
         </p:txBody>
       </p:sp>
@@ -13377,7 +14517,7 @@
                 <a:ea typeface="Aptos" pitchFamily="34" charset="-122"/>
                 <a:cs typeface="Aptos" pitchFamily="34" charset="-120"/>
               </a:rPr>
-              <a:t>© Paula Soper</a:t>
+              <a:t>Â© Paula Soper</a:t>
             </a:r>
             <a:endParaRPr lang="en-US" sz="800" dirty="0"/>
           </a:p>
@@ -13385,7 +14525,46 @@
       </p:sp>
       <p:sp>
         <p:nvSpPr>
-          <p:cNvPr id="7" name="Shape 5"/>
+          <p:cNvPr id="7" name="Text 5"/>
+          <p:cNvSpPr/>
+          <p:nvPr/>
+        </p:nvSpPr>
+        <p:spPr>
+          <a:xfrm>
+            <a:off x="11137392" y="6510528"/>
+            <a:ext cx="411480" cy="201168"/>
+          </a:xfrm>
+          <a:prstGeom prst="rect">
+            <a:avLst/>
+          </a:prstGeom>
+          <a:noFill/>
+          <a:ln/>
+        </p:spPr>
+        <p:txBody>
+          <a:bodyPr wrap="square" lIns="0" tIns="0" rIns="0" bIns="0" rtlCol="0" anchor="ctr"/>
+          <a:lstStyle/>
+          <a:p>
+            <a:pPr algn="r" indent="0" marL="0">
+              <a:buNone/>
+            </a:pPr>
+            <a:r>
+              <a:rPr lang="en-US" sz="900" dirty="0">
+                <a:solidFill>
+                  <a:srgbClr val="5F7181"/>
+                </a:solidFill>
+                <a:latin typeface="Aptos" pitchFamily="34" charset="0"/>
+                <a:ea typeface="Aptos" pitchFamily="34" charset="-122"/>
+                <a:cs typeface="Aptos" pitchFamily="34" charset="-120"/>
+              </a:rPr>
+              <a:t>8</a:t>
+            </a:r>
+            <a:endParaRPr lang="en-US" sz="900" dirty="0"/>
+          </a:p>
+        </p:txBody>
+      </p:sp>
+      <p:sp>
+        <p:nvSpPr>
+          <p:cNvPr id="8" name="Shape 6"/>
           <p:cNvSpPr/>
           <p:nvPr/>
         </p:nvSpPr>
@@ -13410,7 +14589,7 @@
       </p:sp>
       <p:sp>
         <p:nvSpPr>
-          <p:cNvPr id="8" name="Text 6"/>
+          <p:cNvPr id="9" name="Text 7"/>
           <p:cNvSpPr/>
           <p:nvPr/>
         </p:nvSpPr>
@@ -13449,14 +14628,14 @@
       </p:sp>
       <p:sp>
         <p:nvSpPr>
-          <p:cNvPr id="9" name="Text 7"/>
+          <p:cNvPr id="10" name="Text 8"/>
           <p:cNvSpPr/>
           <p:nvPr/>
         </p:nvSpPr>
         <p:spPr>
           <a:xfrm>
             <a:off x="640080" y="621792"/>
-            <a:ext cx="10881360" cy="566928"/>
+            <a:ext cx="10881360" cy="713232"/>
           </a:xfrm>
           <a:prstGeom prst="rect">
             <a:avLst/>
@@ -13474,7 +14653,7 @@
               <a:buNone/>
             </a:pPr>
             <a:r>
-              <a:rPr lang="en-US" sz="2700" b="1" dirty="0">
+              <a:rPr lang="en-US" sz="3400" b="1" dirty="0">
                 <a:solidFill>
                   <a:srgbClr val="003A63"/>
                 </a:solidFill>
@@ -13484,20 +14663,20 @@
               </a:rPr>
               <a:t>Jurisdiction and Agency Policy Note</a:t>
             </a:r>
-            <a:endParaRPr lang="en-US" sz="2700" dirty="0"/>
-          </a:p>
-        </p:txBody>
-      </p:sp>
-      <p:sp>
-        <p:nvSpPr>
-          <p:cNvPr id="10" name="Text 8"/>
-          <p:cNvSpPr/>
-          <p:nvPr/>
-        </p:nvSpPr>
-        <p:spPr>
-          <a:xfrm>
-            <a:off x="868680" y="1417320"/>
-            <a:ext cx="6675120" cy="4434840"/>
+            <a:endParaRPr lang="en-US" sz="3400" dirty="0"/>
+          </a:p>
+        </p:txBody>
+      </p:sp>
+      <p:sp>
+        <p:nvSpPr>
+          <p:cNvPr id="11" name="Text 9"/>
+          <p:cNvSpPr/>
+          <p:nvPr/>
+        </p:nvSpPr>
+        <p:spPr>
+          <a:xfrm>
+            <a:off x="868680" y="1508760"/>
+            <a:ext cx="6537960" cy="4160520"/>
           </a:xfrm>
           <a:prstGeom prst="rect">
             <a:avLst/>
@@ -13512,7 +14691,7 @@
           <a:lstStyle/>
           <a:p>
             <a:r>
-              <a:rPr lang="en-US" sz="1700" dirty="0">
+              <a:rPr lang="en-US" sz="2100" dirty="0">
                 <a:solidFill>
                   <a:srgbClr val="17364A"/>
                 </a:solidFill>
@@ -13522,11 +14701,11 @@
               </a:rPr>
               <a:t>This national-level module is intended for training and planning purposes.</a:t>
             </a:r>
-            <a:endParaRPr lang="en-US" sz="1700" dirty="0"/>
-          </a:p>
-          <a:p>
-            <a:r>
-              <a:rPr lang="en-US" sz="1700" dirty="0">
+            <a:endParaRPr lang="en-US" sz="2100" dirty="0"/>
+          </a:p>
+          <a:p>
+            <a:r>
+              <a:rPr lang="en-US" sz="2100" dirty="0">
                 <a:solidFill>
                   <a:srgbClr val="17364A"/>
                 </a:solidFill>
@@ -13536,11 +14715,11 @@
               </a:rPr>
               <a:t>It does not replace legal, privacy, procurement, civil rights, records, or agency policy review.</a:t>
             </a:r>
-            <a:endParaRPr lang="en-US" sz="1700" dirty="0"/>
-          </a:p>
-          <a:p>
-            <a:r>
-              <a:rPr lang="en-US" sz="1700" dirty="0">
+            <a:endParaRPr lang="en-US" sz="2100" dirty="0"/>
+          </a:p>
+          <a:p>
+            <a:r>
+              <a:rPr lang="en-US" sz="2100" dirty="0">
                 <a:solidFill>
                   <a:srgbClr val="17364A"/>
                 </a:solidFill>
@@ -13548,15 +14727,15 @@
                 <a:ea typeface="Aptos" pitchFamily="34" charset="-122"/>
                 <a:cs typeface="Aptos" pitchFamily="34" charset="-120"/>
               </a:rPr>
-              <a:t>Learners should confirm applicable requirements in their own jurisdiction and organization before implementing AI-supported.</a:t>
-            </a:r>
-            <a:endParaRPr lang="en-US" sz="1700" dirty="0"/>
-          </a:p>
-        </p:txBody>
-      </p:sp>
-      <p:sp>
-        <p:nvSpPr>
-          <p:cNvPr id="11" name="Shape 9"/>
+              <a:t>Learners should confirm applicable requirements in their own jurisdiction and organization before.</a:t>
+            </a:r>
+            <a:endParaRPr lang="en-US" sz="2100" dirty="0"/>
+          </a:p>
+        </p:txBody>
+      </p:sp>
+      <p:sp>
+        <p:nvSpPr>
+          <p:cNvPr id="12" name="Shape 10"/>
           <p:cNvSpPr/>
           <p:nvPr/>
         </p:nvSpPr>
@@ -13583,14 +14762,14 @@
       </p:sp>
       <p:sp>
         <p:nvSpPr>
-          <p:cNvPr id="12" name="Text 10"/>
+          <p:cNvPr id="13" name="Text 11"/>
           <p:cNvSpPr/>
           <p:nvPr/>
         </p:nvSpPr>
         <p:spPr>
           <a:xfrm>
             <a:off x="8074152" y="1563624"/>
-            <a:ext cx="2825496" cy="201168"/>
+            <a:ext cx="2825496" cy="256032"/>
           </a:xfrm>
           <a:prstGeom prst="rect">
             <a:avLst/>
@@ -13606,7 +14785,7 @@
               <a:buNone/>
             </a:pPr>
             <a:r>
-              <a:rPr lang="en-US" sz="950" b="1" dirty="0">
+              <a:rPr lang="en-US" sz="1300" b="1" dirty="0">
                 <a:solidFill>
                   <a:srgbClr val="0068B7"/>
                 </a:solidFill>
@@ -13616,20 +14795,20 @@
               </a:rPr>
               <a:t>Key idea</a:t>
             </a:r>
-            <a:endParaRPr lang="en-US" sz="950" dirty="0"/>
-          </a:p>
-        </p:txBody>
-      </p:sp>
-      <p:sp>
-        <p:nvSpPr>
-          <p:cNvPr id="13" name="Text 11"/>
-          <p:cNvSpPr/>
-          <p:nvPr/>
-        </p:nvSpPr>
-        <p:spPr>
-          <a:xfrm>
-            <a:off x="8074152" y="1856232"/>
-            <a:ext cx="2825496" cy="1261872"/>
+            <a:endParaRPr lang="en-US" sz="1300" dirty="0"/>
+          </a:p>
+        </p:txBody>
+      </p:sp>
+      <p:sp>
+        <p:nvSpPr>
+          <p:cNvPr id="14" name="Text 12"/>
+          <p:cNvSpPr/>
+          <p:nvPr/>
+        </p:nvSpPr>
+        <p:spPr>
+          <a:xfrm>
+            <a:off x="8074152" y="1920240"/>
+            <a:ext cx="2825496" cy="1188720"/>
           </a:xfrm>
           <a:prstGeom prst="rect">
             <a:avLst/>
@@ -13647,7 +14826,7 @@
               <a:buNone/>
             </a:pPr>
             <a:r>
-              <a:rPr lang="en-US" sz="1250" dirty="0">
+              <a:rPr lang="en-US" sz="1550" dirty="0">
                 <a:solidFill>
                   <a:srgbClr val="17364A"/>
                 </a:solidFill>
@@ -13657,13 +14836,13 @@
               </a:rPr>
               <a:t>This national-level module is intended for training and planning purposes.</a:t>
             </a:r>
-            <a:endParaRPr lang="en-US" sz="1250" dirty="0"/>
-          </a:p>
-        </p:txBody>
-      </p:sp>
-      <p:sp>
-        <p:nvSpPr>
-          <p:cNvPr id="14" name="Shape 12"/>
+            <a:endParaRPr lang="en-US" sz="1550" dirty="0"/>
+          </a:p>
+        </p:txBody>
+      </p:sp>
+      <p:sp>
+        <p:nvSpPr>
+          <p:cNvPr id="15" name="Shape 13"/>
           <p:cNvSpPr/>
           <p:nvPr/>
         </p:nvSpPr>
@@ -13690,14 +14869,14 @@
       </p:sp>
       <p:sp>
         <p:nvSpPr>
-          <p:cNvPr id="15" name="Text 13"/>
+          <p:cNvPr id="16" name="Text 14"/>
           <p:cNvSpPr/>
           <p:nvPr/>
         </p:nvSpPr>
         <p:spPr>
           <a:xfrm>
             <a:off x="8074152" y="3666744"/>
-            <a:ext cx="2825496" cy="201168"/>
+            <a:ext cx="2825496" cy="256032"/>
           </a:xfrm>
           <a:prstGeom prst="rect">
             <a:avLst/>
@@ -13713,7 +14892,7 @@
               <a:buNone/>
             </a:pPr>
             <a:r>
-              <a:rPr lang="en-US" sz="950" b="1" dirty="0">
+              <a:rPr lang="en-US" sz="1300" b="1" dirty="0">
                 <a:solidFill>
                   <a:srgbClr val="0068B7"/>
                 </a:solidFill>
@@ -13723,20 +14902,20 @@
               </a:rPr>
               <a:t>Use this for</a:t>
             </a:r>
-            <a:endParaRPr lang="en-US" sz="950" dirty="0"/>
-          </a:p>
-        </p:txBody>
-      </p:sp>
-      <p:sp>
-        <p:nvSpPr>
-          <p:cNvPr id="16" name="Text 14"/>
-          <p:cNvSpPr/>
-          <p:nvPr/>
-        </p:nvSpPr>
-        <p:spPr>
-          <a:xfrm>
-            <a:off x="8074152" y="3959352"/>
-            <a:ext cx="2825496" cy="1170432"/>
+            <a:endParaRPr lang="en-US" sz="1300" dirty="0"/>
+          </a:p>
+        </p:txBody>
+      </p:sp>
+      <p:sp>
+        <p:nvSpPr>
+          <p:cNvPr id="17" name="Text 15"/>
+          <p:cNvSpPr/>
+          <p:nvPr/>
+        </p:nvSpPr>
+        <p:spPr>
+          <a:xfrm>
+            <a:off x="8074152" y="4023360"/>
+            <a:ext cx="2825496" cy="1097280"/>
           </a:xfrm>
           <a:prstGeom prst="rect">
             <a:avLst/>
@@ -13754,7 +14933,7 @@
               <a:buNone/>
             </a:pPr>
             <a:r>
-              <a:rPr lang="en-US" sz="1250" dirty="0">
+              <a:rPr lang="en-US" sz="1550" dirty="0">
                 <a:solidFill>
                   <a:srgbClr val="17364A"/>
                 </a:solidFill>
@@ -13764,7 +14943,7 @@
               </a:rPr>
               <a:t>Connect the concept to public health decisions, safeguards, documentation, or implementation work.</a:t>
             </a:r>
-            <a:endParaRPr lang="en-US" sz="1250" dirty="0"/>
+            <a:endParaRPr lang="en-US" sz="1550" dirty="0"/>
           </a:p>
         </p:txBody>
       </p:sp>
@@ -13961,7 +15140,7 @@
                 <a:ea typeface="Aptos" pitchFamily="34" charset="-122"/>
                 <a:cs typeface="Aptos" pitchFamily="34" charset="-120"/>
               </a:rPr>
-              <a:t>© Paula Soper</a:t>
+              <a:t>Â© Paula Soper</a:t>
             </a:r>
             <a:endParaRPr lang="en-US" sz="800" dirty="0"/>
           </a:p>
@@ -13969,7 +15148,46 @@
       </p:sp>
       <p:sp>
         <p:nvSpPr>
-          <p:cNvPr id="7" name="Shape 5"/>
+          <p:cNvPr id="7" name="Text 5"/>
+          <p:cNvSpPr/>
+          <p:nvPr/>
+        </p:nvSpPr>
+        <p:spPr>
+          <a:xfrm>
+            <a:off x="11137392" y="6510528"/>
+            <a:ext cx="411480" cy="201168"/>
+          </a:xfrm>
+          <a:prstGeom prst="rect">
+            <a:avLst/>
+          </a:prstGeom>
+          <a:noFill/>
+          <a:ln/>
+        </p:spPr>
+        <p:txBody>
+          <a:bodyPr wrap="square" lIns="0" tIns="0" rIns="0" bIns="0" rtlCol="0" anchor="ctr"/>
+          <a:lstStyle/>
+          <a:p>
+            <a:pPr algn="r" indent="0" marL="0">
+              <a:buNone/>
+            </a:pPr>
+            <a:r>
+              <a:rPr lang="en-US" sz="900" dirty="0">
+                <a:solidFill>
+                  <a:srgbClr val="5F7181"/>
+                </a:solidFill>
+                <a:latin typeface="Aptos" pitchFamily="34" charset="0"/>
+                <a:ea typeface="Aptos" pitchFamily="34" charset="-122"/>
+                <a:cs typeface="Aptos" pitchFamily="34" charset="-120"/>
+              </a:rPr>
+              <a:t>9</a:t>
+            </a:r>
+            <a:endParaRPr lang="en-US" sz="900" dirty="0"/>
+          </a:p>
+        </p:txBody>
+      </p:sp>
+      <p:sp>
+        <p:nvSpPr>
+          <p:cNvPr id="8" name="Shape 6"/>
           <p:cNvSpPr/>
           <p:nvPr/>
         </p:nvSpPr>
@@ -13994,7 +15212,7 @@
       </p:sp>
       <p:sp>
         <p:nvSpPr>
-          <p:cNvPr id="8" name="Text 6"/>
+          <p:cNvPr id="9" name="Text 7"/>
           <p:cNvSpPr/>
           <p:nvPr/>
         </p:nvSpPr>
@@ -14033,14 +15251,14 @@
       </p:sp>
       <p:sp>
         <p:nvSpPr>
-          <p:cNvPr id="9" name="Text 7"/>
+          <p:cNvPr id="10" name="Text 8"/>
           <p:cNvSpPr/>
           <p:nvPr/>
         </p:nvSpPr>
         <p:spPr>
           <a:xfrm>
             <a:off x="640080" y="621792"/>
-            <a:ext cx="10881360" cy="566928"/>
+            <a:ext cx="10881360" cy="713232"/>
           </a:xfrm>
           <a:prstGeom prst="rect">
             <a:avLst/>
@@ -14058,7 +15276,7 @@
               <a:buNone/>
             </a:pPr>
             <a:r>
-              <a:rPr lang="en-US" sz="2700" b="1" dirty="0">
+              <a:rPr lang="en-US" sz="3400" b="1" dirty="0">
                 <a:solidFill>
                   <a:srgbClr val="003A63"/>
                 </a:solidFill>
@@ -14068,20 +15286,20 @@
               </a:rPr>
               <a:t>Why This Topic Matters for Public Health AI</a:t>
             </a:r>
-            <a:endParaRPr lang="en-US" sz="2700" dirty="0"/>
-          </a:p>
-        </p:txBody>
-      </p:sp>
-      <p:sp>
-        <p:nvSpPr>
-          <p:cNvPr id="10" name="Text 8"/>
-          <p:cNvSpPr/>
-          <p:nvPr/>
-        </p:nvSpPr>
-        <p:spPr>
-          <a:xfrm>
-            <a:off x="868680" y="1417320"/>
-            <a:ext cx="6675120" cy="4434840"/>
+            <a:endParaRPr lang="en-US" sz="3400" dirty="0"/>
+          </a:p>
+        </p:txBody>
+      </p:sp>
+      <p:sp>
+        <p:nvSpPr>
+          <p:cNvPr id="11" name="Text 9"/>
+          <p:cNvSpPr/>
+          <p:nvPr/>
+        </p:nvSpPr>
+        <p:spPr>
+          <a:xfrm>
+            <a:off x="868680" y="1508760"/>
+            <a:ext cx="6537960" cy="4160520"/>
           </a:xfrm>
           <a:prstGeom prst="rect">
             <a:avLst/>
@@ -14096,7 +15314,7 @@
           <a:lstStyle/>
           <a:p>
             <a:r>
-              <a:rPr lang="en-US" sz="1700" dirty="0">
+              <a:rPr lang="en-US" sz="2100" dirty="0">
                 <a:solidFill>
                   <a:srgbClr val="17364A"/>
                 </a:solidFill>
@@ -14104,13 +15322,13 @@
                 <a:ea typeface="Aptos" pitchFamily="34" charset="-122"/>
                 <a:cs typeface="Aptos" pitchFamily="34" charset="-120"/>
               </a:rPr>
-              <a:t>AI Documentation, Model Cards, and System Cards matters because AI systems are embedded in public health programs, data.</a:t>
-            </a:r>
-            <a:endParaRPr lang="en-US" sz="1700" dirty="0"/>
-          </a:p>
-          <a:p>
-            <a:r>
-              <a:rPr lang="en-US" sz="1700" dirty="0">
+              <a:t>AI Documentation, Model Cards, and System Cards matters because AI systems are embedded in public.</a:t>
+            </a:r>
+            <a:endParaRPr lang="en-US" sz="2100" dirty="0"/>
+          </a:p>
+          <a:p>
+            <a:r>
+              <a:rPr lang="en-US" sz="2100" dirty="0">
                 <a:solidFill>
                   <a:srgbClr val="17364A"/>
                 </a:solidFill>
@@ -14120,11 +15338,11 @@
               </a:rPr>
               <a:t>The topic affects whether AI outputs are accurate, explainable, safe, equitable, secure, and sustainable.</a:t>
             </a:r>
-            <a:endParaRPr lang="en-US" sz="1700" dirty="0"/>
-          </a:p>
-          <a:p>
-            <a:r>
-              <a:rPr lang="en-US" sz="1700" dirty="0">
+            <a:endParaRPr lang="en-US" sz="2100" dirty="0"/>
+          </a:p>
+          <a:p>
+            <a:r>
+              <a:rPr lang="en-US" sz="2100" dirty="0">
                 <a:solidFill>
                   <a:srgbClr val="17364A"/>
                 </a:solidFill>
@@ -14134,27 +15352,13 @@
               </a:rPr>
               <a:t>Agencies that ignore this area may create tools that work in a demonstration but fail in actual practice.</a:t>
             </a:r>
-            <a:endParaRPr lang="en-US" sz="1700" dirty="0"/>
-          </a:p>
-          <a:p>
-            <a:r>
-              <a:rPr lang="en-US" sz="1700" dirty="0">
-                <a:solidFill>
-                  <a:srgbClr val="17364A"/>
-                </a:solidFill>
-                <a:latin typeface="Aptos" pitchFamily="34" charset="0"/>
-                <a:ea typeface="Aptos" pitchFamily="34" charset="-122"/>
-                <a:cs typeface="Aptos" pitchFamily="34" charset="-120"/>
-              </a:rPr>
-              <a:t>The topic also affects accountability.</a:t>
-            </a:r>
-            <a:endParaRPr lang="en-US" sz="1700" dirty="0"/>
-          </a:p>
-        </p:txBody>
-      </p:sp>
-      <p:sp>
-        <p:nvSpPr>
-          <p:cNvPr id="11" name="Shape 9"/>
+            <a:endParaRPr lang="en-US" sz="2100" dirty="0"/>
+          </a:p>
+        </p:txBody>
+      </p:sp>
+      <p:sp>
+        <p:nvSpPr>
+          <p:cNvPr id="12" name="Shape 10"/>
           <p:cNvSpPr/>
           <p:nvPr/>
         </p:nvSpPr>
@@ -14181,14 +15385,14 @@
       </p:sp>
       <p:sp>
         <p:nvSpPr>
-          <p:cNvPr id="12" name="Text 10"/>
+          <p:cNvPr id="13" name="Text 11"/>
           <p:cNvSpPr/>
           <p:nvPr/>
         </p:nvSpPr>
         <p:spPr>
           <a:xfrm>
             <a:off x="8074152" y="1563624"/>
-            <a:ext cx="2825496" cy="201168"/>
+            <a:ext cx="2825496" cy="256032"/>
           </a:xfrm>
           <a:prstGeom prst="rect">
             <a:avLst/>
@@ -14204,7 +15408,7 @@
               <a:buNone/>
             </a:pPr>
             <a:r>
-              <a:rPr lang="en-US" sz="950" b="1" dirty="0">
+              <a:rPr lang="en-US" sz="1300" b="1" dirty="0">
                 <a:solidFill>
                   <a:srgbClr val="0068B7"/>
                 </a:solidFill>
@@ -14214,20 +15418,20 @@
               </a:rPr>
               <a:t>Key idea</a:t>
             </a:r>
-            <a:endParaRPr lang="en-US" sz="950" dirty="0"/>
-          </a:p>
-        </p:txBody>
-      </p:sp>
-      <p:sp>
-        <p:nvSpPr>
-          <p:cNvPr id="13" name="Text 11"/>
-          <p:cNvSpPr/>
-          <p:nvPr/>
-        </p:nvSpPr>
-        <p:spPr>
-          <a:xfrm>
-            <a:off x="8074152" y="1856232"/>
-            <a:ext cx="2825496" cy="1261872"/>
+            <a:endParaRPr lang="en-US" sz="1300" dirty="0"/>
+          </a:p>
+        </p:txBody>
+      </p:sp>
+      <p:sp>
+        <p:nvSpPr>
+          <p:cNvPr id="14" name="Text 12"/>
+          <p:cNvSpPr/>
+          <p:nvPr/>
+        </p:nvSpPr>
+        <p:spPr>
+          <a:xfrm>
+            <a:off x="8074152" y="1920240"/>
+            <a:ext cx="2825496" cy="1188720"/>
           </a:xfrm>
           <a:prstGeom prst="rect">
             <a:avLst/>
@@ -14245,7 +15449,7 @@
               <a:buNone/>
             </a:pPr>
             <a:r>
-              <a:rPr lang="en-US" sz="1250" dirty="0">
+              <a:rPr lang="en-US" sz="1550" dirty="0">
                 <a:solidFill>
                   <a:srgbClr val="17364A"/>
                 </a:solidFill>
@@ -14253,15 +15457,15 @@
                 <a:ea typeface="Aptos" pitchFamily="34" charset="-122"/>
                 <a:cs typeface="Aptos" pitchFamily="34" charset="-120"/>
               </a:rPr>
-              <a:t>AI Documentation, Model Cards, and System Cards matters because AI systems are embedded in public health programs, data.</a:t>
-            </a:r>
-            <a:endParaRPr lang="en-US" sz="1250" dirty="0"/>
-          </a:p>
-        </p:txBody>
-      </p:sp>
-      <p:sp>
-        <p:nvSpPr>
-          <p:cNvPr id="14" name="Shape 12"/>
+              <a:t>AI Documentation, Model Cards, and System Cards matters because AI systems are embedded in public.</a:t>
+            </a:r>
+            <a:endParaRPr lang="en-US" sz="1550" dirty="0"/>
+          </a:p>
+        </p:txBody>
+      </p:sp>
+      <p:sp>
+        <p:nvSpPr>
+          <p:cNvPr id="15" name="Shape 13"/>
           <p:cNvSpPr/>
           <p:nvPr/>
         </p:nvSpPr>
@@ -14288,14 +15492,14 @@
       </p:sp>
       <p:sp>
         <p:nvSpPr>
-          <p:cNvPr id="15" name="Text 13"/>
+          <p:cNvPr id="16" name="Text 14"/>
           <p:cNvSpPr/>
           <p:nvPr/>
         </p:nvSpPr>
         <p:spPr>
           <a:xfrm>
             <a:off x="8074152" y="3666744"/>
-            <a:ext cx="2825496" cy="201168"/>
+            <a:ext cx="2825496" cy="256032"/>
           </a:xfrm>
           <a:prstGeom prst="rect">
             <a:avLst/>
@@ -14311,7 +15515,7 @@
               <a:buNone/>
             </a:pPr>
             <a:r>
-              <a:rPr lang="en-US" sz="950" b="1" dirty="0">
+              <a:rPr lang="en-US" sz="1300" b="1" dirty="0">
                 <a:solidFill>
                   <a:srgbClr val="0068B7"/>
                 </a:solidFill>
@@ -14321,20 +15525,20 @@
               </a:rPr>
               <a:t>Use this for</a:t>
             </a:r>
-            <a:endParaRPr lang="en-US" sz="950" dirty="0"/>
-          </a:p>
-        </p:txBody>
-      </p:sp>
-      <p:sp>
-        <p:nvSpPr>
-          <p:cNvPr id="16" name="Text 14"/>
-          <p:cNvSpPr/>
-          <p:nvPr/>
-        </p:nvSpPr>
-        <p:spPr>
-          <a:xfrm>
-            <a:off x="8074152" y="3959352"/>
-            <a:ext cx="2825496" cy="1170432"/>
+            <a:endParaRPr lang="en-US" sz="1300" dirty="0"/>
+          </a:p>
+        </p:txBody>
+      </p:sp>
+      <p:sp>
+        <p:nvSpPr>
+          <p:cNvPr id="17" name="Text 15"/>
+          <p:cNvSpPr/>
+          <p:nvPr/>
+        </p:nvSpPr>
+        <p:spPr>
+          <a:xfrm>
+            <a:off x="8074152" y="4023360"/>
+            <a:ext cx="2825496" cy="1097280"/>
           </a:xfrm>
           <a:prstGeom prst="rect">
             <a:avLst/>
@@ -14352,7 +15556,7 @@
               <a:buNone/>
             </a:pPr>
             <a:r>
-              <a:rPr lang="en-US" sz="1250" dirty="0">
+              <a:rPr lang="en-US" sz="1550" dirty="0">
                 <a:solidFill>
                   <a:srgbClr val="17364A"/>
                 </a:solidFill>
@@ -14362,7 +15566,7 @@
               </a:rPr>
               <a:t>Connect the concept to public health decisions, safeguards, documentation, or implementation work.</a:t>
             </a:r>
-            <a:endParaRPr lang="en-US" sz="1250" dirty="0"/>
+            <a:endParaRPr lang="en-US" sz="1550" dirty="0"/>
           </a:p>
         </p:txBody>
       </p:sp>
